--- a/Dokumentation/Präsentationen/Präsentation_Kickoff_0.1.pptx
+++ b/Dokumentation/Präsentationen/Präsentation_Kickoff_0.1.pptx
@@ -5,25 +5,24 @@
     <p:sldMasterId id="2147483650" r:id="rId4"/>
   </p:sldMasterIdLst>
   <p:notesMasterIdLst>
-    <p:notesMasterId r:id="rId18"/>
+    <p:notesMasterId r:id="rId17"/>
   </p:notesMasterIdLst>
   <p:handoutMasterIdLst>
-    <p:handoutMasterId r:id="rId19"/>
+    <p:handoutMasterId r:id="rId18"/>
   </p:handoutMasterIdLst>
   <p:sldIdLst>
     <p:sldId id="312" r:id="rId5"/>
-    <p:sldId id="304" r:id="rId6"/>
-    <p:sldId id="307" r:id="rId7"/>
-    <p:sldId id="281" r:id="rId8"/>
-    <p:sldId id="282" r:id="rId9"/>
-    <p:sldId id="314" r:id="rId10"/>
-    <p:sldId id="315" r:id="rId11"/>
-    <p:sldId id="317" r:id="rId12"/>
-    <p:sldId id="318" r:id="rId13"/>
-    <p:sldId id="319" r:id="rId14"/>
-    <p:sldId id="321" r:id="rId15"/>
-    <p:sldId id="322" r:id="rId16"/>
-    <p:sldId id="297" r:id="rId17"/>
+    <p:sldId id="307" r:id="rId6"/>
+    <p:sldId id="304" r:id="rId7"/>
+    <p:sldId id="323" r:id="rId8"/>
+    <p:sldId id="324" r:id="rId9"/>
+    <p:sldId id="325" r:id="rId10"/>
+    <p:sldId id="326" r:id="rId11"/>
+    <p:sldId id="327" r:id="rId12"/>
+    <p:sldId id="328" r:id="rId13"/>
+    <p:sldId id="314" r:id="rId14"/>
+    <p:sldId id="282" r:id="rId15"/>
+    <p:sldId id="297" r:id="rId16"/>
   </p:sldIdLst>
   <p:sldSz cx="12192000" cy="6858000"/>
   <p:notesSz cx="13716000" cy="24384000"/>
@@ -716,7 +715,7 @@
     </p:spTree>
     <p:extLst>
       <p:ext uri="{BB962C8B-B14F-4D97-AF65-F5344CB8AC3E}">
-        <p14:creationId xmlns:p14="http://schemas.microsoft.com/office/powerpoint/2010/main" val="4110138705"/>
+        <p14:creationId xmlns:p14="http://schemas.microsoft.com/office/powerpoint/2010/main" val="87667087"/>
       </p:ext>
     </p:extLst>
   </p:cSld>
@@ -804,7 +803,7 @@
     </p:spTree>
     <p:extLst>
       <p:ext uri="{BB962C8B-B14F-4D97-AF65-F5344CB8AC3E}">
-        <p14:creationId xmlns:p14="http://schemas.microsoft.com/office/powerpoint/2010/main" val="3047668310"/>
+        <p14:creationId xmlns:p14="http://schemas.microsoft.com/office/powerpoint/2010/main" val="1019397722"/>
       </p:ext>
     </p:extLst>
   </p:cSld>
@@ -815,94 +814,6 @@
 </file>
 
 <file path=ppt/notesSlides/notesSlide12.xml><?xml version="1.0" encoding="utf-8"?>
-<p:notes xmlns:a="http://schemas.openxmlformats.org/drawingml/2006/main" xmlns:r="http://schemas.openxmlformats.org/officeDocument/2006/relationships" xmlns:p="http://schemas.openxmlformats.org/presentationml/2006/main">
-  <p:cSld>
-    <p:spTree>
-      <p:nvGrpSpPr>
-        <p:cNvPr id="1" name=""/>
-        <p:cNvGrpSpPr/>
-        <p:nvPr/>
-      </p:nvGrpSpPr>
-      <p:grpSpPr>
-        <a:xfrm>
-          <a:off x="0" y="0"/>
-          <a:ext cx="0" cy="0"/>
-          <a:chOff x="0" y="0"/>
-          <a:chExt cx="0" cy="0"/>
-        </a:xfrm>
-      </p:grpSpPr>
-      <p:sp>
-        <p:nvSpPr>
-          <p:cNvPr id="2" name="Folienbildplatzhalter 1"/>
-          <p:cNvSpPr>
-            <a:spLocks noGrp="1" noRot="1" noChangeAspect="1"/>
-          </p:cNvSpPr>
-          <p:nvPr>
-            <p:ph type="sldImg"/>
-          </p:nvPr>
-        </p:nvSpPr>
-        <p:spPr>
-          <a:xfrm>
-            <a:off x="-457200" y="3048000"/>
-            <a:ext cx="14630400" cy="8229600"/>
-          </a:xfrm>
-          <a:prstGeom prst="rect">
-            <a:avLst/>
-          </a:prstGeom>
-          <a:noFill/>
-          <a:ln w="12700">
-            <a:solidFill>
-              <a:prstClr val="black"/>
-            </a:solidFill>
-          </a:ln>
-        </p:spPr>
-      </p:sp>
-      <p:sp>
-        <p:nvSpPr>
-          <p:cNvPr id="3" name="Notizenplatzhalter 2"/>
-          <p:cNvSpPr>
-            <a:spLocks noGrp="1"/>
-          </p:cNvSpPr>
-          <p:nvPr>
-            <p:ph type="body" idx="1"/>
-          </p:nvPr>
-        </p:nvSpPr>
-        <p:spPr>
-          <a:xfrm>
-            <a:off x="1371600" y="11734800"/>
-            <a:ext cx="10972800" cy="9601200"/>
-          </a:xfrm>
-          <a:prstGeom prst="rect">
-            <a:avLst/>
-          </a:prstGeom>
-        </p:spPr>
-        <p:txBody>
-          <a:bodyPr rtlCol="0"/>
-          <a:lstStyle>
-            <a:defPPr>
-              <a:defRPr lang="de-DE"/>
-            </a:defPPr>
-          </a:lstStyle>
-          <a:p>
-            <a:pPr rtl="0"/>
-            <a:endParaRPr lang="de-DE" dirty="0"/>
-          </a:p>
-        </p:txBody>
-      </p:sp>
-    </p:spTree>
-    <p:extLst>
-      <p:ext uri="{BB962C8B-B14F-4D97-AF65-F5344CB8AC3E}">
-        <p14:creationId xmlns:p14="http://schemas.microsoft.com/office/powerpoint/2010/main" val="2508814883"/>
-      </p:ext>
-    </p:extLst>
-  </p:cSld>
-  <p:clrMapOvr>
-    <a:masterClrMapping/>
-  </p:clrMapOvr>
-</p:notes>
-</file>
-
-<file path=ppt/notesSlides/notesSlide13.xml><?xml version="1.0" encoding="utf-8"?>
 <p:notes xmlns:a="http://schemas.openxmlformats.org/drawingml/2006/main" xmlns:r="http://schemas.openxmlformats.org/officeDocument/2006/relationships" xmlns:p="http://schemas.openxmlformats.org/presentationml/2006/main">
   <p:cSld>
     <p:spTree>
@@ -1068,7 +979,7 @@
     </p:spTree>
     <p:extLst>
       <p:ext uri="{BB962C8B-B14F-4D97-AF65-F5344CB8AC3E}">
-        <p14:creationId xmlns:p14="http://schemas.microsoft.com/office/powerpoint/2010/main" val="587736169"/>
+        <p14:creationId xmlns:p14="http://schemas.microsoft.com/office/powerpoint/2010/main" val="3294931275"/>
       </p:ext>
     </p:extLst>
   </p:cSld>
@@ -1156,7 +1067,7 @@
     </p:spTree>
     <p:extLst>
       <p:ext uri="{BB962C8B-B14F-4D97-AF65-F5344CB8AC3E}">
-        <p14:creationId xmlns:p14="http://schemas.microsoft.com/office/powerpoint/2010/main" val="3294931275"/>
+        <p14:creationId xmlns:p14="http://schemas.microsoft.com/office/powerpoint/2010/main" val="587736169"/>
       </p:ext>
     </p:extLst>
   </p:cSld>
@@ -1171,7 +1082,13 @@
   <p:cSld>
     <p:spTree>
       <p:nvGrpSpPr>
-        <p:cNvPr id="1" name=""/>
+        <p:cNvPr id="1" name="">
+          <a:extLst>
+            <a:ext uri="{FF2B5EF4-FFF2-40B4-BE49-F238E27FC236}">
+              <a16:creationId xmlns:a16="http://schemas.microsoft.com/office/drawing/2014/main" id="{8CB68389-FEE6-4DB9-A429-90888281A888}"/>
+            </a:ext>
+          </a:extLst>
+        </p:cNvPr>
         <p:cNvGrpSpPr/>
         <p:nvPr/>
       </p:nvGrpSpPr>
@@ -1185,7 +1102,13 @@
       </p:grpSpPr>
       <p:sp>
         <p:nvSpPr>
-          <p:cNvPr id="2" name="Folienbildplatzhalter 1"/>
+          <p:cNvPr id="2" name="Folienbildplatzhalter 1">
+            <a:extLst>
+              <a:ext uri="{FF2B5EF4-FFF2-40B4-BE49-F238E27FC236}">
+                <a16:creationId xmlns:a16="http://schemas.microsoft.com/office/drawing/2014/main" id="{40AC27C1-F5E4-4DEB-A01B-096E29963070}"/>
+              </a:ext>
+            </a:extLst>
+          </p:cNvPr>
           <p:cNvSpPr>
             <a:spLocks noGrp="1" noRot="1" noChangeAspect="1"/>
           </p:cNvSpPr>
@@ -1211,7 +1134,13 @@
       </p:sp>
       <p:sp>
         <p:nvSpPr>
-          <p:cNvPr id="3" name="Notizenplatzhalter 2"/>
+          <p:cNvPr id="3" name="Notizenplatzhalter 2">
+            <a:extLst>
+              <a:ext uri="{FF2B5EF4-FFF2-40B4-BE49-F238E27FC236}">
+                <a16:creationId xmlns:a16="http://schemas.microsoft.com/office/drawing/2014/main" id="{037980CE-CF6F-3D31-0BA7-41EEB22BB44A}"/>
+              </a:ext>
+            </a:extLst>
+          </p:cNvPr>
           <p:cNvSpPr>
             <a:spLocks noGrp="1"/>
           </p:cNvSpPr>
@@ -1244,7 +1173,7 @@
     </p:spTree>
     <p:extLst>
       <p:ext uri="{BB962C8B-B14F-4D97-AF65-F5344CB8AC3E}">
-        <p14:creationId xmlns:p14="http://schemas.microsoft.com/office/powerpoint/2010/main" val="3068653063"/>
+        <p14:creationId xmlns:p14="http://schemas.microsoft.com/office/powerpoint/2010/main" val="1539688053"/>
       </p:ext>
     </p:extLst>
   </p:cSld>
@@ -1259,7 +1188,13 @@
   <p:cSld>
     <p:spTree>
       <p:nvGrpSpPr>
-        <p:cNvPr id="1" name=""/>
+        <p:cNvPr id="1" name="">
+          <a:extLst>
+            <a:ext uri="{FF2B5EF4-FFF2-40B4-BE49-F238E27FC236}">
+              <a16:creationId xmlns:a16="http://schemas.microsoft.com/office/drawing/2014/main" id="{DC387416-BC68-78D6-57E7-EC2A1E680F5B}"/>
+            </a:ext>
+          </a:extLst>
+        </p:cNvPr>
         <p:cNvGrpSpPr/>
         <p:nvPr/>
       </p:nvGrpSpPr>
@@ -1273,7 +1208,13 @@
       </p:grpSpPr>
       <p:sp>
         <p:nvSpPr>
-          <p:cNvPr id="2" name="Folienbildplatzhalter 1"/>
+          <p:cNvPr id="2" name="Folienbildplatzhalter 1">
+            <a:extLst>
+              <a:ext uri="{FF2B5EF4-FFF2-40B4-BE49-F238E27FC236}">
+                <a16:creationId xmlns:a16="http://schemas.microsoft.com/office/drawing/2014/main" id="{0A8E2C2E-D59D-9AF4-CB7B-F400211E2304}"/>
+              </a:ext>
+            </a:extLst>
+          </p:cNvPr>
           <p:cNvSpPr>
             <a:spLocks noGrp="1" noRot="1" noChangeAspect="1"/>
           </p:cNvSpPr>
@@ -1299,7 +1240,13 @@
       </p:sp>
       <p:sp>
         <p:nvSpPr>
-          <p:cNvPr id="3" name="Notizenplatzhalter 2"/>
+          <p:cNvPr id="3" name="Notizenplatzhalter 2">
+            <a:extLst>
+              <a:ext uri="{FF2B5EF4-FFF2-40B4-BE49-F238E27FC236}">
+                <a16:creationId xmlns:a16="http://schemas.microsoft.com/office/drawing/2014/main" id="{4E729D0C-06E5-7D92-530A-E2BC708EFEA7}"/>
+              </a:ext>
+            </a:extLst>
+          </p:cNvPr>
           <p:cNvSpPr>
             <a:spLocks noGrp="1"/>
           </p:cNvSpPr>
@@ -1332,7 +1279,7 @@
     </p:spTree>
     <p:extLst>
       <p:ext uri="{BB962C8B-B14F-4D97-AF65-F5344CB8AC3E}">
-        <p14:creationId xmlns:p14="http://schemas.microsoft.com/office/powerpoint/2010/main" val="1019397722"/>
+        <p14:creationId xmlns:p14="http://schemas.microsoft.com/office/powerpoint/2010/main" val="121382847"/>
       </p:ext>
     </p:extLst>
   </p:cSld>
@@ -1347,7 +1294,13 @@
   <p:cSld>
     <p:spTree>
       <p:nvGrpSpPr>
-        <p:cNvPr id="1" name=""/>
+        <p:cNvPr id="1" name="">
+          <a:extLst>
+            <a:ext uri="{FF2B5EF4-FFF2-40B4-BE49-F238E27FC236}">
+              <a16:creationId xmlns:a16="http://schemas.microsoft.com/office/drawing/2014/main" id="{B96E0C75-8FD9-4FD6-126C-B2C4D07D3B30}"/>
+            </a:ext>
+          </a:extLst>
+        </p:cNvPr>
         <p:cNvGrpSpPr/>
         <p:nvPr/>
       </p:nvGrpSpPr>
@@ -1361,7 +1314,13 @@
       </p:grpSpPr>
       <p:sp>
         <p:nvSpPr>
-          <p:cNvPr id="2" name="Folienbildplatzhalter 1"/>
+          <p:cNvPr id="2" name="Folienbildplatzhalter 1">
+            <a:extLst>
+              <a:ext uri="{FF2B5EF4-FFF2-40B4-BE49-F238E27FC236}">
+                <a16:creationId xmlns:a16="http://schemas.microsoft.com/office/drawing/2014/main" id="{EABE27F1-C0CF-456C-7FE3-772EFDB84923}"/>
+              </a:ext>
+            </a:extLst>
+          </p:cNvPr>
           <p:cNvSpPr>
             <a:spLocks noGrp="1" noRot="1" noChangeAspect="1"/>
           </p:cNvSpPr>
@@ -1387,7 +1346,13 @@
       </p:sp>
       <p:sp>
         <p:nvSpPr>
-          <p:cNvPr id="3" name="Notizenplatzhalter 2"/>
+          <p:cNvPr id="3" name="Notizenplatzhalter 2">
+            <a:extLst>
+              <a:ext uri="{FF2B5EF4-FFF2-40B4-BE49-F238E27FC236}">
+                <a16:creationId xmlns:a16="http://schemas.microsoft.com/office/drawing/2014/main" id="{485142E0-C62C-FDF3-5306-B8A9940CBAC0}"/>
+              </a:ext>
+            </a:extLst>
+          </p:cNvPr>
           <p:cNvSpPr>
             <a:spLocks noGrp="1"/>
           </p:cNvSpPr>
@@ -1420,7 +1385,7 @@
     </p:spTree>
     <p:extLst>
       <p:ext uri="{BB962C8B-B14F-4D97-AF65-F5344CB8AC3E}">
-        <p14:creationId xmlns:p14="http://schemas.microsoft.com/office/powerpoint/2010/main" val="87667087"/>
+        <p14:creationId xmlns:p14="http://schemas.microsoft.com/office/powerpoint/2010/main" val="4265210154"/>
       </p:ext>
     </p:extLst>
   </p:cSld>
@@ -1435,7 +1400,13 @@
   <p:cSld>
     <p:spTree>
       <p:nvGrpSpPr>
-        <p:cNvPr id="1" name=""/>
+        <p:cNvPr id="1" name="">
+          <a:extLst>
+            <a:ext uri="{FF2B5EF4-FFF2-40B4-BE49-F238E27FC236}">
+              <a16:creationId xmlns:a16="http://schemas.microsoft.com/office/drawing/2014/main" id="{949B017C-D628-D80A-10CF-7B58A61CE8D6}"/>
+            </a:ext>
+          </a:extLst>
+        </p:cNvPr>
         <p:cNvGrpSpPr/>
         <p:nvPr/>
       </p:nvGrpSpPr>
@@ -1449,7 +1420,13 @@
       </p:grpSpPr>
       <p:sp>
         <p:nvSpPr>
-          <p:cNvPr id="2" name="Folienbildplatzhalter 1"/>
+          <p:cNvPr id="2" name="Folienbildplatzhalter 1">
+            <a:extLst>
+              <a:ext uri="{FF2B5EF4-FFF2-40B4-BE49-F238E27FC236}">
+                <a16:creationId xmlns:a16="http://schemas.microsoft.com/office/drawing/2014/main" id="{C322F955-6F86-6D87-E736-F765A8A537D4}"/>
+              </a:ext>
+            </a:extLst>
+          </p:cNvPr>
           <p:cNvSpPr>
             <a:spLocks noGrp="1" noRot="1" noChangeAspect="1"/>
           </p:cNvSpPr>
@@ -1475,7 +1452,13 @@
       </p:sp>
       <p:sp>
         <p:nvSpPr>
-          <p:cNvPr id="3" name="Notizenplatzhalter 2"/>
+          <p:cNvPr id="3" name="Notizenplatzhalter 2">
+            <a:extLst>
+              <a:ext uri="{FF2B5EF4-FFF2-40B4-BE49-F238E27FC236}">
+                <a16:creationId xmlns:a16="http://schemas.microsoft.com/office/drawing/2014/main" id="{24B4ABC6-9277-C901-6008-5F74E58603F2}"/>
+              </a:ext>
+            </a:extLst>
+          </p:cNvPr>
           <p:cNvSpPr>
             <a:spLocks noGrp="1"/>
           </p:cNvSpPr>
@@ -1508,7 +1491,7 @@
     </p:spTree>
     <p:extLst>
       <p:ext uri="{BB962C8B-B14F-4D97-AF65-F5344CB8AC3E}">
-        <p14:creationId xmlns:p14="http://schemas.microsoft.com/office/powerpoint/2010/main" val="1649742202"/>
+        <p14:creationId xmlns:p14="http://schemas.microsoft.com/office/powerpoint/2010/main" val="3374383724"/>
       </p:ext>
     </p:extLst>
   </p:cSld>
@@ -1523,7 +1506,13 @@
   <p:cSld>
     <p:spTree>
       <p:nvGrpSpPr>
-        <p:cNvPr id="1" name=""/>
+        <p:cNvPr id="1" name="">
+          <a:extLst>
+            <a:ext uri="{FF2B5EF4-FFF2-40B4-BE49-F238E27FC236}">
+              <a16:creationId xmlns:a16="http://schemas.microsoft.com/office/drawing/2014/main" id="{FB7C6919-689B-53BE-F63A-E995C87DCD03}"/>
+            </a:ext>
+          </a:extLst>
+        </p:cNvPr>
         <p:cNvGrpSpPr/>
         <p:nvPr/>
       </p:nvGrpSpPr>
@@ -1537,7 +1526,13 @@
       </p:grpSpPr>
       <p:sp>
         <p:nvSpPr>
-          <p:cNvPr id="2" name="Folienbildplatzhalter 1"/>
+          <p:cNvPr id="2" name="Folienbildplatzhalter 1">
+            <a:extLst>
+              <a:ext uri="{FF2B5EF4-FFF2-40B4-BE49-F238E27FC236}">
+                <a16:creationId xmlns:a16="http://schemas.microsoft.com/office/drawing/2014/main" id="{D6BA1889-69E6-C356-B00E-C14B803B381D}"/>
+              </a:ext>
+            </a:extLst>
+          </p:cNvPr>
           <p:cNvSpPr>
             <a:spLocks noGrp="1" noRot="1" noChangeAspect="1"/>
           </p:cNvSpPr>
@@ -1563,7 +1558,13 @@
       </p:sp>
       <p:sp>
         <p:nvSpPr>
-          <p:cNvPr id="3" name="Notizenplatzhalter 2"/>
+          <p:cNvPr id="3" name="Notizenplatzhalter 2">
+            <a:extLst>
+              <a:ext uri="{FF2B5EF4-FFF2-40B4-BE49-F238E27FC236}">
+                <a16:creationId xmlns:a16="http://schemas.microsoft.com/office/drawing/2014/main" id="{63F99931-5493-6D11-F7AE-018FB9E741CE}"/>
+              </a:ext>
+            </a:extLst>
+          </p:cNvPr>
           <p:cNvSpPr>
             <a:spLocks noGrp="1"/>
           </p:cNvSpPr>
@@ -1596,7 +1597,7 @@
     </p:spTree>
     <p:extLst>
       <p:ext uri="{BB962C8B-B14F-4D97-AF65-F5344CB8AC3E}">
-        <p14:creationId xmlns:p14="http://schemas.microsoft.com/office/powerpoint/2010/main" val="177914689"/>
+        <p14:creationId xmlns:p14="http://schemas.microsoft.com/office/powerpoint/2010/main" val="890984838"/>
       </p:ext>
     </p:extLst>
   </p:cSld>
@@ -1611,7 +1612,13 @@
   <p:cSld>
     <p:spTree>
       <p:nvGrpSpPr>
-        <p:cNvPr id="1" name=""/>
+        <p:cNvPr id="1" name="">
+          <a:extLst>
+            <a:ext uri="{FF2B5EF4-FFF2-40B4-BE49-F238E27FC236}">
+              <a16:creationId xmlns:a16="http://schemas.microsoft.com/office/drawing/2014/main" id="{43FEC0BD-4227-1395-83D9-8EFEAA5E87C6}"/>
+            </a:ext>
+          </a:extLst>
+        </p:cNvPr>
         <p:cNvGrpSpPr/>
         <p:nvPr/>
       </p:nvGrpSpPr>
@@ -1625,7 +1632,13 @@
       </p:grpSpPr>
       <p:sp>
         <p:nvSpPr>
-          <p:cNvPr id="2" name="Folienbildplatzhalter 1"/>
+          <p:cNvPr id="2" name="Folienbildplatzhalter 1">
+            <a:extLst>
+              <a:ext uri="{FF2B5EF4-FFF2-40B4-BE49-F238E27FC236}">
+                <a16:creationId xmlns:a16="http://schemas.microsoft.com/office/drawing/2014/main" id="{F36AF8B4-0A2A-2913-01DF-FDB13124F9D4}"/>
+              </a:ext>
+            </a:extLst>
+          </p:cNvPr>
           <p:cNvSpPr>
             <a:spLocks noGrp="1" noRot="1" noChangeAspect="1"/>
           </p:cNvSpPr>
@@ -1651,7 +1664,13 @@
       </p:sp>
       <p:sp>
         <p:nvSpPr>
-          <p:cNvPr id="3" name="Notizenplatzhalter 2"/>
+          <p:cNvPr id="3" name="Notizenplatzhalter 2">
+            <a:extLst>
+              <a:ext uri="{FF2B5EF4-FFF2-40B4-BE49-F238E27FC236}">
+                <a16:creationId xmlns:a16="http://schemas.microsoft.com/office/drawing/2014/main" id="{6D70BBC4-8F7A-72DA-99B8-E4314563FEEE}"/>
+              </a:ext>
+            </a:extLst>
+          </p:cNvPr>
           <p:cNvSpPr>
             <a:spLocks noGrp="1"/>
           </p:cNvSpPr>
@@ -1684,7 +1703,7 @@
     </p:spTree>
     <p:extLst>
       <p:ext uri="{BB962C8B-B14F-4D97-AF65-F5344CB8AC3E}">
-        <p14:creationId xmlns:p14="http://schemas.microsoft.com/office/powerpoint/2010/main" val="984541709"/>
+        <p14:creationId xmlns:p14="http://schemas.microsoft.com/office/powerpoint/2010/main" val="432066566"/>
       </p:ext>
     </p:extLst>
   </p:cSld>
@@ -2674,6 +2693,36 @@
           </a:p>
         </p:txBody>
       </p:sp>
+      <p:pic>
+        <p:nvPicPr>
+          <p:cNvPr id="3" name="Grafik 2" descr="Ein Bild, das Text, Schrift, Grafiken, Logo enthält.&#10;&#10;KI-generierte Inhalte können fehlerhaft sein.">
+            <a:extLst>
+              <a:ext uri="{FF2B5EF4-FFF2-40B4-BE49-F238E27FC236}">
+                <a16:creationId xmlns:a16="http://schemas.microsoft.com/office/drawing/2014/main" id="{581560C5-E96D-652C-7797-7E72F96EEC3F}"/>
+              </a:ext>
+            </a:extLst>
+          </p:cNvPr>
+          <p:cNvPicPr>
+            <a:picLocks noChangeAspect="1"/>
+          </p:cNvPicPr>
+          <p:nvPr userDrawn="1"/>
+        </p:nvPicPr>
+        <p:blipFill>
+          <a:blip r:embed="rId2"/>
+          <a:stretch>
+            <a:fillRect/>
+          </a:stretch>
+        </p:blipFill>
+        <p:spPr>
+          <a:xfrm>
+            <a:off x="9885682" y="5971109"/>
+            <a:ext cx="2238796" cy="738977"/>
+          </a:xfrm>
+          <a:prstGeom prst="rect">
+            <a:avLst/>
+          </a:prstGeom>
+        </p:spPr>
+      </p:pic>
     </p:spTree>
     <p:extLst>
       <p:ext uri="{BB962C8B-B14F-4D97-AF65-F5344CB8AC3E}">
@@ -3421,6 +3470,36 @@
           </a:p>
         </p:txBody>
       </p:sp>
+      <p:pic>
+        <p:nvPicPr>
+          <p:cNvPr id="5" name="Grafik 4" descr="Ein Bild, das Text, Schrift, Grafiken, Logo enthält.&#10;&#10;KI-generierte Inhalte können fehlerhaft sein.">
+            <a:extLst>
+              <a:ext uri="{FF2B5EF4-FFF2-40B4-BE49-F238E27FC236}">
+                <a16:creationId xmlns:a16="http://schemas.microsoft.com/office/drawing/2014/main" id="{E7C41091-8B52-6C57-3170-47BA143542D9}"/>
+              </a:ext>
+            </a:extLst>
+          </p:cNvPr>
+          <p:cNvPicPr>
+            <a:picLocks noChangeAspect="1"/>
+          </p:cNvPicPr>
+          <p:nvPr userDrawn="1"/>
+        </p:nvPicPr>
+        <p:blipFill>
+          <a:blip r:embed="rId6"/>
+          <a:stretch>
+            <a:fillRect/>
+          </a:stretch>
+        </p:blipFill>
+        <p:spPr>
+          <a:xfrm>
+            <a:off x="9885682" y="5971109"/>
+            <a:ext cx="2238796" cy="738977"/>
+          </a:xfrm>
+          <a:prstGeom prst="rect">
+            <a:avLst/>
+          </a:prstGeom>
+        </p:spPr>
+      </p:pic>
     </p:spTree>
     <p:extLst>
       <p:ext uri="{BB962C8B-B14F-4D97-AF65-F5344CB8AC3E}">
@@ -3753,6 +3832,36 @@
           </a:p>
         </p:txBody>
       </p:sp>
+      <p:pic>
+        <p:nvPicPr>
+          <p:cNvPr id="3" name="Grafik 2" descr="Ein Bild, das Text, Schrift, Grafiken, Logo enthält.&#10;&#10;KI-generierte Inhalte können fehlerhaft sein.">
+            <a:extLst>
+              <a:ext uri="{FF2B5EF4-FFF2-40B4-BE49-F238E27FC236}">
+                <a16:creationId xmlns:a16="http://schemas.microsoft.com/office/drawing/2014/main" id="{6E71F870-1F9B-900B-36BA-C9DF2C42C06E}"/>
+              </a:ext>
+            </a:extLst>
+          </p:cNvPr>
+          <p:cNvPicPr>
+            <a:picLocks noChangeAspect="1"/>
+          </p:cNvPicPr>
+          <p:nvPr userDrawn="1"/>
+        </p:nvPicPr>
+        <p:blipFill>
+          <a:blip r:embed="rId2"/>
+          <a:stretch>
+            <a:fillRect/>
+          </a:stretch>
+        </p:blipFill>
+        <p:spPr>
+          <a:xfrm>
+            <a:off x="9885682" y="5971109"/>
+            <a:ext cx="2238796" cy="738977"/>
+          </a:xfrm>
+          <a:prstGeom prst="rect">
+            <a:avLst/>
+          </a:prstGeom>
+        </p:spPr>
+      </p:pic>
     </p:spTree>
     <p:extLst>
       <p:ext uri="{BB962C8B-B14F-4D97-AF65-F5344CB8AC3E}">
@@ -4178,6 +4287,36 @@
           </a:p>
         </p:txBody>
       </p:sp>
+      <p:pic>
+        <p:nvPicPr>
+          <p:cNvPr id="3" name="Grafik 2" descr="Ein Bild, das Text, Schrift, Grafiken, Logo enthält.&#10;&#10;KI-generierte Inhalte können fehlerhaft sein.">
+            <a:extLst>
+              <a:ext uri="{FF2B5EF4-FFF2-40B4-BE49-F238E27FC236}">
+                <a16:creationId xmlns:a16="http://schemas.microsoft.com/office/drawing/2014/main" id="{A75B1080-5F71-FD7F-6C65-7E347CCA611D}"/>
+              </a:ext>
+            </a:extLst>
+          </p:cNvPr>
+          <p:cNvPicPr>
+            <a:picLocks noChangeAspect="1"/>
+          </p:cNvPicPr>
+          <p:nvPr userDrawn="1"/>
+        </p:nvPicPr>
+        <p:blipFill>
+          <a:blip r:embed="rId4"/>
+          <a:stretch>
+            <a:fillRect/>
+          </a:stretch>
+        </p:blipFill>
+        <p:spPr>
+          <a:xfrm>
+            <a:off x="9885682" y="5971109"/>
+            <a:ext cx="2238796" cy="738977"/>
+          </a:xfrm>
+          <a:prstGeom prst="rect">
+            <a:avLst/>
+          </a:prstGeom>
+        </p:spPr>
+      </p:pic>
     </p:spTree>
     <p:extLst>
       <p:ext uri="{BB962C8B-B14F-4D97-AF65-F5344CB8AC3E}">
@@ -6202,6 +6341,36 @@
           </a:p>
         </p:txBody>
       </p:sp>
+      <p:pic>
+        <p:nvPicPr>
+          <p:cNvPr id="3" name="Grafik 2" descr="Ein Bild, das Text, Schrift, Grafiken, Logo enthält.&#10;&#10;KI-generierte Inhalte können fehlerhaft sein.">
+            <a:extLst>
+              <a:ext uri="{FF2B5EF4-FFF2-40B4-BE49-F238E27FC236}">
+                <a16:creationId xmlns:a16="http://schemas.microsoft.com/office/drawing/2014/main" id="{4D1D3423-DBC5-2EBE-474C-426E356C297B}"/>
+              </a:ext>
+            </a:extLst>
+          </p:cNvPr>
+          <p:cNvPicPr>
+            <a:picLocks noChangeAspect="1"/>
+          </p:cNvPicPr>
+          <p:nvPr userDrawn="1"/>
+        </p:nvPicPr>
+        <p:blipFill>
+          <a:blip r:embed="rId2"/>
+          <a:stretch>
+            <a:fillRect/>
+          </a:stretch>
+        </p:blipFill>
+        <p:spPr>
+          <a:xfrm>
+            <a:off x="9885682" y="5971109"/>
+            <a:ext cx="2238796" cy="738977"/>
+          </a:xfrm>
+          <a:prstGeom prst="rect">
+            <a:avLst/>
+          </a:prstGeom>
+        </p:spPr>
+      </p:pic>
     </p:spTree>
     <p:extLst>
       <p:ext uri="{BB962C8B-B14F-4D97-AF65-F5344CB8AC3E}">
@@ -8199,6 +8368,36 @@
           </a:p>
         </p:txBody>
       </p:sp>
+      <p:pic>
+        <p:nvPicPr>
+          <p:cNvPr id="2" name="Grafik 1" descr="Ein Bild, das Text, Schrift, Grafiken, Logo enthält.&#10;&#10;KI-generierte Inhalte können fehlerhaft sein.">
+            <a:extLst>
+              <a:ext uri="{FF2B5EF4-FFF2-40B4-BE49-F238E27FC236}">
+                <a16:creationId xmlns:a16="http://schemas.microsoft.com/office/drawing/2014/main" id="{D6AC1E20-0A1D-46AE-38D7-2320BB282D1C}"/>
+              </a:ext>
+            </a:extLst>
+          </p:cNvPr>
+          <p:cNvPicPr>
+            <a:picLocks noChangeAspect="1"/>
+          </p:cNvPicPr>
+          <p:nvPr userDrawn="1"/>
+        </p:nvPicPr>
+        <p:blipFill>
+          <a:blip r:embed="rId2"/>
+          <a:stretch>
+            <a:fillRect/>
+          </a:stretch>
+        </p:blipFill>
+        <p:spPr>
+          <a:xfrm>
+            <a:off x="9885682" y="5971109"/>
+            <a:ext cx="2238796" cy="738977"/>
+          </a:xfrm>
+          <a:prstGeom prst="rect">
+            <a:avLst/>
+          </a:prstGeom>
+        </p:spPr>
+      </p:pic>
     </p:spTree>
     <p:extLst>
       <p:ext uri="{BB962C8B-B14F-4D97-AF65-F5344CB8AC3E}">
@@ -9412,6 +9611,36 @@
           </a:p>
         </p:txBody>
       </p:sp>
+      <p:pic>
+        <p:nvPicPr>
+          <p:cNvPr id="5" name="Grafik 4" descr="Ein Bild, das Text, Schrift, Grafiken, Logo enthält.&#10;&#10;KI-generierte Inhalte können fehlerhaft sein.">
+            <a:extLst>
+              <a:ext uri="{FF2B5EF4-FFF2-40B4-BE49-F238E27FC236}">
+                <a16:creationId xmlns:a16="http://schemas.microsoft.com/office/drawing/2014/main" id="{44E5B82D-B1AC-F3BC-125D-604F4F0A86BF}"/>
+              </a:ext>
+            </a:extLst>
+          </p:cNvPr>
+          <p:cNvPicPr>
+            <a:picLocks noChangeAspect="1"/>
+          </p:cNvPicPr>
+          <p:nvPr userDrawn="1"/>
+        </p:nvPicPr>
+        <p:blipFill>
+          <a:blip r:embed="rId2"/>
+          <a:stretch>
+            <a:fillRect/>
+          </a:stretch>
+        </p:blipFill>
+        <p:spPr>
+          <a:xfrm>
+            <a:off x="9885682" y="5971109"/>
+            <a:ext cx="2238796" cy="738977"/>
+          </a:xfrm>
+          <a:prstGeom prst="rect">
+            <a:avLst/>
+          </a:prstGeom>
+        </p:spPr>
+      </p:pic>
     </p:spTree>
     <p:extLst>
       <p:ext uri="{BB962C8B-B14F-4D97-AF65-F5344CB8AC3E}">
@@ -10608,6 +10837,36 @@
           </a:p>
         </p:txBody>
       </p:sp>
+      <p:pic>
+        <p:nvPicPr>
+          <p:cNvPr id="5" name="Grafik 4" descr="Ein Bild, das Text, Schrift, Grafiken, Logo enthält.&#10;&#10;KI-generierte Inhalte können fehlerhaft sein.">
+            <a:extLst>
+              <a:ext uri="{FF2B5EF4-FFF2-40B4-BE49-F238E27FC236}">
+                <a16:creationId xmlns:a16="http://schemas.microsoft.com/office/drawing/2014/main" id="{D3427751-8C60-2CD1-EA60-D68B65CB7A56}"/>
+              </a:ext>
+            </a:extLst>
+          </p:cNvPr>
+          <p:cNvPicPr>
+            <a:picLocks noChangeAspect="1"/>
+          </p:cNvPicPr>
+          <p:nvPr userDrawn="1"/>
+        </p:nvPicPr>
+        <p:blipFill>
+          <a:blip r:embed="rId2"/>
+          <a:stretch>
+            <a:fillRect/>
+          </a:stretch>
+        </p:blipFill>
+        <p:spPr>
+          <a:xfrm>
+            <a:off x="9885682" y="5971109"/>
+            <a:ext cx="2238796" cy="738977"/>
+          </a:xfrm>
+          <a:prstGeom prst="rect">
+            <a:avLst/>
+          </a:prstGeom>
+        </p:spPr>
+      </p:pic>
     </p:spTree>
     <p:extLst>
       <p:ext uri="{BB962C8B-B14F-4D97-AF65-F5344CB8AC3E}">
@@ -11322,6 +11581,36 @@
           </a:p>
         </p:txBody>
       </p:sp>
+      <p:pic>
+        <p:nvPicPr>
+          <p:cNvPr id="4" name="Grafik 3" descr="Ein Bild, das Text, Schrift, Grafiken, Logo enthält.&#10;&#10;KI-generierte Inhalte können fehlerhaft sein.">
+            <a:extLst>
+              <a:ext uri="{FF2B5EF4-FFF2-40B4-BE49-F238E27FC236}">
+                <a16:creationId xmlns:a16="http://schemas.microsoft.com/office/drawing/2014/main" id="{6306BBC1-E03A-F152-C703-D32EFE4624F9}"/>
+              </a:ext>
+            </a:extLst>
+          </p:cNvPr>
+          <p:cNvPicPr>
+            <a:picLocks noChangeAspect="1"/>
+          </p:cNvPicPr>
+          <p:nvPr userDrawn="1"/>
+        </p:nvPicPr>
+        <p:blipFill>
+          <a:blip r:embed="rId2"/>
+          <a:stretch>
+            <a:fillRect/>
+          </a:stretch>
+        </p:blipFill>
+        <p:spPr>
+          <a:xfrm>
+            <a:off x="9885682" y="2939837"/>
+            <a:ext cx="2238796" cy="738977"/>
+          </a:xfrm>
+          <a:prstGeom prst="rect">
+            <a:avLst/>
+          </a:prstGeom>
+        </p:spPr>
+      </p:pic>
     </p:spTree>
     <p:extLst>
       <p:ext uri="{BB962C8B-B14F-4D97-AF65-F5344CB8AC3E}">
@@ -11910,6 +12199,36 @@
           </a:p>
         </p:txBody>
       </p:sp>
+      <p:pic>
+        <p:nvPicPr>
+          <p:cNvPr id="3" name="Grafik 2" descr="Ein Bild, das Text, Schrift, Grafiken, Logo enthält.&#10;&#10;KI-generierte Inhalte können fehlerhaft sein.">
+            <a:extLst>
+              <a:ext uri="{FF2B5EF4-FFF2-40B4-BE49-F238E27FC236}">
+                <a16:creationId xmlns:a16="http://schemas.microsoft.com/office/drawing/2014/main" id="{AF0B927E-BC02-E447-1933-828E1B6F4118}"/>
+              </a:ext>
+            </a:extLst>
+          </p:cNvPr>
+          <p:cNvPicPr>
+            <a:picLocks noChangeAspect="1"/>
+          </p:cNvPicPr>
+          <p:nvPr userDrawn="1"/>
+        </p:nvPicPr>
+        <p:blipFill>
+          <a:blip r:embed="rId2"/>
+          <a:stretch>
+            <a:fillRect/>
+          </a:stretch>
+        </p:blipFill>
+        <p:spPr>
+          <a:xfrm>
+            <a:off x="10446817" y="68742"/>
+            <a:ext cx="1745181" cy="576046"/>
+          </a:xfrm>
+          <a:prstGeom prst="rect">
+            <a:avLst/>
+          </a:prstGeom>
+        </p:spPr>
+      </p:pic>
     </p:spTree>
     <p:extLst>
       <p:ext uri="{BB962C8B-B14F-4D97-AF65-F5344CB8AC3E}">
@@ -12421,6 +12740,36 @@
           </a:p>
         </p:txBody>
       </p:sp>
+      <p:pic>
+        <p:nvPicPr>
+          <p:cNvPr id="2" name="Grafik 1" descr="Ein Bild, das Text, Schrift, Grafiken, Logo enthält.&#10;&#10;KI-generierte Inhalte können fehlerhaft sein.">
+            <a:extLst>
+              <a:ext uri="{FF2B5EF4-FFF2-40B4-BE49-F238E27FC236}">
+                <a16:creationId xmlns:a16="http://schemas.microsoft.com/office/drawing/2014/main" id="{B8216B48-7C45-AA54-E614-37E99008EA45}"/>
+              </a:ext>
+            </a:extLst>
+          </p:cNvPr>
+          <p:cNvPicPr>
+            <a:picLocks noChangeAspect="1"/>
+          </p:cNvPicPr>
+          <p:nvPr userDrawn="1"/>
+        </p:nvPicPr>
+        <p:blipFill>
+          <a:blip r:embed="rId2"/>
+          <a:stretch>
+            <a:fillRect/>
+          </a:stretch>
+        </p:blipFill>
+        <p:spPr>
+          <a:xfrm>
+            <a:off x="9586541" y="6087444"/>
+            <a:ext cx="2238796" cy="738977"/>
+          </a:xfrm>
+          <a:prstGeom prst="rect">
+            <a:avLst/>
+          </a:prstGeom>
+        </p:spPr>
+      </p:pic>
     </p:spTree>
     <p:extLst>
       <p:ext uri="{BB962C8B-B14F-4D97-AF65-F5344CB8AC3E}">
@@ -13872,6 +14221,36 @@
           </a:p>
         </p:txBody>
       </p:sp>
+      <p:pic>
+        <p:nvPicPr>
+          <p:cNvPr id="4" name="Grafik 3" descr="Ein Bild, das Text, Schrift, Grafiken, Logo enthält.&#10;&#10;KI-generierte Inhalte können fehlerhaft sein.">
+            <a:extLst>
+              <a:ext uri="{FF2B5EF4-FFF2-40B4-BE49-F238E27FC236}">
+                <a16:creationId xmlns:a16="http://schemas.microsoft.com/office/drawing/2014/main" id="{D79F7BCF-BBB7-3894-91B5-A6F05CCE992D}"/>
+              </a:ext>
+            </a:extLst>
+          </p:cNvPr>
+          <p:cNvPicPr>
+            <a:picLocks noChangeAspect="1"/>
+          </p:cNvPicPr>
+          <p:nvPr userDrawn="1"/>
+        </p:nvPicPr>
+        <p:blipFill>
+          <a:blip r:embed="rId2"/>
+          <a:stretch>
+            <a:fillRect/>
+          </a:stretch>
+        </p:blipFill>
+        <p:spPr>
+          <a:xfrm>
+            <a:off x="9885682" y="5971109"/>
+            <a:ext cx="2238796" cy="738977"/>
+          </a:xfrm>
+          <a:prstGeom prst="rect">
+            <a:avLst/>
+          </a:prstGeom>
+        </p:spPr>
+      </p:pic>
     </p:spTree>
     <p:extLst>
       <p:ext uri="{BB962C8B-B14F-4D97-AF65-F5344CB8AC3E}">
@@ -15214,6 +15593,36 @@
           </a:p>
         </p:txBody>
       </p:sp>
+      <p:pic>
+        <p:nvPicPr>
+          <p:cNvPr id="3" name="Grafik 2" descr="Ein Bild, das Text, Schrift, Grafiken, Logo enthält.&#10;&#10;KI-generierte Inhalte können fehlerhaft sein.">
+            <a:extLst>
+              <a:ext uri="{FF2B5EF4-FFF2-40B4-BE49-F238E27FC236}">
+                <a16:creationId xmlns:a16="http://schemas.microsoft.com/office/drawing/2014/main" id="{E2DA8446-2FA0-04D7-3759-5E6ACF477955}"/>
+              </a:ext>
+            </a:extLst>
+          </p:cNvPr>
+          <p:cNvPicPr>
+            <a:picLocks noChangeAspect="1"/>
+          </p:cNvPicPr>
+          <p:nvPr userDrawn="1"/>
+        </p:nvPicPr>
+        <p:blipFill>
+          <a:blip r:embed="rId6"/>
+          <a:stretch>
+            <a:fillRect/>
+          </a:stretch>
+        </p:blipFill>
+        <p:spPr>
+          <a:xfrm>
+            <a:off x="9885682" y="5971109"/>
+            <a:ext cx="2238796" cy="738977"/>
+          </a:xfrm>
+          <a:prstGeom prst="rect">
+            <a:avLst/>
+          </a:prstGeom>
+        </p:spPr>
+      </p:pic>
     </p:spTree>
     <p:extLst>
       <p:ext uri="{BB962C8B-B14F-4D97-AF65-F5344CB8AC3E}">
@@ -15901,6 +16310,36 @@
           </a:p>
         </p:txBody>
       </p:sp>
+      <p:pic>
+        <p:nvPicPr>
+          <p:cNvPr id="2" name="Grafik 1" descr="Ein Bild, das Text, Schrift, Grafiken, Logo enthält.&#10;&#10;KI-generierte Inhalte können fehlerhaft sein.">
+            <a:extLst>
+              <a:ext uri="{FF2B5EF4-FFF2-40B4-BE49-F238E27FC236}">
+                <a16:creationId xmlns:a16="http://schemas.microsoft.com/office/drawing/2014/main" id="{FEFDD764-FA47-39CB-8417-CCF87794203A}"/>
+              </a:ext>
+            </a:extLst>
+          </p:cNvPr>
+          <p:cNvPicPr>
+            <a:picLocks noChangeAspect="1"/>
+          </p:cNvPicPr>
+          <p:nvPr userDrawn="1"/>
+        </p:nvPicPr>
+        <p:blipFill>
+          <a:blip r:embed="rId2"/>
+          <a:stretch>
+            <a:fillRect/>
+          </a:stretch>
+        </p:blipFill>
+        <p:spPr>
+          <a:xfrm>
+            <a:off x="9885682" y="5971109"/>
+            <a:ext cx="2238796" cy="738977"/>
+          </a:xfrm>
+          <a:prstGeom prst="rect">
+            <a:avLst/>
+          </a:prstGeom>
+        </p:spPr>
+      </p:pic>
     </p:spTree>
     <p:extLst>
       <p:ext uri="{BB962C8B-B14F-4D97-AF65-F5344CB8AC3E}">
@@ -16995,6 +17434,36 @@
           </a:p>
         </p:txBody>
       </p:sp>
+      <p:pic>
+        <p:nvPicPr>
+          <p:cNvPr id="4" name="Grafik 3" descr="Ein Bild, das Text, Schrift, Grafiken, Logo enthält.&#10;&#10;KI-generierte Inhalte können fehlerhaft sein.">
+            <a:extLst>
+              <a:ext uri="{FF2B5EF4-FFF2-40B4-BE49-F238E27FC236}">
+                <a16:creationId xmlns:a16="http://schemas.microsoft.com/office/drawing/2014/main" id="{424F291B-73B5-9D6E-B778-5FBE95B15017}"/>
+              </a:ext>
+            </a:extLst>
+          </p:cNvPr>
+          <p:cNvPicPr>
+            <a:picLocks noChangeAspect="1"/>
+          </p:cNvPicPr>
+          <p:nvPr userDrawn="1"/>
+        </p:nvPicPr>
+        <p:blipFill>
+          <a:blip r:embed="rId2"/>
+          <a:stretch>
+            <a:fillRect/>
+          </a:stretch>
+        </p:blipFill>
+        <p:spPr>
+          <a:xfrm>
+            <a:off x="6812206" y="6077732"/>
+            <a:ext cx="2238796" cy="738977"/>
+          </a:xfrm>
+          <a:prstGeom prst="rect">
+            <a:avLst/>
+          </a:prstGeom>
+        </p:spPr>
+      </p:pic>
     </p:spTree>
     <p:extLst>
       <p:ext uri="{BB962C8B-B14F-4D97-AF65-F5344CB8AC3E}">
@@ -17656,6 +18125,36 @@
           </a:p>
         </p:txBody>
       </p:sp>
+      <p:pic>
+        <p:nvPicPr>
+          <p:cNvPr id="3" name="Grafik 2" descr="Ein Bild, das Text, Schrift, Grafiken, Logo enthält.&#10;&#10;KI-generierte Inhalte können fehlerhaft sein.">
+            <a:extLst>
+              <a:ext uri="{FF2B5EF4-FFF2-40B4-BE49-F238E27FC236}">
+                <a16:creationId xmlns:a16="http://schemas.microsoft.com/office/drawing/2014/main" id="{E430FB98-80F5-DCF9-D680-053BA670DF16}"/>
+              </a:ext>
+            </a:extLst>
+          </p:cNvPr>
+          <p:cNvPicPr>
+            <a:picLocks noChangeAspect="1"/>
+          </p:cNvPicPr>
+          <p:nvPr userDrawn="1"/>
+        </p:nvPicPr>
+        <p:blipFill>
+          <a:blip r:embed="rId4"/>
+          <a:stretch>
+            <a:fillRect/>
+          </a:stretch>
+        </p:blipFill>
+        <p:spPr>
+          <a:xfrm>
+            <a:off x="9885682" y="5971109"/>
+            <a:ext cx="2238796" cy="738977"/>
+          </a:xfrm>
+          <a:prstGeom prst="rect">
+            <a:avLst/>
+          </a:prstGeom>
+        </p:spPr>
+      </p:pic>
     </p:spTree>
     <p:extLst>
       <p:ext uri="{BB962C8B-B14F-4D97-AF65-F5344CB8AC3E}">
@@ -18166,41 +18665,122 @@
           <a:chExt cx="0" cy="0"/>
         </a:xfrm>
       </p:grpSpPr>
+      <p:pic>
+        <p:nvPicPr>
+          <p:cNvPr id="4" name="Grafik 3" descr="Ein Bild, das Text, Schrift, Grafiken, Logo enthält.&#10;&#10;KI-generierte Inhalte können fehlerhaft sein.">
+            <a:extLst>
+              <a:ext uri="{FF2B5EF4-FFF2-40B4-BE49-F238E27FC236}">
+                <a16:creationId xmlns:a16="http://schemas.microsoft.com/office/drawing/2014/main" id="{089655DC-22F6-2498-D15B-D48FF011B64F}"/>
+              </a:ext>
+            </a:extLst>
+          </p:cNvPr>
+          <p:cNvPicPr>
+            <a:picLocks noChangeAspect="1"/>
+          </p:cNvPicPr>
+          <p:nvPr/>
+        </p:nvPicPr>
+        <p:blipFill>
+          <a:blip r:embed="rId3"/>
+          <a:stretch>
+            <a:fillRect/>
+          </a:stretch>
+        </p:blipFill>
+        <p:spPr>
+          <a:xfrm>
+            <a:off x="3222930" y="741582"/>
+            <a:ext cx="5746140" cy="1896675"/>
+          </a:xfrm>
+          <a:prstGeom prst="rect">
+            <a:avLst/>
+          </a:prstGeom>
+        </p:spPr>
+      </p:pic>
       <p:sp>
         <p:nvSpPr>
-          <p:cNvPr id="2" name="Titel 1">
+          <p:cNvPr id="5" name="Textfeld 4">
             <a:extLst>
               <a:ext uri="{FF2B5EF4-FFF2-40B4-BE49-F238E27FC236}">
-                <a16:creationId xmlns:a16="http://schemas.microsoft.com/office/drawing/2014/main" id="{4207FF65-A536-F639-8591-ED024C223308}"/>
+                <a16:creationId xmlns:a16="http://schemas.microsoft.com/office/drawing/2014/main" id="{833F5856-E949-3554-0594-6ECE332EB90C}"/>
               </a:ext>
             </a:extLst>
           </p:cNvPr>
-          <p:cNvSpPr>
-            <a:spLocks noGrp="1"/>
-          </p:cNvSpPr>
-          <p:nvPr>
-            <p:ph type="ctrTitle"/>
-          </p:nvPr>
+          <p:cNvSpPr txBox="1"/>
+          <p:nvPr/>
         </p:nvSpPr>
         <p:spPr>
           <a:xfrm>
-            <a:off x="3222931" y="810227"/>
-            <a:ext cx="5746140" cy="3831221"/>
+            <a:off x="4191000" y="2827866"/>
+            <a:ext cx="3810000" cy="523220"/>
           </a:xfrm>
+          <a:prstGeom prst="rect">
+            <a:avLst/>
+          </a:prstGeom>
+          <a:noFill/>
         </p:spPr>
         <p:txBody>
-          <a:bodyPr rtlCol="0" anchor="ctr"/>
-          <a:lstStyle>
-            <a:defPPr>
-              <a:defRPr lang="de-DE"/>
-            </a:defPPr>
-          </a:lstStyle>
-          <a:p>
-            <a:pPr rtl="0"/>
+          <a:bodyPr wrap="square" rtlCol="0">
+            <a:spAutoFit/>
+          </a:bodyPr>
+          <a:lstStyle/>
+          <a:p>
             <a:r>
-              <a:rPr lang="de-DE" dirty="0"/>
-              <a:t>Einfache Präsentation</a:t>
+              <a:rPr lang="de-DE" sz="2800" b="1" dirty="0">
+                <a:solidFill>
+                  <a:srgbClr val="388EEC"/>
+                </a:solidFill>
+              </a:rPr>
+              <a:t>Kick-Off Präsentation</a:t>
             </a:r>
+            <a:endParaRPr lang="de-AT" sz="2800" b="1" dirty="0">
+              <a:solidFill>
+                <a:srgbClr val="388EEC"/>
+              </a:solidFill>
+            </a:endParaRPr>
+          </a:p>
+        </p:txBody>
+      </p:sp>
+      <p:sp>
+        <p:nvSpPr>
+          <p:cNvPr id="6" name="Textfeld 5">
+            <a:extLst>
+              <a:ext uri="{FF2B5EF4-FFF2-40B4-BE49-F238E27FC236}">
+                <a16:creationId xmlns:a16="http://schemas.microsoft.com/office/drawing/2014/main" id="{9873F719-C6B8-CB7E-FB2B-10DD626570B1}"/>
+              </a:ext>
+            </a:extLst>
+          </p:cNvPr>
+          <p:cNvSpPr txBox="1"/>
+          <p:nvPr/>
+        </p:nvSpPr>
+        <p:spPr>
+          <a:xfrm>
+            <a:off x="6449352" y="3435664"/>
+            <a:ext cx="1405990" cy="400110"/>
+          </a:xfrm>
+          <a:prstGeom prst="rect">
+            <a:avLst/>
+          </a:prstGeom>
+          <a:noFill/>
+        </p:spPr>
+        <p:txBody>
+          <a:bodyPr wrap="square" rtlCol="0">
+            <a:spAutoFit/>
+          </a:bodyPr>
+          <a:lstStyle/>
+          <a:p>
+            <a:pPr algn="r"/>
+            <a:r>
+              <a:rPr lang="de-DE" sz="2000" dirty="0">
+                <a:solidFill>
+                  <a:srgbClr val="388EEC"/>
+                </a:solidFill>
+              </a:rPr>
+              <a:t>10.12.2025</a:t>
+            </a:r>
+            <a:endParaRPr lang="de-AT" sz="2000" dirty="0">
+              <a:solidFill>
+                <a:srgbClr val="388EEC"/>
+              </a:solidFill>
+            </a:endParaRPr>
           </a:p>
         </p:txBody>
       </p:sp>
@@ -18236,10 +18816,10 @@
       </p:grpSpPr>
       <p:sp>
         <p:nvSpPr>
-          <p:cNvPr id="5" name="Titel 4">
+          <p:cNvPr id="2" name="Titel 1">
             <a:extLst>
               <a:ext uri="{FF2B5EF4-FFF2-40B4-BE49-F238E27FC236}">
-                <a16:creationId xmlns:a16="http://schemas.microsoft.com/office/drawing/2014/main" id="{2136FCF6-982C-CC37-9625-3EBFC7E7DD13}"/>
+                <a16:creationId xmlns:a16="http://schemas.microsoft.com/office/drawing/2014/main" id="{B6210199-C129-11F0-56F2-2D1AED21CB4C}"/>
               </a:ext>
             </a:extLst>
           </p:cNvPr>
@@ -18252,8 +18832,8 @@
         </p:nvSpPr>
         <p:spPr>
           <a:xfrm>
-            <a:off x="1550563" y="1089213"/>
-            <a:ext cx="9879437" cy="980844"/>
+            <a:off x="4076701" y="1057275"/>
+            <a:ext cx="5257800" cy="568326"/>
           </a:xfrm>
         </p:spPr>
         <p:txBody>
@@ -18266,18 +18846,19 @@
           <a:p>
             <a:pPr rtl="0"/>
             <a:r>
-              <a:rPr lang="de-DE"/>
-              <a:t>Dynamischer Vortrag</a:t>
+              <a:rPr lang="de-DE" sz="4000" dirty="0"/>
+              <a:t>Meilensteine</a:t>
             </a:r>
+            <a:endParaRPr lang="de-DE" dirty="0"/>
           </a:p>
         </p:txBody>
       </p:sp>
       <p:sp>
         <p:nvSpPr>
-          <p:cNvPr id="4" name="Textplatzhalter 3">
+          <p:cNvPr id="3" name="Foliennummernplatzhalter 2">
             <a:extLst>
               <a:ext uri="{FF2B5EF4-FFF2-40B4-BE49-F238E27FC236}">
-                <a16:creationId xmlns:a16="http://schemas.microsoft.com/office/drawing/2014/main" id="{97DCC342-9FD1-7055-EAAC-008DC851B13F}"/>
+                <a16:creationId xmlns:a16="http://schemas.microsoft.com/office/drawing/2014/main" id="{370AEC4F-E711-8552-9C34-82C1514A1E37}"/>
               </a:ext>
             </a:extLst>
           </p:cNvPr>
@@ -18285,13 +18866,13 @@
             <a:spLocks noGrp="1"/>
           </p:cNvSpPr>
           <p:nvPr>
-            <p:ph type="body" sz="quarter" idx="13"/>
+            <p:ph type="sldNum" sz="quarter" idx="10"/>
           </p:nvPr>
         </p:nvSpPr>
         <p:spPr>
           <a:xfrm>
-            <a:off x="1550564" y="2331958"/>
-            <a:ext cx="2975217" cy="3704266"/>
+            <a:off x="10438475" y="457199"/>
+            <a:ext cx="987552" cy="471489"/>
           </a:xfrm>
         </p:spPr>
         <p:txBody>
@@ -18303,661 +18884,331 @@
           </a:lstStyle>
           <a:p>
             <a:pPr rtl="0"/>
+            <a:fld id="{48F63A3B-78C7-47BE-AE5E-E10140E04643}" type="slidenum">
+              <a:rPr lang="de-DE" smtClean="0"/>
+              <a:pPr rtl="0"/>
+              <a:t>10</a:t>
+            </a:fld>
+            <a:endParaRPr lang="de-DE" dirty="0"/>
+          </a:p>
+        </p:txBody>
+      </p:sp>
+      <p:sp>
+        <p:nvSpPr>
+          <p:cNvPr id="4" name="Inhaltsplatzhalter 3">
+            <a:extLst>
+              <a:ext uri="{FF2B5EF4-FFF2-40B4-BE49-F238E27FC236}">
+                <a16:creationId xmlns:a16="http://schemas.microsoft.com/office/drawing/2014/main" id="{BDDD6BDC-E008-6AB7-55A1-46ED9BCF054F}"/>
+              </a:ext>
+            </a:extLst>
+          </p:cNvPr>
+          <p:cNvSpPr>
+            <a:spLocks noGrp="1"/>
+          </p:cNvSpPr>
+          <p:nvPr>
+            <p:ph idx="11"/>
+          </p:nvPr>
+        </p:nvSpPr>
+        <p:spPr>
+          <a:xfrm>
+            <a:off x="3556000" y="1973786"/>
+            <a:ext cx="8636000" cy="3886732"/>
+          </a:xfrm>
+        </p:spPr>
+        <p:txBody>
+          <a:bodyPr rtlCol="0">
+            <a:normAutofit/>
+          </a:bodyPr>
+          <a:lstStyle>
+            <a:defPPr>
+              <a:defRPr lang="de-DE"/>
+            </a:defPPr>
+          </a:lstStyle>
+          <a:p>
+            <a:pPr marL="342900" indent="-342900" rtl="0">
+              <a:spcAft>
+                <a:spcPts val="1200"/>
+              </a:spcAft>
+              <a:buFont typeface="Arial" panose="020B0604020202020204" pitchFamily="34" charset="0"/>
+              <a:buChar char="•"/>
+            </a:pPr>
+            <a:r>
+              <a:rPr lang="de-DE" b="1" dirty="0"/>
+              <a:t>M1</a:t>
+            </a:r>
             <a:r>
               <a:rPr lang="de-DE" dirty="0"/>
-              <a:t>Erfahren Sie, wie Sie Energie in Ihren Vortrag einfließen lassen, um einen bleibenden Eindruck zu hinterlassen.</a:t>
+              <a:t>: Kickoff-Meeting – 11.12.2025</a:t>
             </a:r>
           </a:p>
+          <a:p>
+            <a:pPr marL="342900" indent="-342900" rtl="0">
+              <a:spcAft>
+                <a:spcPts val="1200"/>
+              </a:spcAft>
+              <a:buFont typeface="Arial" panose="020B0604020202020204" pitchFamily="34" charset="0"/>
+              <a:buChar char="•"/>
+            </a:pPr>
+            <a:r>
+              <a:rPr lang="de-DE" b="1" dirty="0"/>
+              <a:t>M2</a:t>
+            </a:r>
+            <a:r>
+              <a:rPr lang="de-DE" dirty="0"/>
+              <a:t>: Prototypen für Frontend, APIs (GPS, Wetter) – 26.01.2026</a:t>
+            </a:r>
+          </a:p>
+          <a:p>
+            <a:pPr marL="342900" indent="-342900" rtl="0">
+              <a:spcAft>
+                <a:spcPts val="1200"/>
+              </a:spcAft>
+              <a:buFont typeface="Arial" panose="020B0604020202020204" pitchFamily="34" charset="0"/>
+              <a:buChar char="•"/>
+            </a:pPr>
+            <a:r>
+              <a:rPr lang="de-DE" b="1" dirty="0"/>
+              <a:t>M3</a:t>
+            </a:r>
+            <a:r>
+              <a:rPr lang="de-DE" dirty="0"/>
+              <a:t>: Backend mit Datenbank, Kommunikation zu Frontend – 26.03.2026	</a:t>
+            </a:r>
+          </a:p>
+          <a:p>
+            <a:pPr marL="342900" indent="-342900" rtl="0">
+              <a:spcAft>
+                <a:spcPts val="1200"/>
+              </a:spcAft>
+              <a:buFont typeface="Arial" panose="020B0604020202020204" pitchFamily="34" charset="0"/>
+              <a:buChar char="•"/>
+            </a:pPr>
+            <a:r>
+              <a:rPr lang="de-DE" b="1" dirty="0"/>
+              <a:t>M4</a:t>
+            </a:r>
+            <a:r>
+              <a:rPr lang="de-DE" dirty="0"/>
+              <a:t>: Automatische Protokollerstellung und Export– 20.04.2026</a:t>
+            </a:r>
+          </a:p>
+          <a:p>
+            <a:pPr marL="342900" indent="-342900" rtl="0">
+              <a:spcAft>
+                <a:spcPts val="1200"/>
+              </a:spcAft>
+              <a:buFont typeface="Arial" panose="020B0604020202020204" pitchFamily="34" charset="0"/>
+              <a:buChar char="•"/>
+            </a:pPr>
+            <a:r>
+              <a:rPr lang="de-DE" b="1" dirty="0"/>
+              <a:t>M5</a:t>
+            </a:r>
+            <a:r>
+              <a:rPr lang="de-DE" dirty="0"/>
+              <a:t>: Design Frontend – 28.05.2026</a:t>
+            </a:r>
+          </a:p>
+          <a:p>
+            <a:pPr marL="342900" indent="-342900" rtl="0">
+              <a:spcAft>
+                <a:spcPts val="1200"/>
+              </a:spcAft>
+              <a:buFont typeface="Arial" panose="020B0604020202020204" pitchFamily="34" charset="0"/>
+              <a:buChar char="•"/>
+            </a:pPr>
+            <a:r>
+              <a:rPr lang="de-DE" b="1" dirty="0"/>
+              <a:t>M6</a:t>
+            </a:r>
+            <a:r>
+              <a:rPr lang="de-DE" dirty="0"/>
+              <a:t>: Abschluss – 15.06.2026</a:t>
+            </a:r>
+          </a:p>
+          <a:p>
+            <a:pPr marL="342900" indent="-342900" rtl="0">
+              <a:buFont typeface="Arial" panose="020B0604020202020204" pitchFamily="34" charset="0"/>
+              <a:buChar char="•"/>
+            </a:pPr>
+            <a:endParaRPr lang="de-DE" dirty="0"/>
+          </a:p>
+        </p:txBody>
+      </p:sp>
+    </p:spTree>
+    <p:extLst>
+      <p:ext uri="{BB962C8B-B14F-4D97-AF65-F5344CB8AC3E}">
+        <p14:creationId xmlns:p14="http://schemas.microsoft.com/office/powerpoint/2010/main" val="1131718056"/>
+      </p:ext>
+    </p:extLst>
+  </p:cSld>
+  <p:clrMapOvr>
+    <a:masterClrMapping/>
+  </p:clrMapOvr>
+  <mc:AlternateContent xmlns:mc="http://schemas.openxmlformats.org/markup-compatibility/2006">
+    <mc:Choice xmlns:p159="http://schemas.microsoft.com/office/powerpoint/2015/09/main" Requires="p159">
+      <p:transition xmlns:p14="http://schemas.microsoft.com/office/powerpoint/2010/main" spd="slow" p14:dur="2000">
+        <p159:morph option="byObject"/>
+      </p:transition>
+    </mc:Choice>
+    <mc:Fallback>
+      <p:transition spd="slow">
+        <p:fade/>
+      </p:transition>
+    </mc:Fallback>
+  </mc:AlternateContent>
+</p:sld>
+</file>
+
+<file path=ppt/slides/slide11.xml><?xml version="1.0" encoding="utf-8"?>
+<p:sld xmlns:a="http://schemas.openxmlformats.org/drawingml/2006/main" xmlns:r="http://schemas.openxmlformats.org/officeDocument/2006/relationships" xmlns:p="http://schemas.openxmlformats.org/presentationml/2006/main">
+  <p:cSld>
+    <p:spTree>
+      <p:nvGrpSpPr>
+        <p:cNvPr id="1" name=""/>
+        <p:cNvGrpSpPr/>
+        <p:nvPr/>
+      </p:nvGrpSpPr>
+      <p:grpSpPr>
+        <a:xfrm>
+          <a:off x="0" y="0"/>
+          <a:ext cx="0" cy="0"/>
+          <a:chOff x="0" y="0"/>
+          <a:chExt cx="0" cy="0"/>
+        </a:xfrm>
+      </p:grpSpPr>
+      <p:sp>
+        <p:nvSpPr>
+          <p:cNvPr id="2" name="Titel 1">
+            <a:extLst>
+              <a:ext uri="{FF2B5EF4-FFF2-40B4-BE49-F238E27FC236}">
+                <a16:creationId xmlns:a16="http://schemas.microsoft.com/office/drawing/2014/main" id="{FD5E8954-9BCB-7FD9-A210-38DC54382D45}"/>
+              </a:ext>
+            </a:extLst>
+          </p:cNvPr>
+          <p:cNvSpPr>
+            <a:spLocks noGrp="1"/>
+          </p:cNvSpPr>
+          <p:nvPr>
+            <p:ph type="title"/>
+          </p:nvPr>
+        </p:nvSpPr>
+        <p:spPr>
+          <a:xfrm>
+            <a:off x="3460564" y="431606"/>
+            <a:ext cx="7965461" cy="994164"/>
+          </a:xfrm>
+        </p:spPr>
+        <p:txBody>
+          <a:bodyPr rtlCol="0"/>
+          <a:lstStyle>
+            <a:defPPr>
+              <a:defRPr lang="de-DE"/>
+            </a:defPPr>
+          </a:lstStyle>
           <a:p>
             <a:pPr rtl="0"/>
             <a:r>
               <a:rPr lang="de-DE" dirty="0"/>
-              <a:t>Eines der Ziele einer effektiven Kommunikation besteht darin, Ihre Zielgruppe zu motivieren.</a:t>
+              <a:t>Risiken</a:t>
             </a:r>
           </a:p>
         </p:txBody>
       </p:sp>
-      <p:graphicFrame>
-        <p:nvGraphicFramePr>
-          <p:cNvPr id="6" name="Inhaltsplatzhalter 5">
+      <p:sp>
+        <p:nvSpPr>
+          <p:cNvPr id="3" name="Inhaltsplatzhalter 2">
             <a:extLst>
               <a:ext uri="{FF2B5EF4-FFF2-40B4-BE49-F238E27FC236}">
-                <a16:creationId xmlns:a16="http://schemas.microsoft.com/office/drawing/2014/main" id="{4DB3991E-0605-C20E-53AD-D64E13638DA5}"/>
+                <a16:creationId xmlns:a16="http://schemas.microsoft.com/office/drawing/2014/main" id="{75111C33-898C-4414-4665-5136EB6FC126}"/>
               </a:ext>
             </a:extLst>
           </p:cNvPr>
-          <p:cNvGraphicFramePr>
-            <a:graphicFrameLocks noGrp="1"/>
-          </p:cNvGraphicFramePr>
+          <p:cNvSpPr>
+            <a:spLocks noGrp="1"/>
+          </p:cNvSpPr>
           <p:nvPr>
-            <p:ph sz="half" idx="1"/>
-            <p:extLst>
-              <p:ext uri="{D42A27DB-BD31-4B8C-83A1-F6EECF244321}">
-                <p14:modId xmlns:p14="http://schemas.microsoft.com/office/powerpoint/2010/main" val="1034980823"/>
-              </p:ext>
-            </p:extLst>
+            <p:ph sz="half" idx="2"/>
           </p:nvPr>
-        </p:nvGraphicFramePr>
-        <p:xfrm>
-          <a:off x="5087938" y="2332038"/>
-          <a:ext cx="6621980" cy="3947181"/>
-        </p:xfrm>
-        <a:graphic>
-          <a:graphicData uri="http://schemas.openxmlformats.org/drawingml/2006/table">
-            <a:tbl>
-              <a:tblPr firstRow="1" bandRow="1">
-                <a:tableStyleId>{3B4B98B0-60AC-42C2-AFA5-B58CD77FA1E5}</a:tableStyleId>
-              </a:tblPr>
-              <a:tblGrid>
-                <a:gridCol w="2801543">
-                  <a:extLst>
-                    <a:ext uri="{9D8B030D-6E8A-4147-A177-3AD203B41FA5}">
-                      <a16:colId xmlns:a16="http://schemas.microsoft.com/office/drawing/2014/main" val="180956085"/>
-                    </a:ext>
-                  </a:extLst>
-                </a:gridCol>
-                <a:gridCol w="1758372">
-                  <a:extLst>
-                    <a:ext uri="{9D8B030D-6E8A-4147-A177-3AD203B41FA5}">
-                      <a16:colId xmlns:a16="http://schemas.microsoft.com/office/drawing/2014/main" val="1180706872"/>
-                    </a:ext>
-                  </a:extLst>
-                </a:gridCol>
-                <a:gridCol w="662474">
-                  <a:extLst>
-                    <a:ext uri="{9D8B030D-6E8A-4147-A177-3AD203B41FA5}">
-                      <a16:colId xmlns:a16="http://schemas.microsoft.com/office/drawing/2014/main" val="2050154702"/>
-                    </a:ext>
-                  </a:extLst>
-                </a:gridCol>
-                <a:gridCol w="1399591">
-                  <a:extLst>
-                    <a:ext uri="{9D8B030D-6E8A-4147-A177-3AD203B41FA5}">
-                      <a16:colId xmlns:a16="http://schemas.microsoft.com/office/drawing/2014/main" val="1872764148"/>
-                    </a:ext>
-                  </a:extLst>
-                </a:gridCol>
-              </a:tblGrid>
-              <a:tr h="606129">
-                <a:tc>
-                  <a:txBody>
-                    <a:bodyPr/>
-                    <a:lstStyle>
-                      <a:defPPr>
-                        <a:defRPr lang="de-DE"/>
-                      </a:defPPr>
-                    </a:lstStyle>
-                    <a:p>
-                      <a:pPr rtl="0"/>
-                      <a:r>
-                        <a:rPr lang="de-DE">
-                          <a:solidFill>
-                            <a:schemeClr val="accent6"/>
-                          </a:solidFill>
-                        </a:rPr>
-                        <a:t>Metrik</a:t>
-                      </a:r>
-                    </a:p>
-                  </a:txBody>
-                  <a:tcPr anchor="ctr"/>
-                </a:tc>
-                <a:tc>
-                  <a:txBody>
-                    <a:bodyPr/>
-                    <a:lstStyle>
-                      <a:defPPr>
-                        <a:defRPr lang="de-DE"/>
-                      </a:defPPr>
-                    </a:lstStyle>
-                    <a:p>
-                      <a:pPr rtl="0"/>
-                      <a:r>
-                        <a:rPr lang="de-DE">
-                          <a:solidFill>
-                            <a:schemeClr val="accent6"/>
-                          </a:solidFill>
-                        </a:rPr>
-                        <a:t>Messung</a:t>
-                      </a:r>
-                    </a:p>
-                  </a:txBody>
-                  <a:tcPr anchor="ctr"/>
-                </a:tc>
-                <a:tc>
-                  <a:txBody>
-                    <a:bodyPr/>
-                    <a:lstStyle>
-                      <a:defPPr>
-                        <a:defRPr lang="de-DE"/>
-                      </a:defPPr>
-                    </a:lstStyle>
-                    <a:p>
-                      <a:pPr rtl="0"/>
-                      <a:r>
-                        <a:rPr lang="de-DE">
-                          <a:solidFill>
-                            <a:schemeClr val="accent6"/>
-                          </a:solidFill>
-                        </a:rPr>
-                        <a:t>Ziel</a:t>
-                      </a:r>
-                    </a:p>
-                  </a:txBody>
-                  <a:tcPr anchor="ctr"/>
-                </a:tc>
-                <a:tc>
-                  <a:txBody>
-                    <a:bodyPr/>
-                    <a:lstStyle>
-                      <a:defPPr>
-                        <a:defRPr lang="de-DE"/>
-                      </a:defPPr>
-                    </a:lstStyle>
-                    <a:p>
-                      <a:pPr rtl="0"/>
-                      <a:r>
-                        <a:rPr lang="de-DE">
-                          <a:solidFill>
-                            <a:schemeClr val="accent6"/>
-                          </a:solidFill>
-                        </a:rPr>
-                        <a:t>Tatsächlich</a:t>
-                      </a:r>
-                    </a:p>
-                  </a:txBody>
-                  <a:tcPr anchor="ctr"/>
-                </a:tc>
-                <a:extLst>
-                  <a:ext uri="{0D108BD9-81ED-4DB2-BD59-A6C34878D82A}">
-                    <a16:rowId xmlns:a16="http://schemas.microsoft.com/office/drawing/2014/main" val="3059142786"/>
-                  </a:ext>
-                </a:extLst>
-              </a:tr>
-              <a:tr h="606129">
-                <a:tc>
-                  <a:txBody>
-                    <a:bodyPr/>
-                    <a:lstStyle>
-                      <a:defPPr>
-                        <a:defRPr lang="de-DE"/>
-                      </a:defPPr>
-                    </a:lstStyle>
-                    <a:p>
-                      <a:pPr rtl="0"/>
-                      <a:r>
-                        <a:rPr lang="de-DE">
-                          <a:solidFill>
-                            <a:schemeClr val="accent6"/>
-                          </a:solidFill>
-                        </a:rPr>
-                        <a:t>Anwesenheit des Publikums</a:t>
-                      </a:r>
-                    </a:p>
-                  </a:txBody>
-                  <a:tcPr anchor="ctr"/>
-                </a:tc>
-                <a:tc>
-                  <a:txBody>
-                    <a:bodyPr/>
-                    <a:lstStyle>
-                      <a:defPPr>
-                        <a:defRPr lang="de-DE"/>
-                      </a:defPPr>
-                    </a:lstStyle>
-                    <a:p>
-                      <a:pPr rtl="0"/>
-                      <a:r>
-                        <a:rPr lang="de-DE" dirty="0">
-                          <a:solidFill>
-                            <a:schemeClr val="accent6"/>
-                          </a:solidFill>
-                        </a:rPr>
-                        <a:t>Anzahl der Teilnehmer</a:t>
-                      </a:r>
-                    </a:p>
-                  </a:txBody>
-                  <a:tcPr anchor="ctr"/>
-                </a:tc>
-                <a:tc>
-                  <a:txBody>
-                    <a:bodyPr/>
-                    <a:lstStyle>
-                      <a:defPPr>
-                        <a:defRPr lang="de-DE"/>
-                      </a:defPPr>
-                    </a:lstStyle>
-                    <a:p>
-                      <a:pPr rtl="0"/>
-                      <a:r>
-                        <a:rPr lang="de-DE">
-                          <a:solidFill>
-                            <a:schemeClr val="accent6"/>
-                          </a:solidFill>
-                        </a:rPr>
-                        <a:t>150</a:t>
-                      </a:r>
-                    </a:p>
-                  </a:txBody>
-                  <a:tcPr anchor="ctr"/>
-                </a:tc>
-                <a:tc>
-                  <a:txBody>
-                    <a:bodyPr/>
-                    <a:lstStyle>
-                      <a:defPPr>
-                        <a:defRPr lang="de-DE"/>
-                      </a:defPPr>
-                    </a:lstStyle>
-                    <a:p>
-                      <a:pPr rtl="0"/>
-                      <a:r>
-                        <a:rPr lang="de-DE">
-                          <a:solidFill>
-                            <a:schemeClr val="accent6"/>
-                          </a:solidFill>
-                        </a:rPr>
-                        <a:t>120</a:t>
-                      </a:r>
-                    </a:p>
-                  </a:txBody>
-                  <a:tcPr anchor="ctr"/>
-                </a:tc>
-                <a:extLst>
-                  <a:ext uri="{0D108BD9-81ED-4DB2-BD59-A6C34878D82A}">
-                    <a16:rowId xmlns:a16="http://schemas.microsoft.com/office/drawing/2014/main" val="3588576737"/>
-                  </a:ext>
-                </a:extLst>
-              </a:tr>
-              <a:tr h="643498">
-                <a:tc>
-                  <a:txBody>
-                    <a:bodyPr/>
-                    <a:lstStyle>
-                      <a:defPPr>
-                        <a:defRPr lang="de-DE"/>
-                      </a:defPPr>
-                    </a:lstStyle>
-                    <a:p>
-                      <a:pPr rtl="0"/>
-                      <a:r>
-                        <a:rPr lang="de-DE">
-                          <a:solidFill>
-                            <a:schemeClr val="accent6"/>
-                          </a:solidFill>
-                        </a:rPr>
-                        <a:t>Vortragsdauer</a:t>
-                      </a:r>
-                    </a:p>
-                  </a:txBody>
-                  <a:tcPr anchor="ctr"/>
-                </a:tc>
-                <a:tc>
-                  <a:txBody>
-                    <a:bodyPr/>
-                    <a:lstStyle>
-                      <a:defPPr>
-                        <a:defRPr lang="de-DE"/>
-                      </a:defPPr>
-                    </a:lstStyle>
-                    <a:p>
-                      <a:pPr rtl="0"/>
-                      <a:r>
-                        <a:rPr lang="de-DE">
-                          <a:solidFill>
-                            <a:schemeClr val="accent6"/>
-                          </a:solidFill>
-                        </a:rPr>
-                        <a:t>Minuten</a:t>
-                      </a:r>
-                    </a:p>
-                  </a:txBody>
-                  <a:tcPr anchor="ctr"/>
-                </a:tc>
-                <a:tc>
-                  <a:txBody>
-                    <a:bodyPr/>
-                    <a:lstStyle>
-                      <a:defPPr>
-                        <a:defRPr lang="de-DE"/>
-                      </a:defPPr>
-                    </a:lstStyle>
-                    <a:p>
-                      <a:pPr rtl="0"/>
-                      <a:r>
-                        <a:rPr lang="de-DE">
-                          <a:solidFill>
-                            <a:schemeClr val="accent6"/>
-                          </a:solidFill>
-                        </a:rPr>
-                        <a:t>60</a:t>
-                      </a:r>
-                    </a:p>
-                  </a:txBody>
-                  <a:tcPr anchor="ctr"/>
-                </a:tc>
-                <a:tc>
-                  <a:txBody>
-                    <a:bodyPr/>
-                    <a:lstStyle>
-                      <a:defPPr>
-                        <a:defRPr lang="de-DE"/>
-                      </a:defPPr>
-                    </a:lstStyle>
-                    <a:p>
-                      <a:pPr rtl="0"/>
-                      <a:r>
-                        <a:rPr lang="de-DE">
-                          <a:solidFill>
-                            <a:schemeClr val="accent6"/>
-                          </a:solidFill>
-                        </a:rPr>
-                        <a:t>75</a:t>
-                      </a:r>
-                    </a:p>
-                  </a:txBody>
-                  <a:tcPr anchor="ctr"/>
-                </a:tc>
-                <a:extLst>
-                  <a:ext uri="{0D108BD9-81ED-4DB2-BD59-A6C34878D82A}">
-                    <a16:rowId xmlns:a16="http://schemas.microsoft.com/office/drawing/2014/main" val="1626410507"/>
-                  </a:ext>
-                </a:extLst>
-              </a:tr>
-              <a:tr h="606129">
-                <a:tc>
-                  <a:txBody>
-                    <a:bodyPr/>
-                    <a:lstStyle>
-                      <a:defPPr>
-                        <a:defRPr lang="de-DE"/>
-                      </a:defPPr>
-                    </a:lstStyle>
-                    <a:p>
-                      <a:pPr rtl="0"/>
-                      <a:r>
-                        <a:rPr lang="de-DE" dirty="0">
-                          <a:solidFill>
-                            <a:schemeClr val="accent6"/>
-                          </a:solidFill>
-                        </a:rPr>
-                        <a:t>Frage-Antwort-Interaktion</a:t>
-                      </a:r>
-                    </a:p>
-                  </a:txBody>
-                  <a:tcPr anchor="ctr"/>
-                </a:tc>
-                <a:tc>
-                  <a:txBody>
-                    <a:bodyPr/>
-                    <a:lstStyle>
-                      <a:defPPr>
-                        <a:defRPr lang="de-DE"/>
-                      </a:defPPr>
-                    </a:lstStyle>
-                    <a:p>
-                      <a:pPr rtl="0"/>
-                      <a:r>
-                        <a:rPr lang="de-DE">
-                          <a:solidFill>
-                            <a:schemeClr val="accent6"/>
-                          </a:solidFill>
-                        </a:rPr>
-                        <a:t>Anzahl der Fragen</a:t>
-                      </a:r>
-                    </a:p>
-                  </a:txBody>
-                  <a:tcPr anchor="ctr"/>
-                </a:tc>
-                <a:tc>
-                  <a:txBody>
-                    <a:bodyPr/>
-                    <a:lstStyle>
-                      <a:defPPr>
-                        <a:defRPr lang="de-DE"/>
-                      </a:defPPr>
-                    </a:lstStyle>
-                    <a:p>
-                      <a:pPr rtl="0"/>
-                      <a:r>
-                        <a:rPr lang="de-DE">
-                          <a:solidFill>
-                            <a:schemeClr val="accent6"/>
-                          </a:solidFill>
-                        </a:rPr>
-                        <a:t>10</a:t>
-                      </a:r>
-                    </a:p>
-                  </a:txBody>
-                  <a:tcPr anchor="ctr"/>
-                </a:tc>
-                <a:tc>
-                  <a:txBody>
-                    <a:bodyPr/>
-                    <a:lstStyle>
-                      <a:defPPr>
-                        <a:defRPr lang="de-DE"/>
-                      </a:defPPr>
-                    </a:lstStyle>
-                    <a:p>
-                      <a:pPr rtl="0"/>
-                      <a:r>
-                        <a:rPr lang="de-DE">
-                          <a:solidFill>
-                            <a:schemeClr val="accent6"/>
-                          </a:solidFill>
-                        </a:rPr>
-                        <a:t>15</a:t>
-                      </a:r>
-                    </a:p>
-                  </a:txBody>
-                  <a:tcPr anchor="ctr"/>
-                </a:tc>
-                <a:extLst>
-                  <a:ext uri="{0D108BD9-81ED-4DB2-BD59-A6C34878D82A}">
-                    <a16:rowId xmlns:a16="http://schemas.microsoft.com/office/drawing/2014/main" val="1888116840"/>
-                  </a:ext>
-                </a:extLst>
-              </a:tr>
-              <a:tr h="606129">
-                <a:tc>
-                  <a:txBody>
-                    <a:bodyPr/>
-                    <a:lstStyle>
-                      <a:defPPr>
-                        <a:defRPr lang="de-DE"/>
-                      </a:defPPr>
-                    </a:lstStyle>
-                    <a:p>
-                      <a:pPr rtl="0"/>
-                      <a:r>
-                        <a:rPr lang="de-DE">
-                          <a:solidFill>
-                            <a:schemeClr val="accent6"/>
-                          </a:solidFill>
-                        </a:rPr>
-                        <a:t>Positives Feedback</a:t>
-                      </a:r>
-                    </a:p>
-                  </a:txBody>
-                  <a:tcPr anchor="ctr"/>
-                </a:tc>
-                <a:tc>
-                  <a:txBody>
-                    <a:bodyPr/>
-                    <a:lstStyle>
-                      <a:defPPr>
-                        <a:defRPr lang="de-DE"/>
-                      </a:defPPr>
-                    </a:lstStyle>
-                    <a:p>
-                      <a:pPr rtl="0"/>
-                      <a:r>
-                        <a:rPr lang="de-DE">
-                          <a:solidFill>
-                            <a:schemeClr val="accent6"/>
-                          </a:solidFill>
-                        </a:rPr>
-                        <a:t>Prozentsatz (%)</a:t>
-                      </a:r>
-                    </a:p>
-                  </a:txBody>
-                  <a:tcPr anchor="ctr"/>
-                </a:tc>
-                <a:tc>
-                  <a:txBody>
-                    <a:bodyPr/>
-                    <a:lstStyle>
-                      <a:defPPr>
-                        <a:defRPr lang="de-DE"/>
-                      </a:defPPr>
-                    </a:lstStyle>
-                    <a:p>
-                      <a:pPr rtl="0"/>
-                      <a:r>
-                        <a:rPr lang="de-DE">
-                          <a:solidFill>
-                            <a:schemeClr val="accent6"/>
-                          </a:solidFill>
-                        </a:rPr>
-                        <a:t>90</a:t>
-                      </a:r>
-                    </a:p>
-                  </a:txBody>
-                  <a:tcPr anchor="ctr"/>
-                </a:tc>
-                <a:tc>
-                  <a:txBody>
-                    <a:bodyPr/>
-                    <a:lstStyle>
-                      <a:defPPr>
-                        <a:defRPr lang="de-DE"/>
-                      </a:defPPr>
-                    </a:lstStyle>
-                    <a:p>
-                      <a:pPr rtl="0"/>
-                      <a:r>
-                        <a:rPr lang="de-DE">
-                          <a:solidFill>
-                            <a:schemeClr val="accent6"/>
-                          </a:solidFill>
-                        </a:rPr>
-                        <a:t>95</a:t>
-                      </a:r>
-                    </a:p>
-                  </a:txBody>
-                  <a:tcPr anchor="ctr"/>
-                </a:tc>
-                <a:extLst>
-                  <a:ext uri="{0D108BD9-81ED-4DB2-BD59-A6C34878D82A}">
-                    <a16:rowId xmlns:a16="http://schemas.microsoft.com/office/drawing/2014/main" val="4023592559"/>
-                  </a:ext>
-                </a:extLst>
-              </a:tr>
-              <a:tr h="811265">
-                <a:tc>
-                  <a:txBody>
-                    <a:bodyPr/>
-                    <a:lstStyle>
-                      <a:defPPr>
-                        <a:defRPr lang="de-DE"/>
-                      </a:defPPr>
-                    </a:lstStyle>
-                    <a:p>
-                      <a:pPr rtl="0"/>
-                      <a:r>
-                        <a:rPr lang="de-DE" dirty="0">
-                          <a:solidFill>
-                            <a:schemeClr val="accent6"/>
-                          </a:solidFill>
-                        </a:rPr>
-                        <a:t>Rate der Informationsspeicherung</a:t>
-                      </a:r>
-                    </a:p>
-                  </a:txBody>
-                  <a:tcPr anchor="ctr"/>
-                </a:tc>
-                <a:tc>
-                  <a:txBody>
-                    <a:bodyPr/>
-                    <a:lstStyle>
-                      <a:defPPr>
-                        <a:defRPr lang="de-DE"/>
-                      </a:defPPr>
-                    </a:lstStyle>
-                    <a:p>
-                      <a:pPr rtl="0"/>
-                      <a:r>
-                        <a:rPr lang="de-DE">
-                          <a:solidFill>
-                            <a:schemeClr val="accent6"/>
-                          </a:solidFill>
-                        </a:rPr>
-                        <a:t>Prozentsatz (%)</a:t>
-                      </a:r>
-                    </a:p>
-                  </a:txBody>
-                  <a:tcPr anchor="ctr"/>
-                </a:tc>
-                <a:tc>
-                  <a:txBody>
-                    <a:bodyPr/>
-                    <a:lstStyle>
-                      <a:defPPr>
-                        <a:defRPr lang="de-DE"/>
-                      </a:defPPr>
-                    </a:lstStyle>
-                    <a:p>
-                      <a:pPr rtl="0"/>
-                      <a:r>
-                        <a:rPr lang="de-DE">
-                          <a:solidFill>
-                            <a:schemeClr val="accent6"/>
-                          </a:solidFill>
-                        </a:rPr>
-                        <a:t>80</a:t>
-                      </a:r>
-                    </a:p>
-                  </a:txBody>
-                  <a:tcPr anchor="ctr"/>
-                </a:tc>
-                <a:tc>
-                  <a:txBody>
-                    <a:bodyPr/>
-                    <a:lstStyle>
-                      <a:defPPr>
-                        <a:defRPr lang="de-DE"/>
-                      </a:defPPr>
-                    </a:lstStyle>
-                    <a:p>
-                      <a:pPr rtl="0"/>
-                      <a:r>
-                        <a:rPr lang="de-DE" dirty="0">
-                          <a:solidFill>
-                            <a:schemeClr val="accent6"/>
-                          </a:solidFill>
-                        </a:rPr>
-                        <a:t>85</a:t>
-                      </a:r>
-                    </a:p>
-                  </a:txBody>
-                  <a:tcPr anchor="ctr"/>
-                </a:tc>
-                <a:extLst>
-                  <a:ext uri="{0D108BD9-81ED-4DB2-BD59-A6C34878D82A}">
-                    <a16:rowId xmlns:a16="http://schemas.microsoft.com/office/drawing/2014/main" val="2426564953"/>
-                  </a:ext>
-                </a:extLst>
-              </a:tr>
-            </a:tbl>
-          </a:graphicData>
-        </a:graphic>
-      </p:graphicFrame>
+        </p:nvSpPr>
+        <p:spPr>
+          <a:xfrm>
+            <a:off x="3460565" y="1769629"/>
+            <a:ext cx="7965460" cy="2591040"/>
+          </a:xfrm>
+        </p:spPr>
+        <p:txBody>
+          <a:bodyPr rtlCol="0">
+            <a:normAutofit/>
+          </a:bodyPr>
+          <a:lstStyle>
+            <a:defPPr>
+              <a:defRPr lang="de-DE"/>
+            </a:defPPr>
+          </a:lstStyle>
+          <a:p>
+            <a:pPr rtl="0">
+              <a:spcAft>
+                <a:spcPts val="600"/>
+              </a:spcAft>
+            </a:pPr>
+            <a:r>
+              <a:rPr lang="de-DE" sz="2000" dirty="0"/>
+              <a:t>Verzögerung der Entwicklung – Zeitmangel</a:t>
+            </a:r>
+          </a:p>
+          <a:p>
+            <a:pPr rtl="0">
+              <a:spcAft>
+                <a:spcPts val="600"/>
+              </a:spcAft>
+            </a:pPr>
+            <a:r>
+              <a:rPr lang="de-DE" sz="2000" dirty="0"/>
+              <a:t>Probleme mit API-Anbindung für GPS-Aufzeichnung und Wetter</a:t>
+            </a:r>
+          </a:p>
+          <a:p>
+            <a:pPr rtl="0">
+              <a:spcAft>
+                <a:spcPts val="600"/>
+              </a:spcAft>
+            </a:pPr>
+            <a:r>
+              <a:rPr lang="de-DE" sz="2000" dirty="0"/>
+              <a:t>Fehlender Erfahrung mit neuen Technologien</a:t>
+            </a:r>
+          </a:p>
+          <a:p>
+            <a:pPr rtl="0">
+              <a:spcAft>
+                <a:spcPts val="600"/>
+              </a:spcAft>
+            </a:pPr>
+            <a:r>
+              <a:rPr lang="de-DE" sz="2000" dirty="0"/>
+              <a:t>Limitierungen durch API-Anfragen</a:t>
+            </a:r>
+          </a:p>
+          <a:p>
+            <a:pPr rtl="0">
+              <a:spcAft>
+                <a:spcPts val="600"/>
+              </a:spcAft>
+            </a:pPr>
+            <a:r>
+              <a:rPr lang="de-DE" sz="2000" dirty="0"/>
+              <a:t>Instabiler oder unerreichbarer Datenbank-Server</a:t>
+            </a:r>
+          </a:p>
+        </p:txBody>
+      </p:sp>
       <p:sp>
         <p:nvSpPr>
-          <p:cNvPr id="2" name="Foliennummernplatzhalter 1">
+          <p:cNvPr id="23" name="Foliennummernplatzhalter 22">
             <a:extLst>
               <a:ext uri="{FF2B5EF4-FFF2-40B4-BE49-F238E27FC236}">
-                <a16:creationId xmlns:a16="http://schemas.microsoft.com/office/drawing/2014/main" id="{A913EEC9-16E3-6C86-97D0-A7EC7EA09CDA}"/>
+                <a16:creationId xmlns:a16="http://schemas.microsoft.com/office/drawing/2014/main" id="{94FF72B7-0438-3641-5939-75128934B0DF}"/>
               </a:ext>
             </a:extLst>
           </p:cNvPr>
@@ -18985,286 +19236,107 @@
             <a:pPr rtl="0"/>
             <a:fld id="{48F63A3B-78C7-47BE-AE5E-E10140E04643}" type="slidenum">
               <a:rPr lang="de-DE" smtClean="0"/>
-              <a:pPr/>
-              <a:t>10</a:t>
+              <a:pPr rtl="0"/>
+              <a:t>11</a:t>
             </a:fld>
             <a:endParaRPr lang="de-DE" dirty="0"/>
           </a:p>
         </p:txBody>
       </p:sp>
+      <p:pic>
+        <p:nvPicPr>
+          <p:cNvPr id="5" name="Grafik 4" descr="Warnung mit einfarbiger Füllung">
+            <a:extLst>
+              <a:ext uri="{FF2B5EF4-FFF2-40B4-BE49-F238E27FC236}">
+                <a16:creationId xmlns:a16="http://schemas.microsoft.com/office/drawing/2014/main" id="{C048610D-2AF2-3587-C0AE-29AB2A0660A0}"/>
+              </a:ext>
+            </a:extLst>
+          </p:cNvPr>
+          <p:cNvPicPr>
+            <a:picLocks noChangeAspect="1"/>
+          </p:cNvPicPr>
+          <p:nvPr/>
+        </p:nvPicPr>
+        <p:blipFill>
+          <a:blip r:embed="rId3">
+            <a:extLst>
+              <a:ext uri="{96DAC541-7B7A-43D3-8B79-37D633B846F1}">
+                <asvg:svgBlip xmlns:asvg="http://schemas.microsoft.com/office/drawing/2016/SVG/main" r:embed="rId4"/>
+              </a:ext>
+            </a:extLst>
+          </a:blip>
+          <a:stretch>
+            <a:fillRect/>
+          </a:stretch>
+        </p:blipFill>
+        <p:spPr>
+          <a:xfrm>
+            <a:off x="4317225" y="4857752"/>
+            <a:ext cx="1152527" cy="1152527"/>
+          </a:xfrm>
+          <a:prstGeom prst="rect">
+            <a:avLst/>
+          </a:prstGeom>
+        </p:spPr>
+      </p:pic>
+      <p:pic>
+        <p:nvPicPr>
+          <p:cNvPr id="7" name="Grafik 6" descr="Martinshorn mit einfarbiger Füllung">
+            <a:extLst>
+              <a:ext uri="{FF2B5EF4-FFF2-40B4-BE49-F238E27FC236}">
+                <a16:creationId xmlns:a16="http://schemas.microsoft.com/office/drawing/2014/main" id="{1964C23B-A4EB-0A1A-D848-1554F180671F}"/>
+              </a:ext>
+            </a:extLst>
+          </p:cNvPr>
+          <p:cNvPicPr>
+            <a:picLocks noChangeAspect="1"/>
+          </p:cNvPicPr>
+          <p:nvPr/>
+        </p:nvPicPr>
+        <p:blipFill>
+          <a:blip r:embed="rId5">
+            <a:extLst>
+              <a:ext uri="{96DAC541-7B7A-43D3-8B79-37D633B846F1}">
+                <asvg:svgBlip xmlns:asvg="http://schemas.microsoft.com/office/drawing/2016/SVG/main" r:embed="rId6"/>
+              </a:ext>
+            </a:extLst>
+          </a:blip>
+          <a:stretch>
+            <a:fillRect/>
+          </a:stretch>
+        </p:blipFill>
+        <p:spPr>
+          <a:xfrm>
+            <a:off x="7455673" y="4857751"/>
+            <a:ext cx="1152527" cy="1152527"/>
+          </a:xfrm>
+          <a:prstGeom prst="rect">
+            <a:avLst/>
+          </a:prstGeom>
+        </p:spPr>
+      </p:pic>
     </p:spTree>
     <p:extLst>
       <p:ext uri="{BB962C8B-B14F-4D97-AF65-F5344CB8AC3E}">
-        <p14:creationId xmlns:p14="http://schemas.microsoft.com/office/powerpoint/2010/main" val="3969996159"/>
+        <p14:creationId xmlns:p14="http://schemas.microsoft.com/office/powerpoint/2010/main" val="685681062"/>
       </p:ext>
     </p:extLst>
   </p:cSld>
   <p:clrMapOvr>
     <a:masterClrMapping/>
   </p:clrMapOvr>
-</p:sld>
-</file>
-
-<file path=ppt/slides/slide11.xml><?xml version="1.0" encoding="utf-8"?>
-<p:sld xmlns:a="http://schemas.openxmlformats.org/drawingml/2006/main" xmlns:r="http://schemas.openxmlformats.org/officeDocument/2006/relationships" xmlns:p="http://schemas.openxmlformats.org/presentationml/2006/main">
-  <p:cSld>
-    <p:spTree>
-      <p:nvGrpSpPr>
-        <p:cNvPr id="1" name=""/>
-        <p:cNvGrpSpPr/>
-        <p:nvPr/>
-      </p:nvGrpSpPr>
-      <p:grpSpPr>
-        <a:xfrm>
-          <a:off x="0" y="0"/>
-          <a:ext cx="0" cy="0"/>
-          <a:chOff x="0" y="0"/>
-          <a:chExt cx="0" cy="0"/>
-        </a:xfrm>
-      </p:grpSpPr>
-      <p:sp>
-        <p:nvSpPr>
-          <p:cNvPr id="3" name="Titel 2">
-            <a:extLst>
-              <a:ext uri="{FF2B5EF4-FFF2-40B4-BE49-F238E27FC236}">
-                <a16:creationId xmlns:a16="http://schemas.microsoft.com/office/drawing/2014/main" id="{38D62608-F5E4-7EC0-5EF0-4F988DDDEC5B}"/>
-              </a:ext>
-            </a:extLst>
-          </p:cNvPr>
-          <p:cNvSpPr>
-            <a:spLocks noGrp="1"/>
-          </p:cNvSpPr>
-          <p:nvPr>
-            <p:ph type="title"/>
-          </p:nvPr>
-        </p:nvSpPr>
-        <p:spPr>
-          <a:xfrm>
-            <a:off x="1550564" y="1057274"/>
-            <a:ext cx="9875463" cy="999746"/>
-          </a:xfrm>
-        </p:spPr>
-        <p:txBody>
-          <a:bodyPr rtlCol="0"/>
-          <a:lstStyle>
-            <a:defPPr>
-              <a:defRPr lang="de-DE"/>
-            </a:defPPr>
-          </a:lstStyle>
-          <a:p>
-            <a:pPr rtl="0"/>
-            <a:r>
-              <a:rPr lang="de-DE"/>
-              <a:t>Letzte Tipps und Erkenntnisse</a:t>
-            </a:r>
-          </a:p>
-        </p:txBody>
-      </p:sp>
-      <p:sp>
-        <p:nvSpPr>
-          <p:cNvPr id="12" name="Inhaltsplatzhalter 3">
-            <a:extLst>
-              <a:ext uri="{FF2B5EF4-FFF2-40B4-BE49-F238E27FC236}">
-                <a16:creationId xmlns:a16="http://schemas.microsoft.com/office/drawing/2014/main" id="{288BD9B8-D6A6-D55A-830D-4D3CC2DC3933}"/>
-              </a:ext>
-            </a:extLst>
-          </p:cNvPr>
-          <p:cNvSpPr>
-            <a:spLocks noGrp="1"/>
-          </p:cNvSpPr>
-          <p:nvPr>
-            <p:ph sz="half" idx="2"/>
-          </p:nvPr>
-        </p:nvSpPr>
-        <p:spPr>
-          <a:xfrm>
-            <a:off x="1550564" y="2303028"/>
-            <a:ext cx="5829147" cy="3961593"/>
-          </a:xfrm>
-        </p:spPr>
-        <p:txBody>
-          <a:bodyPr rtlCol="0">
-            <a:normAutofit/>
-          </a:bodyPr>
-          <a:lstStyle>
-            <a:defPPr>
-              <a:defRPr lang="de-DE"/>
-            </a:defPPr>
-          </a:lstStyle>
-          <a:p>
-            <a:pPr rtl="0"/>
-            <a:r>
-              <a:rPr lang="de-DE" dirty="0"/>
-              <a:t>Konsequentes Üben</a:t>
-            </a:r>
-          </a:p>
-          <a:p>
-            <a:pPr lvl="1" rtl="0"/>
-            <a:r>
-              <a:rPr lang="de-DE" dirty="0"/>
-              <a:t>Stärken Ihrer Vertrautheit</a:t>
-            </a:r>
-          </a:p>
-          <a:p>
-            <a:pPr rtl="0"/>
-            <a:r>
-              <a:rPr lang="de-DE" dirty="0"/>
-              <a:t>Vortragsstil verfeinern</a:t>
-            </a:r>
-          </a:p>
-          <a:p>
-            <a:pPr lvl="1" rtl="0"/>
-            <a:r>
-              <a:rPr lang="de-DE" dirty="0"/>
-              <a:t>Tempo, Tonfall und Betonung</a:t>
-            </a:r>
-          </a:p>
-          <a:p>
-            <a:pPr rtl="0"/>
-            <a:r>
-              <a:rPr lang="de-DE" dirty="0"/>
-              <a:t>Timing und Übergänge</a:t>
-            </a:r>
-          </a:p>
-          <a:p>
-            <a:pPr lvl="1" rtl="0"/>
-            <a:r>
-              <a:rPr lang="de-DE" dirty="0"/>
-              <a:t>Streben Sie einen nahtlosen, professionellen Vortrag an.</a:t>
-            </a:r>
-          </a:p>
-          <a:p>
-            <a:pPr rtl="0"/>
-            <a:r>
-              <a:rPr lang="de-DE" dirty="0"/>
-              <a:t>Übungspublikum</a:t>
-            </a:r>
-          </a:p>
-          <a:p>
-            <a:pPr lvl="1" rtl="0"/>
-            <a:r>
-              <a:rPr lang="de-DE" dirty="0"/>
-              <a:t>Bitten Sie Ihre Kollegen, zuzuhören und Feedback zu geben.</a:t>
-            </a:r>
-          </a:p>
-        </p:txBody>
-      </p:sp>
-      <p:sp>
-        <p:nvSpPr>
-          <p:cNvPr id="13" name="Inhaltsplatzhalter 7">
-            <a:extLst>
-              <a:ext uri="{FF2B5EF4-FFF2-40B4-BE49-F238E27FC236}">
-                <a16:creationId xmlns:a16="http://schemas.microsoft.com/office/drawing/2014/main" id="{0853098E-C088-D323-4BF2-987893F262F6}"/>
-              </a:ext>
-            </a:extLst>
-          </p:cNvPr>
-          <p:cNvSpPr>
-            <a:spLocks noGrp="1"/>
-          </p:cNvSpPr>
-          <p:nvPr>
-            <p:ph sz="half" idx="15"/>
-          </p:nvPr>
-        </p:nvSpPr>
-        <p:spPr>
-          <a:xfrm>
-            <a:off x="7940842" y="2303028"/>
-            <a:ext cx="3485184" cy="3961593"/>
-          </a:xfrm>
-        </p:spPr>
-        <p:txBody>
-          <a:bodyPr rtlCol="0"/>
-          <a:lstStyle>
-            <a:defPPr>
-              <a:defRPr lang="de-DE"/>
-            </a:defPPr>
-          </a:lstStyle>
-          <a:p>
-            <a:pPr rtl="0"/>
-            <a:r>
-              <a:rPr lang="de-DE" dirty="0"/>
-              <a:t>Feedback einholen</a:t>
-            </a:r>
-          </a:p>
-          <a:p>
-            <a:pPr rtl="0"/>
-            <a:r>
-              <a:rPr lang="de-DE" dirty="0"/>
-              <a:t>Über Leistung nachdenken</a:t>
-            </a:r>
-          </a:p>
-          <a:p>
-            <a:pPr rtl="0"/>
-            <a:r>
-              <a:rPr lang="de-DE" dirty="0"/>
-              <a:t>Erkunden neuer Techniken</a:t>
-            </a:r>
-          </a:p>
-          <a:p>
-            <a:pPr rtl="0"/>
-            <a:r>
-              <a:rPr lang="de-DE" dirty="0"/>
-              <a:t>Persönliche Ziele festlegen</a:t>
-            </a:r>
-          </a:p>
-          <a:p>
-            <a:pPr rtl="0"/>
-            <a:r>
-              <a:rPr lang="de-DE" dirty="0"/>
-              <a:t>Wiederholen und Anpassen</a:t>
-            </a:r>
-          </a:p>
-        </p:txBody>
-      </p:sp>
-      <p:sp>
-        <p:nvSpPr>
-          <p:cNvPr id="2" name="Foliennummernplatzhalter 1">
-            <a:extLst>
-              <a:ext uri="{FF2B5EF4-FFF2-40B4-BE49-F238E27FC236}">
-                <a16:creationId xmlns:a16="http://schemas.microsoft.com/office/drawing/2014/main" id="{1DCFAD14-1AAA-8CDA-A49B-523FD6C66F35}"/>
-              </a:ext>
-            </a:extLst>
-          </p:cNvPr>
-          <p:cNvSpPr>
-            <a:spLocks noGrp="1"/>
-          </p:cNvSpPr>
-          <p:nvPr>
-            <p:ph type="sldNum" sz="quarter" idx="10"/>
-          </p:nvPr>
-        </p:nvSpPr>
-        <p:spPr>
-          <a:xfrm>
-            <a:off x="10438475" y="457199"/>
-            <a:ext cx="987552" cy="471489"/>
-          </a:xfrm>
-        </p:spPr>
-        <p:txBody>
-          <a:bodyPr rtlCol="0"/>
-          <a:lstStyle>
-            <a:defPPr>
-              <a:defRPr lang="de-DE"/>
-            </a:defPPr>
-          </a:lstStyle>
-          <a:p>
-            <a:pPr rtl="0"/>
-            <a:fld id="{48F63A3B-78C7-47BE-AE5E-E10140E04643}" type="slidenum">
-              <a:rPr lang="de-DE" smtClean="0"/>
-              <a:pPr/>
-              <a:t>11</a:t>
-            </a:fld>
-            <a:endParaRPr lang="de-DE" dirty="0"/>
-          </a:p>
-        </p:txBody>
-      </p:sp>
-    </p:spTree>
-    <p:extLst>
-      <p:ext uri="{BB962C8B-B14F-4D97-AF65-F5344CB8AC3E}">
-        <p14:creationId xmlns:p14="http://schemas.microsoft.com/office/powerpoint/2010/main" val="2498021601"/>
-      </p:ext>
-    </p:extLst>
-  </p:cSld>
-  <p:clrMapOvr>
-    <a:masterClrMapping/>
-  </p:clrMapOvr>
+  <mc:AlternateContent xmlns:mc="http://schemas.openxmlformats.org/markup-compatibility/2006">
+    <mc:Choice xmlns:p159="http://schemas.microsoft.com/office/powerpoint/2015/09/main" Requires="p159">
+      <p:transition xmlns:p14="http://schemas.microsoft.com/office/powerpoint/2010/main" spd="slow" p14:dur="2000">
+        <p159:morph option="byObject"/>
+      </p:transition>
+    </mc:Choice>
+    <mc:Fallback>
+      <p:transition spd="slow">
+        <p:fade/>
+      </p:transition>
+    </mc:Fallback>
+  </mc:AlternateContent>
 </p:sld>
 </file>
 
@@ -19290,7 +19362,1414 @@
           <p:cNvPr id="2" name="Titel 1">
             <a:extLst>
               <a:ext uri="{FF2B5EF4-FFF2-40B4-BE49-F238E27FC236}">
-                <a16:creationId xmlns:a16="http://schemas.microsoft.com/office/drawing/2014/main" id="{4730A324-0737-F0DA-1F7D-10CBE06D7C3F}"/>
+                <a16:creationId xmlns:a16="http://schemas.microsoft.com/office/drawing/2014/main" id="{509D22C5-0C9E-B582-A8FE-B45E70A01E7F}"/>
+              </a:ext>
+            </a:extLst>
+          </p:cNvPr>
+          <p:cNvSpPr>
+            <a:spLocks noGrp="1"/>
+          </p:cNvSpPr>
+          <p:nvPr>
+            <p:ph type="ctrTitle"/>
+          </p:nvPr>
+        </p:nvSpPr>
+        <p:spPr>
+          <a:xfrm>
+            <a:off x="914400" y="849782"/>
+            <a:ext cx="4455885" cy="2727709"/>
+          </a:xfrm>
+        </p:spPr>
+        <p:txBody>
+          <a:bodyPr rtlCol="0"/>
+          <a:lstStyle>
+            <a:defPPr>
+              <a:defRPr lang="de-DE"/>
+            </a:defPPr>
+          </a:lstStyle>
+          <a:p>
+            <a:pPr rtl="0"/>
+            <a:r>
+              <a:rPr lang="de-DE" dirty="0"/>
+              <a:t>Vielen Dank</a:t>
+            </a:r>
+          </a:p>
+        </p:txBody>
+      </p:sp>
+    </p:spTree>
+    <p:extLst>
+      <p:ext uri="{BB962C8B-B14F-4D97-AF65-F5344CB8AC3E}">
+        <p14:creationId xmlns:p14="http://schemas.microsoft.com/office/powerpoint/2010/main" val="1973173046"/>
+      </p:ext>
+    </p:extLst>
+  </p:cSld>
+  <p:clrMapOvr>
+    <a:masterClrMapping/>
+  </p:clrMapOvr>
+  <mc:AlternateContent xmlns:mc="http://schemas.openxmlformats.org/markup-compatibility/2006">
+    <mc:Choice xmlns:p159="http://schemas.microsoft.com/office/powerpoint/2015/09/main" Requires="p159">
+      <p:transition xmlns:p14="http://schemas.microsoft.com/office/powerpoint/2010/main" spd="slow" p14:dur="2000">
+        <p159:morph option="byObject"/>
+      </p:transition>
+    </mc:Choice>
+    <mc:Fallback>
+      <p:transition spd="slow">
+        <p:fade/>
+      </p:transition>
+    </mc:Fallback>
+  </mc:AlternateContent>
+</p:sld>
+</file>
+
+<file path=ppt/slides/slide2.xml><?xml version="1.0" encoding="utf-8"?>
+<p:sld xmlns:a="http://schemas.openxmlformats.org/drawingml/2006/main" xmlns:r="http://schemas.openxmlformats.org/officeDocument/2006/relationships" xmlns:p="http://schemas.openxmlformats.org/presentationml/2006/main">
+  <p:cSld>
+    <p:spTree>
+      <p:nvGrpSpPr>
+        <p:cNvPr id="1" name=""/>
+        <p:cNvGrpSpPr/>
+        <p:nvPr/>
+      </p:nvGrpSpPr>
+      <p:grpSpPr>
+        <a:xfrm>
+          <a:off x="0" y="0"/>
+          <a:ext cx="0" cy="0"/>
+          <a:chOff x="0" y="0"/>
+          <a:chExt cx="0" cy="0"/>
+        </a:xfrm>
+      </p:grpSpPr>
+      <p:sp>
+        <p:nvSpPr>
+          <p:cNvPr id="18" name="Rechteck: abgerundete Ecken 17">
+            <a:extLst>
+              <a:ext uri="{FF2B5EF4-FFF2-40B4-BE49-F238E27FC236}">
+                <a16:creationId xmlns:a16="http://schemas.microsoft.com/office/drawing/2014/main" id="{B62FD93E-C809-CE46-BD98-26A337B727CE}"/>
+              </a:ext>
+            </a:extLst>
+          </p:cNvPr>
+          <p:cNvSpPr/>
+          <p:nvPr/>
+        </p:nvSpPr>
+        <p:spPr>
+          <a:xfrm>
+            <a:off x="7923805" y="1943742"/>
+            <a:ext cx="2343842" cy="4195905"/>
+          </a:xfrm>
+          <a:prstGeom prst="roundRect">
+            <a:avLst/>
+          </a:prstGeom>
+          <a:solidFill>
+            <a:schemeClr val="accent4"/>
+          </a:solidFill>
+        </p:spPr>
+        <p:style>
+          <a:lnRef idx="2">
+            <a:schemeClr val="accent1">
+              <a:shade val="15000"/>
+            </a:schemeClr>
+          </a:lnRef>
+          <a:fillRef idx="1">
+            <a:schemeClr val="accent1"/>
+          </a:fillRef>
+          <a:effectRef idx="0">
+            <a:schemeClr val="accent1"/>
+          </a:effectRef>
+          <a:fontRef idx="minor">
+            <a:schemeClr val="lt1"/>
+          </a:fontRef>
+        </p:style>
+        <p:txBody>
+          <a:bodyPr rtlCol="0" anchor="ctr"/>
+          <a:lstStyle/>
+          <a:p>
+            <a:pPr algn="ctr"/>
+            <a:endParaRPr lang="de-AT"/>
+          </a:p>
+        </p:txBody>
+      </p:sp>
+      <p:sp>
+        <p:nvSpPr>
+          <p:cNvPr id="12" name="Rechteck: abgerundete Ecken 11">
+            <a:extLst>
+              <a:ext uri="{FF2B5EF4-FFF2-40B4-BE49-F238E27FC236}">
+                <a16:creationId xmlns:a16="http://schemas.microsoft.com/office/drawing/2014/main" id="{854BB456-23D3-D880-B85A-BAB3D6710A8C}"/>
+              </a:ext>
+            </a:extLst>
+          </p:cNvPr>
+          <p:cNvSpPr/>
+          <p:nvPr/>
+        </p:nvSpPr>
+        <p:spPr>
+          <a:xfrm>
+            <a:off x="5540153" y="1943743"/>
+            <a:ext cx="2343842" cy="4195902"/>
+          </a:xfrm>
+          <a:prstGeom prst="roundRect">
+            <a:avLst/>
+          </a:prstGeom>
+        </p:spPr>
+        <p:style>
+          <a:lnRef idx="2">
+            <a:schemeClr val="accent1">
+              <a:shade val="15000"/>
+            </a:schemeClr>
+          </a:lnRef>
+          <a:fillRef idx="1">
+            <a:schemeClr val="accent1"/>
+          </a:fillRef>
+          <a:effectRef idx="0">
+            <a:schemeClr val="accent1"/>
+          </a:effectRef>
+          <a:fontRef idx="minor">
+            <a:schemeClr val="lt1"/>
+          </a:fontRef>
+        </p:style>
+        <p:txBody>
+          <a:bodyPr rtlCol="0" anchor="ctr"/>
+          <a:lstStyle/>
+          <a:p>
+            <a:pPr algn="ctr"/>
+            <a:endParaRPr lang="de-AT"/>
+          </a:p>
+        </p:txBody>
+      </p:sp>
+      <p:sp>
+        <p:nvSpPr>
+          <p:cNvPr id="11" name="Rechteck: abgerundete Ecken 10">
+            <a:extLst>
+              <a:ext uri="{FF2B5EF4-FFF2-40B4-BE49-F238E27FC236}">
+                <a16:creationId xmlns:a16="http://schemas.microsoft.com/office/drawing/2014/main" id="{1AF709AA-5857-93B9-04C9-50EE48C8346B}"/>
+              </a:ext>
+            </a:extLst>
+          </p:cNvPr>
+          <p:cNvSpPr/>
+          <p:nvPr/>
+        </p:nvSpPr>
+        <p:spPr>
+          <a:xfrm>
+            <a:off x="3156501" y="1943744"/>
+            <a:ext cx="2343842" cy="4195902"/>
+          </a:xfrm>
+          <a:prstGeom prst="roundRect">
+            <a:avLst/>
+          </a:prstGeom>
+          <a:solidFill>
+            <a:schemeClr val="accent4"/>
+          </a:solidFill>
+        </p:spPr>
+        <p:style>
+          <a:lnRef idx="2">
+            <a:schemeClr val="accent1">
+              <a:shade val="15000"/>
+            </a:schemeClr>
+          </a:lnRef>
+          <a:fillRef idx="1">
+            <a:schemeClr val="accent1"/>
+          </a:fillRef>
+          <a:effectRef idx="0">
+            <a:schemeClr val="accent1"/>
+          </a:effectRef>
+          <a:fontRef idx="minor">
+            <a:schemeClr val="lt1"/>
+          </a:fontRef>
+        </p:style>
+        <p:txBody>
+          <a:bodyPr rtlCol="0" anchor="ctr"/>
+          <a:lstStyle/>
+          <a:p>
+            <a:pPr algn="ctr"/>
+            <a:endParaRPr lang="de-AT"/>
+          </a:p>
+        </p:txBody>
+      </p:sp>
+      <p:sp>
+        <p:nvSpPr>
+          <p:cNvPr id="10" name="Rechteck: abgerundete Ecken 9">
+            <a:extLst>
+              <a:ext uri="{FF2B5EF4-FFF2-40B4-BE49-F238E27FC236}">
+                <a16:creationId xmlns:a16="http://schemas.microsoft.com/office/drawing/2014/main" id="{4507F2FE-2EE1-6F6B-55FD-F9B67886BB04}"/>
+              </a:ext>
+            </a:extLst>
+          </p:cNvPr>
+          <p:cNvSpPr/>
+          <p:nvPr/>
+        </p:nvSpPr>
+        <p:spPr>
+          <a:xfrm>
+            <a:off x="771526" y="1943745"/>
+            <a:ext cx="2343842" cy="4195902"/>
+          </a:xfrm>
+          <a:prstGeom prst="roundRect">
+            <a:avLst/>
+          </a:prstGeom>
+        </p:spPr>
+        <p:style>
+          <a:lnRef idx="2">
+            <a:schemeClr val="accent1">
+              <a:shade val="15000"/>
+            </a:schemeClr>
+          </a:lnRef>
+          <a:fillRef idx="1">
+            <a:schemeClr val="accent1"/>
+          </a:fillRef>
+          <a:effectRef idx="0">
+            <a:schemeClr val="accent1"/>
+          </a:effectRef>
+          <a:fontRef idx="minor">
+            <a:schemeClr val="lt1"/>
+          </a:fontRef>
+        </p:style>
+        <p:txBody>
+          <a:bodyPr rtlCol="0" anchor="ctr"/>
+          <a:lstStyle/>
+          <a:p>
+            <a:pPr algn="ctr"/>
+            <a:endParaRPr lang="de-AT"/>
+          </a:p>
+        </p:txBody>
+      </p:sp>
+      <p:sp>
+        <p:nvSpPr>
+          <p:cNvPr id="5" name="Inhaltsplatzhalter 2">
+            <a:extLst>
+              <a:ext uri="{FF2B5EF4-FFF2-40B4-BE49-F238E27FC236}">
+                <a16:creationId xmlns:a16="http://schemas.microsoft.com/office/drawing/2014/main" id="{D4D22962-3C7F-E480-5C35-7F4860A098E1}"/>
+              </a:ext>
+            </a:extLst>
+          </p:cNvPr>
+          <p:cNvSpPr txBox="1">
+            <a:spLocks/>
+          </p:cNvSpPr>
+          <p:nvPr/>
+        </p:nvSpPr>
+        <p:spPr>
+          <a:xfrm>
+            <a:off x="306525" y="1195018"/>
+            <a:ext cx="6583680" cy="574634"/>
+          </a:xfrm>
+          <a:prstGeom prst="rect">
+            <a:avLst/>
+          </a:prstGeom>
+        </p:spPr>
+        <p:txBody>
+          <a:bodyPr rtlCol="0"/>
+          <a:lstStyle>
+            <a:defPPr>
+              <a:defRPr lang="de-DE"/>
+            </a:defPPr>
+            <a:lvl1pPr marL="347472" indent="-347472" algn="l" defTabSz="914400" rtl="0" eaLnBrk="1" latinLnBrk="0" hangingPunct="1">
+              <a:lnSpc>
+                <a:spcPct val="100000"/>
+              </a:lnSpc>
+              <a:spcBef>
+                <a:spcPts val="360"/>
+              </a:spcBef>
+              <a:buFont typeface="Arial" panose="020B0604020202020204" pitchFamily="34" charset="0"/>
+              <a:buChar char="•"/>
+              <a:defRPr lang="de-DE" sz="2800" kern="1200">
+                <a:solidFill>
+                  <a:schemeClr val="accent6"/>
+                </a:solidFill>
+                <a:latin typeface="+mn-lt"/>
+                <a:ea typeface="+mn-ea"/>
+                <a:cs typeface="+mn-cs"/>
+              </a:defRPr>
+            </a:lvl1pPr>
+            <a:lvl2pPr marL="685800" indent="-347472" algn="l" defTabSz="914400" rtl="0" eaLnBrk="1" latinLnBrk="0" hangingPunct="1">
+              <a:lnSpc>
+                <a:spcPct val="100000"/>
+              </a:lnSpc>
+              <a:spcBef>
+                <a:spcPts val="360"/>
+              </a:spcBef>
+              <a:buFont typeface="Arial" panose="020B0604020202020204" pitchFamily="34" charset="0"/>
+              <a:buChar char="•"/>
+              <a:defRPr lang="de-DE" sz="2400" kern="1200">
+                <a:solidFill>
+                  <a:schemeClr val="accent6"/>
+                </a:solidFill>
+                <a:latin typeface="+mn-lt"/>
+                <a:ea typeface="+mn-ea"/>
+                <a:cs typeface="+mn-cs"/>
+              </a:defRPr>
+            </a:lvl2pPr>
+            <a:lvl3pPr marL="1143000" indent="-347472" algn="l" defTabSz="914400" rtl="0" eaLnBrk="1" latinLnBrk="0" hangingPunct="1">
+              <a:lnSpc>
+                <a:spcPct val="100000"/>
+              </a:lnSpc>
+              <a:spcBef>
+                <a:spcPts val="360"/>
+              </a:spcBef>
+              <a:buFont typeface="Arial" panose="020B0604020202020204" pitchFamily="34" charset="0"/>
+              <a:buChar char="•"/>
+              <a:defRPr lang="de-DE" sz="2000" kern="1200">
+                <a:solidFill>
+                  <a:schemeClr val="accent6"/>
+                </a:solidFill>
+                <a:latin typeface="+mn-lt"/>
+                <a:ea typeface="+mn-ea"/>
+                <a:cs typeface="+mn-cs"/>
+              </a:defRPr>
+            </a:lvl3pPr>
+            <a:lvl4pPr marL="1600200" indent="-347472" algn="l" defTabSz="914400" rtl="0" eaLnBrk="1" latinLnBrk="0" hangingPunct="1">
+              <a:lnSpc>
+                <a:spcPct val="100000"/>
+              </a:lnSpc>
+              <a:spcBef>
+                <a:spcPts val="360"/>
+              </a:spcBef>
+              <a:buFont typeface="Arial" panose="020B0604020202020204" pitchFamily="34" charset="0"/>
+              <a:buChar char="•"/>
+              <a:defRPr lang="de-DE" sz="1800" kern="1200">
+                <a:solidFill>
+                  <a:schemeClr val="accent6"/>
+                </a:solidFill>
+                <a:latin typeface="+mn-lt"/>
+                <a:ea typeface="+mn-ea"/>
+                <a:cs typeface="+mn-cs"/>
+              </a:defRPr>
+            </a:lvl4pPr>
+            <a:lvl5pPr marL="2057400" indent="-347472" algn="l" defTabSz="914400" rtl="0" eaLnBrk="1" latinLnBrk="0" hangingPunct="1">
+              <a:lnSpc>
+                <a:spcPct val="100000"/>
+              </a:lnSpc>
+              <a:spcBef>
+                <a:spcPts val="360"/>
+              </a:spcBef>
+              <a:buFont typeface="Arial" panose="020B0604020202020204" pitchFamily="34" charset="0"/>
+              <a:buChar char="•"/>
+              <a:defRPr lang="de-DE" sz="1800" kern="1200">
+                <a:solidFill>
+                  <a:schemeClr val="accent6"/>
+                </a:solidFill>
+                <a:latin typeface="+mn-lt"/>
+                <a:ea typeface="+mn-ea"/>
+                <a:cs typeface="+mn-cs"/>
+              </a:defRPr>
+            </a:lvl5pPr>
+            <a:lvl6pPr marL="2514600" indent="-228600" algn="l" defTabSz="914400" rtl="0" eaLnBrk="1" latinLnBrk="0" hangingPunct="1">
+              <a:lnSpc>
+                <a:spcPct val="90000"/>
+              </a:lnSpc>
+              <a:spcBef>
+                <a:spcPts val="500"/>
+              </a:spcBef>
+              <a:buFont typeface="Arial" panose="020B0604020202020204" pitchFamily="34" charset="0"/>
+              <a:buChar char="•"/>
+              <a:defRPr lang="de-DE" sz="1800" kern="1200">
+                <a:solidFill>
+                  <a:schemeClr val="tx1"/>
+                </a:solidFill>
+                <a:latin typeface="+mn-lt"/>
+                <a:ea typeface="+mn-ea"/>
+                <a:cs typeface="+mn-cs"/>
+              </a:defRPr>
+            </a:lvl6pPr>
+            <a:lvl7pPr marL="2971800" indent="-228600" algn="l" defTabSz="914400" rtl="0" eaLnBrk="1" latinLnBrk="0" hangingPunct="1">
+              <a:lnSpc>
+                <a:spcPct val="90000"/>
+              </a:lnSpc>
+              <a:spcBef>
+                <a:spcPts val="500"/>
+              </a:spcBef>
+              <a:buFont typeface="Arial" panose="020B0604020202020204" pitchFamily="34" charset="0"/>
+              <a:buChar char="•"/>
+              <a:defRPr lang="de-DE" sz="1800" kern="1200">
+                <a:solidFill>
+                  <a:schemeClr val="tx1"/>
+                </a:solidFill>
+                <a:latin typeface="+mn-lt"/>
+                <a:ea typeface="+mn-ea"/>
+                <a:cs typeface="+mn-cs"/>
+              </a:defRPr>
+            </a:lvl7pPr>
+            <a:lvl8pPr marL="3429000" indent="-228600" algn="l" defTabSz="914400" rtl="0" eaLnBrk="1" latinLnBrk="0" hangingPunct="1">
+              <a:lnSpc>
+                <a:spcPct val="90000"/>
+              </a:lnSpc>
+              <a:spcBef>
+                <a:spcPts val="500"/>
+              </a:spcBef>
+              <a:buFont typeface="Arial" panose="020B0604020202020204" pitchFamily="34" charset="0"/>
+              <a:buChar char="•"/>
+              <a:defRPr lang="de-DE" sz="1800" kern="1200">
+                <a:solidFill>
+                  <a:schemeClr val="tx1"/>
+                </a:solidFill>
+                <a:latin typeface="+mn-lt"/>
+                <a:ea typeface="+mn-ea"/>
+                <a:cs typeface="+mn-cs"/>
+              </a:defRPr>
+            </a:lvl8pPr>
+            <a:lvl9pPr marL="3886200" indent="-228600" algn="l" defTabSz="914400" rtl="0" eaLnBrk="1" latinLnBrk="0" hangingPunct="1">
+              <a:lnSpc>
+                <a:spcPct val="90000"/>
+              </a:lnSpc>
+              <a:spcBef>
+                <a:spcPts val="500"/>
+              </a:spcBef>
+              <a:buFont typeface="Arial" panose="020B0604020202020204" pitchFamily="34" charset="0"/>
+              <a:buChar char="•"/>
+              <a:defRPr lang="de-DE" sz="1800" kern="1200">
+                <a:solidFill>
+                  <a:schemeClr val="tx1"/>
+                </a:solidFill>
+                <a:latin typeface="+mn-lt"/>
+                <a:ea typeface="+mn-ea"/>
+                <a:cs typeface="+mn-cs"/>
+              </a:defRPr>
+            </a:lvl9pPr>
+          </a:lstStyle>
+          <a:p>
+            <a:pPr marL="0" indent="0">
+              <a:buNone/>
+            </a:pPr>
+            <a:r>
+              <a:rPr lang="de-AT" dirty="0"/>
+              <a:t>Projektmitglieder:</a:t>
+            </a:r>
+          </a:p>
+        </p:txBody>
+      </p:sp>
+      <p:sp>
+        <p:nvSpPr>
+          <p:cNvPr id="13" name="Ellipse 12">
+            <a:extLst>
+              <a:ext uri="{FF2B5EF4-FFF2-40B4-BE49-F238E27FC236}">
+                <a16:creationId xmlns:a16="http://schemas.microsoft.com/office/drawing/2014/main" id="{63D184FB-E364-8216-8083-DCAE8A2FE357}"/>
+              </a:ext>
+            </a:extLst>
+          </p:cNvPr>
+          <p:cNvSpPr/>
+          <p:nvPr/>
+        </p:nvSpPr>
+        <p:spPr>
+          <a:xfrm>
+            <a:off x="1228034" y="2112719"/>
+            <a:ext cx="1353847" cy="1743345"/>
+          </a:xfrm>
+          <a:prstGeom prst="ellipse">
+            <a:avLst/>
+          </a:prstGeom>
+          <a:blipFill dpi="0" rotWithShape="1">
+            <a:blip r:embed="rId3">
+              <a:extLst>
+                <a:ext uri="{28A0092B-C50C-407E-A947-70E740481C1C}">
+                  <a14:useLocalDpi xmlns:a14="http://schemas.microsoft.com/office/drawing/2010/main" val="0"/>
+                </a:ext>
+              </a:extLst>
+            </a:blip>
+            <a:srcRect/>
+            <a:stretch>
+              <a:fillRect t="-5559" r="-132" b="-13517"/>
+            </a:stretch>
+          </a:blipFill>
+        </p:spPr>
+        <p:style>
+          <a:lnRef idx="2">
+            <a:schemeClr val="accent1">
+              <a:shade val="15000"/>
+            </a:schemeClr>
+          </a:lnRef>
+          <a:fillRef idx="1">
+            <a:schemeClr val="accent1"/>
+          </a:fillRef>
+          <a:effectRef idx="0">
+            <a:schemeClr val="accent1"/>
+          </a:effectRef>
+          <a:fontRef idx="minor">
+            <a:schemeClr val="lt1"/>
+          </a:fontRef>
+        </p:style>
+        <p:txBody>
+          <a:bodyPr rtlCol="0" anchor="ctr"/>
+          <a:lstStyle/>
+          <a:p>
+            <a:pPr algn="ctr"/>
+            <a:endParaRPr lang="de-AT"/>
+          </a:p>
+        </p:txBody>
+      </p:sp>
+      <p:sp>
+        <p:nvSpPr>
+          <p:cNvPr id="14" name="Ellipse 13">
+            <a:extLst>
+              <a:ext uri="{FF2B5EF4-FFF2-40B4-BE49-F238E27FC236}">
+                <a16:creationId xmlns:a16="http://schemas.microsoft.com/office/drawing/2014/main" id="{5D74AF2B-7324-E439-8434-6A7E12B1A421}"/>
+              </a:ext>
+            </a:extLst>
+          </p:cNvPr>
+          <p:cNvSpPr/>
+          <p:nvPr/>
+        </p:nvSpPr>
+        <p:spPr>
+          <a:xfrm>
+            <a:off x="8418802" y="2112816"/>
+            <a:ext cx="1353847" cy="1743345"/>
+          </a:xfrm>
+          <a:prstGeom prst="ellipse">
+            <a:avLst/>
+          </a:prstGeom>
+          <a:blipFill dpi="0" rotWithShape="1">
+            <a:blip r:embed="rId4">
+              <a:extLst>
+                <a:ext uri="{28A0092B-C50C-407E-A947-70E740481C1C}">
+                  <a14:useLocalDpi xmlns:a14="http://schemas.microsoft.com/office/drawing/2010/main" val="0"/>
+                </a:ext>
+              </a:extLst>
+            </a:blip>
+            <a:srcRect/>
+            <a:stretch>
+              <a:fillRect t="-4386" b="-5658"/>
+            </a:stretch>
+          </a:blipFill>
+        </p:spPr>
+        <p:style>
+          <a:lnRef idx="2">
+            <a:schemeClr val="accent1">
+              <a:shade val="15000"/>
+            </a:schemeClr>
+          </a:lnRef>
+          <a:fillRef idx="1">
+            <a:schemeClr val="accent1"/>
+          </a:fillRef>
+          <a:effectRef idx="0">
+            <a:schemeClr val="accent1"/>
+          </a:effectRef>
+          <a:fontRef idx="minor">
+            <a:schemeClr val="lt1"/>
+          </a:fontRef>
+        </p:style>
+        <p:txBody>
+          <a:bodyPr rtlCol="0" anchor="ctr"/>
+          <a:lstStyle/>
+          <a:p>
+            <a:pPr algn="ctr"/>
+            <a:endParaRPr lang="de-AT" dirty="0"/>
+          </a:p>
+        </p:txBody>
+      </p:sp>
+      <p:sp>
+        <p:nvSpPr>
+          <p:cNvPr id="15" name="Ellipse 14">
+            <a:extLst>
+              <a:ext uri="{FF2B5EF4-FFF2-40B4-BE49-F238E27FC236}">
+                <a16:creationId xmlns:a16="http://schemas.microsoft.com/office/drawing/2014/main" id="{0D1AD4FE-403D-5BDD-6DD5-9F0BDBF0B1D5}"/>
+              </a:ext>
+            </a:extLst>
+          </p:cNvPr>
+          <p:cNvSpPr/>
+          <p:nvPr/>
+        </p:nvSpPr>
+        <p:spPr>
+          <a:xfrm>
+            <a:off x="6035150" y="2143039"/>
+            <a:ext cx="1353847" cy="1743345"/>
+          </a:xfrm>
+          <a:prstGeom prst="ellipse">
+            <a:avLst/>
+          </a:prstGeom>
+          <a:blipFill dpi="0" rotWithShape="1">
+            <a:blip r:embed="rId5">
+              <a:extLst>
+                <a:ext uri="{28A0092B-C50C-407E-A947-70E740481C1C}">
+                  <a14:useLocalDpi xmlns:a14="http://schemas.microsoft.com/office/drawing/2010/main" val="0"/>
+                </a:ext>
+              </a:extLst>
+            </a:blip>
+            <a:srcRect/>
+            <a:stretch>
+              <a:fillRect t="-9554" r="-5804" b="1"/>
+            </a:stretch>
+          </a:blipFill>
+        </p:spPr>
+        <p:style>
+          <a:lnRef idx="2">
+            <a:schemeClr val="accent1">
+              <a:shade val="15000"/>
+            </a:schemeClr>
+          </a:lnRef>
+          <a:fillRef idx="1">
+            <a:schemeClr val="accent1"/>
+          </a:fillRef>
+          <a:effectRef idx="0">
+            <a:schemeClr val="accent1"/>
+          </a:effectRef>
+          <a:fontRef idx="minor">
+            <a:schemeClr val="lt1"/>
+          </a:fontRef>
+        </p:style>
+        <p:txBody>
+          <a:bodyPr rtlCol="0" anchor="ctr"/>
+          <a:lstStyle/>
+          <a:p>
+            <a:pPr algn="ctr"/>
+            <a:endParaRPr lang="de-AT" dirty="0"/>
+          </a:p>
+        </p:txBody>
+      </p:sp>
+      <p:sp>
+        <p:nvSpPr>
+          <p:cNvPr id="16" name="Ellipse 15">
+            <a:extLst>
+              <a:ext uri="{FF2B5EF4-FFF2-40B4-BE49-F238E27FC236}">
+                <a16:creationId xmlns:a16="http://schemas.microsoft.com/office/drawing/2014/main" id="{E1B584DE-26E3-57CE-D6EE-93D8B5BF068C}"/>
+              </a:ext>
+            </a:extLst>
+          </p:cNvPr>
+          <p:cNvSpPr/>
+          <p:nvPr/>
+        </p:nvSpPr>
+        <p:spPr>
+          <a:xfrm>
+            <a:off x="3582269" y="2143040"/>
+            <a:ext cx="1353847" cy="1743345"/>
+          </a:xfrm>
+          <a:prstGeom prst="ellipse">
+            <a:avLst/>
+          </a:prstGeom>
+          <a:blipFill dpi="0" rotWithShape="1">
+            <a:blip r:embed="rId6">
+              <a:extLst>
+                <a:ext uri="{28A0092B-C50C-407E-A947-70E740481C1C}">
+                  <a14:useLocalDpi xmlns:a14="http://schemas.microsoft.com/office/drawing/2010/main" val="0"/>
+                </a:ext>
+              </a:extLst>
+            </a:blip>
+            <a:srcRect/>
+            <a:stretch>
+              <a:fillRect l="-823" t="-9631" r="-5057"/>
+            </a:stretch>
+          </a:blipFill>
+        </p:spPr>
+        <p:style>
+          <a:lnRef idx="2">
+            <a:schemeClr val="accent1">
+              <a:shade val="15000"/>
+            </a:schemeClr>
+          </a:lnRef>
+          <a:fillRef idx="1">
+            <a:schemeClr val="accent1"/>
+          </a:fillRef>
+          <a:effectRef idx="0">
+            <a:schemeClr val="accent1"/>
+          </a:effectRef>
+          <a:fontRef idx="minor">
+            <a:schemeClr val="lt1"/>
+          </a:fontRef>
+        </p:style>
+        <p:txBody>
+          <a:bodyPr rtlCol="0" anchor="ctr"/>
+          <a:lstStyle/>
+          <a:p>
+            <a:pPr algn="ctr"/>
+            <a:endParaRPr lang="de-AT" dirty="0"/>
+          </a:p>
+        </p:txBody>
+      </p:sp>
+      <p:sp>
+        <p:nvSpPr>
+          <p:cNvPr id="17" name="Textfeld 16">
+            <a:extLst>
+              <a:ext uri="{FF2B5EF4-FFF2-40B4-BE49-F238E27FC236}">
+                <a16:creationId xmlns:a16="http://schemas.microsoft.com/office/drawing/2014/main" id="{A0518A4B-0989-5BA8-079D-9C1A293BD428}"/>
+              </a:ext>
+            </a:extLst>
+          </p:cNvPr>
+          <p:cNvSpPr txBox="1"/>
+          <p:nvPr/>
+        </p:nvSpPr>
+        <p:spPr>
+          <a:xfrm>
+            <a:off x="898040" y="4000600"/>
+            <a:ext cx="2181916" cy="2139047"/>
+          </a:xfrm>
+          <a:prstGeom prst="rect">
+            <a:avLst/>
+          </a:prstGeom>
+          <a:noFill/>
+        </p:spPr>
+        <p:txBody>
+          <a:bodyPr wrap="square" rtlCol="0">
+            <a:spAutoFit/>
+          </a:bodyPr>
+          <a:lstStyle/>
+          <a:p>
+            <a:pPr>
+              <a:spcAft>
+                <a:spcPts val="600"/>
+              </a:spcAft>
+            </a:pPr>
+            <a:r>
+              <a:rPr lang="de-DE" b="1" u="sng" dirty="0">
+                <a:solidFill>
+                  <a:schemeClr val="bg1"/>
+                </a:solidFill>
+              </a:rPr>
+              <a:t>Eric Hölzl</a:t>
+            </a:r>
+          </a:p>
+          <a:p>
+            <a:pPr marL="85725" indent="-85725">
+              <a:spcAft>
+                <a:spcPts val="600"/>
+              </a:spcAft>
+              <a:buFont typeface="Arial" panose="020B0604020202020204" pitchFamily="34" charset="0"/>
+              <a:buChar char="•"/>
+            </a:pPr>
+            <a:r>
+              <a:rPr lang="de-DE" dirty="0">
+                <a:solidFill>
+                  <a:schemeClr val="bg1"/>
+                </a:solidFill>
+              </a:rPr>
+              <a:t>Projektleiter</a:t>
+            </a:r>
+          </a:p>
+          <a:p>
+            <a:pPr marL="85725" indent="-85725">
+              <a:spcAft>
+                <a:spcPts val="600"/>
+              </a:spcAft>
+              <a:buFont typeface="Arial" panose="020B0604020202020204" pitchFamily="34" charset="0"/>
+              <a:buChar char="•"/>
+            </a:pPr>
+            <a:r>
+              <a:rPr lang="de-DE" dirty="0">
+                <a:solidFill>
+                  <a:schemeClr val="bg1"/>
+                </a:solidFill>
+              </a:rPr>
+              <a:t>Lead-QS</a:t>
+            </a:r>
+          </a:p>
+          <a:p>
+            <a:pPr marL="85725" indent="-85725">
+              <a:spcAft>
+                <a:spcPts val="600"/>
+              </a:spcAft>
+              <a:buFont typeface="Arial" panose="020B0604020202020204" pitchFamily="34" charset="0"/>
+              <a:buChar char="•"/>
+            </a:pPr>
+            <a:r>
+              <a:rPr lang="de-DE" dirty="0">
+                <a:solidFill>
+                  <a:schemeClr val="bg1"/>
+                </a:solidFill>
+              </a:rPr>
+              <a:t>Backend-Lead</a:t>
+            </a:r>
+          </a:p>
+          <a:p>
+            <a:pPr marL="85725" indent="-85725">
+              <a:spcAft>
+                <a:spcPts val="600"/>
+              </a:spcAft>
+              <a:buFont typeface="Arial" panose="020B0604020202020204" pitchFamily="34" charset="0"/>
+              <a:buChar char="•"/>
+            </a:pPr>
+            <a:r>
+              <a:rPr lang="de-DE" dirty="0">
+                <a:solidFill>
+                  <a:schemeClr val="bg1"/>
+                </a:solidFill>
+              </a:rPr>
+              <a:t>Implementierung</a:t>
+            </a:r>
+          </a:p>
+          <a:p>
+            <a:pPr marL="85725" indent="-85725">
+              <a:spcAft>
+                <a:spcPts val="600"/>
+              </a:spcAft>
+              <a:buFont typeface="Arial" panose="020B0604020202020204" pitchFamily="34" charset="0"/>
+              <a:buChar char="•"/>
+            </a:pPr>
+            <a:r>
+              <a:rPr lang="de-DE" dirty="0">
+                <a:solidFill>
+                  <a:schemeClr val="bg1"/>
+                </a:solidFill>
+              </a:rPr>
+              <a:t>Testen</a:t>
+            </a:r>
+            <a:endParaRPr lang="de-AT" dirty="0">
+              <a:solidFill>
+                <a:schemeClr val="bg1"/>
+              </a:solidFill>
+            </a:endParaRPr>
+          </a:p>
+        </p:txBody>
+      </p:sp>
+      <p:sp>
+        <p:nvSpPr>
+          <p:cNvPr id="20" name="Textfeld 19">
+            <a:extLst>
+              <a:ext uri="{FF2B5EF4-FFF2-40B4-BE49-F238E27FC236}">
+                <a16:creationId xmlns:a16="http://schemas.microsoft.com/office/drawing/2014/main" id="{7A31AD48-F972-9F62-0273-159340A504BF}"/>
+              </a:ext>
+            </a:extLst>
+          </p:cNvPr>
+          <p:cNvSpPr txBox="1"/>
+          <p:nvPr/>
+        </p:nvSpPr>
+        <p:spPr>
+          <a:xfrm>
+            <a:off x="3294959" y="4025038"/>
+            <a:ext cx="2248591" cy="1431161"/>
+          </a:xfrm>
+          <a:prstGeom prst="rect">
+            <a:avLst/>
+          </a:prstGeom>
+          <a:noFill/>
+        </p:spPr>
+        <p:txBody>
+          <a:bodyPr wrap="square" rtlCol="0">
+            <a:spAutoFit/>
+          </a:bodyPr>
+          <a:lstStyle/>
+          <a:p>
+            <a:pPr>
+              <a:spcAft>
+                <a:spcPts val="600"/>
+              </a:spcAft>
+            </a:pPr>
+            <a:r>
+              <a:rPr lang="de-DE" b="1" u="sng" dirty="0">
+                <a:solidFill>
+                  <a:schemeClr val="bg1"/>
+                </a:solidFill>
+              </a:rPr>
+              <a:t>Christof Prevedel</a:t>
+            </a:r>
+          </a:p>
+          <a:p>
+            <a:pPr marL="85725" indent="-85725">
+              <a:spcAft>
+                <a:spcPts val="600"/>
+              </a:spcAft>
+              <a:buFont typeface="Arial" panose="020B0604020202020204" pitchFamily="34" charset="0"/>
+              <a:buChar char="•"/>
+            </a:pPr>
+            <a:r>
+              <a:rPr lang="de-DE" dirty="0">
+                <a:solidFill>
+                  <a:schemeClr val="bg1"/>
+                </a:solidFill>
+              </a:rPr>
+              <a:t>Grafik und Design</a:t>
+            </a:r>
+          </a:p>
+          <a:p>
+            <a:pPr marL="85725" indent="-85725">
+              <a:spcAft>
+                <a:spcPts val="600"/>
+              </a:spcAft>
+              <a:buFont typeface="Arial" panose="020B0604020202020204" pitchFamily="34" charset="0"/>
+              <a:buChar char="•"/>
+            </a:pPr>
+            <a:r>
+              <a:rPr lang="de-DE" dirty="0">
+                <a:solidFill>
+                  <a:schemeClr val="bg1"/>
+                </a:solidFill>
+              </a:rPr>
+              <a:t>Implementierung</a:t>
+            </a:r>
+          </a:p>
+          <a:p>
+            <a:pPr marL="85725" indent="-85725">
+              <a:spcAft>
+                <a:spcPts val="600"/>
+              </a:spcAft>
+              <a:buFont typeface="Arial" panose="020B0604020202020204" pitchFamily="34" charset="0"/>
+              <a:buChar char="•"/>
+            </a:pPr>
+            <a:r>
+              <a:rPr lang="de-DE" dirty="0">
+                <a:solidFill>
+                  <a:schemeClr val="bg1"/>
+                </a:solidFill>
+              </a:rPr>
+              <a:t>Testen </a:t>
+            </a:r>
+            <a:endParaRPr lang="de-AT" dirty="0">
+              <a:solidFill>
+                <a:schemeClr val="bg1"/>
+              </a:solidFill>
+            </a:endParaRPr>
+          </a:p>
+        </p:txBody>
+      </p:sp>
+      <p:sp>
+        <p:nvSpPr>
+          <p:cNvPr id="21" name="Textfeld 20">
+            <a:extLst>
+              <a:ext uri="{FF2B5EF4-FFF2-40B4-BE49-F238E27FC236}">
+                <a16:creationId xmlns:a16="http://schemas.microsoft.com/office/drawing/2014/main" id="{D935526B-BD72-E642-FC9A-48E6B1CA3A30}"/>
+              </a:ext>
+            </a:extLst>
+          </p:cNvPr>
+          <p:cNvSpPr txBox="1"/>
+          <p:nvPr/>
+        </p:nvSpPr>
+        <p:spPr>
+          <a:xfrm>
+            <a:off x="5724638" y="4021000"/>
+            <a:ext cx="2066925" cy="1431161"/>
+          </a:xfrm>
+          <a:prstGeom prst="rect">
+            <a:avLst/>
+          </a:prstGeom>
+          <a:noFill/>
+        </p:spPr>
+        <p:txBody>
+          <a:bodyPr wrap="square" rtlCol="0">
+            <a:spAutoFit/>
+          </a:bodyPr>
+          <a:lstStyle/>
+          <a:p>
+            <a:pPr>
+              <a:spcAft>
+                <a:spcPts val="600"/>
+              </a:spcAft>
+            </a:pPr>
+            <a:r>
+              <a:rPr lang="de-DE" b="1" u="sng" dirty="0">
+                <a:solidFill>
+                  <a:schemeClr val="bg1"/>
+                </a:solidFill>
+              </a:rPr>
+              <a:t>Niklas </a:t>
+            </a:r>
+            <a:r>
+              <a:rPr lang="de-DE" b="1" u="sng" dirty="0" err="1">
+                <a:solidFill>
+                  <a:schemeClr val="bg1"/>
+                </a:solidFill>
+              </a:rPr>
+              <a:t>Raindl</a:t>
+            </a:r>
+            <a:endParaRPr lang="de-DE" b="1" u="sng" dirty="0">
+              <a:solidFill>
+                <a:schemeClr val="bg1"/>
+              </a:solidFill>
+            </a:endParaRPr>
+          </a:p>
+          <a:p>
+            <a:pPr marL="85725" indent="-85725">
+              <a:spcAft>
+                <a:spcPts val="600"/>
+              </a:spcAft>
+              <a:buFont typeface="Arial" panose="020B0604020202020204" pitchFamily="34" charset="0"/>
+              <a:buChar char="•"/>
+            </a:pPr>
+            <a:r>
+              <a:rPr lang="de-DE" dirty="0">
+                <a:solidFill>
+                  <a:schemeClr val="bg1"/>
+                </a:solidFill>
+              </a:rPr>
+              <a:t>Frontend-Lead</a:t>
+            </a:r>
+          </a:p>
+          <a:p>
+            <a:pPr marL="85725" indent="-85725">
+              <a:spcAft>
+                <a:spcPts val="600"/>
+              </a:spcAft>
+              <a:buFont typeface="Arial" panose="020B0604020202020204" pitchFamily="34" charset="0"/>
+              <a:buChar char="•"/>
+            </a:pPr>
+            <a:r>
+              <a:rPr lang="de-DE" dirty="0">
+                <a:solidFill>
+                  <a:schemeClr val="bg1"/>
+                </a:solidFill>
+              </a:rPr>
+              <a:t>Implementierung</a:t>
+            </a:r>
+          </a:p>
+          <a:p>
+            <a:pPr marL="85725" indent="-85725">
+              <a:spcAft>
+                <a:spcPts val="600"/>
+              </a:spcAft>
+              <a:buFont typeface="Arial" panose="020B0604020202020204" pitchFamily="34" charset="0"/>
+              <a:buChar char="•"/>
+            </a:pPr>
+            <a:r>
+              <a:rPr lang="de-DE" dirty="0">
+                <a:solidFill>
+                  <a:schemeClr val="bg1"/>
+                </a:solidFill>
+              </a:rPr>
+              <a:t>Testen </a:t>
+            </a:r>
+            <a:endParaRPr lang="de-AT" dirty="0">
+              <a:solidFill>
+                <a:schemeClr val="bg1"/>
+              </a:solidFill>
+            </a:endParaRPr>
+          </a:p>
+        </p:txBody>
+      </p:sp>
+      <p:sp>
+        <p:nvSpPr>
+          <p:cNvPr id="22" name="Textfeld 21">
+            <a:extLst>
+              <a:ext uri="{FF2B5EF4-FFF2-40B4-BE49-F238E27FC236}">
+                <a16:creationId xmlns:a16="http://schemas.microsoft.com/office/drawing/2014/main" id="{3B1A9844-E0B4-E70C-0B20-A6BD511519D4}"/>
+              </a:ext>
+            </a:extLst>
+          </p:cNvPr>
+          <p:cNvSpPr txBox="1"/>
+          <p:nvPr/>
+        </p:nvSpPr>
+        <p:spPr>
+          <a:xfrm>
+            <a:off x="8104893" y="3996563"/>
+            <a:ext cx="2343841" cy="1431161"/>
+          </a:xfrm>
+          <a:prstGeom prst="rect">
+            <a:avLst/>
+          </a:prstGeom>
+          <a:noFill/>
+        </p:spPr>
+        <p:txBody>
+          <a:bodyPr wrap="square" rtlCol="0">
+            <a:spAutoFit/>
+          </a:bodyPr>
+          <a:lstStyle/>
+          <a:p>
+            <a:pPr>
+              <a:spcAft>
+                <a:spcPts val="600"/>
+              </a:spcAft>
+            </a:pPr>
+            <a:r>
+              <a:rPr lang="de-DE" b="1" u="sng" dirty="0">
+                <a:solidFill>
+                  <a:schemeClr val="bg1"/>
+                </a:solidFill>
+              </a:rPr>
+              <a:t>Daniel </a:t>
+            </a:r>
+            <a:r>
+              <a:rPr lang="de-DE" b="1" u="sng" dirty="0" err="1">
+                <a:solidFill>
+                  <a:schemeClr val="bg1"/>
+                </a:solidFill>
+              </a:rPr>
+              <a:t>Steffelbauer</a:t>
+            </a:r>
+            <a:endParaRPr lang="de-DE" b="1" u="sng" dirty="0">
+              <a:solidFill>
+                <a:schemeClr val="bg1"/>
+              </a:solidFill>
+            </a:endParaRPr>
+          </a:p>
+          <a:p>
+            <a:pPr marL="85725" indent="-85725">
+              <a:spcAft>
+                <a:spcPts val="600"/>
+              </a:spcAft>
+              <a:buFont typeface="Arial" panose="020B0604020202020204" pitchFamily="34" charset="0"/>
+              <a:buChar char="•"/>
+            </a:pPr>
+            <a:r>
+              <a:rPr lang="de-DE" dirty="0">
+                <a:solidFill>
+                  <a:schemeClr val="bg1"/>
+                </a:solidFill>
+              </a:rPr>
+              <a:t>Protokollführer</a:t>
+            </a:r>
+          </a:p>
+          <a:p>
+            <a:pPr marL="85725" indent="-85725">
+              <a:spcAft>
+                <a:spcPts val="600"/>
+              </a:spcAft>
+              <a:buFont typeface="Arial" panose="020B0604020202020204" pitchFamily="34" charset="0"/>
+              <a:buChar char="•"/>
+            </a:pPr>
+            <a:r>
+              <a:rPr lang="de-DE" dirty="0">
+                <a:solidFill>
+                  <a:schemeClr val="bg1"/>
+                </a:solidFill>
+              </a:rPr>
+              <a:t>Implementierung</a:t>
+            </a:r>
+          </a:p>
+          <a:p>
+            <a:pPr marL="85725" indent="-85725">
+              <a:spcAft>
+                <a:spcPts val="600"/>
+              </a:spcAft>
+              <a:buFont typeface="Arial" panose="020B0604020202020204" pitchFamily="34" charset="0"/>
+              <a:buChar char="•"/>
+            </a:pPr>
+            <a:r>
+              <a:rPr lang="de-DE" dirty="0">
+                <a:solidFill>
+                  <a:schemeClr val="bg1"/>
+                </a:solidFill>
+              </a:rPr>
+              <a:t>Lead-Tester </a:t>
+            </a:r>
+            <a:endParaRPr lang="de-AT" dirty="0">
+              <a:solidFill>
+                <a:schemeClr val="bg1"/>
+              </a:solidFill>
+            </a:endParaRPr>
+          </a:p>
+        </p:txBody>
+      </p:sp>
+      <p:sp>
+        <p:nvSpPr>
+          <p:cNvPr id="6" name="Titel 1">
+            <a:extLst>
+              <a:ext uri="{FF2B5EF4-FFF2-40B4-BE49-F238E27FC236}">
+                <a16:creationId xmlns:a16="http://schemas.microsoft.com/office/drawing/2014/main" id="{13021072-4A77-DB4D-DF41-58EADB7DA94E}"/>
+              </a:ext>
+            </a:extLst>
+          </p:cNvPr>
+          <p:cNvSpPr txBox="1">
+            <a:spLocks/>
+          </p:cNvSpPr>
+          <p:nvPr/>
+        </p:nvSpPr>
+        <p:spPr>
+          <a:xfrm>
+            <a:off x="240543" y="200325"/>
+            <a:ext cx="6583680" cy="1531357"/>
+          </a:xfrm>
+          <a:prstGeom prst="rect">
+            <a:avLst/>
+          </a:prstGeom>
+        </p:spPr>
+        <p:txBody>
+          <a:bodyPr vert="horz" lIns="91440" tIns="0" rIns="91440" bIns="0" rtlCol="0" anchor="ctr" anchorCtr="0">
+            <a:noAutofit/>
+          </a:bodyPr>
+          <a:lstStyle>
+            <a:defPPr>
+              <a:defRPr lang="de-DE"/>
+            </a:defPPr>
+            <a:lvl1pPr algn="l" defTabSz="914400" rtl="0" eaLnBrk="1" latinLnBrk="0" hangingPunct="1">
+              <a:lnSpc>
+                <a:spcPct val="100000"/>
+              </a:lnSpc>
+              <a:spcBef>
+                <a:spcPct val="0"/>
+              </a:spcBef>
+              <a:buNone/>
+              <a:defRPr lang="de-DE" sz="3600" b="1" kern="1200" cap="all" baseline="0">
+                <a:solidFill>
+                  <a:schemeClr val="accent6"/>
+                </a:solidFill>
+                <a:latin typeface="+mj-lt"/>
+                <a:ea typeface="+mj-ea"/>
+                <a:cs typeface="+mj-cs"/>
+              </a:defRPr>
+            </a:lvl1pPr>
+          </a:lstStyle>
+          <a:p>
+            <a:r>
+              <a:rPr lang="de-AT" dirty="0"/>
+              <a:t>Team &amp; Rollen</a:t>
+            </a:r>
+          </a:p>
+        </p:txBody>
+      </p:sp>
+    </p:spTree>
+    <p:extLst>
+      <p:ext uri="{BB962C8B-B14F-4D97-AF65-F5344CB8AC3E}">
+        <p14:creationId xmlns:p14="http://schemas.microsoft.com/office/powerpoint/2010/main" val="2906491918"/>
+      </p:ext>
+    </p:extLst>
+  </p:cSld>
+  <p:clrMapOvr>
+    <a:masterClrMapping/>
+  </p:clrMapOvr>
+  <mc:AlternateContent xmlns:mc="http://schemas.openxmlformats.org/markup-compatibility/2006">
+    <mc:Choice xmlns:p159="http://schemas.microsoft.com/office/powerpoint/2015/09/main" Requires="p159">
+      <p:transition xmlns:p14="http://schemas.microsoft.com/office/powerpoint/2010/main" spd="slow" p14:dur="2000">
+        <p159:morph option="byObject"/>
+      </p:transition>
+    </mc:Choice>
+    <mc:Fallback>
+      <p:transition spd="slow">
+        <p:fade/>
+      </p:transition>
+    </mc:Fallback>
+  </mc:AlternateContent>
+</p:sld>
+</file>
+
+<file path=ppt/slides/slide3.xml><?xml version="1.0" encoding="utf-8"?>
+<p:sld xmlns:a="http://schemas.openxmlformats.org/drawingml/2006/main" xmlns:r="http://schemas.openxmlformats.org/officeDocument/2006/relationships" xmlns:p="http://schemas.openxmlformats.org/presentationml/2006/main">
+  <p:cSld>
+    <p:spTree>
+      <p:nvGrpSpPr>
+        <p:cNvPr id="1" name=""/>
+        <p:cNvGrpSpPr/>
+        <p:nvPr/>
+      </p:nvGrpSpPr>
+      <p:grpSpPr>
+        <a:xfrm>
+          <a:off x="0" y="0"/>
+          <a:ext cx="0" cy="0"/>
+          <a:chOff x="0" y="0"/>
+          <a:chExt cx="0" cy="0"/>
+        </a:xfrm>
+      </p:grpSpPr>
+      <p:sp>
+        <p:nvSpPr>
+          <p:cNvPr id="4" name="Foliennummernplatzhalter 3">
+            <a:extLst>
+              <a:ext uri="{FF2B5EF4-FFF2-40B4-BE49-F238E27FC236}">
+                <a16:creationId xmlns:a16="http://schemas.microsoft.com/office/drawing/2014/main" id="{18D5CFA2-4E67-F157-5FFD-A246307D41F7}"/>
+              </a:ext>
+            </a:extLst>
+          </p:cNvPr>
+          <p:cNvSpPr>
+            <a:spLocks noGrp="1"/>
+          </p:cNvSpPr>
+          <p:nvPr>
+            <p:ph type="sldNum" sz="quarter" idx="10"/>
+          </p:nvPr>
+        </p:nvSpPr>
+        <p:spPr>
+          <a:xfrm>
+            <a:off x="10206037" y="433386"/>
+            <a:ext cx="1067589" cy="471489"/>
+          </a:xfrm>
+        </p:spPr>
+        <p:txBody>
+          <a:bodyPr rtlCol="0"/>
+          <a:lstStyle>
+            <a:defPPr>
+              <a:defRPr lang="de-DE"/>
+            </a:defPPr>
+          </a:lstStyle>
+          <a:p>
+            <a:pPr rtl="0"/>
+            <a:fld id="{48F63A3B-78C7-47BE-AE5E-E10140E04643}" type="slidenum">
+              <a:rPr lang="de-DE" smtClean="0"/>
+              <a:pPr rtl="0"/>
+              <a:t>3</a:t>
+            </a:fld>
+            <a:endParaRPr lang="de-DE" dirty="0"/>
+          </a:p>
+        </p:txBody>
+      </p:sp>
+      <p:sp>
+        <p:nvSpPr>
+          <p:cNvPr id="24" name="Inhaltsplatzhalter 23">
+            <a:extLst>
+              <a:ext uri="{FF2B5EF4-FFF2-40B4-BE49-F238E27FC236}">
+                <a16:creationId xmlns:a16="http://schemas.microsoft.com/office/drawing/2014/main" id="{5715B78F-165E-AF73-AD66-240015E2AF58}"/>
+              </a:ext>
+            </a:extLst>
+          </p:cNvPr>
+          <p:cNvSpPr>
+            <a:spLocks noGrp="1"/>
+          </p:cNvSpPr>
+          <p:nvPr>
+            <p:ph idx="1"/>
+          </p:nvPr>
+        </p:nvSpPr>
+        <p:spPr>
+          <a:xfrm>
+            <a:off x="914399" y="2298382"/>
+            <a:ext cx="6772275" cy="3537585"/>
+          </a:xfrm>
+        </p:spPr>
+        <p:txBody>
+          <a:bodyPr>
+            <a:normAutofit/>
+          </a:bodyPr>
+          <a:lstStyle/>
+          <a:p>
+            <a:pPr marL="342900" indent="-342900">
+              <a:buFont typeface="Arial" panose="020B0604020202020204" pitchFamily="34" charset="0"/>
+              <a:buChar char="•"/>
+            </a:pPr>
+            <a:r>
+              <a:rPr lang="de-DE" dirty="0"/>
+              <a:t>Protokolle leicht zu verlieren</a:t>
+            </a:r>
+          </a:p>
+          <a:p>
+            <a:pPr marL="342900" indent="-342900">
+              <a:buFont typeface="Arial" panose="020B0604020202020204" pitchFamily="34" charset="0"/>
+              <a:buChar char="•"/>
+            </a:pPr>
+            <a:r>
+              <a:rPr lang="de-DE" dirty="0"/>
+              <a:t>Nachtragen kann vergessen werden</a:t>
+            </a:r>
+          </a:p>
+          <a:p>
+            <a:pPr marL="342900" indent="-342900">
+              <a:spcAft>
+                <a:spcPts val="1200"/>
+              </a:spcAft>
+              <a:buFont typeface="Arial" panose="020B0604020202020204" pitchFamily="34" charset="0"/>
+              <a:buChar char="•"/>
+            </a:pPr>
+            <a:r>
+              <a:rPr lang="de-DE" dirty="0"/>
+              <a:t>Protokolle umständlich auszufüllen</a:t>
+            </a:r>
+          </a:p>
+          <a:p>
+            <a:pPr marL="342900" indent="-342900">
+              <a:buFont typeface="Arial" panose="020B0604020202020204" pitchFamily="34" charset="0"/>
+              <a:buChar char="•"/>
+            </a:pPr>
+            <a:r>
+              <a:rPr lang="de-DE" dirty="0"/>
+              <a:t>Führerscheinprotokolle</a:t>
+            </a:r>
+          </a:p>
+          <a:p>
+            <a:pPr marL="342900" indent="-342900">
+              <a:buFont typeface="Arial" panose="020B0604020202020204" pitchFamily="34" charset="0"/>
+              <a:buChar char="•"/>
+            </a:pPr>
+            <a:r>
+              <a:rPr lang="de-DE" dirty="0"/>
+              <a:t>Berufsfahrten </a:t>
+            </a:r>
+          </a:p>
+          <a:p>
+            <a:pPr marL="342900" indent="-342900">
+              <a:buFont typeface="Arial" panose="020B0604020202020204" pitchFamily="34" charset="0"/>
+              <a:buChar char="•"/>
+            </a:pPr>
+            <a:r>
+              <a:rPr lang="de-DE" dirty="0"/>
+              <a:t>Private Zwecke</a:t>
+            </a:r>
+          </a:p>
+          <a:p>
+            <a:pPr marL="342900" indent="-342900">
+              <a:buFont typeface="Arial" panose="020B0604020202020204" pitchFamily="34" charset="0"/>
+              <a:buChar char="•"/>
+            </a:pPr>
+            <a:endParaRPr lang="de-AT" dirty="0"/>
+          </a:p>
+        </p:txBody>
+      </p:sp>
+      <p:sp>
+        <p:nvSpPr>
+          <p:cNvPr id="26" name="Titel 25">
+            <a:extLst>
+              <a:ext uri="{FF2B5EF4-FFF2-40B4-BE49-F238E27FC236}">
+                <a16:creationId xmlns:a16="http://schemas.microsoft.com/office/drawing/2014/main" id="{A410FF5C-07C0-40F7-7BCC-D09601EF4AEB}"/>
               </a:ext>
             </a:extLst>
           </p:cNvPr>
@@ -19303,8 +20782,126 @@
         </p:nvSpPr>
         <p:spPr>
           <a:xfrm>
-            <a:off x="914400" y="1057274"/>
-            <a:ext cx="10511627" cy="1012785"/>
+            <a:off x="765974" y="447673"/>
+            <a:ext cx="6583680" cy="1531357"/>
+          </a:xfrm>
+        </p:spPr>
+        <p:txBody>
+          <a:bodyPr/>
+          <a:lstStyle/>
+          <a:p>
+            <a:r>
+              <a:rPr lang="de-DE" dirty="0"/>
+              <a:t>Hintergrund</a:t>
+            </a:r>
+            <a:endParaRPr lang="de-AT" dirty="0"/>
+          </a:p>
+        </p:txBody>
+      </p:sp>
+      <p:pic>
+        <p:nvPicPr>
+          <p:cNvPr id="28" name="Grafik 27" descr="Dokument mit einfarbiger Füllung">
+            <a:extLst>
+              <a:ext uri="{FF2B5EF4-FFF2-40B4-BE49-F238E27FC236}">
+                <a16:creationId xmlns:a16="http://schemas.microsoft.com/office/drawing/2014/main" id="{CDA5606E-F6B8-5F4C-8DC0-9C3BCCB32B98}"/>
+              </a:ext>
+            </a:extLst>
+          </p:cNvPr>
+          <p:cNvPicPr>
+            <a:picLocks noChangeAspect="1"/>
+          </p:cNvPicPr>
+          <p:nvPr/>
+        </p:nvPicPr>
+        <p:blipFill>
+          <a:blip r:embed="rId3">
+            <a:extLst>
+              <a:ext uri="{96DAC541-7B7A-43D3-8B79-37D633B846F1}">
+                <asvg:svgBlip xmlns:asvg="http://schemas.microsoft.com/office/drawing/2016/SVG/main" r:embed="rId4"/>
+              </a:ext>
+            </a:extLst>
+          </a:blip>
+          <a:stretch>
+            <a:fillRect/>
+          </a:stretch>
+        </p:blipFill>
+        <p:spPr>
+          <a:xfrm>
+            <a:off x="5000625" y="4419599"/>
+            <a:ext cx="1257300" cy="1257300"/>
+          </a:xfrm>
+          <a:prstGeom prst="rect">
+            <a:avLst/>
+          </a:prstGeom>
+        </p:spPr>
+      </p:pic>
+    </p:spTree>
+    <p:extLst>
+      <p:ext uri="{BB962C8B-B14F-4D97-AF65-F5344CB8AC3E}">
+        <p14:creationId xmlns:p14="http://schemas.microsoft.com/office/powerpoint/2010/main" val="3913219759"/>
+      </p:ext>
+    </p:extLst>
+  </p:cSld>
+  <p:clrMapOvr>
+    <a:masterClrMapping/>
+  </p:clrMapOvr>
+  <mc:AlternateContent xmlns:mc="http://schemas.openxmlformats.org/markup-compatibility/2006">
+    <mc:Choice xmlns:p159="http://schemas.microsoft.com/office/powerpoint/2015/09/main" Requires="p159">
+      <p:transition xmlns:p14="http://schemas.microsoft.com/office/powerpoint/2010/main" spd="slow" p14:dur="2000">
+        <p159:morph option="byObject"/>
+      </p:transition>
+    </mc:Choice>
+    <mc:Fallback>
+      <p:transition spd="slow">
+        <p:fade/>
+      </p:transition>
+    </mc:Fallback>
+  </mc:AlternateContent>
+</p:sld>
+</file>
+
+<file path=ppt/slides/slide4.xml><?xml version="1.0" encoding="utf-8"?>
+<p:sld xmlns:a="http://schemas.openxmlformats.org/drawingml/2006/main" xmlns:r="http://schemas.openxmlformats.org/officeDocument/2006/relationships" xmlns:p="http://schemas.openxmlformats.org/presentationml/2006/main">
+  <p:cSld>
+    <p:spTree>
+      <p:nvGrpSpPr>
+        <p:cNvPr id="1" name="">
+          <a:extLst>
+            <a:ext uri="{FF2B5EF4-FFF2-40B4-BE49-F238E27FC236}">
+              <a16:creationId xmlns:a16="http://schemas.microsoft.com/office/drawing/2014/main" id="{2C990DE1-32A6-F74E-AAFE-68C8629B9DAA}"/>
+            </a:ext>
+          </a:extLst>
+        </p:cNvPr>
+        <p:cNvGrpSpPr/>
+        <p:nvPr/>
+      </p:nvGrpSpPr>
+      <p:grpSpPr>
+        <a:xfrm>
+          <a:off x="0" y="0"/>
+          <a:ext cx="0" cy="0"/>
+          <a:chOff x="0" y="0"/>
+          <a:chExt cx="0" cy="0"/>
+        </a:xfrm>
+      </p:grpSpPr>
+      <p:sp>
+        <p:nvSpPr>
+          <p:cNvPr id="3" name="Titel 2">
+            <a:extLst>
+              <a:ext uri="{FF2B5EF4-FFF2-40B4-BE49-F238E27FC236}">
+                <a16:creationId xmlns:a16="http://schemas.microsoft.com/office/drawing/2014/main" id="{D6C0BB41-1534-18BC-17F5-956EDCECE968}"/>
+              </a:ext>
+            </a:extLst>
+          </p:cNvPr>
+          <p:cNvSpPr>
+            <a:spLocks noGrp="1"/>
+          </p:cNvSpPr>
+          <p:nvPr>
+            <p:ph type="title"/>
+          </p:nvPr>
+        </p:nvSpPr>
+        <p:spPr>
+          <a:xfrm>
+            <a:off x="1550564" y="1057274"/>
+            <a:ext cx="9875463" cy="999746"/>
           </a:xfrm>
         </p:spPr>
         <p:txBody>
@@ -19317,557 +20914,968 @@
           <a:p>
             <a:pPr rtl="0"/>
             <a:r>
-              <a:rPr lang="de-DE" dirty="0"/>
-              <a:t>Metriken zum Einsatz von Referenten</a:t>
+              <a:rPr lang="de-DE" sz="4000" dirty="0"/>
+              <a:t>Ziele</a:t>
             </a:r>
+            <a:endParaRPr lang="de-DE" dirty="0"/>
           </a:p>
         </p:txBody>
       </p:sp>
-      <p:graphicFrame>
-        <p:nvGraphicFramePr>
-          <p:cNvPr id="5" name="Inhaltsplatzhalter 4">
+      <p:sp>
+        <p:nvSpPr>
+          <p:cNvPr id="12" name="Inhaltsplatzhalter 3">
             <a:extLst>
               <a:ext uri="{FF2B5EF4-FFF2-40B4-BE49-F238E27FC236}">
-                <a16:creationId xmlns:a16="http://schemas.microsoft.com/office/drawing/2014/main" id="{AC0C7FF8-9CAF-6C67-C1E5-AF40401D0B3D}"/>
+                <a16:creationId xmlns:a16="http://schemas.microsoft.com/office/drawing/2014/main" id="{4DFA50D0-FD2C-BE0F-14B6-AEB7A7E46AE9}"/>
               </a:ext>
             </a:extLst>
           </p:cNvPr>
-          <p:cNvGraphicFramePr>
-            <a:graphicFrameLocks noGrp="1"/>
-          </p:cNvGraphicFramePr>
+          <p:cNvSpPr>
+            <a:spLocks noGrp="1"/>
+          </p:cNvSpPr>
           <p:nvPr>
-            <p:ph sz="quarter" idx="4"/>
-            <p:extLst>
-              <p:ext uri="{D42A27DB-BD31-4B8C-83A1-F6EECF244321}">
-                <p14:modId xmlns:p14="http://schemas.microsoft.com/office/powerpoint/2010/main" val="3999503228"/>
-              </p:ext>
-            </p:extLst>
+            <p:ph sz="half" idx="2"/>
           </p:nvPr>
-        </p:nvGraphicFramePr>
-        <p:xfrm>
-          <a:off x="914400" y="2316163"/>
-          <a:ext cx="10510836" cy="3948462"/>
-        </p:xfrm>
-        <a:graphic>
-          <a:graphicData uri="http://schemas.openxmlformats.org/drawingml/2006/table">
-            <a:tbl>
-              <a:tblPr firstRow="1" bandRow="1">
-                <a:tableStyleId>{C083E6E3-FA7D-4D7B-A595-EF9225AFEA82}</a:tableStyleId>
-              </a:tblPr>
-              <a:tblGrid>
-                <a:gridCol w="4080076">
-                  <a:extLst>
-                    <a:ext uri="{9D8B030D-6E8A-4147-A177-3AD203B41FA5}">
-                      <a16:colId xmlns:a16="http://schemas.microsoft.com/office/drawing/2014/main" val="1764027237"/>
-                    </a:ext>
-                  </a:extLst>
-                </a:gridCol>
-                <a:gridCol w="4080076">
-                  <a:extLst>
-                    <a:ext uri="{9D8B030D-6E8A-4147-A177-3AD203B41FA5}">
-                      <a16:colId xmlns:a16="http://schemas.microsoft.com/office/drawing/2014/main" val="778914542"/>
-                    </a:ext>
-                  </a:extLst>
-                </a:gridCol>
-                <a:gridCol w="1175342">
-                  <a:extLst>
-                    <a:ext uri="{9D8B030D-6E8A-4147-A177-3AD203B41FA5}">
-                      <a16:colId xmlns:a16="http://schemas.microsoft.com/office/drawing/2014/main" val="4233386372"/>
-                    </a:ext>
-                  </a:extLst>
-                </a:gridCol>
-                <a:gridCol w="1175342">
-                  <a:extLst>
-                    <a:ext uri="{9D8B030D-6E8A-4147-A177-3AD203B41FA5}">
-                      <a16:colId xmlns:a16="http://schemas.microsoft.com/office/drawing/2014/main" val="1626524931"/>
-                    </a:ext>
-                  </a:extLst>
-                </a:gridCol>
-              </a:tblGrid>
-              <a:tr h="658077">
-                <a:tc>
-                  <a:txBody>
-                    <a:bodyPr/>
-                    <a:lstStyle>
-                      <a:defPPr>
-                        <a:defRPr lang="de-DE"/>
-                      </a:defPPr>
-                    </a:lstStyle>
-                    <a:p>
-                      <a:pPr rtl="0"/>
-                      <a:r>
-                        <a:rPr lang="de-DE"/>
-                        <a:t>Einflussfaktor</a:t>
-                      </a:r>
-                    </a:p>
-                  </a:txBody>
-                  <a:tcPr anchor="ctr"/>
-                </a:tc>
-                <a:tc>
-                  <a:txBody>
-                    <a:bodyPr/>
-                    <a:lstStyle>
-                      <a:defPPr>
-                        <a:defRPr lang="de-DE"/>
-                      </a:defPPr>
-                    </a:lstStyle>
-                    <a:p>
-                      <a:pPr rtl="0"/>
-                      <a:r>
-                        <a:rPr lang="de-DE"/>
-                        <a:t>Messung</a:t>
-                      </a:r>
-                    </a:p>
-                  </a:txBody>
-                  <a:tcPr anchor="ctr"/>
-                </a:tc>
-                <a:tc>
-                  <a:txBody>
-                    <a:bodyPr/>
-                    <a:lstStyle>
-                      <a:defPPr>
-                        <a:defRPr lang="de-DE"/>
-                      </a:defPPr>
-                    </a:lstStyle>
-                    <a:p>
-                      <a:pPr rtl="0"/>
-                      <a:r>
-                        <a:rPr lang="de-DE"/>
-                        <a:t>Ziel</a:t>
-                      </a:r>
-                    </a:p>
-                  </a:txBody>
-                  <a:tcPr anchor="ctr"/>
-                </a:tc>
-                <a:tc>
-                  <a:txBody>
-                    <a:bodyPr/>
-                    <a:lstStyle>
-                      <a:defPPr>
-                        <a:defRPr lang="de-DE"/>
-                      </a:defPPr>
-                    </a:lstStyle>
-                    <a:p>
-                      <a:pPr rtl="0"/>
-                      <a:r>
-                        <a:rPr lang="de-DE"/>
-                        <a:t>Erreicht</a:t>
-                      </a:r>
-                    </a:p>
-                  </a:txBody>
-                  <a:tcPr anchor="ctr"/>
-                </a:tc>
-                <a:extLst>
-                  <a:ext uri="{0D108BD9-81ED-4DB2-BD59-A6C34878D82A}">
-                    <a16:rowId xmlns:a16="http://schemas.microsoft.com/office/drawing/2014/main" val="2865033212"/>
-                  </a:ext>
-                </a:extLst>
-              </a:tr>
-              <a:tr h="658077">
-                <a:tc>
-                  <a:txBody>
-                    <a:bodyPr/>
-                    <a:lstStyle>
-                      <a:defPPr>
-                        <a:defRPr lang="de-DE"/>
-                      </a:defPPr>
-                    </a:lstStyle>
-                    <a:p>
-                      <a:pPr rtl="0"/>
-                      <a:r>
-                        <a:rPr lang="de-DE"/>
-                        <a:t>Publikumsinteraktion</a:t>
-                      </a:r>
-                    </a:p>
-                  </a:txBody>
-                  <a:tcPr anchor="ctr"/>
-                </a:tc>
-                <a:tc>
-                  <a:txBody>
-                    <a:bodyPr/>
-                    <a:lstStyle>
-                      <a:defPPr>
-                        <a:defRPr lang="de-DE"/>
-                      </a:defPPr>
-                    </a:lstStyle>
-                    <a:p>
-                      <a:pPr rtl="0"/>
-                      <a:r>
-                        <a:rPr lang="de-DE"/>
-                        <a:t>Prozentsatz (%)</a:t>
-                      </a:r>
-                    </a:p>
-                  </a:txBody>
-                  <a:tcPr anchor="ctr"/>
-                </a:tc>
-                <a:tc>
-                  <a:txBody>
-                    <a:bodyPr/>
-                    <a:lstStyle>
-                      <a:defPPr>
-                        <a:defRPr lang="de-DE"/>
-                      </a:defPPr>
-                    </a:lstStyle>
-                    <a:p>
-                      <a:pPr rtl="0"/>
-                      <a:r>
-                        <a:rPr lang="de-DE"/>
-                        <a:t>85</a:t>
-                      </a:r>
-                    </a:p>
-                  </a:txBody>
-                  <a:tcPr anchor="ctr"/>
-                </a:tc>
-                <a:tc>
-                  <a:txBody>
-                    <a:bodyPr/>
-                    <a:lstStyle>
-                      <a:defPPr>
-                        <a:defRPr lang="de-DE"/>
-                      </a:defPPr>
-                    </a:lstStyle>
-                    <a:p>
-                      <a:pPr rtl="0"/>
-                      <a:r>
-                        <a:rPr lang="de-DE"/>
-                        <a:t>88</a:t>
-                      </a:r>
-                    </a:p>
-                  </a:txBody>
-                  <a:tcPr anchor="ctr"/>
-                </a:tc>
-                <a:extLst>
-                  <a:ext uri="{0D108BD9-81ED-4DB2-BD59-A6C34878D82A}">
-                    <a16:rowId xmlns:a16="http://schemas.microsoft.com/office/drawing/2014/main" val="773796761"/>
-                  </a:ext>
-                </a:extLst>
-              </a:tr>
-              <a:tr h="658077">
-                <a:tc>
-                  <a:txBody>
-                    <a:bodyPr/>
-                    <a:lstStyle>
-                      <a:defPPr>
-                        <a:defRPr lang="de-DE"/>
-                      </a:defPPr>
-                    </a:lstStyle>
-                    <a:p>
-                      <a:pPr rtl="0"/>
-                      <a:r>
-                        <a:rPr lang="de-DE"/>
-                        <a:t>Wissen bewahren</a:t>
-                      </a:r>
-                    </a:p>
-                  </a:txBody>
-                  <a:tcPr anchor="ctr"/>
-                </a:tc>
-                <a:tc>
-                  <a:txBody>
-                    <a:bodyPr/>
-                    <a:lstStyle>
-                      <a:defPPr>
-                        <a:defRPr lang="de-DE"/>
-                      </a:defPPr>
-                    </a:lstStyle>
-                    <a:p>
-                      <a:pPr rtl="0"/>
-                      <a:r>
-                        <a:rPr lang="de-DE"/>
-                        <a:t>Prozentsatz (%)</a:t>
-                      </a:r>
-                    </a:p>
-                  </a:txBody>
-                  <a:tcPr anchor="ctr"/>
-                </a:tc>
-                <a:tc>
-                  <a:txBody>
-                    <a:bodyPr/>
-                    <a:lstStyle>
-                      <a:defPPr>
-                        <a:defRPr lang="de-DE"/>
-                      </a:defPPr>
-                    </a:lstStyle>
-                    <a:p>
-                      <a:pPr rtl="0"/>
-                      <a:r>
-                        <a:rPr lang="de-DE"/>
-                        <a:t>75</a:t>
-                      </a:r>
-                    </a:p>
-                  </a:txBody>
-                  <a:tcPr anchor="ctr"/>
-                </a:tc>
-                <a:tc>
-                  <a:txBody>
-                    <a:bodyPr/>
-                    <a:lstStyle>
-                      <a:defPPr>
-                        <a:defRPr lang="de-DE"/>
-                      </a:defPPr>
-                    </a:lstStyle>
-                    <a:p>
-                      <a:pPr rtl="0"/>
-                      <a:r>
-                        <a:rPr lang="de-DE"/>
-                        <a:t>80</a:t>
-                      </a:r>
-                    </a:p>
-                  </a:txBody>
-                  <a:tcPr anchor="ctr"/>
-                </a:tc>
-                <a:extLst>
-                  <a:ext uri="{0D108BD9-81ED-4DB2-BD59-A6C34878D82A}">
-                    <a16:rowId xmlns:a16="http://schemas.microsoft.com/office/drawing/2014/main" val="1789202252"/>
-                  </a:ext>
-                </a:extLst>
-              </a:tr>
-              <a:tr h="658077">
-                <a:tc>
-                  <a:txBody>
-                    <a:bodyPr/>
-                    <a:lstStyle>
-                      <a:defPPr>
-                        <a:defRPr lang="de-DE"/>
-                      </a:defPPr>
-                    </a:lstStyle>
-                    <a:p>
-                      <a:pPr rtl="0"/>
-                      <a:r>
-                        <a:rPr lang="de-DE" dirty="0"/>
-                        <a:t>Umfragen nach der Präsentation</a:t>
-                      </a:r>
-                    </a:p>
-                  </a:txBody>
-                  <a:tcPr anchor="ctr"/>
-                </a:tc>
-                <a:tc>
-                  <a:txBody>
-                    <a:bodyPr/>
-                    <a:lstStyle>
-                      <a:defPPr>
-                        <a:defRPr lang="de-DE"/>
-                      </a:defPPr>
-                    </a:lstStyle>
-                    <a:p>
-                      <a:pPr rtl="0"/>
-                      <a:r>
-                        <a:rPr lang="de-DE"/>
-                        <a:t>Durchschnittliche Bewertung</a:t>
-                      </a:r>
-                    </a:p>
-                  </a:txBody>
-                  <a:tcPr anchor="ctr"/>
-                </a:tc>
-                <a:tc>
-                  <a:txBody>
-                    <a:bodyPr/>
-                    <a:lstStyle>
-                      <a:defPPr>
-                        <a:defRPr lang="de-DE"/>
-                      </a:defPPr>
-                    </a:lstStyle>
-                    <a:p>
-                      <a:pPr rtl="0"/>
-                      <a:r>
-                        <a:rPr lang="de-DE"/>
-                        <a:t>4,2</a:t>
-                      </a:r>
-                    </a:p>
-                  </a:txBody>
-                  <a:tcPr anchor="ctr"/>
-                </a:tc>
-                <a:tc>
-                  <a:txBody>
-                    <a:bodyPr/>
-                    <a:lstStyle>
-                      <a:defPPr>
-                        <a:defRPr lang="de-DE"/>
-                      </a:defPPr>
-                    </a:lstStyle>
-                    <a:p>
-                      <a:pPr rtl="0"/>
-                      <a:r>
-                        <a:rPr lang="de-DE"/>
-                        <a:t>4,5</a:t>
-                      </a:r>
-                    </a:p>
-                  </a:txBody>
-                  <a:tcPr anchor="ctr"/>
-                </a:tc>
-                <a:extLst>
-                  <a:ext uri="{0D108BD9-81ED-4DB2-BD59-A6C34878D82A}">
-                    <a16:rowId xmlns:a16="http://schemas.microsoft.com/office/drawing/2014/main" val="2325356481"/>
-                  </a:ext>
-                </a:extLst>
-              </a:tr>
-              <a:tr h="658077">
-                <a:tc>
-                  <a:txBody>
-                    <a:bodyPr/>
-                    <a:lstStyle>
-                      <a:defPPr>
-                        <a:defRPr lang="de-DE"/>
-                      </a:defPPr>
-                    </a:lstStyle>
-                    <a:p>
-                      <a:pPr rtl="0"/>
-                      <a:r>
-                        <a:rPr lang="de-DE"/>
-                        <a:t>Empfehlungsrate</a:t>
-                      </a:r>
-                    </a:p>
-                  </a:txBody>
-                  <a:tcPr anchor="ctr"/>
-                </a:tc>
-                <a:tc>
-                  <a:txBody>
-                    <a:bodyPr/>
-                    <a:lstStyle>
-                      <a:defPPr>
-                        <a:defRPr lang="de-DE"/>
-                      </a:defPPr>
-                    </a:lstStyle>
-                    <a:p>
-                      <a:pPr rtl="0"/>
-                      <a:r>
-                        <a:rPr lang="de-DE"/>
-                        <a:t>Prozentsatz (%)</a:t>
-                      </a:r>
-                    </a:p>
-                  </a:txBody>
-                  <a:tcPr anchor="ctr"/>
-                </a:tc>
-                <a:tc>
-                  <a:txBody>
-                    <a:bodyPr/>
-                    <a:lstStyle>
-                      <a:defPPr>
-                        <a:defRPr lang="de-DE"/>
-                      </a:defPPr>
-                    </a:lstStyle>
-                    <a:p>
-                      <a:pPr rtl="0"/>
-                      <a:r>
-                        <a:rPr lang="de-DE"/>
-                        <a:t>10</a:t>
-                      </a:r>
-                    </a:p>
-                  </a:txBody>
-                  <a:tcPr anchor="ctr"/>
-                </a:tc>
-                <a:tc>
-                  <a:txBody>
-                    <a:bodyPr/>
-                    <a:lstStyle>
-                      <a:defPPr>
-                        <a:defRPr lang="de-DE"/>
-                      </a:defPPr>
-                    </a:lstStyle>
-                    <a:p>
-                      <a:pPr rtl="0"/>
-                      <a:r>
-                        <a:rPr lang="de-DE"/>
-                        <a:t>12</a:t>
-                      </a:r>
-                    </a:p>
-                  </a:txBody>
-                  <a:tcPr anchor="ctr"/>
-                </a:tc>
-                <a:extLst>
-                  <a:ext uri="{0D108BD9-81ED-4DB2-BD59-A6C34878D82A}">
-                    <a16:rowId xmlns:a16="http://schemas.microsoft.com/office/drawing/2014/main" val="3322085491"/>
-                  </a:ext>
-                </a:extLst>
-              </a:tr>
-              <a:tr h="658077">
-                <a:tc>
-                  <a:txBody>
-                    <a:bodyPr/>
-                    <a:lstStyle>
-                      <a:defPPr>
-                        <a:defRPr lang="de-DE"/>
-                      </a:defPPr>
-                    </a:lstStyle>
-                    <a:p>
-                      <a:pPr rtl="0"/>
-                      <a:r>
-                        <a:rPr lang="de-DE"/>
-                        <a:t>Möglichkeiten der Zusammenarbeit</a:t>
-                      </a:r>
-                    </a:p>
-                  </a:txBody>
-                  <a:tcPr anchor="ctr"/>
-                </a:tc>
-                <a:tc>
-                  <a:txBody>
-                    <a:bodyPr/>
-                    <a:lstStyle>
-                      <a:defPPr>
-                        <a:defRPr lang="de-DE"/>
-                      </a:defPPr>
-                    </a:lstStyle>
-                    <a:p>
-                      <a:pPr rtl="0"/>
-                      <a:r>
-                        <a:rPr lang="de-DE"/>
-                        <a:t>Anzahl der Möglichkeiten</a:t>
-                      </a:r>
-                    </a:p>
-                  </a:txBody>
-                  <a:tcPr anchor="ctr"/>
-                </a:tc>
-                <a:tc>
-                  <a:txBody>
-                    <a:bodyPr/>
-                    <a:lstStyle>
-                      <a:defPPr>
-                        <a:defRPr lang="de-DE"/>
-                      </a:defPPr>
-                    </a:lstStyle>
-                    <a:p>
-                      <a:pPr rtl="0"/>
-                      <a:r>
-                        <a:rPr lang="de-DE"/>
-                        <a:t>8</a:t>
-                      </a:r>
-                    </a:p>
-                  </a:txBody>
-                  <a:tcPr anchor="ctr"/>
-                </a:tc>
-                <a:tc>
-                  <a:txBody>
-                    <a:bodyPr/>
-                    <a:lstStyle>
-                      <a:defPPr>
-                        <a:defRPr lang="de-DE"/>
-                      </a:defPPr>
-                    </a:lstStyle>
-                    <a:p>
-                      <a:pPr rtl="0"/>
-                      <a:r>
-                        <a:rPr lang="de-DE" dirty="0"/>
-                        <a:t>10</a:t>
-                      </a:r>
-                    </a:p>
-                  </a:txBody>
-                  <a:tcPr anchor="ctr"/>
-                </a:tc>
-                <a:extLst>
-                  <a:ext uri="{0D108BD9-81ED-4DB2-BD59-A6C34878D82A}">
-                    <a16:rowId xmlns:a16="http://schemas.microsoft.com/office/drawing/2014/main" val="2682318458"/>
-                  </a:ext>
-                </a:extLst>
-              </a:tr>
-            </a:tbl>
-          </a:graphicData>
-        </a:graphic>
-      </p:graphicFrame>
+        </p:nvSpPr>
+        <p:spPr>
+          <a:xfrm>
+            <a:off x="1550564" y="2303028"/>
+            <a:ext cx="8041111" cy="3961593"/>
+          </a:xfrm>
+        </p:spPr>
+        <p:txBody>
+          <a:bodyPr rtlCol="0">
+            <a:normAutofit/>
+          </a:bodyPr>
+          <a:lstStyle>
+            <a:defPPr>
+              <a:defRPr lang="de-DE"/>
+            </a:defPPr>
+          </a:lstStyle>
+          <a:p>
+            <a:pPr rtl="0">
+              <a:spcAft>
+                <a:spcPts val="600"/>
+              </a:spcAft>
+            </a:pPr>
+            <a:r>
+              <a:rPr lang="de-DE" sz="2400" dirty="0"/>
+              <a:t>Automatischer Erfassung von Fahrten</a:t>
+            </a:r>
+          </a:p>
+          <a:p>
+            <a:pPr rtl="0">
+              <a:spcAft>
+                <a:spcPts val="600"/>
+              </a:spcAft>
+            </a:pPr>
+            <a:r>
+              <a:rPr lang="de-DE" sz="2400" dirty="0"/>
+              <a:t>Web-App + Smartphone App</a:t>
+            </a:r>
+          </a:p>
+          <a:p>
+            <a:pPr rtl="0">
+              <a:spcAft>
+                <a:spcPts val="600"/>
+              </a:spcAft>
+            </a:pPr>
+            <a:r>
+              <a:rPr lang="de-DE" sz="2400" dirty="0"/>
+              <a:t>GPS-Aufzeichnung in Echtzeit</a:t>
+            </a:r>
+          </a:p>
+          <a:p>
+            <a:pPr rtl="0">
+              <a:spcAft>
+                <a:spcPts val="600"/>
+              </a:spcAft>
+            </a:pPr>
+            <a:r>
+              <a:rPr lang="de-DE" sz="2400" dirty="0"/>
+              <a:t>Einfache &amp; zuverlässige Bedienung</a:t>
+            </a:r>
+          </a:p>
+          <a:p>
+            <a:pPr>
+              <a:spcAft>
+                <a:spcPts val="600"/>
+              </a:spcAft>
+            </a:pPr>
+            <a:r>
+              <a:rPr lang="de-DE" sz="2400" dirty="0"/>
+              <a:t>Automatische Erstellung von Fahrtenprotokollen</a:t>
+            </a:r>
+          </a:p>
+          <a:p>
+            <a:pPr rtl="0">
+              <a:spcAft>
+                <a:spcPts val="600"/>
+              </a:spcAft>
+            </a:pPr>
+            <a:r>
+              <a:rPr lang="de-DE" sz="2400" dirty="0"/>
+              <a:t>Visualisierung auf Karte &amp; Export der Protokolle</a:t>
+            </a:r>
+          </a:p>
+        </p:txBody>
+      </p:sp>
+      <p:sp>
+        <p:nvSpPr>
+          <p:cNvPr id="2" name="Foliennummernplatzhalter 1">
+            <a:extLst>
+              <a:ext uri="{FF2B5EF4-FFF2-40B4-BE49-F238E27FC236}">
+                <a16:creationId xmlns:a16="http://schemas.microsoft.com/office/drawing/2014/main" id="{F9BFC741-8A18-50BC-49B4-F6F98C644F28}"/>
+              </a:ext>
+            </a:extLst>
+          </p:cNvPr>
+          <p:cNvSpPr>
+            <a:spLocks noGrp="1"/>
+          </p:cNvSpPr>
+          <p:nvPr>
+            <p:ph type="sldNum" sz="quarter" idx="10"/>
+          </p:nvPr>
+        </p:nvSpPr>
+        <p:spPr>
+          <a:xfrm>
+            <a:off x="10438475" y="457199"/>
+            <a:ext cx="987552" cy="471489"/>
+          </a:xfrm>
+        </p:spPr>
+        <p:txBody>
+          <a:bodyPr rtlCol="0"/>
+          <a:lstStyle>
+            <a:defPPr>
+              <a:defRPr lang="de-DE"/>
+            </a:defPPr>
+          </a:lstStyle>
+          <a:p>
+            <a:pPr rtl="0"/>
+            <a:fld id="{48F63A3B-78C7-47BE-AE5E-E10140E04643}" type="slidenum">
+              <a:rPr lang="de-DE" smtClean="0"/>
+              <a:pPr rtl="0"/>
+              <a:t>4</a:t>
+            </a:fld>
+            <a:endParaRPr lang="de-DE" dirty="0"/>
+          </a:p>
+        </p:txBody>
+      </p:sp>
+      <p:pic>
+        <p:nvPicPr>
+          <p:cNvPr id="7" name="Grafik 6" descr="Karte mit Ortsmarkierung mit einfarbiger Füllung">
+            <a:extLst>
+              <a:ext uri="{FF2B5EF4-FFF2-40B4-BE49-F238E27FC236}">
+                <a16:creationId xmlns:a16="http://schemas.microsoft.com/office/drawing/2014/main" id="{C73D811E-6486-1A7C-C0F2-1143D5773ED3}"/>
+              </a:ext>
+            </a:extLst>
+          </p:cNvPr>
+          <p:cNvPicPr>
+            <a:picLocks noChangeAspect="1"/>
+          </p:cNvPicPr>
+          <p:nvPr/>
+        </p:nvPicPr>
+        <p:blipFill>
+          <a:blip r:embed="rId3">
+            <a:extLst>
+              <a:ext uri="{96DAC541-7B7A-43D3-8B79-37D633B846F1}">
+                <asvg:svgBlip xmlns:asvg="http://schemas.microsoft.com/office/drawing/2016/SVG/main" r:embed="rId4"/>
+              </a:ext>
+            </a:extLst>
+          </a:blip>
+          <a:stretch>
+            <a:fillRect/>
+          </a:stretch>
+        </p:blipFill>
+        <p:spPr>
+          <a:xfrm>
+            <a:off x="9096369" y="3857625"/>
+            <a:ext cx="1409700" cy="1409700"/>
+          </a:xfrm>
+          <a:prstGeom prst="rect">
+            <a:avLst/>
+          </a:prstGeom>
+        </p:spPr>
+      </p:pic>
+      <p:pic>
+        <p:nvPicPr>
+          <p:cNvPr id="11" name="Grafik 10" descr="Smartphone mit einfarbiger Füllung">
+            <a:extLst>
+              <a:ext uri="{FF2B5EF4-FFF2-40B4-BE49-F238E27FC236}">
+                <a16:creationId xmlns:a16="http://schemas.microsoft.com/office/drawing/2014/main" id="{2BA46CD8-5561-A2B9-3DCF-6CD76211A608}"/>
+              </a:ext>
+            </a:extLst>
+          </p:cNvPr>
+          <p:cNvPicPr>
+            <a:picLocks noChangeAspect="1"/>
+          </p:cNvPicPr>
+          <p:nvPr/>
+        </p:nvPicPr>
+        <p:blipFill>
+          <a:blip r:embed="rId5">
+            <a:extLst>
+              <a:ext uri="{96DAC541-7B7A-43D3-8B79-37D633B846F1}">
+                <asvg:svgBlip xmlns:asvg="http://schemas.microsoft.com/office/drawing/2016/SVG/main" r:embed="rId6"/>
+              </a:ext>
+            </a:extLst>
+          </a:blip>
+          <a:stretch>
+            <a:fillRect/>
+          </a:stretch>
+        </p:blipFill>
+        <p:spPr>
+          <a:xfrm>
+            <a:off x="9875489" y="2253205"/>
+            <a:ext cx="1125972" cy="1125972"/>
+          </a:xfrm>
+          <a:prstGeom prst="rect">
+            <a:avLst/>
+          </a:prstGeom>
+        </p:spPr>
+      </p:pic>
+      <p:pic>
+        <p:nvPicPr>
+          <p:cNvPr id="15" name="Grafik 14" descr="Internet mit einfarbiger Füllung">
+            <a:extLst>
+              <a:ext uri="{FF2B5EF4-FFF2-40B4-BE49-F238E27FC236}">
+                <a16:creationId xmlns:a16="http://schemas.microsoft.com/office/drawing/2014/main" id="{0804E4ED-680A-7A89-052A-81DD240EB436}"/>
+              </a:ext>
+            </a:extLst>
+          </p:cNvPr>
+          <p:cNvPicPr>
+            <a:picLocks noChangeAspect="1"/>
+          </p:cNvPicPr>
+          <p:nvPr/>
+        </p:nvPicPr>
+        <p:blipFill>
+          <a:blip r:embed="rId7">
+            <a:extLst>
+              <a:ext uri="{96DAC541-7B7A-43D3-8B79-37D633B846F1}">
+                <asvg:svgBlip xmlns:asvg="http://schemas.microsoft.com/office/drawing/2016/SVG/main" r:embed="rId8"/>
+              </a:ext>
+            </a:extLst>
+          </a:blip>
+          <a:stretch>
+            <a:fillRect/>
+          </a:stretch>
+        </p:blipFill>
+        <p:spPr>
+          <a:xfrm>
+            <a:off x="8010524" y="2766647"/>
+            <a:ext cx="1225061" cy="1225061"/>
+          </a:xfrm>
+          <a:prstGeom prst="rect">
+            <a:avLst/>
+          </a:prstGeom>
+        </p:spPr>
+      </p:pic>
+      <p:pic>
+        <p:nvPicPr>
+          <p:cNvPr id="17" name="Grafik 16" descr="Volltreffer mit einfarbiger Füllung">
+            <a:extLst>
+              <a:ext uri="{FF2B5EF4-FFF2-40B4-BE49-F238E27FC236}">
+                <a16:creationId xmlns:a16="http://schemas.microsoft.com/office/drawing/2014/main" id="{D9EE7B0E-B10C-C74D-E49A-33195FE875D7}"/>
+              </a:ext>
+            </a:extLst>
+          </p:cNvPr>
+          <p:cNvPicPr>
+            <a:picLocks noChangeAspect="1"/>
+          </p:cNvPicPr>
+          <p:nvPr/>
+        </p:nvPicPr>
+        <p:blipFill>
+          <a:blip r:embed="rId9">
+            <a:extLst>
+              <a:ext uri="{96DAC541-7B7A-43D3-8B79-37D633B846F1}">
+                <asvg:svgBlip xmlns:asvg="http://schemas.microsoft.com/office/drawing/2016/SVG/main" r:embed="rId10"/>
+              </a:ext>
+            </a:extLst>
+          </a:blip>
+          <a:stretch>
+            <a:fillRect/>
+          </a:stretch>
+        </p:blipFill>
+        <p:spPr>
+          <a:xfrm>
+            <a:off x="3493275" y="1271206"/>
+            <a:ext cx="914400" cy="914400"/>
+          </a:xfrm>
+          <a:prstGeom prst="rect">
+            <a:avLst/>
+          </a:prstGeom>
+        </p:spPr>
+      </p:pic>
+    </p:spTree>
+    <p:extLst>
+      <p:ext uri="{BB962C8B-B14F-4D97-AF65-F5344CB8AC3E}">
+        <p14:creationId xmlns:p14="http://schemas.microsoft.com/office/powerpoint/2010/main" val="2359680970"/>
+      </p:ext>
+    </p:extLst>
+  </p:cSld>
+  <p:clrMapOvr>
+    <a:masterClrMapping/>
+  </p:clrMapOvr>
+  <mc:AlternateContent xmlns:mc="http://schemas.openxmlformats.org/markup-compatibility/2006">
+    <mc:Choice xmlns:p159="http://schemas.microsoft.com/office/powerpoint/2015/09/main" Requires="p159">
+      <p:transition xmlns:p14="http://schemas.microsoft.com/office/powerpoint/2010/main" spd="slow" p14:dur="2000">
+        <p159:morph option="byObject"/>
+      </p:transition>
+    </mc:Choice>
+    <mc:Fallback>
+      <p:transition spd="slow">
+        <p:fade/>
+      </p:transition>
+    </mc:Fallback>
+  </mc:AlternateContent>
+</p:sld>
+</file>
+
+<file path=ppt/slides/slide5.xml><?xml version="1.0" encoding="utf-8"?>
+<p:sld xmlns:a="http://schemas.openxmlformats.org/drawingml/2006/main" xmlns:r="http://schemas.openxmlformats.org/officeDocument/2006/relationships" xmlns:p="http://schemas.openxmlformats.org/presentationml/2006/main">
+  <p:cSld>
+    <p:spTree>
+      <p:nvGrpSpPr>
+        <p:cNvPr id="1" name="">
+          <a:extLst>
+            <a:ext uri="{FF2B5EF4-FFF2-40B4-BE49-F238E27FC236}">
+              <a16:creationId xmlns:a16="http://schemas.microsoft.com/office/drawing/2014/main" id="{44E47E6C-6062-9DB0-B3C9-DA52815446D8}"/>
+            </a:ext>
+          </a:extLst>
+        </p:cNvPr>
+        <p:cNvGrpSpPr/>
+        <p:nvPr/>
+      </p:nvGrpSpPr>
+      <p:grpSpPr>
+        <a:xfrm>
+          <a:off x="0" y="0"/>
+          <a:ext cx="0" cy="0"/>
+          <a:chOff x="0" y="0"/>
+          <a:chExt cx="0" cy="0"/>
+        </a:xfrm>
+      </p:grpSpPr>
+      <p:sp>
+        <p:nvSpPr>
+          <p:cNvPr id="2" name="Titel 1">
+            <a:extLst>
+              <a:ext uri="{FF2B5EF4-FFF2-40B4-BE49-F238E27FC236}">
+                <a16:creationId xmlns:a16="http://schemas.microsoft.com/office/drawing/2014/main" id="{37E746D0-F7F1-BAEE-C5F6-C218BECFC871}"/>
+              </a:ext>
+            </a:extLst>
+          </p:cNvPr>
+          <p:cNvSpPr>
+            <a:spLocks noGrp="1"/>
+          </p:cNvSpPr>
+          <p:nvPr>
+            <p:ph type="title"/>
+          </p:nvPr>
+        </p:nvSpPr>
+        <p:spPr>
+          <a:xfrm>
+            <a:off x="629079" y="457199"/>
+            <a:ext cx="7796464" cy="1222385"/>
+          </a:xfrm>
+        </p:spPr>
+        <p:txBody>
+          <a:bodyPr rtlCol="0"/>
+          <a:lstStyle>
+            <a:defPPr>
+              <a:defRPr lang="de-DE"/>
+            </a:defPPr>
+          </a:lstStyle>
+          <a:p>
+            <a:pPr rtl="0"/>
+            <a:r>
+              <a:rPr lang="de-DE" dirty="0"/>
+              <a:t>Projektumfang</a:t>
+            </a:r>
+          </a:p>
+        </p:txBody>
+      </p:sp>
       <p:sp>
         <p:nvSpPr>
           <p:cNvPr id="3" name="Foliennummernplatzhalter 2">
             <a:extLst>
               <a:ext uri="{FF2B5EF4-FFF2-40B4-BE49-F238E27FC236}">
-                <a16:creationId xmlns:a16="http://schemas.microsoft.com/office/drawing/2014/main" id="{AC21286A-7B29-3B58-1636-0F45723890AB}"/>
+                <a16:creationId xmlns:a16="http://schemas.microsoft.com/office/drawing/2014/main" id="{8FE041B5-1F9D-E239-2E67-AC20182248CA}"/>
+              </a:ext>
+            </a:extLst>
+          </p:cNvPr>
+          <p:cNvSpPr>
+            <a:spLocks noGrp="1"/>
+          </p:cNvSpPr>
+          <p:nvPr>
+            <p:ph type="sldNum" sz="quarter" idx="10"/>
+          </p:nvPr>
+        </p:nvSpPr>
+        <p:spPr>
+          <a:xfrm>
+            <a:off x="10438475" y="457199"/>
+            <a:ext cx="987552" cy="471489"/>
+          </a:xfrm>
+        </p:spPr>
+        <p:txBody>
+          <a:bodyPr rtlCol="0"/>
+          <a:lstStyle>
+            <a:defPPr>
+              <a:defRPr lang="de-DE"/>
+            </a:defPPr>
+          </a:lstStyle>
+          <a:p>
+            <a:pPr rtl="0"/>
+            <a:fld id="{48F63A3B-78C7-47BE-AE5E-E10140E04643}" type="slidenum">
+              <a:rPr lang="de-DE" smtClean="0"/>
+              <a:pPr rtl="0"/>
+              <a:t>5</a:t>
+            </a:fld>
+            <a:endParaRPr lang="de-DE" dirty="0"/>
+          </a:p>
+        </p:txBody>
+      </p:sp>
+      <p:sp>
+        <p:nvSpPr>
+          <p:cNvPr id="16" name="Inhaltsplatzhalter 4">
+            <a:extLst>
+              <a:ext uri="{FF2B5EF4-FFF2-40B4-BE49-F238E27FC236}">
+                <a16:creationId xmlns:a16="http://schemas.microsoft.com/office/drawing/2014/main" id="{C4AF35D8-28CB-FD85-81F3-D62DACCD9BE3}"/>
+              </a:ext>
+            </a:extLst>
+          </p:cNvPr>
+          <p:cNvSpPr>
+            <a:spLocks noGrp="1"/>
+          </p:cNvSpPr>
+          <p:nvPr>
+            <p:ph sz="half" idx="2"/>
+          </p:nvPr>
+        </p:nvSpPr>
+        <p:spPr>
+          <a:xfrm>
+            <a:off x="629080" y="1925591"/>
+            <a:ext cx="3643384" cy="4297797"/>
+          </a:xfrm>
+        </p:spPr>
+        <p:txBody>
+          <a:bodyPr rtlCol="0">
+            <a:normAutofit fontScale="92500" lnSpcReduction="10000"/>
+          </a:bodyPr>
+          <a:lstStyle>
+            <a:defPPr>
+              <a:defRPr lang="de-DE"/>
+            </a:defPPr>
+          </a:lstStyle>
+          <a:p>
+            <a:pPr rtl="0"/>
+            <a:r>
+              <a:rPr lang="de-DE" sz="1900" b="1" u="sng" dirty="0"/>
+              <a:t>IN-SCOPE</a:t>
+            </a:r>
+            <a:endParaRPr lang="de-DE" b="1" u="sng" dirty="0"/>
+          </a:p>
+          <a:p>
+            <a:pPr marL="285750" indent="-285750" rtl="0">
+              <a:buFont typeface="Arial" panose="020B0604020202020204" pitchFamily="34" charset="0"/>
+              <a:buChar char="•"/>
+            </a:pPr>
+            <a:r>
+              <a:rPr lang="de-DE" dirty="0"/>
+              <a:t>Echtzeit GPS-Aufzeichnung</a:t>
+            </a:r>
+          </a:p>
+          <a:p>
+            <a:pPr lvl="1" rtl="0"/>
+            <a:r>
+              <a:rPr lang="de-DE" dirty="0"/>
+              <a:t>Web-APP</a:t>
+            </a:r>
+          </a:p>
+          <a:p>
+            <a:pPr lvl="1" rtl="0"/>
+            <a:r>
+              <a:rPr lang="de-DE" dirty="0"/>
+              <a:t>Smartphone App</a:t>
+            </a:r>
+          </a:p>
+          <a:p>
+            <a:pPr marL="628650" lvl="4" indent="-361950">
+              <a:buFont typeface="Wingdings" panose="05000000000000000000" pitchFamily="2" charset="2"/>
+              <a:buChar char="§"/>
+            </a:pPr>
+            <a:r>
+              <a:rPr lang="de-DE" dirty="0"/>
+              <a:t>Android</a:t>
+            </a:r>
+          </a:p>
+          <a:p>
+            <a:pPr marL="628650" lvl="4" indent="-361950">
+              <a:buFont typeface="Wingdings" panose="05000000000000000000" pitchFamily="2" charset="2"/>
+              <a:buChar char="§"/>
+            </a:pPr>
+            <a:r>
+              <a:rPr lang="de-DE" dirty="0"/>
+              <a:t>iOS</a:t>
+            </a:r>
+          </a:p>
+          <a:p>
+            <a:pPr lvl="1" rtl="0"/>
+            <a:r>
+              <a:rPr lang="de-DE" dirty="0"/>
+              <a:t>Export der Protokolle </a:t>
+            </a:r>
+          </a:p>
+          <a:p>
+            <a:pPr marL="542925" lvl="2" indent="-282575">
+              <a:buFont typeface="Wingdings" panose="05000000000000000000" pitchFamily="2" charset="2"/>
+              <a:buChar char="§"/>
+            </a:pPr>
+            <a:r>
+              <a:rPr lang="de-DE" dirty="0"/>
+              <a:t>PDF</a:t>
+            </a:r>
+          </a:p>
+          <a:p>
+            <a:pPr marL="542925" lvl="2" indent="-282575">
+              <a:buFont typeface="Wingdings" panose="05000000000000000000" pitchFamily="2" charset="2"/>
+              <a:buChar char="§"/>
+            </a:pPr>
+            <a:r>
+              <a:rPr lang="de-DE" dirty="0"/>
+              <a:t>Druck</a:t>
+            </a:r>
+          </a:p>
+          <a:p>
+            <a:pPr marL="285750" lvl="2" indent="-285750"/>
+            <a:r>
+              <a:rPr lang="de-DE" dirty="0"/>
+              <a:t>Verwaltung der Fahrten</a:t>
+            </a:r>
+          </a:p>
+          <a:p>
+            <a:pPr marL="285750" lvl="2" indent="-285750"/>
+            <a:r>
+              <a:rPr lang="de-DE" dirty="0"/>
+              <a:t>Darstellung auf Karte</a:t>
+            </a:r>
+          </a:p>
+          <a:p>
+            <a:pPr marL="285750" lvl="2" indent="-285750"/>
+            <a:r>
+              <a:rPr lang="de-DE" dirty="0"/>
+              <a:t>Datenbank zur Speicherung</a:t>
+            </a:r>
+          </a:p>
+          <a:p>
+            <a:pPr marL="260350" lvl="2" indent="0">
+              <a:buNone/>
+            </a:pPr>
+            <a:endParaRPr lang="de-DE" dirty="0"/>
+          </a:p>
+        </p:txBody>
+      </p:sp>
+      <p:sp>
+        <p:nvSpPr>
+          <p:cNvPr id="17" name="Inhaltsplatzhalter 6">
+            <a:extLst>
+              <a:ext uri="{FF2B5EF4-FFF2-40B4-BE49-F238E27FC236}">
+                <a16:creationId xmlns:a16="http://schemas.microsoft.com/office/drawing/2014/main" id="{E0F48D9E-0363-13CF-FA2A-D1C6E58B747F}"/>
+              </a:ext>
+            </a:extLst>
+          </p:cNvPr>
+          <p:cNvSpPr>
+            <a:spLocks noGrp="1"/>
+          </p:cNvSpPr>
+          <p:nvPr>
+            <p:ph sz="quarter" idx="4"/>
+          </p:nvPr>
+        </p:nvSpPr>
+        <p:spPr>
+          <a:xfrm>
+            <a:off x="4496839" y="1925592"/>
+            <a:ext cx="4332836" cy="3720337"/>
+          </a:xfrm>
+        </p:spPr>
+        <p:txBody>
+          <a:bodyPr rtlCol="0">
+            <a:normAutofit/>
+          </a:bodyPr>
+          <a:lstStyle>
+            <a:defPPr>
+              <a:defRPr lang="de-DE"/>
+            </a:defPPr>
+          </a:lstStyle>
+          <a:p>
+            <a:pPr rtl="0"/>
+            <a:r>
+              <a:rPr lang="de-DE" b="1" u="sng" dirty="0"/>
+              <a:t>OUT-OF-SCOPE</a:t>
+            </a:r>
+          </a:p>
+          <a:p>
+            <a:pPr lvl="1" rtl="0"/>
+            <a:r>
+              <a:rPr lang="de-DE" sz="1700" dirty="0"/>
+              <a:t>Implementierung in externe Fahrschulsysteme</a:t>
+            </a:r>
+          </a:p>
+          <a:p>
+            <a:pPr lvl="1" rtl="0"/>
+            <a:r>
+              <a:rPr lang="de-DE" sz="1700" dirty="0"/>
+              <a:t>Desktop-App</a:t>
+            </a:r>
+          </a:p>
+          <a:p>
+            <a:pPr lvl="1" rtl="0"/>
+            <a:r>
+              <a:rPr lang="de-DE" sz="1700" dirty="0"/>
+              <a:t>Einsatz von KI-Unterstützung</a:t>
+            </a:r>
+          </a:p>
+          <a:p>
+            <a:pPr lvl="1" rtl="0"/>
+            <a:r>
+              <a:rPr lang="de-DE" sz="1700" dirty="0"/>
+              <a:t>Integration in Fahrzeuge</a:t>
+            </a:r>
+          </a:p>
+        </p:txBody>
+      </p:sp>
+      <p:pic>
+        <p:nvPicPr>
+          <p:cNvPr id="5" name="Grafik 4" descr="Klemmbrett mit einfarbiger Füllung">
+            <a:extLst>
+              <a:ext uri="{FF2B5EF4-FFF2-40B4-BE49-F238E27FC236}">
+                <a16:creationId xmlns:a16="http://schemas.microsoft.com/office/drawing/2014/main" id="{AF822C3D-90C1-ABC5-EA03-D89987D5A8FD}"/>
+              </a:ext>
+            </a:extLst>
+          </p:cNvPr>
+          <p:cNvPicPr>
+            <a:picLocks noChangeAspect="1"/>
+          </p:cNvPicPr>
+          <p:nvPr/>
+        </p:nvPicPr>
+        <p:blipFill>
+          <a:blip r:embed="rId3">
+            <a:extLst>
+              <a:ext uri="{96DAC541-7B7A-43D3-8B79-37D633B846F1}">
+                <asvg:svgBlip xmlns:asvg="http://schemas.microsoft.com/office/drawing/2016/SVG/main" r:embed="rId4"/>
+              </a:ext>
+            </a:extLst>
+          </a:blip>
+          <a:stretch>
+            <a:fillRect/>
+          </a:stretch>
+        </p:blipFill>
+        <p:spPr>
+          <a:xfrm>
+            <a:off x="5275943" y="4583274"/>
+            <a:ext cx="1640114" cy="1640114"/>
+          </a:xfrm>
+          <a:prstGeom prst="rect">
+            <a:avLst/>
+          </a:prstGeom>
+        </p:spPr>
+      </p:pic>
+    </p:spTree>
+    <p:extLst>
+      <p:ext uri="{BB962C8B-B14F-4D97-AF65-F5344CB8AC3E}">
+        <p14:creationId xmlns:p14="http://schemas.microsoft.com/office/powerpoint/2010/main" val="1736931660"/>
+      </p:ext>
+    </p:extLst>
+  </p:cSld>
+  <p:clrMapOvr>
+    <a:masterClrMapping/>
+  </p:clrMapOvr>
+  <mc:AlternateContent xmlns:mc="http://schemas.openxmlformats.org/markup-compatibility/2006">
+    <mc:Choice xmlns:p159="http://schemas.microsoft.com/office/powerpoint/2015/09/main" Requires="p159">
+      <p:transition xmlns:p14="http://schemas.microsoft.com/office/powerpoint/2010/main" spd="slow" p14:dur="2000">
+        <p159:morph option="byObject"/>
+      </p:transition>
+    </mc:Choice>
+    <mc:Fallback>
+      <p:transition spd="slow">
+        <p:fade/>
+      </p:transition>
+    </mc:Fallback>
+  </mc:AlternateContent>
+</p:sld>
+</file>
+
+<file path=ppt/slides/slide6.xml><?xml version="1.0" encoding="utf-8"?>
+<p:sld xmlns:a="http://schemas.openxmlformats.org/drawingml/2006/main" xmlns:r="http://schemas.openxmlformats.org/officeDocument/2006/relationships" xmlns:p="http://schemas.openxmlformats.org/presentationml/2006/main">
+  <p:cSld>
+    <p:spTree>
+      <p:nvGrpSpPr>
+        <p:cNvPr id="1" name="">
+          <a:extLst>
+            <a:ext uri="{FF2B5EF4-FFF2-40B4-BE49-F238E27FC236}">
+              <a16:creationId xmlns:a16="http://schemas.microsoft.com/office/drawing/2014/main" id="{1AB00F28-7A20-A34F-01CD-77222022C2A7}"/>
+            </a:ext>
+          </a:extLst>
+        </p:cNvPr>
+        <p:cNvGrpSpPr/>
+        <p:nvPr/>
+      </p:nvGrpSpPr>
+      <p:grpSpPr>
+        <a:xfrm>
+          <a:off x="0" y="0"/>
+          <a:ext cx="0" cy="0"/>
+          <a:chOff x="0" y="0"/>
+          <a:chExt cx="0" cy="0"/>
+        </a:xfrm>
+      </p:grpSpPr>
+      <p:sp>
+        <p:nvSpPr>
+          <p:cNvPr id="20" name="Rechteck: abgerundete Ecken 19">
+            <a:extLst>
+              <a:ext uri="{FF2B5EF4-FFF2-40B4-BE49-F238E27FC236}">
+                <a16:creationId xmlns:a16="http://schemas.microsoft.com/office/drawing/2014/main" id="{5445F523-A63F-BE8B-AD02-B3D25FB5B039}"/>
+              </a:ext>
+            </a:extLst>
+          </p:cNvPr>
+          <p:cNvSpPr/>
+          <p:nvPr/>
+        </p:nvSpPr>
+        <p:spPr>
+          <a:xfrm>
+            <a:off x="8734425" y="2598029"/>
+            <a:ext cx="3397704" cy="2145421"/>
+          </a:xfrm>
+          <a:prstGeom prst="roundRect">
+            <a:avLst/>
+          </a:prstGeom>
+          <a:solidFill>
+            <a:schemeClr val="accent5"/>
+          </a:solidFill>
+        </p:spPr>
+        <p:style>
+          <a:lnRef idx="2">
+            <a:schemeClr val="accent2">
+              <a:shade val="15000"/>
+            </a:schemeClr>
+          </a:lnRef>
+          <a:fillRef idx="1">
+            <a:schemeClr val="accent2"/>
+          </a:fillRef>
+          <a:effectRef idx="0">
+            <a:schemeClr val="accent2"/>
+          </a:effectRef>
+          <a:fontRef idx="minor">
+            <a:schemeClr val="lt1"/>
+          </a:fontRef>
+        </p:style>
+        <p:txBody>
+          <a:bodyPr rtlCol="0" anchor="ctr"/>
+          <a:lstStyle/>
+          <a:p>
+            <a:pPr algn="ctr"/>
+            <a:endParaRPr lang="de-AT"/>
+          </a:p>
+        </p:txBody>
+      </p:sp>
+      <p:sp>
+        <p:nvSpPr>
+          <p:cNvPr id="19" name="Rechteck: abgerundete Ecken 18">
+            <a:extLst>
+              <a:ext uri="{FF2B5EF4-FFF2-40B4-BE49-F238E27FC236}">
+                <a16:creationId xmlns:a16="http://schemas.microsoft.com/office/drawing/2014/main" id="{465719B4-CBDF-2E10-CC99-57FB2836A073}"/>
+              </a:ext>
+            </a:extLst>
+          </p:cNvPr>
+          <p:cNvSpPr/>
+          <p:nvPr/>
+        </p:nvSpPr>
+        <p:spPr>
+          <a:xfrm>
+            <a:off x="5772151" y="2598029"/>
+            <a:ext cx="2809874" cy="2145421"/>
+          </a:xfrm>
+          <a:prstGeom prst="roundRect">
+            <a:avLst/>
+          </a:prstGeom>
+        </p:spPr>
+        <p:style>
+          <a:lnRef idx="2">
+            <a:schemeClr val="accent2">
+              <a:shade val="15000"/>
+            </a:schemeClr>
+          </a:lnRef>
+          <a:fillRef idx="1">
+            <a:schemeClr val="accent2"/>
+          </a:fillRef>
+          <a:effectRef idx="0">
+            <a:schemeClr val="accent2"/>
+          </a:effectRef>
+          <a:fontRef idx="minor">
+            <a:schemeClr val="lt1"/>
+          </a:fontRef>
+        </p:style>
+        <p:txBody>
+          <a:bodyPr rtlCol="0" anchor="ctr"/>
+          <a:lstStyle/>
+          <a:p>
+            <a:pPr algn="ctr"/>
+            <a:endParaRPr lang="de-AT"/>
+          </a:p>
+        </p:txBody>
+      </p:sp>
+      <p:sp>
+        <p:nvSpPr>
+          <p:cNvPr id="16" name="Rechteck: abgerundete Ecken 15">
+            <a:extLst>
+              <a:ext uri="{FF2B5EF4-FFF2-40B4-BE49-F238E27FC236}">
+                <a16:creationId xmlns:a16="http://schemas.microsoft.com/office/drawing/2014/main" id="{615C0B27-1AF1-6829-7C32-D42BC18F3C8C}"/>
+              </a:ext>
+            </a:extLst>
+          </p:cNvPr>
+          <p:cNvSpPr/>
+          <p:nvPr/>
+        </p:nvSpPr>
+        <p:spPr>
+          <a:xfrm>
+            <a:off x="3090183" y="2580094"/>
+            <a:ext cx="2466975" cy="3821706"/>
+          </a:xfrm>
+          <a:prstGeom prst="roundRect">
+            <a:avLst/>
+          </a:prstGeom>
+        </p:spPr>
+        <p:style>
+          <a:lnRef idx="2">
+            <a:schemeClr val="accent3">
+              <a:shade val="15000"/>
+            </a:schemeClr>
+          </a:lnRef>
+          <a:fillRef idx="1">
+            <a:schemeClr val="accent3"/>
+          </a:fillRef>
+          <a:effectRef idx="0">
+            <a:schemeClr val="accent3"/>
+          </a:effectRef>
+          <a:fontRef idx="minor">
+            <a:schemeClr val="lt1"/>
+          </a:fontRef>
+        </p:style>
+        <p:txBody>
+          <a:bodyPr rtlCol="0" anchor="ctr"/>
+          <a:lstStyle/>
+          <a:p>
+            <a:pPr algn="ctr"/>
+            <a:endParaRPr lang="de-AT"/>
+          </a:p>
+        </p:txBody>
+      </p:sp>
+      <p:sp>
+        <p:nvSpPr>
+          <p:cNvPr id="5" name="Titel 4">
+            <a:extLst>
+              <a:ext uri="{FF2B5EF4-FFF2-40B4-BE49-F238E27FC236}">
+                <a16:creationId xmlns:a16="http://schemas.microsoft.com/office/drawing/2014/main" id="{ADCCD4FE-56BB-65F9-6166-146BDC1B3E38}"/>
+              </a:ext>
+            </a:extLst>
+          </p:cNvPr>
+          <p:cNvSpPr>
+            <a:spLocks noGrp="1"/>
+          </p:cNvSpPr>
+          <p:nvPr>
+            <p:ph type="title"/>
+          </p:nvPr>
+        </p:nvSpPr>
+        <p:spPr>
+          <a:xfrm>
+            <a:off x="2138391" y="438266"/>
+            <a:ext cx="9879437" cy="980844"/>
+          </a:xfrm>
+        </p:spPr>
+        <p:txBody>
+          <a:bodyPr rtlCol="0"/>
+          <a:lstStyle>
+            <a:defPPr>
+              <a:defRPr lang="de-DE"/>
+            </a:defPPr>
+          </a:lstStyle>
+          <a:p>
+            <a:pPr rtl="0"/>
+            <a:r>
+              <a:rPr lang="de-DE" sz="4000" dirty="0"/>
+              <a:t>Konto-arten</a:t>
+            </a:r>
+          </a:p>
+        </p:txBody>
+      </p:sp>
+      <p:sp>
+        <p:nvSpPr>
+          <p:cNvPr id="4" name="Textplatzhalter 3">
+            <a:extLst>
+              <a:ext uri="{FF2B5EF4-FFF2-40B4-BE49-F238E27FC236}">
+                <a16:creationId xmlns:a16="http://schemas.microsoft.com/office/drawing/2014/main" id="{265C9678-CB0E-6CC8-1456-205E4F49083F}"/>
+              </a:ext>
+            </a:extLst>
+          </p:cNvPr>
+          <p:cNvSpPr>
+            <a:spLocks noGrp="1"/>
+          </p:cNvSpPr>
+          <p:nvPr>
+            <p:ph type="body" sz="quarter" idx="13"/>
+          </p:nvPr>
+        </p:nvSpPr>
+        <p:spPr>
+          <a:xfrm>
+            <a:off x="240375" y="2827728"/>
+            <a:ext cx="3217378" cy="2344386"/>
+          </a:xfrm>
+        </p:spPr>
+        <p:txBody>
+          <a:bodyPr rtlCol="0"/>
+          <a:lstStyle>
+            <a:defPPr>
+              <a:defRPr lang="de-DE"/>
+            </a:defPPr>
+          </a:lstStyle>
+          <a:p>
+            <a:pPr rtl="0"/>
+            <a:r>
+              <a:rPr lang="de-DE" sz="2400" b="1" u="sng" dirty="0"/>
+              <a:t>Bei Registrierung:</a:t>
+            </a:r>
+            <a:endParaRPr lang="de-DE" sz="2000" dirty="0"/>
+          </a:p>
+          <a:p>
+            <a:pPr marL="285750" indent="-285750" rtl="0">
+              <a:buFont typeface="Arial" panose="020B0604020202020204" pitchFamily="34" charset="0"/>
+              <a:buChar char="•"/>
+            </a:pPr>
+            <a:r>
+              <a:rPr lang="de-DE" sz="2400" dirty="0"/>
+              <a:t>Berufsfahrer</a:t>
+            </a:r>
+          </a:p>
+          <a:p>
+            <a:pPr marL="285750" indent="-285750">
+              <a:buFont typeface="Arial" panose="020B0604020202020204" pitchFamily="34" charset="0"/>
+              <a:buChar char="•"/>
+            </a:pPr>
+            <a:r>
+              <a:rPr lang="de-DE" sz="2400" dirty="0"/>
+              <a:t>Fahrschüler</a:t>
+            </a:r>
+          </a:p>
+          <a:p>
+            <a:pPr marL="285750" indent="-285750" rtl="0">
+              <a:buFont typeface="Arial" panose="020B0604020202020204" pitchFamily="34" charset="0"/>
+              <a:buChar char="•"/>
+            </a:pPr>
+            <a:r>
+              <a:rPr lang="de-DE" sz="2400" dirty="0"/>
+              <a:t>Privat</a:t>
+            </a:r>
+            <a:endParaRPr lang="de-DE" sz="2000" dirty="0"/>
+          </a:p>
+        </p:txBody>
+      </p:sp>
+      <p:sp>
+        <p:nvSpPr>
+          <p:cNvPr id="2" name="Foliennummernplatzhalter 1">
+            <a:extLst>
+              <a:ext uri="{FF2B5EF4-FFF2-40B4-BE49-F238E27FC236}">
+                <a16:creationId xmlns:a16="http://schemas.microsoft.com/office/drawing/2014/main" id="{900EEA16-9149-C34F-9094-51163F2DF974}"/>
               </a:ext>
             </a:extLst>
           </p:cNvPr>
@@ -19895,32 +21903,639 @@
             <a:pPr rtl="0"/>
             <a:fld id="{48F63A3B-78C7-47BE-AE5E-E10140E04643}" type="slidenum">
               <a:rPr lang="de-DE" smtClean="0"/>
-              <a:pPr/>
-              <a:t>12</a:t>
+              <a:pPr rtl="0"/>
+              <a:t>6</a:t>
             </a:fld>
             <a:endParaRPr lang="de-DE" dirty="0"/>
           </a:p>
         </p:txBody>
       </p:sp>
+      <p:sp>
+        <p:nvSpPr>
+          <p:cNvPr id="9" name="Textfeld 8">
+            <a:extLst>
+              <a:ext uri="{FF2B5EF4-FFF2-40B4-BE49-F238E27FC236}">
+                <a16:creationId xmlns:a16="http://schemas.microsoft.com/office/drawing/2014/main" id="{62CD795D-3539-0A7F-8CC5-33994CD22656}"/>
+              </a:ext>
+            </a:extLst>
+          </p:cNvPr>
+          <p:cNvSpPr txBox="1"/>
+          <p:nvPr/>
+        </p:nvSpPr>
+        <p:spPr>
+          <a:xfrm>
+            <a:off x="3090183" y="1868777"/>
+            <a:ext cx="7458074" cy="523220"/>
+          </a:xfrm>
+          <a:prstGeom prst="rect">
+            <a:avLst/>
+          </a:prstGeom>
+          <a:noFill/>
+        </p:spPr>
+        <p:txBody>
+          <a:bodyPr wrap="square">
+            <a:spAutoFit/>
+          </a:bodyPr>
+          <a:lstStyle/>
+          <a:p>
+            <a:r>
+              <a:rPr lang="de-DE" sz="2800" b="1" u="sng" dirty="0">
+                <a:solidFill>
+                  <a:schemeClr val="accent1">
+                    <a:lumMod val="75000"/>
+                  </a:schemeClr>
+                </a:solidFill>
+              </a:rPr>
+              <a:t>Fahrtenprotokolle anders je nach Konto-Art:</a:t>
+            </a:r>
+          </a:p>
+        </p:txBody>
+      </p:sp>
+      <p:sp>
+        <p:nvSpPr>
+          <p:cNvPr id="12" name="Textfeld 11">
+            <a:extLst>
+              <a:ext uri="{FF2B5EF4-FFF2-40B4-BE49-F238E27FC236}">
+                <a16:creationId xmlns:a16="http://schemas.microsoft.com/office/drawing/2014/main" id="{EC7D429F-BCB5-A1DF-703D-244C40A0B59C}"/>
+              </a:ext>
+            </a:extLst>
+          </p:cNvPr>
+          <p:cNvSpPr txBox="1"/>
+          <p:nvPr/>
+        </p:nvSpPr>
+        <p:spPr>
+          <a:xfrm>
+            <a:off x="3252108" y="2687909"/>
+            <a:ext cx="2305050" cy="3754874"/>
+          </a:xfrm>
+          <a:prstGeom prst="rect">
+            <a:avLst/>
+          </a:prstGeom>
+          <a:noFill/>
+        </p:spPr>
+        <p:txBody>
+          <a:bodyPr wrap="square">
+            <a:spAutoFit/>
+          </a:bodyPr>
+          <a:lstStyle/>
+          <a:p>
+            <a:pPr>
+              <a:spcAft>
+                <a:spcPts val="600"/>
+              </a:spcAft>
+            </a:pPr>
+            <a:r>
+              <a:rPr lang="de-DE" b="1" u="sng" dirty="0">
+                <a:solidFill>
+                  <a:schemeClr val="bg1"/>
+                </a:solidFill>
+              </a:rPr>
+              <a:t>Berufsfahrer</a:t>
+            </a:r>
+            <a:r>
+              <a:rPr lang="de-DE" dirty="0">
+                <a:solidFill>
+                  <a:schemeClr val="bg1"/>
+                </a:solidFill>
+              </a:rPr>
+              <a:t>: </a:t>
+            </a:r>
+          </a:p>
+          <a:p>
+            <a:pPr marL="285750" indent="-285750">
+              <a:spcAft>
+                <a:spcPts val="600"/>
+              </a:spcAft>
+              <a:buFont typeface="Arial" panose="020B0604020202020204" pitchFamily="34" charset="0"/>
+              <a:buChar char="•"/>
+            </a:pPr>
+            <a:r>
+              <a:rPr lang="de-DE" b="1" dirty="0">
+                <a:solidFill>
+                  <a:schemeClr val="bg1"/>
+                </a:solidFill>
+              </a:rPr>
+              <a:t>Vorname</a:t>
+            </a:r>
+            <a:r>
+              <a:rPr lang="de-DE" dirty="0">
+                <a:solidFill>
+                  <a:schemeClr val="bg1"/>
+                </a:solidFill>
+              </a:rPr>
+              <a:t>? (automatisch)</a:t>
+            </a:r>
+          </a:p>
+          <a:p>
+            <a:pPr marL="285750" indent="-285750">
+              <a:spcAft>
+                <a:spcPts val="600"/>
+              </a:spcAft>
+              <a:buFont typeface="Arial" panose="020B0604020202020204" pitchFamily="34" charset="0"/>
+              <a:buChar char="•"/>
+            </a:pPr>
+            <a:r>
+              <a:rPr lang="de-DE" b="1" dirty="0">
+                <a:solidFill>
+                  <a:schemeClr val="bg1"/>
+                </a:solidFill>
+              </a:rPr>
+              <a:t>Nachname</a:t>
+            </a:r>
+            <a:r>
+              <a:rPr lang="de-DE" dirty="0">
+                <a:solidFill>
+                  <a:schemeClr val="bg1"/>
+                </a:solidFill>
+              </a:rPr>
+              <a:t>? (automatisch)</a:t>
+            </a:r>
+          </a:p>
+          <a:p>
+            <a:pPr marL="285750" indent="-285750">
+              <a:spcAft>
+                <a:spcPts val="600"/>
+              </a:spcAft>
+              <a:buFont typeface="Arial" panose="020B0604020202020204" pitchFamily="34" charset="0"/>
+              <a:buChar char="•"/>
+            </a:pPr>
+            <a:r>
+              <a:rPr lang="de-DE" b="1" dirty="0">
+                <a:solidFill>
+                  <a:schemeClr val="bg1"/>
+                </a:solidFill>
+              </a:rPr>
+              <a:t>Kilometerstand</a:t>
+            </a:r>
+            <a:r>
+              <a:rPr lang="de-DE" dirty="0">
+                <a:solidFill>
+                  <a:schemeClr val="bg1"/>
+                </a:solidFill>
+              </a:rPr>
+              <a:t>?</a:t>
+            </a:r>
+          </a:p>
+          <a:p>
+            <a:pPr marL="285750" indent="-285750">
+              <a:spcAft>
+                <a:spcPts val="600"/>
+              </a:spcAft>
+              <a:buFont typeface="Arial" panose="020B0604020202020204" pitchFamily="34" charset="0"/>
+              <a:buChar char="•"/>
+            </a:pPr>
+            <a:r>
+              <a:rPr lang="de-DE" b="1" dirty="0">
+                <a:solidFill>
+                  <a:schemeClr val="bg1"/>
+                </a:solidFill>
+              </a:rPr>
+              <a:t>Kennzeichen?</a:t>
+            </a:r>
+          </a:p>
+          <a:p>
+            <a:pPr marL="285750" indent="-285750">
+              <a:spcAft>
+                <a:spcPts val="600"/>
+              </a:spcAft>
+              <a:buFont typeface="Arial" panose="020B0604020202020204" pitchFamily="34" charset="0"/>
+              <a:buChar char="•"/>
+            </a:pPr>
+            <a:r>
+              <a:rPr lang="de-DE" b="1" dirty="0">
+                <a:solidFill>
+                  <a:schemeClr val="bg1"/>
+                </a:solidFill>
+              </a:rPr>
+              <a:t>Anfang?</a:t>
+            </a:r>
+          </a:p>
+          <a:p>
+            <a:pPr marL="285750" indent="-285750">
+              <a:spcAft>
+                <a:spcPts val="600"/>
+              </a:spcAft>
+              <a:buFont typeface="Arial" panose="020B0604020202020204" pitchFamily="34" charset="0"/>
+              <a:buChar char="•"/>
+            </a:pPr>
+            <a:r>
+              <a:rPr lang="de-DE" b="1" dirty="0">
+                <a:solidFill>
+                  <a:schemeClr val="bg1"/>
+                </a:solidFill>
+              </a:rPr>
+              <a:t>Ende?</a:t>
+            </a:r>
+          </a:p>
+          <a:p>
+            <a:pPr marL="285750" indent="-285750">
+              <a:spcAft>
+                <a:spcPts val="600"/>
+              </a:spcAft>
+              <a:buFont typeface="Arial" panose="020B0604020202020204" pitchFamily="34" charset="0"/>
+              <a:buChar char="•"/>
+            </a:pPr>
+            <a:r>
+              <a:rPr lang="de-DE" b="1" dirty="0">
+                <a:solidFill>
+                  <a:schemeClr val="bg1"/>
+                </a:solidFill>
+              </a:rPr>
+              <a:t>Kilometer?</a:t>
+            </a:r>
+          </a:p>
+          <a:p>
+            <a:pPr marL="285750" indent="-285750">
+              <a:spcAft>
+                <a:spcPts val="600"/>
+              </a:spcAft>
+              <a:buFont typeface="Arial" panose="020B0604020202020204" pitchFamily="34" charset="0"/>
+              <a:buChar char="•"/>
+            </a:pPr>
+            <a:r>
+              <a:rPr lang="de-DE" b="1" dirty="0">
+                <a:solidFill>
+                  <a:schemeClr val="bg1"/>
+                </a:solidFill>
+              </a:rPr>
+              <a:t>Datum</a:t>
+            </a:r>
+            <a:r>
+              <a:rPr lang="de-DE" dirty="0">
+                <a:solidFill>
+                  <a:schemeClr val="bg1"/>
+                </a:solidFill>
+              </a:rPr>
+              <a:t>?</a:t>
+            </a:r>
+          </a:p>
+        </p:txBody>
+      </p:sp>
+      <p:sp>
+        <p:nvSpPr>
+          <p:cNvPr id="13" name="Textfeld 12">
+            <a:extLst>
+              <a:ext uri="{FF2B5EF4-FFF2-40B4-BE49-F238E27FC236}">
+                <a16:creationId xmlns:a16="http://schemas.microsoft.com/office/drawing/2014/main" id="{529F5AB4-F832-419E-B718-B9C598622AD0}"/>
+              </a:ext>
+            </a:extLst>
+          </p:cNvPr>
+          <p:cNvSpPr txBox="1"/>
+          <p:nvPr/>
+        </p:nvSpPr>
+        <p:spPr>
+          <a:xfrm>
+            <a:off x="5848351" y="2705843"/>
+            <a:ext cx="2886074" cy="1785104"/>
+          </a:xfrm>
+          <a:prstGeom prst="rect">
+            <a:avLst/>
+          </a:prstGeom>
+          <a:noFill/>
+        </p:spPr>
+        <p:txBody>
+          <a:bodyPr wrap="square">
+            <a:spAutoFit/>
+          </a:bodyPr>
+          <a:lstStyle/>
+          <a:p>
+            <a:pPr>
+              <a:spcAft>
+                <a:spcPts val="600"/>
+              </a:spcAft>
+            </a:pPr>
+            <a:r>
+              <a:rPr lang="de-DE" b="1" u="sng" dirty="0">
+                <a:solidFill>
+                  <a:schemeClr val="bg1"/>
+                </a:solidFill>
+              </a:rPr>
+              <a:t>Fahrschüler (Extras)</a:t>
+            </a:r>
+            <a:r>
+              <a:rPr lang="de-DE" dirty="0">
+                <a:solidFill>
+                  <a:schemeClr val="bg1"/>
+                </a:solidFill>
+              </a:rPr>
+              <a:t>: </a:t>
+            </a:r>
+          </a:p>
+          <a:p>
+            <a:pPr marL="285750" indent="-285750">
+              <a:spcAft>
+                <a:spcPts val="600"/>
+              </a:spcAft>
+              <a:buFont typeface="Arial" panose="020B0604020202020204" pitchFamily="34" charset="0"/>
+              <a:buChar char="•"/>
+            </a:pPr>
+            <a:r>
+              <a:rPr lang="de-DE" dirty="0">
+                <a:solidFill>
+                  <a:schemeClr val="bg1"/>
+                </a:solidFill>
+              </a:rPr>
+              <a:t>Begleitperson</a:t>
+            </a:r>
+          </a:p>
+          <a:p>
+            <a:pPr marL="285750" indent="-285750">
+              <a:spcAft>
+                <a:spcPts val="600"/>
+              </a:spcAft>
+              <a:buFont typeface="Arial" panose="020B0604020202020204" pitchFamily="34" charset="0"/>
+              <a:buChar char="•"/>
+            </a:pPr>
+            <a:r>
+              <a:rPr lang="de-DE" dirty="0">
+                <a:solidFill>
+                  <a:schemeClr val="bg1"/>
+                </a:solidFill>
+              </a:rPr>
+              <a:t>Fahrbahnbeschaffenheit</a:t>
+            </a:r>
+          </a:p>
+          <a:p>
+            <a:pPr marL="285750" indent="-285750">
+              <a:spcAft>
+                <a:spcPts val="600"/>
+              </a:spcAft>
+              <a:buFont typeface="Arial" panose="020B0604020202020204" pitchFamily="34" charset="0"/>
+              <a:buChar char="•"/>
+            </a:pPr>
+            <a:r>
+              <a:rPr lang="de-DE" dirty="0">
+                <a:solidFill>
+                  <a:schemeClr val="bg1"/>
+                </a:solidFill>
+              </a:rPr>
+              <a:t>Unterschrift Schüler</a:t>
+            </a:r>
+          </a:p>
+          <a:p>
+            <a:pPr marL="285750" indent="-285750">
+              <a:spcAft>
+                <a:spcPts val="600"/>
+              </a:spcAft>
+              <a:buFont typeface="Arial" panose="020B0604020202020204" pitchFamily="34" charset="0"/>
+              <a:buChar char="•"/>
+            </a:pPr>
+            <a:r>
+              <a:rPr lang="de-DE" dirty="0">
+                <a:solidFill>
+                  <a:schemeClr val="bg1"/>
+                </a:solidFill>
+              </a:rPr>
+              <a:t>Unterschrift Begleiter</a:t>
+            </a:r>
+          </a:p>
+        </p:txBody>
+      </p:sp>
+      <p:sp>
+        <p:nvSpPr>
+          <p:cNvPr id="15" name="Textfeld 14">
+            <a:extLst>
+              <a:ext uri="{FF2B5EF4-FFF2-40B4-BE49-F238E27FC236}">
+                <a16:creationId xmlns:a16="http://schemas.microsoft.com/office/drawing/2014/main" id="{487AE909-1644-18F5-72D8-56A7940F1463}"/>
+              </a:ext>
+            </a:extLst>
+          </p:cNvPr>
+          <p:cNvSpPr txBox="1"/>
+          <p:nvPr/>
+        </p:nvSpPr>
+        <p:spPr>
+          <a:xfrm>
+            <a:off x="8774536" y="2705843"/>
+            <a:ext cx="3457576" cy="2616101"/>
+          </a:xfrm>
+          <a:prstGeom prst="rect">
+            <a:avLst/>
+          </a:prstGeom>
+          <a:noFill/>
+        </p:spPr>
+        <p:txBody>
+          <a:bodyPr wrap="square">
+            <a:spAutoFit/>
+          </a:bodyPr>
+          <a:lstStyle/>
+          <a:p>
+            <a:pPr>
+              <a:spcAft>
+                <a:spcPts val="600"/>
+              </a:spcAft>
+            </a:pPr>
+            <a:r>
+              <a:rPr lang="de-DE" b="1" u="sng" dirty="0">
+                <a:solidFill>
+                  <a:schemeClr val="bg1"/>
+                </a:solidFill>
+              </a:rPr>
+              <a:t>Privat</a:t>
+            </a:r>
+            <a:r>
+              <a:rPr lang="de-DE" dirty="0">
+                <a:solidFill>
+                  <a:schemeClr val="bg1"/>
+                </a:solidFill>
+              </a:rPr>
+              <a:t>: </a:t>
+            </a:r>
+          </a:p>
+          <a:p>
+            <a:pPr marL="285750" indent="-285750">
+              <a:spcAft>
+                <a:spcPts val="600"/>
+              </a:spcAft>
+              <a:buFont typeface="Arial" panose="020B0604020202020204" pitchFamily="34" charset="0"/>
+              <a:buChar char="•"/>
+            </a:pPr>
+            <a:r>
+              <a:rPr lang="de-DE" dirty="0">
+                <a:solidFill>
+                  <a:schemeClr val="bg1"/>
+                </a:solidFill>
+              </a:rPr>
+              <a:t>Protokoll wie Berufsfahrer</a:t>
+            </a:r>
+          </a:p>
+          <a:p>
+            <a:pPr marL="285750" indent="-285750">
+              <a:spcAft>
+                <a:spcPts val="600"/>
+              </a:spcAft>
+              <a:buFont typeface="Arial" panose="020B0604020202020204" pitchFamily="34" charset="0"/>
+              <a:buChar char="•"/>
+            </a:pPr>
+            <a:r>
+              <a:rPr lang="de-DE" dirty="0">
+                <a:solidFill>
+                  <a:schemeClr val="bg1"/>
+                </a:solidFill>
+              </a:rPr>
+              <a:t>Mehrere Privat-Konten können einen Haushalt bilden</a:t>
+            </a:r>
+          </a:p>
+          <a:p>
+            <a:pPr marL="285750" indent="-285750">
+              <a:spcAft>
+                <a:spcPts val="600"/>
+              </a:spcAft>
+              <a:buFont typeface="Arial" panose="020B0604020202020204" pitchFamily="34" charset="0"/>
+              <a:buChar char="•"/>
+            </a:pPr>
+            <a:r>
+              <a:rPr lang="de-DE" dirty="0">
+                <a:solidFill>
+                  <a:schemeClr val="bg1"/>
+                </a:solidFill>
+              </a:rPr>
+              <a:t>Gleiches Protokoll</a:t>
+            </a:r>
+          </a:p>
+          <a:p>
+            <a:pPr marL="285750" indent="-285750">
+              <a:buFont typeface="Arial" panose="020B0604020202020204" pitchFamily="34" charset="0"/>
+              <a:buChar char="•"/>
+            </a:pPr>
+            <a:endParaRPr lang="de-DE" dirty="0">
+              <a:solidFill>
+                <a:schemeClr val="bg1"/>
+              </a:solidFill>
+            </a:endParaRPr>
+          </a:p>
+          <a:p>
+            <a:pPr marL="285750" indent="-285750">
+              <a:buFont typeface="Arial" panose="020B0604020202020204" pitchFamily="34" charset="0"/>
+              <a:buChar char="•"/>
+            </a:pPr>
+            <a:endParaRPr lang="de-DE" dirty="0">
+              <a:solidFill>
+                <a:schemeClr val="bg1"/>
+              </a:solidFill>
+            </a:endParaRPr>
+          </a:p>
+          <a:p>
+            <a:pPr marL="285750" indent="-285750">
+              <a:buFont typeface="Arial" panose="020B0604020202020204" pitchFamily="34" charset="0"/>
+              <a:buChar char="•"/>
+            </a:pPr>
+            <a:endParaRPr lang="de-DE" dirty="0">
+              <a:solidFill>
+                <a:schemeClr val="bg1"/>
+              </a:solidFill>
+            </a:endParaRPr>
+          </a:p>
+        </p:txBody>
+      </p:sp>
+      <p:pic>
+        <p:nvPicPr>
+          <p:cNvPr id="25" name="Grafik 24" descr="Benutzer Silhouette">
+            <a:extLst>
+              <a:ext uri="{FF2B5EF4-FFF2-40B4-BE49-F238E27FC236}">
+                <a16:creationId xmlns:a16="http://schemas.microsoft.com/office/drawing/2014/main" id="{F9F0A5B1-F4D8-337F-4D86-BF0214D5964D}"/>
+              </a:ext>
+            </a:extLst>
+          </p:cNvPr>
+          <p:cNvPicPr>
+            <a:picLocks noChangeAspect="1"/>
+          </p:cNvPicPr>
+          <p:nvPr/>
+        </p:nvPicPr>
+        <p:blipFill>
+          <a:blip r:embed="rId3">
+            <a:extLst>
+              <a:ext uri="{96DAC541-7B7A-43D3-8B79-37D633B846F1}">
+                <asvg:svgBlip xmlns:asvg="http://schemas.microsoft.com/office/drawing/2016/SVG/main" r:embed="rId4"/>
+              </a:ext>
+            </a:extLst>
+          </a:blip>
+          <a:stretch>
+            <a:fillRect/>
+          </a:stretch>
+        </p:blipFill>
+        <p:spPr>
+          <a:xfrm>
+            <a:off x="9320570" y="4909063"/>
+            <a:ext cx="1533720" cy="1533720"/>
+          </a:xfrm>
+          <a:prstGeom prst="rect">
+            <a:avLst/>
+          </a:prstGeom>
+        </p:spPr>
+      </p:pic>
+      <p:pic>
+        <p:nvPicPr>
+          <p:cNvPr id="27" name="Grafik 26" descr="Benutzer Silhouette">
+            <a:extLst>
+              <a:ext uri="{FF2B5EF4-FFF2-40B4-BE49-F238E27FC236}">
+                <a16:creationId xmlns:a16="http://schemas.microsoft.com/office/drawing/2014/main" id="{A41C6F04-3D1D-BA53-452D-C6FCAFCA08AE}"/>
+              </a:ext>
+            </a:extLst>
+          </p:cNvPr>
+          <p:cNvPicPr>
+            <a:picLocks noChangeAspect="1"/>
+          </p:cNvPicPr>
+          <p:nvPr/>
+        </p:nvPicPr>
+        <p:blipFill>
+          <a:blip r:embed="rId5">
+            <a:extLst>
+              <a:ext uri="{96DAC541-7B7A-43D3-8B79-37D633B846F1}">
+                <asvg:svgBlip xmlns:asvg="http://schemas.microsoft.com/office/drawing/2016/SVG/main" r:embed="rId6"/>
+              </a:ext>
+            </a:extLst>
+          </a:blip>
+          <a:stretch>
+            <a:fillRect/>
+          </a:stretch>
+        </p:blipFill>
+        <p:spPr>
+          <a:xfrm>
+            <a:off x="6597424" y="5096259"/>
+            <a:ext cx="1159327" cy="1159327"/>
+          </a:xfrm>
+          <a:prstGeom prst="rect">
+            <a:avLst/>
+          </a:prstGeom>
+        </p:spPr>
+      </p:pic>
     </p:spTree>
     <p:extLst>
       <p:ext uri="{BB962C8B-B14F-4D97-AF65-F5344CB8AC3E}">
-        <p14:creationId xmlns:p14="http://schemas.microsoft.com/office/powerpoint/2010/main" val="1686213229"/>
+        <p14:creationId xmlns:p14="http://schemas.microsoft.com/office/powerpoint/2010/main" val="1724717974"/>
       </p:ext>
     </p:extLst>
   </p:cSld>
   <p:clrMapOvr>
     <a:masterClrMapping/>
   </p:clrMapOvr>
+  <mc:AlternateContent xmlns:mc="http://schemas.openxmlformats.org/markup-compatibility/2006">
+    <mc:Choice xmlns:p159="http://schemas.microsoft.com/office/powerpoint/2015/09/main" Requires="p159">
+      <p:transition xmlns:p14="http://schemas.microsoft.com/office/powerpoint/2010/main" spd="slow" p14:dur="2000">
+        <p159:morph option="byObject"/>
+      </p:transition>
+    </mc:Choice>
+    <mc:Fallback>
+      <p:transition spd="slow">
+        <p:fade/>
+      </p:transition>
+    </mc:Fallback>
+  </mc:AlternateContent>
 </p:sld>
 </file>
 
-<file path=ppt/slides/slide13.xml><?xml version="1.0" encoding="utf-8"?>
+<file path=ppt/slides/slide7.xml><?xml version="1.0" encoding="utf-8"?>
 <p:sld xmlns:a="http://schemas.openxmlformats.org/drawingml/2006/main" xmlns:r="http://schemas.openxmlformats.org/officeDocument/2006/relationships" xmlns:p="http://schemas.openxmlformats.org/presentationml/2006/main">
   <p:cSld>
     <p:spTree>
       <p:nvGrpSpPr>
-        <p:cNvPr id="1" name=""/>
+        <p:cNvPr id="1" name="">
+          <a:extLst>
+            <a:ext uri="{FF2B5EF4-FFF2-40B4-BE49-F238E27FC236}">
+              <a16:creationId xmlns:a16="http://schemas.microsoft.com/office/drawing/2014/main" id="{782C6FF3-A729-D3AB-A031-74E1F962DA90}"/>
+            </a:ext>
+          </a:extLst>
+        </p:cNvPr>
         <p:cNvGrpSpPr/>
         <p:nvPr/>
       </p:nvGrpSpPr>
@@ -19934,137 +22549,10 @@
       </p:grpSpPr>
       <p:sp>
         <p:nvSpPr>
-          <p:cNvPr id="2" name="Titel 1">
+          <p:cNvPr id="3" name="Titel 2">
             <a:extLst>
               <a:ext uri="{FF2B5EF4-FFF2-40B4-BE49-F238E27FC236}">
-                <a16:creationId xmlns:a16="http://schemas.microsoft.com/office/drawing/2014/main" id="{509D22C5-0C9E-B582-A8FE-B45E70A01E7F}"/>
-              </a:ext>
-            </a:extLst>
-          </p:cNvPr>
-          <p:cNvSpPr>
-            <a:spLocks noGrp="1"/>
-          </p:cNvSpPr>
-          <p:nvPr>
-            <p:ph type="ctrTitle"/>
-          </p:nvPr>
-        </p:nvSpPr>
-        <p:spPr>
-          <a:xfrm>
-            <a:off x="914401" y="849782"/>
-            <a:ext cx="3213716" cy="2727709"/>
-          </a:xfrm>
-        </p:spPr>
-        <p:txBody>
-          <a:bodyPr rtlCol="0"/>
-          <a:lstStyle>
-            <a:defPPr>
-              <a:defRPr lang="de-DE"/>
-            </a:defPPr>
-          </a:lstStyle>
-          <a:p>
-            <a:pPr rtl="0"/>
-            <a:r>
-              <a:rPr lang="de-DE" dirty="0"/>
-              <a:t>Vielen Dank</a:t>
-            </a:r>
-          </a:p>
-        </p:txBody>
-      </p:sp>
-      <p:sp>
-        <p:nvSpPr>
-          <p:cNvPr id="3" name="Untertitel 2">
-            <a:extLst>
-              <a:ext uri="{FF2B5EF4-FFF2-40B4-BE49-F238E27FC236}">
-                <a16:creationId xmlns:a16="http://schemas.microsoft.com/office/drawing/2014/main" id="{D8B5CEF2-E667-BBB5-2EA6-C06F93B6DE12}"/>
-              </a:ext>
-            </a:extLst>
-          </p:cNvPr>
-          <p:cNvSpPr>
-            <a:spLocks noGrp="1"/>
-          </p:cNvSpPr>
-          <p:nvPr>
-            <p:ph type="subTitle" idx="1"/>
-          </p:nvPr>
-        </p:nvSpPr>
-        <p:spPr>
-          <a:xfrm>
-            <a:off x="914401" y="3813606"/>
-            <a:ext cx="5715000" cy="2234642"/>
-          </a:xfrm>
-        </p:spPr>
-        <p:txBody>
-          <a:bodyPr rtlCol="0"/>
-          <a:lstStyle>
-            <a:defPPr>
-              <a:defRPr lang="de-DE"/>
-            </a:defPPr>
-          </a:lstStyle>
-          <a:p>
-            <a:pPr rtl="0"/>
-            <a:r>
-              <a:rPr lang="de-DE"/>
-              <a:t>Brita Tamm</a:t>
-            </a:r>
-          </a:p>
-          <a:p>
-            <a:pPr rtl="0"/>
-            <a:r>
-              <a:rPr lang="de-DE"/>
-              <a:t>502-555-0152</a:t>
-            </a:r>
-          </a:p>
-          <a:p>
-            <a:pPr rtl="0"/>
-            <a:r>
-              <a:rPr lang="de-DE"/>
-              <a:t>brita@firstupconsultants.com </a:t>
-            </a:r>
-          </a:p>
-          <a:p>
-            <a:pPr rtl="0"/>
-            <a:r>
-              <a:rPr lang="de-DE"/>
-              <a:t>www.firstupconsultants.com</a:t>
-            </a:r>
-          </a:p>
-        </p:txBody>
-      </p:sp>
-    </p:spTree>
-    <p:extLst>
-      <p:ext uri="{BB962C8B-B14F-4D97-AF65-F5344CB8AC3E}">
-        <p14:creationId xmlns:p14="http://schemas.microsoft.com/office/powerpoint/2010/main" val="1973173046"/>
-      </p:ext>
-    </p:extLst>
-  </p:cSld>
-  <p:clrMapOvr>
-    <a:masterClrMapping/>
-  </p:clrMapOvr>
-</p:sld>
-</file>
-
-<file path=ppt/slides/slide2.xml><?xml version="1.0" encoding="utf-8"?>
-<p:sld xmlns:a="http://schemas.openxmlformats.org/drawingml/2006/main" xmlns:r="http://schemas.openxmlformats.org/officeDocument/2006/relationships" xmlns:p="http://schemas.openxmlformats.org/presentationml/2006/main">
-  <p:cSld>
-    <p:spTree>
-      <p:nvGrpSpPr>
-        <p:cNvPr id="1" name=""/>
-        <p:cNvGrpSpPr/>
-        <p:nvPr/>
-      </p:nvGrpSpPr>
-      <p:grpSpPr>
-        <a:xfrm>
-          <a:off x="0" y="0"/>
-          <a:ext cx="0" cy="0"/>
-          <a:chOff x="0" y="0"/>
-          <a:chExt cx="0" cy="0"/>
-        </a:xfrm>
-      </p:grpSpPr>
-      <p:sp>
-        <p:nvSpPr>
-          <p:cNvPr id="2" name="Titel 1">
-            <a:extLst>
-              <a:ext uri="{FF2B5EF4-FFF2-40B4-BE49-F238E27FC236}">
-                <a16:creationId xmlns:a16="http://schemas.microsoft.com/office/drawing/2014/main" id="{13021072-4A77-DB4D-DF41-58EADB7DA94E}"/>
+                <a16:creationId xmlns:a16="http://schemas.microsoft.com/office/drawing/2014/main" id="{5EAA56E6-D056-7741-2E13-2FAAC4F28928}"/>
               </a:ext>
             </a:extLst>
           </p:cNvPr>
@@ -20077,8 +22565,8 @@
         </p:nvSpPr>
         <p:spPr>
           <a:xfrm>
-            <a:off x="914400" y="1057274"/>
-            <a:ext cx="6583680" cy="1531357"/>
+            <a:off x="918677" y="473148"/>
+            <a:ext cx="7725746" cy="1091627"/>
           </a:xfrm>
         </p:spPr>
         <p:txBody>
@@ -20091,74 +22579,8 @@
           <a:p>
             <a:pPr rtl="0"/>
             <a:r>
-              <a:rPr lang="de-DE"/>
-              <a:t>Agenda</a:t>
-            </a:r>
-          </a:p>
-        </p:txBody>
-      </p:sp>
-      <p:sp>
-        <p:nvSpPr>
-          <p:cNvPr id="3" name="Inhaltsplatzhalter 2">
-            <a:extLst>
-              <a:ext uri="{FF2B5EF4-FFF2-40B4-BE49-F238E27FC236}">
-                <a16:creationId xmlns:a16="http://schemas.microsoft.com/office/drawing/2014/main" id="{D4D22962-3C7F-E480-5C35-7F4860A098E1}"/>
-              </a:ext>
-            </a:extLst>
-          </p:cNvPr>
-          <p:cNvSpPr>
-            <a:spLocks noGrp="1"/>
-          </p:cNvSpPr>
-          <p:nvPr>
-            <p:ph idx="1"/>
-          </p:nvPr>
-        </p:nvSpPr>
-        <p:spPr>
-          <a:xfrm>
-            <a:off x="914400" y="2834640"/>
-            <a:ext cx="6583680" cy="3207344"/>
-          </a:xfrm>
-        </p:spPr>
-        <p:txBody>
-          <a:bodyPr rtlCol="0"/>
-          <a:lstStyle>
-            <a:defPPr>
-              <a:defRPr lang="de-DE"/>
-            </a:defPPr>
-          </a:lstStyle>
-          <a:p>
-            <a:pPr rtl="0"/>
-            <a:r>
-              <a:rPr lang="de-DE"/>
-              <a:t>Einführung</a:t>
-            </a:r>
-          </a:p>
-          <a:p>
-            <a:pPr rtl="0"/>
-            <a:r>
-              <a:rPr lang="de-DE"/>
-              <a:t>Vertrauen aufbauen</a:t>
-            </a:r>
-          </a:p>
-          <a:p>
-            <a:pPr rtl="0"/>
-            <a:r>
-              <a:rPr lang="de-DE"/>
-              <a:t>Einbindung des Publikums</a:t>
-            </a:r>
-          </a:p>
-          <a:p>
-            <a:pPr rtl="0"/>
-            <a:r>
-              <a:rPr lang="de-DE"/>
-              <a:t>Visuelle Hilfen</a:t>
-            </a:r>
-          </a:p>
-          <a:p>
-            <a:pPr rtl="0"/>
-            <a:r>
-              <a:rPr lang="de-DE"/>
-              <a:t>Letzte Tipps und Erkenntnisse</a:t>
+              <a:rPr lang="de-DE" dirty="0"/>
+              <a:t>Technologien</a:t>
             </a:r>
           </a:p>
         </p:txBody>
@@ -20168,7 +22590,7 @@
           <p:cNvPr id="4" name="Foliennummernplatzhalter 3">
             <a:extLst>
               <a:ext uri="{FF2B5EF4-FFF2-40B4-BE49-F238E27FC236}">
-                <a16:creationId xmlns:a16="http://schemas.microsoft.com/office/drawing/2014/main" id="{18D5CFA2-4E67-F157-5FFD-A246307D41F7}"/>
+                <a16:creationId xmlns:a16="http://schemas.microsoft.com/office/drawing/2014/main" id="{C8476ED0-D106-600A-1FE1-F501334657C0}"/>
               </a:ext>
             </a:extLst>
           </p:cNvPr>
@@ -20196,32 +22618,410 @@
             <a:pPr rtl="0"/>
             <a:fld id="{48F63A3B-78C7-47BE-AE5E-E10140E04643}" type="slidenum">
               <a:rPr lang="de-DE" smtClean="0"/>
-              <a:pPr/>
-              <a:t>2</a:t>
+              <a:pPr rtl="0"/>
+              <a:t>7</a:t>
             </a:fld>
             <a:endParaRPr lang="de-DE" dirty="0"/>
           </a:p>
         </p:txBody>
       </p:sp>
+      <p:pic>
+        <p:nvPicPr>
+          <p:cNvPr id="56" name="Grafik 55">
+            <a:extLst>
+              <a:ext uri="{FF2B5EF4-FFF2-40B4-BE49-F238E27FC236}">
+                <a16:creationId xmlns:a16="http://schemas.microsoft.com/office/drawing/2014/main" id="{EB2CF6D6-C049-B264-BA7B-72D43C2994F4}"/>
+              </a:ext>
+            </a:extLst>
+          </p:cNvPr>
+          <p:cNvPicPr>
+            <a:picLocks noChangeAspect="1"/>
+          </p:cNvPicPr>
+          <p:nvPr/>
+        </p:nvPicPr>
+        <p:blipFill>
+          <a:blip r:embed="rId3">
+            <a:extLst>
+              <a:ext uri="{96DAC541-7B7A-43D3-8B79-37D633B846F1}">
+                <asvg:svgBlip xmlns:asvg="http://schemas.microsoft.com/office/drawing/2016/SVG/main" r:embed="rId4"/>
+              </a:ext>
+            </a:extLst>
+          </a:blip>
+          <a:stretch>
+            <a:fillRect/>
+          </a:stretch>
+        </p:blipFill>
+        <p:spPr>
+          <a:xfrm>
+            <a:off x="984492" y="2306998"/>
+            <a:ext cx="931165" cy="931165"/>
+          </a:xfrm>
+          <a:prstGeom prst="rect">
+            <a:avLst/>
+          </a:prstGeom>
+        </p:spPr>
+      </p:pic>
+      <p:pic>
+        <p:nvPicPr>
+          <p:cNvPr id="58" name="Grafik 57">
+            <a:extLst>
+              <a:ext uri="{FF2B5EF4-FFF2-40B4-BE49-F238E27FC236}">
+                <a16:creationId xmlns:a16="http://schemas.microsoft.com/office/drawing/2014/main" id="{E640C9FB-292B-C228-CB33-F7BF1899086E}"/>
+              </a:ext>
+            </a:extLst>
+          </p:cNvPr>
+          <p:cNvPicPr>
+            <a:picLocks noChangeAspect="1"/>
+          </p:cNvPicPr>
+          <p:nvPr/>
+        </p:nvPicPr>
+        <p:blipFill>
+          <a:blip r:embed="rId5">
+            <a:extLst>
+              <a:ext uri="{96DAC541-7B7A-43D3-8B79-37D633B846F1}">
+                <asvg:svgBlip xmlns:asvg="http://schemas.microsoft.com/office/drawing/2016/SVG/main" r:embed="rId6"/>
+              </a:ext>
+            </a:extLst>
+          </a:blip>
+          <a:stretch>
+            <a:fillRect/>
+          </a:stretch>
+        </p:blipFill>
+        <p:spPr>
+          <a:xfrm>
+            <a:off x="5158544" y="2724406"/>
+            <a:ext cx="1944095" cy="1091627"/>
+          </a:xfrm>
+          <a:prstGeom prst="rect">
+            <a:avLst/>
+          </a:prstGeom>
+        </p:spPr>
+      </p:pic>
+      <p:pic>
+        <p:nvPicPr>
+          <p:cNvPr id="70" name="Grafik 69">
+            <a:extLst>
+              <a:ext uri="{FF2B5EF4-FFF2-40B4-BE49-F238E27FC236}">
+                <a16:creationId xmlns:a16="http://schemas.microsoft.com/office/drawing/2014/main" id="{FA0A01EA-1FAC-9FE8-CE29-1B37DF5586D6}"/>
+              </a:ext>
+            </a:extLst>
+          </p:cNvPr>
+          <p:cNvPicPr>
+            <a:picLocks noChangeAspect="1"/>
+          </p:cNvPicPr>
+          <p:nvPr/>
+        </p:nvPicPr>
+        <p:blipFill>
+          <a:blip r:embed="rId7">
+            <a:extLst>
+              <a:ext uri="{96DAC541-7B7A-43D3-8B79-37D633B846F1}">
+                <asvg:svgBlip xmlns:asvg="http://schemas.microsoft.com/office/drawing/2016/SVG/main" r:embed="rId8"/>
+              </a:ext>
+            </a:extLst>
+          </a:blip>
+          <a:stretch>
+            <a:fillRect/>
+          </a:stretch>
+        </p:blipFill>
+        <p:spPr>
+          <a:xfrm>
+            <a:off x="4367655" y="4541652"/>
+            <a:ext cx="931165" cy="931165"/>
+          </a:xfrm>
+          <a:prstGeom prst="rect">
+            <a:avLst/>
+          </a:prstGeom>
+        </p:spPr>
+      </p:pic>
+      <p:pic>
+        <p:nvPicPr>
+          <p:cNvPr id="72" name="Grafik 71">
+            <a:extLst>
+              <a:ext uri="{FF2B5EF4-FFF2-40B4-BE49-F238E27FC236}">
+                <a16:creationId xmlns:a16="http://schemas.microsoft.com/office/drawing/2014/main" id="{E0CF297D-F550-8EB4-C6EB-9475AF16FC70}"/>
+              </a:ext>
+            </a:extLst>
+          </p:cNvPr>
+          <p:cNvPicPr>
+            <a:picLocks noChangeAspect="1"/>
+          </p:cNvPicPr>
+          <p:nvPr/>
+        </p:nvPicPr>
+        <p:blipFill>
+          <a:blip r:embed="rId9">
+            <a:extLst>
+              <a:ext uri="{96DAC541-7B7A-43D3-8B79-37D633B846F1}">
+                <asvg:svgBlip xmlns:asvg="http://schemas.microsoft.com/office/drawing/2016/SVG/main" r:embed="rId10"/>
+              </a:ext>
+            </a:extLst>
+          </a:blip>
+          <a:stretch>
+            <a:fillRect/>
+          </a:stretch>
+        </p:blipFill>
+        <p:spPr>
+          <a:xfrm>
+            <a:off x="7717696" y="2744493"/>
+            <a:ext cx="2181226" cy="1090613"/>
+          </a:xfrm>
+          <a:prstGeom prst="rect">
+            <a:avLst/>
+          </a:prstGeom>
+        </p:spPr>
+      </p:pic>
+      <p:pic>
+        <p:nvPicPr>
+          <p:cNvPr id="76" name="Grafik 75">
+            <a:extLst>
+              <a:ext uri="{FF2B5EF4-FFF2-40B4-BE49-F238E27FC236}">
+                <a16:creationId xmlns:a16="http://schemas.microsoft.com/office/drawing/2014/main" id="{EFA39FF8-456B-7E08-2F8D-55B707E206B0}"/>
+              </a:ext>
+            </a:extLst>
+          </p:cNvPr>
+          <p:cNvPicPr>
+            <a:picLocks noChangeAspect="1"/>
+          </p:cNvPicPr>
+          <p:nvPr/>
+        </p:nvPicPr>
+        <p:blipFill>
+          <a:blip r:embed="rId11">
+            <a:extLst>
+              <a:ext uri="{96DAC541-7B7A-43D3-8B79-37D633B846F1}">
+                <asvg:svgBlip xmlns:asvg="http://schemas.microsoft.com/office/drawing/2016/SVG/main" r:embed="rId12"/>
+              </a:ext>
+            </a:extLst>
+          </a:blip>
+          <a:stretch>
+            <a:fillRect/>
+          </a:stretch>
+        </p:blipFill>
+        <p:spPr>
+          <a:xfrm>
+            <a:off x="7389923" y="3987322"/>
+            <a:ext cx="2508999" cy="1254500"/>
+          </a:xfrm>
+          <a:prstGeom prst="rect">
+            <a:avLst/>
+          </a:prstGeom>
+        </p:spPr>
+      </p:pic>
+      <p:pic>
+        <p:nvPicPr>
+          <p:cNvPr id="78" name="Grafik 77">
+            <a:extLst>
+              <a:ext uri="{FF2B5EF4-FFF2-40B4-BE49-F238E27FC236}">
+                <a16:creationId xmlns:a16="http://schemas.microsoft.com/office/drawing/2014/main" id="{0AC1489E-B4B8-C5D0-5DF7-EF08935197F8}"/>
+              </a:ext>
+            </a:extLst>
+          </p:cNvPr>
+          <p:cNvPicPr>
+            <a:picLocks noChangeAspect="1"/>
+          </p:cNvPicPr>
+          <p:nvPr/>
+        </p:nvPicPr>
+        <p:blipFill>
+          <a:blip r:embed="rId13">
+            <a:extLst>
+              <a:ext uri="{96DAC541-7B7A-43D3-8B79-37D633B846F1}">
+                <asvg:svgBlip xmlns:asvg="http://schemas.microsoft.com/office/drawing/2016/SVG/main" r:embed="rId14"/>
+              </a:ext>
+            </a:extLst>
+          </a:blip>
+          <a:stretch>
+            <a:fillRect/>
+          </a:stretch>
+        </p:blipFill>
+        <p:spPr>
+          <a:xfrm>
+            <a:off x="984492" y="3683407"/>
+            <a:ext cx="931165" cy="931165"/>
+          </a:xfrm>
+          <a:prstGeom prst="rect">
+            <a:avLst/>
+          </a:prstGeom>
+        </p:spPr>
+      </p:pic>
+      <p:pic>
+        <p:nvPicPr>
+          <p:cNvPr id="84" name="Grafik 83">
+            <a:extLst>
+              <a:ext uri="{FF2B5EF4-FFF2-40B4-BE49-F238E27FC236}">
+                <a16:creationId xmlns:a16="http://schemas.microsoft.com/office/drawing/2014/main" id="{06FA0559-9AA4-935E-02C1-C805BAD80172}"/>
+              </a:ext>
+            </a:extLst>
+          </p:cNvPr>
+          <p:cNvPicPr>
+            <a:picLocks noChangeAspect="1"/>
+          </p:cNvPicPr>
+          <p:nvPr/>
+        </p:nvPicPr>
+        <p:blipFill>
+          <a:blip r:embed="rId15">
+            <a:extLst>
+              <a:ext uri="{96DAC541-7B7A-43D3-8B79-37D633B846F1}">
+                <asvg:svgBlip xmlns:asvg="http://schemas.microsoft.com/office/drawing/2016/SVG/main" r:embed="rId16"/>
+              </a:ext>
+            </a:extLst>
+          </a:blip>
+          <a:stretch>
+            <a:fillRect/>
+          </a:stretch>
+        </p:blipFill>
+        <p:spPr>
+          <a:xfrm>
+            <a:off x="3051313" y="4541651"/>
+            <a:ext cx="931165" cy="931165"/>
+          </a:xfrm>
+          <a:prstGeom prst="rect">
+            <a:avLst/>
+          </a:prstGeom>
+        </p:spPr>
+      </p:pic>
+      <p:pic>
+        <p:nvPicPr>
+          <p:cNvPr id="88" name="Grafik 87">
+            <a:extLst>
+              <a:ext uri="{FF2B5EF4-FFF2-40B4-BE49-F238E27FC236}">
+                <a16:creationId xmlns:a16="http://schemas.microsoft.com/office/drawing/2014/main" id="{803B41D0-ABCA-5F23-FCA4-0937BBCAC54B}"/>
+              </a:ext>
+            </a:extLst>
+          </p:cNvPr>
+          <p:cNvPicPr>
+            <a:picLocks noChangeAspect="1"/>
+          </p:cNvPicPr>
+          <p:nvPr/>
+        </p:nvPicPr>
+        <p:blipFill>
+          <a:blip r:embed="rId17">
+            <a:extLst>
+              <a:ext uri="{96DAC541-7B7A-43D3-8B79-37D633B846F1}">
+                <asvg:svgBlip xmlns:asvg="http://schemas.microsoft.com/office/drawing/2016/SVG/main" r:embed="rId18"/>
+              </a:ext>
+            </a:extLst>
+          </a:blip>
+          <a:stretch>
+            <a:fillRect/>
+          </a:stretch>
+        </p:blipFill>
+        <p:spPr>
+          <a:xfrm>
+            <a:off x="5532405" y="4541650"/>
+            <a:ext cx="1070840" cy="931165"/>
+          </a:xfrm>
+          <a:prstGeom prst="rect">
+            <a:avLst/>
+          </a:prstGeom>
+        </p:spPr>
+      </p:pic>
+      <p:pic>
+        <p:nvPicPr>
+          <p:cNvPr id="94" name="Grafik 93">
+            <a:extLst>
+              <a:ext uri="{FF2B5EF4-FFF2-40B4-BE49-F238E27FC236}">
+                <a16:creationId xmlns:a16="http://schemas.microsoft.com/office/drawing/2014/main" id="{F5907737-13CA-856A-18AB-797AC2376166}"/>
+              </a:ext>
+            </a:extLst>
+          </p:cNvPr>
+          <p:cNvPicPr>
+            <a:picLocks noChangeAspect="1"/>
+          </p:cNvPicPr>
+          <p:nvPr/>
+        </p:nvPicPr>
+        <p:blipFill>
+          <a:blip r:embed="rId19">
+            <a:extLst>
+              <a:ext uri="{96DAC541-7B7A-43D3-8B79-37D633B846F1}">
+                <asvg:svgBlip xmlns:asvg="http://schemas.microsoft.com/office/drawing/2016/SVG/main" r:embed="rId20"/>
+              </a:ext>
+            </a:extLst>
+          </a:blip>
+          <a:stretch>
+            <a:fillRect/>
+          </a:stretch>
+        </p:blipFill>
+        <p:spPr>
+          <a:xfrm>
+            <a:off x="2740688" y="2306456"/>
+            <a:ext cx="1966686" cy="1966686"/>
+          </a:xfrm>
+          <a:prstGeom prst="rect">
+            <a:avLst/>
+          </a:prstGeom>
+        </p:spPr>
+      </p:pic>
+      <p:pic>
+        <p:nvPicPr>
+          <p:cNvPr id="96" name="Grafik 95">
+            <a:extLst>
+              <a:ext uri="{FF2B5EF4-FFF2-40B4-BE49-F238E27FC236}">
+                <a16:creationId xmlns:a16="http://schemas.microsoft.com/office/drawing/2014/main" id="{021F3BE4-E5CB-F5D6-340B-AABFB2C5BF63}"/>
+              </a:ext>
+            </a:extLst>
+          </p:cNvPr>
+          <p:cNvPicPr>
+            <a:picLocks noChangeAspect="1"/>
+          </p:cNvPicPr>
+          <p:nvPr/>
+        </p:nvPicPr>
+        <p:blipFill>
+          <a:blip r:embed="rId21">
+            <a:extLst>
+              <a:ext uri="{96DAC541-7B7A-43D3-8B79-37D633B846F1}">
+                <asvg:svgBlip xmlns:asvg="http://schemas.microsoft.com/office/drawing/2016/SVG/main" r:embed="rId22"/>
+              </a:ext>
+            </a:extLst>
+          </a:blip>
+          <a:stretch>
+            <a:fillRect/>
+          </a:stretch>
+        </p:blipFill>
+        <p:spPr>
+          <a:xfrm>
+            <a:off x="892278" y="4915021"/>
+            <a:ext cx="1115592" cy="1121967"/>
+          </a:xfrm>
+          <a:prstGeom prst="rect">
+            <a:avLst/>
+          </a:prstGeom>
+        </p:spPr>
+      </p:pic>
     </p:spTree>
     <p:extLst>
       <p:ext uri="{BB962C8B-B14F-4D97-AF65-F5344CB8AC3E}">
-        <p14:creationId xmlns:p14="http://schemas.microsoft.com/office/powerpoint/2010/main" val="3913219759"/>
+        <p14:creationId xmlns:p14="http://schemas.microsoft.com/office/powerpoint/2010/main" val="1326088408"/>
       </p:ext>
     </p:extLst>
   </p:cSld>
   <p:clrMapOvr>
     <a:masterClrMapping/>
   </p:clrMapOvr>
+  <mc:AlternateContent xmlns:mc="http://schemas.openxmlformats.org/markup-compatibility/2006">
+    <mc:Choice xmlns:p159="http://schemas.microsoft.com/office/powerpoint/2015/09/main" Requires="p159">
+      <p:transition xmlns:p14="http://schemas.microsoft.com/office/powerpoint/2010/main" spd="slow" p14:dur="2000">
+        <p159:morph option="byObject"/>
+      </p:transition>
+    </mc:Choice>
+    <mc:Fallback>
+      <p:transition spd="slow">
+        <p:fade/>
+      </p:transition>
+    </mc:Fallback>
+  </mc:AlternateContent>
 </p:sld>
 </file>
 
-<file path=ppt/slides/slide3.xml><?xml version="1.0" encoding="utf-8"?>
+<file path=ppt/slides/slide8.xml><?xml version="1.0" encoding="utf-8"?>
 <p:sld xmlns:a="http://schemas.openxmlformats.org/drawingml/2006/main" xmlns:r="http://schemas.openxmlformats.org/officeDocument/2006/relationships" xmlns:p="http://schemas.openxmlformats.org/presentationml/2006/main">
   <p:cSld>
     <p:spTree>
       <p:nvGrpSpPr>
-        <p:cNvPr id="1" name=""/>
+        <p:cNvPr id="1" name="">
+          <a:extLst>
+            <a:ext uri="{FF2B5EF4-FFF2-40B4-BE49-F238E27FC236}">
+              <a16:creationId xmlns:a16="http://schemas.microsoft.com/office/drawing/2014/main" id="{DE9DDD7D-11FC-346C-3C1C-7A84A0B8F2A7}"/>
+            </a:ext>
+          </a:extLst>
+        </p:cNvPr>
         <p:cNvGrpSpPr/>
         <p:nvPr/>
       </p:nvGrpSpPr>
@@ -20235,10 +23035,10 @@
       </p:grpSpPr>
       <p:sp>
         <p:nvSpPr>
-          <p:cNvPr id="2" name="Titel 1">
+          <p:cNvPr id="3" name="Titel 2">
             <a:extLst>
               <a:ext uri="{FF2B5EF4-FFF2-40B4-BE49-F238E27FC236}">
-                <a16:creationId xmlns:a16="http://schemas.microsoft.com/office/drawing/2014/main" id="{D54EDA75-0988-2AC2-87F8-8DEC83A7B9CA}"/>
+                <a16:creationId xmlns:a16="http://schemas.microsoft.com/office/drawing/2014/main" id="{46D1DACF-6337-0A58-9A8C-2B372376552A}"/>
               </a:ext>
             </a:extLst>
           </p:cNvPr>
@@ -20251,8 +23051,8 @@
         </p:nvSpPr>
         <p:spPr>
           <a:xfrm>
-            <a:off x="5702441" y="1061623"/>
-            <a:ext cx="5723586" cy="4739104"/>
+            <a:off x="1550563" y="771524"/>
+            <a:ext cx="9875463" cy="999746"/>
           </a:xfrm>
         </p:spPr>
         <p:txBody>
@@ -20266,263 +23066,17 @@
             <a:pPr rtl="0"/>
             <a:r>
               <a:rPr lang="de-DE" dirty="0"/>
-              <a:t>Die Macht der Kommunikation</a:t>
-            </a:r>
-          </a:p>
-        </p:txBody>
-      </p:sp>
-      <p:pic>
-        <p:nvPicPr>
-          <p:cNvPr id="7" name="Bildplatzhalter 6" descr="Eine Person, die vor einem Whiteboard steht">
-            <a:extLst>
-              <a:ext uri="{FF2B5EF4-FFF2-40B4-BE49-F238E27FC236}">
-                <a16:creationId xmlns:a16="http://schemas.microsoft.com/office/drawing/2014/main" id="{DD186EAB-37C7-E7E6-AE8D-F077D02804F9}"/>
-              </a:ext>
-            </a:extLst>
-          </p:cNvPr>
-          <p:cNvPicPr>
-            <a:picLocks noGrp="1" noChangeAspect="1"/>
-          </p:cNvPicPr>
-          <p:nvPr>
-            <p:ph type="pic" sz="quarter" idx="11"/>
-          </p:nvPr>
-        </p:nvPicPr>
-        <p:blipFill>
-          <a:blip r:embed="rId3">
-            <a:duotone>
-              <a:prstClr val="black"/>
-              <a:schemeClr val="accent1">
-                <a:tint val="45000"/>
-                <a:satMod val="400000"/>
-              </a:schemeClr>
-            </a:duotone>
-          </a:blip>
-          <a:srcRect l="27208" r="27208"/>
-          <a:stretch/>
-        </p:blipFill>
-        <p:spPr>
-          <a:xfrm>
-            <a:off x="443345" y="0"/>
-            <a:ext cx="4344695" cy="6359525"/>
-          </a:xfrm>
-        </p:spPr>
-      </p:pic>
-    </p:spTree>
-    <p:extLst>
-      <p:ext uri="{BB962C8B-B14F-4D97-AF65-F5344CB8AC3E}">
-        <p14:creationId xmlns:p14="http://schemas.microsoft.com/office/powerpoint/2010/main" val="2906491918"/>
-      </p:ext>
-    </p:extLst>
-  </p:cSld>
-  <p:clrMapOvr>
-    <a:masterClrMapping/>
-  </p:clrMapOvr>
-</p:sld>
-</file>
-
-<file path=ppt/slides/slide4.xml><?xml version="1.0" encoding="utf-8"?>
-<p:sld xmlns:a="http://schemas.openxmlformats.org/drawingml/2006/main" xmlns:r="http://schemas.openxmlformats.org/officeDocument/2006/relationships" xmlns:p="http://schemas.openxmlformats.org/presentationml/2006/main">
-  <p:cSld>
-    <p:spTree>
-      <p:nvGrpSpPr>
-        <p:cNvPr id="1" name=""/>
-        <p:cNvGrpSpPr/>
-        <p:nvPr/>
-      </p:nvGrpSpPr>
-      <p:grpSpPr>
-        <a:xfrm>
-          <a:off x="0" y="0"/>
-          <a:ext cx="0" cy="0"/>
-          <a:chOff x="0" y="0"/>
-          <a:chExt cx="0" cy="0"/>
-        </a:xfrm>
-      </p:grpSpPr>
-      <p:sp>
-        <p:nvSpPr>
-          <p:cNvPr id="2" name="Titel 1">
-            <a:extLst>
-              <a:ext uri="{FF2B5EF4-FFF2-40B4-BE49-F238E27FC236}">
-                <a16:creationId xmlns:a16="http://schemas.microsoft.com/office/drawing/2014/main" id="{D53B219B-7E3A-7E84-6386-37313F0CFB09}"/>
-              </a:ext>
-            </a:extLst>
-          </p:cNvPr>
-          <p:cNvSpPr>
-            <a:spLocks noGrp="1"/>
-          </p:cNvSpPr>
-          <p:nvPr>
-            <p:ph type="title"/>
-          </p:nvPr>
-        </p:nvSpPr>
-        <p:spPr>
-          <a:xfrm>
-            <a:off x="914400" y="1057275"/>
-            <a:ext cx="5259554" cy="2495028"/>
-          </a:xfrm>
-        </p:spPr>
-        <p:txBody>
-          <a:bodyPr rtlCol="0"/>
-          <a:lstStyle>
-            <a:defPPr>
-              <a:defRPr lang="de-DE"/>
-            </a:defPPr>
-          </a:lstStyle>
-          <a:p>
-            <a:pPr rtl="0"/>
-            <a:r>
-              <a:rPr lang="de-DE" dirty="0"/>
-              <a:t>Nervosität überwinden</a:t>
+              <a:t>Organisation</a:t>
             </a:r>
           </a:p>
         </p:txBody>
       </p:sp>
       <p:sp>
         <p:nvSpPr>
-          <p:cNvPr id="3" name="Textplatzhalter 2">
+          <p:cNvPr id="12" name="Inhaltsplatzhalter 3">
             <a:extLst>
               <a:ext uri="{FF2B5EF4-FFF2-40B4-BE49-F238E27FC236}">
-                <a16:creationId xmlns:a16="http://schemas.microsoft.com/office/drawing/2014/main" id="{A2E339BF-E6D7-DD0E-AF02-6813852EE723}"/>
-              </a:ext>
-            </a:extLst>
-          </p:cNvPr>
-          <p:cNvSpPr>
-            <a:spLocks noGrp="1"/>
-          </p:cNvSpPr>
-          <p:nvPr>
-            <p:ph idx="1"/>
-          </p:nvPr>
-        </p:nvSpPr>
-        <p:spPr>
-          <a:xfrm>
-            <a:off x="914400" y="3808750"/>
-            <a:ext cx="5259554" cy="2233233"/>
-          </a:xfrm>
-        </p:spPr>
-        <p:txBody>
-          <a:bodyPr rtlCol="0"/>
-          <a:lstStyle>
-            <a:defPPr>
-              <a:defRPr lang="de-DE"/>
-            </a:defPPr>
-          </a:lstStyle>
-          <a:p>
-            <a:pPr rtl="0"/>
-            <a:r>
-              <a:rPr lang="de-DE"/>
-              <a:t>Strategien zur Vertrauensbildung</a:t>
-            </a:r>
-          </a:p>
-        </p:txBody>
-      </p:sp>
-      <p:pic>
-        <p:nvPicPr>
-          <p:cNvPr id="6" name="Bildplatzhalter 5" descr="Eine Person, die ein Mikrofon hält und vor einer Gruppe von Personen steht">
-            <a:extLst>
-              <a:ext uri="{FF2B5EF4-FFF2-40B4-BE49-F238E27FC236}">
-                <a16:creationId xmlns:a16="http://schemas.microsoft.com/office/drawing/2014/main" id="{FECDA901-DD88-89EB-E10E-A2994D0A92DB}"/>
-              </a:ext>
-            </a:extLst>
-          </p:cNvPr>
-          <p:cNvPicPr>
-            <a:picLocks noGrp="1" noChangeAspect="1"/>
-          </p:cNvPicPr>
-          <p:nvPr>
-            <p:ph type="pic" sz="quarter" idx="11"/>
-          </p:nvPr>
-        </p:nvPicPr>
-        <p:blipFill rotWithShape="1">
-          <a:blip r:embed="rId3">
-            <a:duotone>
-              <a:prstClr val="black"/>
-              <a:schemeClr val="accent3">
-                <a:tint val="45000"/>
-                <a:satMod val="400000"/>
-              </a:schemeClr>
-            </a:duotone>
-          </a:blip>
-          <a:srcRect l="27745" r="27745"/>
-          <a:stretch/>
-        </p:blipFill>
-        <p:spPr>
-          <a:xfrm>
-            <a:off x="7414194" y="410780"/>
-            <a:ext cx="4344695" cy="6447220"/>
-          </a:xfrm>
-        </p:spPr>
-      </p:pic>
-    </p:spTree>
-    <p:extLst>
-      <p:ext uri="{BB962C8B-B14F-4D97-AF65-F5344CB8AC3E}">
-        <p14:creationId xmlns:p14="http://schemas.microsoft.com/office/powerpoint/2010/main" val="2952923800"/>
-      </p:ext>
-    </p:extLst>
-  </p:cSld>
-  <p:clrMapOvr>
-    <a:masterClrMapping/>
-  </p:clrMapOvr>
-</p:sld>
-</file>
-
-<file path=ppt/slides/slide5.xml><?xml version="1.0" encoding="utf-8"?>
-<p:sld xmlns:a="http://schemas.openxmlformats.org/drawingml/2006/main" xmlns:r="http://schemas.openxmlformats.org/officeDocument/2006/relationships" xmlns:p="http://schemas.openxmlformats.org/presentationml/2006/main">
-  <p:cSld>
-    <p:spTree>
-      <p:nvGrpSpPr>
-        <p:cNvPr id="1" name=""/>
-        <p:cNvGrpSpPr/>
-        <p:nvPr/>
-      </p:nvGrpSpPr>
-      <p:grpSpPr>
-        <a:xfrm>
-          <a:off x="0" y="0"/>
-          <a:ext cx="0" cy="0"/>
-          <a:chOff x="0" y="0"/>
-          <a:chExt cx="0" cy="0"/>
-        </a:xfrm>
-      </p:grpSpPr>
-      <p:sp>
-        <p:nvSpPr>
-          <p:cNvPr id="2" name="Titel 1">
-            <a:extLst>
-              <a:ext uri="{FF2B5EF4-FFF2-40B4-BE49-F238E27FC236}">
-                <a16:creationId xmlns:a16="http://schemas.microsoft.com/office/drawing/2014/main" id="{FD5E8954-9BCB-7FD9-A210-38DC54382D45}"/>
-              </a:ext>
-            </a:extLst>
-          </p:cNvPr>
-          <p:cNvSpPr>
-            <a:spLocks noGrp="1"/>
-          </p:cNvSpPr>
-          <p:nvPr>
-            <p:ph type="title"/>
-          </p:nvPr>
-        </p:nvSpPr>
-        <p:spPr>
-          <a:xfrm>
-            <a:off x="3460565" y="1057274"/>
-            <a:ext cx="7965461" cy="994164"/>
-          </a:xfrm>
-        </p:spPr>
-        <p:txBody>
-          <a:bodyPr rtlCol="0"/>
-          <a:lstStyle>
-            <a:defPPr>
-              <a:defRPr lang="de-DE"/>
-            </a:defPPr>
-          </a:lstStyle>
-          <a:p>
-            <a:pPr rtl="0"/>
-            <a:r>
-              <a:rPr lang="de-DE"/>
-              <a:t>Einbindung des Publikums</a:t>
-            </a:r>
-          </a:p>
-        </p:txBody>
-      </p:sp>
-      <p:sp>
-        <p:nvSpPr>
-          <p:cNvPr id="3" name="Inhaltsplatzhalter 2">
-            <a:extLst>
-              <a:ext uri="{FF2B5EF4-FFF2-40B4-BE49-F238E27FC236}">
-                <a16:creationId xmlns:a16="http://schemas.microsoft.com/office/drawing/2014/main" id="{75111C33-898C-4414-4665-5136EB6FC126}"/>
+                <a16:creationId xmlns:a16="http://schemas.microsoft.com/office/drawing/2014/main" id="{CFE888B7-B4AA-A3AD-620D-F9C9BEBC776F}"/>
               </a:ext>
             </a:extLst>
           </p:cNvPr>
@@ -20535,161 +23089,114 @@
         </p:nvSpPr>
         <p:spPr>
           <a:xfrm>
-            <a:off x="3460565" y="2303029"/>
-            <a:ext cx="7965460" cy="3497698"/>
+            <a:off x="1674389" y="2130364"/>
+            <a:ext cx="5829147" cy="3961593"/>
           </a:xfrm>
         </p:spPr>
         <p:txBody>
-          <a:bodyPr rtlCol="0"/>
+          <a:bodyPr rtlCol="0">
+            <a:normAutofit/>
+          </a:bodyPr>
           <a:lstStyle>
             <a:defPPr>
               <a:defRPr lang="de-DE"/>
             </a:defPPr>
           </a:lstStyle>
           <a:p>
-            <a:pPr rtl="0"/>
+            <a:pPr rtl="0">
+              <a:spcAft>
+                <a:spcPts val="600"/>
+              </a:spcAft>
+            </a:pPr>
             <a:r>
-              <a:rPr lang="de-DE"/>
-              <a:t>Stellen Sie Augenkontakt mit Ihrem Publikum her, um ein Gefühl von Vertrautheit und Beteiligung zu erzeugen.</a:t>
+              <a:rPr lang="de-DE" sz="2000" dirty="0"/>
+              <a:t>Arbeiten nach SCRUM</a:t>
             </a:r>
           </a:p>
           <a:p>
-            <a:pPr rtl="0"/>
+            <a:pPr lvl="1">
+              <a:spcAft>
+                <a:spcPts val="600"/>
+              </a:spcAft>
+              <a:buFont typeface="Wingdings" panose="05000000000000000000" pitchFamily="2" charset="2"/>
+              <a:buChar char="§"/>
+            </a:pPr>
             <a:r>
-              <a:rPr lang="de-DE"/>
-              <a:t>Binden Sie glaubwürdige Geschichten in Ihre Präsentation ein und verwenden Sie Erzählungen, die Ihre Botschaft einprägsam und überzeugend machen.</a:t>
+              <a:rPr lang="de-DE" sz="2000" dirty="0"/>
+              <a:t>2–4-wöchige Sprints</a:t>
             </a:r>
           </a:p>
           <a:p>
-            <a:pPr rtl="0"/>
+            <a:pPr rtl="0">
+              <a:spcAft>
+                <a:spcPts val="600"/>
+              </a:spcAft>
+            </a:pPr>
             <a:r>
-              <a:rPr lang="de-DE"/>
-              <a:t>Ermutigen Sie zu Fragen und geben Sie durchdachte Antworten, um die Beteiligung des Publikums zu fördern.</a:t>
+              <a:rPr lang="de-DE" sz="2000" dirty="0"/>
+              <a:t>Wöchentliche Meetings zur Abstimmung</a:t>
             </a:r>
           </a:p>
           <a:p>
-            <a:pPr rtl="0"/>
+            <a:pPr rtl="0">
+              <a:spcAft>
+                <a:spcPts val="600"/>
+              </a:spcAft>
+            </a:pPr>
             <a:r>
-              <a:rPr lang="de-DE"/>
-              <a:t>Verwenden Sie Live-Abstimmungen oder Umfragen, um die Meinung des Publikums einzuholen, das Engagement zu fördern und dafür zu sorgen, dass sich das Publikum einbezogen fühlt.</a:t>
+              <a:rPr lang="de-DE" sz="2000" dirty="0"/>
+              <a:t>Rollenverteilung und Verantwortlichkeiten</a:t>
             </a:r>
+          </a:p>
+          <a:p>
+            <a:pPr rtl="0">
+              <a:spcAft>
+                <a:spcPts val="600"/>
+              </a:spcAft>
+            </a:pPr>
+            <a:r>
+              <a:rPr lang="de-DE" sz="2000" dirty="0"/>
+              <a:t>Dokumentation nach CM-Plan</a:t>
+            </a:r>
+          </a:p>
+          <a:p>
+            <a:pPr rtl="0">
+              <a:spcAft>
+                <a:spcPts val="600"/>
+              </a:spcAft>
+            </a:pPr>
+            <a:r>
+              <a:rPr lang="de-DE" sz="2000" dirty="0"/>
+              <a:t>Einhaltung der Meilensteine</a:t>
+            </a:r>
+          </a:p>
+          <a:p>
+            <a:pPr rtl="0">
+              <a:spcAft>
+                <a:spcPts val="600"/>
+              </a:spcAft>
+            </a:pPr>
+            <a:r>
+              <a:rPr lang="de-DE" sz="2000" dirty="0"/>
+              <a:t>Einhaltung der internen Rollen</a:t>
+            </a:r>
+          </a:p>
+          <a:p>
+            <a:pPr rtl="0">
+              <a:spcAft>
+                <a:spcPts val="600"/>
+              </a:spcAft>
+            </a:pPr>
+            <a:endParaRPr lang="de-DE" dirty="0"/>
           </a:p>
         </p:txBody>
       </p:sp>
       <p:sp>
         <p:nvSpPr>
-          <p:cNvPr id="23" name="Foliennummernplatzhalter 22">
+          <p:cNvPr id="2" name="Foliennummernplatzhalter 1">
             <a:extLst>
               <a:ext uri="{FF2B5EF4-FFF2-40B4-BE49-F238E27FC236}">
-                <a16:creationId xmlns:a16="http://schemas.microsoft.com/office/drawing/2014/main" id="{94FF72B7-0438-3641-5939-75128934B0DF}"/>
-              </a:ext>
-            </a:extLst>
-          </p:cNvPr>
-          <p:cNvSpPr>
-            <a:spLocks noGrp="1"/>
-          </p:cNvSpPr>
-          <p:nvPr>
-            <p:ph type="sldNum" sz="quarter" idx="10"/>
-          </p:nvPr>
-        </p:nvSpPr>
-        <p:spPr>
-          <a:xfrm>
-            <a:off x="10358437" y="457199"/>
-            <a:ext cx="1067589" cy="471489"/>
-          </a:xfrm>
-        </p:spPr>
-        <p:txBody>
-          <a:bodyPr rtlCol="0"/>
-          <a:lstStyle>
-            <a:defPPr>
-              <a:defRPr lang="de-DE"/>
-            </a:defPPr>
-          </a:lstStyle>
-          <a:p>
-            <a:pPr rtl="0"/>
-            <a:fld id="{48F63A3B-78C7-47BE-AE5E-E10140E04643}" type="slidenum">
-              <a:rPr lang="de-DE" smtClean="0"/>
-              <a:pPr/>
-              <a:t>5</a:t>
-            </a:fld>
-            <a:endParaRPr lang="de-DE" dirty="0"/>
-          </a:p>
-        </p:txBody>
-      </p:sp>
-    </p:spTree>
-    <p:extLst>
-      <p:ext uri="{BB962C8B-B14F-4D97-AF65-F5344CB8AC3E}">
-        <p14:creationId xmlns:p14="http://schemas.microsoft.com/office/powerpoint/2010/main" val="685681062"/>
-      </p:ext>
-    </p:extLst>
-  </p:cSld>
-  <p:clrMapOvr>
-    <a:masterClrMapping/>
-  </p:clrMapOvr>
-</p:sld>
-</file>
-
-<file path=ppt/slides/slide6.xml><?xml version="1.0" encoding="utf-8"?>
-<p:sld xmlns:a="http://schemas.openxmlformats.org/drawingml/2006/main" xmlns:r="http://schemas.openxmlformats.org/officeDocument/2006/relationships" xmlns:p="http://schemas.openxmlformats.org/presentationml/2006/main">
-  <p:cSld>
-    <p:spTree>
-      <p:nvGrpSpPr>
-        <p:cNvPr id="1" name=""/>
-        <p:cNvGrpSpPr/>
-        <p:nvPr/>
-      </p:nvGrpSpPr>
-      <p:grpSpPr>
-        <a:xfrm>
-          <a:off x="0" y="0"/>
-          <a:ext cx="0" cy="0"/>
-          <a:chOff x="0" y="0"/>
-          <a:chExt cx="0" cy="0"/>
-        </a:xfrm>
-      </p:grpSpPr>
-      <p:sp>
-        <p:nvSpPr>
-          <p:cNvPr id="2" name="Titel 1">
-            <a:extLst>
-              <a:ext uri="{FF2B5EF4-FFF2-40B4-BE49-F238E27FC236}">
-                <a16:creationId xmlns:a16="http://schemas.microsoft.com/office/drawing/2014/main" id="{B6210199-C129-11F0-56F2-2D1AED21CB4C}"/>
-              </a:ext>
-            </a:extLst>
-          </p:cNvPr>
-          <p:cNvSpPr>
-            <a:spLocks noGrp="1"/>
-          </p:cNvSpPr>
-          <p:nvPr>
-            <p:ph type="title"/>
-          </p:nvPr>
-        </p:nvSpPr>
-        <p:spPr>
-          <a:xfrm>
-            <a:off x="4364809" y="1057274"/>
-            <a:ext cx="5161746" cy="2520217"/>
-          </a:xfrm>
-        </p:spPr>
-        <p:txBody>
-          <a:bodyPr rtlCol="0"/>
-          <a:lstStyle>
-            <a:defPPr>
-              <a:defRPr lang="de-DE"/>
-            </a:defPPr>
-          </a:lstStyle>
-          <a:p>
-            <a:pPr rtl="0"/>
-            <a:r>
-              <a:rPr lang="de-DE" dirty="0"/>
-              <a:t>Auswählen visueller Hilfen</a:t>
-            </a:r>
-          </a:p>
-        </p:txBody>
-      </p:sp>
-      <p:sp>
-        <p:nvSpPr>
-          <p:cNvPr id="3" name="Foliennummernplatzhalter 2">
-            <a:extLst>
-              <a:ext uri="{FF2B5EF4-FFF2-40B4-BE49-F238E27FC236}">
-                <a16:creationId xmlns:a16="http://schemas.microsoft.com/office/drawing/2014/main" id="{370AEC4F-E711-8552-9C34-82C1514A1E37}"/>
+                <a16:creationId xmlns:a16="http://schemas.microsoft.com/office/drawing/2014/main" id="{3823575E-73C7-55D2-E42E-0F42C34803BC}"/>
               </a:ext>
             </a:extLst>
           </p:cNvPr>
@@ -20717,70 +23224,122 @@
             <a:pPr rtl="0"/>
             <a:fld id="{48F63A3B-78C7-47BE-AE5E-E10140E04643}" type="slidenum">
               <a:rPr lang="de-DE" smtClean="0"/>
-              <a:pPr/>
-              <a:t>6</a:t>
+              <a:pPr rtl="0"/>
+              <a:t>8</a:t>
             </a:fld>
             <a:endParaRPr lang="de-DE" dirty="0"/>
           </a:p>
         </p:txBody>
       </p:sp>
-      <p:sp>
-        <p:nvSpPr>
-          <p:cNvPr id="4" name="Inhaltsplatzhalter 3">
+      <p:pic>
+        <p:nvPicPr>
+          <p:cNvPr id="7" name="Grafik 6" descr="Management mit einfarbiger Füllung">
             <a:extLst>
               <a:ext uri="{FF2B5EF4-FFF2-40B4-BE49-F238E27FC236}">
-                <a16:creationId xmlns:a16="http://schemas.microsoft.com/office/drawing/2014/main" id="{BDDD6BDC-E008-6AB7-55A1-46ED9BCF054F}"/>
+                <a16:creationId xmlns:a16="http://schemas.microsoft.com/office/drawing/2014/main" id="{892D7DDC-8734-BB55-C78D-78711B611102}"/>
               </a:ext>
             </a:extLst>
           </p:cNvPr>
-          <p:cNvSpPr>
-            <a:spLocks noGrp="1"/>
-          </p:cNvSpPr>
-          <p:nvPr>
-            <p:ph idx="11"/>
-          </p:nvPr>
-        </p:nvSpPr>
+          <p:cNvPicPr>
+            <a:picLocks noChangeAspect="1"/>
+          </p:cNvPicPr>
+          <p:nvPr/>
+        </p:nvPicPr>
+        <p:blipFill>
+          <a:blip r:embed="rId3">
+            <a:extLst>
+              <a:ext uri="{96DAC541-7B7A-43D3-8B79-37D633B846F1}">
+                <asvg:svgBlip xmlns:asvg="http://schemas.microsoft.com/office/drawing/2016/SVG/main" r:embed="rId4"/>
+              </a:ext>
+            </a:extLst>
+          </a:blip>
+          <a:stretch>
+            <a:fillRect/>
+          </a:stretch>
+        </p:blipFill>
         <p:spPr>
           <a:xfrm>
-            <a:off x="4364808" y="3808750"/>
-            <a:ext cx="7043618" cy="2233233"/>
+            <a:off x="7880906" y="3686695"/>
+            <a:ext cx="1949376" cy="1949376"/>
           </a:xfrm>
+          <a:prstGeom prst="rect">
+            <a:avLst/>
+          </a:prstGeom>
         </p:spPr>
-        <p:txBody>
-          <a:bodyPr rtlCol="0"/>
-          <a:lstStyle>
-            <a:defPPr>
-              <a:defRPr lang="de-DE"/>
-            </a:defPPr>
-          </a:lstStyle>
-          <a:p>
-            <a:pPr rtl="0"/>
-            <a:r>
-              <a:rPr lang="de-DE"/>
-              <a:t>Verbessern Ihrer Präsentation</a:t>
-            </a:r>
-          </a:p>
-        </p:txBody>
-      </p:sp>
+      </p:pic>
+      <p:pic>
+        <p:nvPicPr>
+          <p:cNvPr id="9" name="Grafik 8" descr="Geschäftswachstum mit einfarbiger Füllung">
+            <a:extLst>
+              <a:ext uri="{FF2B5EF4-FFF2-40B4-BE49-F238E27FC236}">
+                <a16:creationId xmlns:a16="http://schemas.microsoft.com/office/drawing/2014/main" id="{72402115-6DE5-7348-1566-CFB4E5B83F22}"/>
+              </a:ext>
+            </a:extLst>
+          </p:cNvPr>
+          <p:cNvPicPr>
+            <a:picLocks noChangeAspect="1"/>
+          </p:cNvPicPr>
+          <p:nvPr/>
+        </p:nvPicPr>
+        <p:blipFill>
+          <a:blip r:embed="rId5">
+            <a:extLst>
+              <a:ext uri="{96DAC541-7B7A-43D3-8B79-37D633B846F1}">
+                <asvg:svgBlip xmlns:asvg="http://schemas.microsoft.com/office/drawing/2016/SVG/main" r:embed="rId6"/>
+              </a:ext>
+            </a:extLst>
+          </a:blip>
+          <a:stretch>
+            <a:fillRect/>
+          </a:stretch>
+        </p:blipFill>
+        <p:spPr>
+          <a:xfrm>
+            <a:off x="8121005" y="1780536"/>
+            <a:ext cx="1469179" cy="1469179"/>
+          </a:xfrm>
+          <a:prstGeom prst="rect">
+            <a:avLst/>
+          </a:prstGeom>
+        </p:spPr>
+      </p:pic>
     </p:spTree>
     <p:extLst>
       <p:ext uri="{BB962C8B-B14F-4D97-AF65-F5344CB8AC3E}">
-        <p14:creationId xmlns:p14="http://schemas.microsoft.com/office/powerpoint/2010/main" val="1131718056"/>
+        <p14:creationId xmlns:p14="http://schemas.microsoft.com/office/powerpoint/2010/main" val="3842165754"/>
       </p:ext>
     </p:extLst>
   </p:cSld>
   <p:clrMapOvr>
     <a:masterClrMapping/>
   </p:clrMapOvr>
+  <mc:AlternateContent xmlns:mc="http://schemas.openxmlformats.org/markup-compatibility/2006">
+    <mc:Choice xmlns:p159="http://schemas.microsoft.com/office/powerpoint/2015/09/main" Requires="p159">
+      <p:transition xmlns:p14="http://schemas.microsoft.com/office/powerpoint/2010/main" spd="slow" p14:dur="2000">
+        <p159:morph option="byObject"/>
+      </p:transition>
+    </mc:Choice>
+    <mc:Fallback>
+      <p:transition spd="slow">
+        <p:fade/>
+      </p:transition>
+    </mc:Fallback>
+  </mc:AlternateContent>
 </p:sld>
 </file>
 
-<file path=ppt/slides/slide7.xml><?xml version="1.0" encoding="utf-8"?>
+<file path=ppt/slides/slide9.xml><?xml version="1.0" encoding="utf-8"?>
 <p:sld xmlns:a="http://schemas.openxmlformats.org/drawingml/2006/main" xmlns:r="http://schemas.openxmlformats.org/officeDocument/2006/relationships" xmlns:p="http://schemas.openxmlformats.org/presentationml/2006/main">
   <p:cSld>
     <p:spTree>
       <p:nvGrpSpPr>
-        <p:cNvPr id="1" name=""/>
+        <p:cNvPr id="1" name="">
+          <a:extLst>
+            <a:ext uri="{FF2B5EF4-FFF2-40B4-BE49-F238E27FC236}">
+              <a16:creationId xmlns:a16="http://schemas.microsoft.com/office/drawing/2014/main" id="{0A8E94A8-A2B8-6A09-8147-9F9373A7ED7D}"/>
+            </a:ext>
+          </a:extLst>
+        </p:cNvPr>
         <p:cNvGrpSpPr/>
         <p:nvPr/>
       </p:nvGrpSpPr>
@@ -20797,7 +23356,7 @@
           <p:cNvPr id="2" name="Titel 1">
             <a:extLst>
               <a:ext uri="{FF2B5EF4-FFF2-40B4-BE49-F238E27FC236}">
-                <a16:creationId xmlns:a16="http://schemas.microsoft.com/office/drawing/2014/main" id="{B28A34A6-22BC-27A4-2C79-EE98A4943B14}"/>
+                <a16:creationId xmlns:a16="http://schemas.microsoft.com/office/drawing/2014/main" id="{787E8176-1A68-6B04-1710-6D39E9912AD2}"/>
               </a:ext>
             </a:extLst>
           </p:cNvPr>
@@ -20810,8 +23369,8 @@
         </p:nvSpPr>
         <p:spPr>
           <a:xfrm>
-            <a:off x="914399" y="834635"/>
-            <a:ext cx="7796464" cy="1222385"/>
+            <a:off x="130629" y="-42105"/>
+            <a:ext cx="8988878" cy="1222385"/>
           </a:xfrm>
         </p:spPr>
         <p:txBody>
@@ -20825,7 +23384,7 @@
             <a:pPr rtl="0"/>
             <a:r>
               <a:rPr lang="de-DE" dirty="0"/>
-              <a:t>Effektive Präsentationstechniken</a:t>
+              <a:t>Kommunikationsmanagement</a:t>
             </a:r>
           </a:p>
         </p:txBody>
@@ -20835,7 +23394,7 @@
           <p:cNvPr id="3" name="Foliennummernplatzhalter 2">
             <a:extLst>
               <a:ext uri="{FF2B5EF4-FFF2-40B4-BE49-F238E27FC236}">
-                <a16:creationId xmlns:a16="http://schemas.microsoft.com/office/drawing/2014/main" id="{7267C004-8B72-C872-98FB-00A2A584D055}"/>
+                <a16:creationId xmlns:a16="http://schemas.microsoft.com/office/drawing/2014/main" id="{76467498-13C4-2CE5-139F-A3015227D63C}"/>
               </a:ext>
             </a:extLst>
           </p:cNvPr>
@@ -20863,8 +23422,8 @@
             <a:pPr rtl="0"/>
             <a:fld id="{48F63A3B-78C7-47BE-AE5E-E10140E04643}" type="slidenum">
               <a:rPr lang="de-DE" smtClean="0"/>
-              <a:pPr/>
-              <a:t>7</a:t>
+              <a:pPr rtl="0"/>
+              <a:t>9</a:t>
             </a:fld>
             <a:endParaRPr lang="de-DE" dirty="0"/>
           </a:p>
@@ -20875,7 +23434,7 @@
           <p:cNvPr id="16" name="Inhaltsplatzhalter 4">
             <a:extLst>
               <a:ext uri="{FF2B5EF4-FFF2-40B4-BE49-F238E27FC236}">
-                <a16:creationId xmlns:a16="http://schemas.microsoft.com/office/drawing/2014/main" id="{AEF9954A-E263-8A7E-58B1-4D03F7D1BD9B}"/>
+                <a16:creationId xmlns:a16="http://schemas.microsoft.com/office/drawing/2014/main" id="{FE8BAEE5-67BD-97CA-8F3D-FE686C341CB9}"/>
               </a:ext>
             </a:extLst>
           </p:cNvPr>
@@ -20888,8 +23447,89 @@
         </p:nvSpPr>
         <p:spPr>
           <a:xfrm>
-            <a:off x="914400" y="2303028"/>
-            <a:ext cx="3283119" cy="3720337"/>
+            <a:off x="463903" y="4230843"/>
+            <a:ext cx="4649964" cy="2020739"/>
+          </a:xfrm>
+        </p:spPr>
+        <p:txBody>
+          <a:bodyPr rtlCol="0">
+            <a:normAutofit lnSpcReduction="10000"/>
+          </a:bodyPr>
+          <a:lstStyle>
+            <a:defPPr>
+              <a:defRPr lang="de-DE"/>
+            </a:defPPr>
+          </a:lstStyle>
+          <a:p>
+            <a:pPr rtl="0"/>
+            <a:r>
+              <a:rPr lang="de-DE" sz="2000" b="1" u="sng" dirty="0"/>
+              <a:t>Tools</a:t>
+            </a:r>
+          </a:p>
+          <a:p>
+            <a:pPr marL="355600" lvl="2" indent="-280988"/>
+            <a:r>
+              <a:rPr lang="de-DE" sz="2000" dirty="0"/>
+              <a:t>Code: </a:t>
+            </a:r>
+            <a:r>
+              <a:rPr lang="de-DE" sz="2000" dirty="0" err="1"/>
+              <a:t>IntelliJ</a:t>
+            </a:r>
+            <a:r>
+              <a:rPr lang="de-DE" sz="2000" dirty="0"/>
+              <a:t>, Visual Studio Code</a:t>
+            </a:r>
+          </a:p>
+          <a:p>
+            <a:pPr marL="355600" lvl="2" indent="-280988"/>
+            <a:r>
+              <a:rPr lang="de-DE" sz="2000" dirty="0"/>
+              <a:t>Versionskontrolle: GitHub</a:t>
+            </a:r>
+          </a:p>
+          <a:p>
+            <a:pPr marL="355600" lvl="2" indent="-280988"/>
+            <a:r>
+              <a:rPr lang="de-DE" sz="2000" dirty="0"/>
+              <a:t>Zeitmanagement mit </a:t>
+            </a:r>
+            <a:r>
+              <a:rPr lang="de-DE" sz="2000" dirty="0" err="1"/>
+              <a:t>Clockify</a:t>
+            </a:r>
+            <a:endParaRPr lang="de-DE" sz="2000" dirty="0"/>
+          </a:p>
+          <a:p>
+            <a:pPr marL="355600" lvl="2" indent="-280988"/>
+            <a:r>
+              <a:rPr lang="de-DE" sz="2000" dirty="0"/>
+              <a:t>Plan-Grafiken: Miro</a:t>
+            </a:r>
+          </a:p>
+        </p:txBody>
+      </p:sp>
+      <p:sp>
+        <p:nvSpPr>
+          <p:cNvPr id="17" name="Inhaltsplatzhalter 6">
+            <a:extLst>
+              <a:ext uri="{FF2B5EF4-FFF2-40B4-BE49-F238E27FC236}">
+                <a16:creationId xmlns:a16="http://schemas.microsoft.com/office/drawing/2014/main" id="{E7AB0CC9-6711-0013-7768-DF49DFEA31AA}"/>
+              </a:ext>
+            </a:extLst>
+          </p:cNvPr>
+          <p:cNvSpPr>
+            <a:spLocks noGrp="1"/>
+          </p:cNvSpPr>
+          <p:nvPr>
+            <p:ph sz="quarter" idx="4"/>
+          </p:nvPr>
+        </p:nvSpPr>
+        <p:spPr>
+          <a:xfrm>
+            <a:off x="463903" y="2061720"/>
+            <a:ext cx="3885979" cy="1640114"/>
           </a:xfrm>
         </p:spPr>
         <p:txBody>
@@ -20904,554 +23544,332 @@
           <a:p>
             <a:pPr rtl="0"/>
             <a:r>
-              <a:rPr lang="de-DE" dirty="0"/>
-              <a:t>Dies ist ein mächtiges Werkzeug beim öffentlichen Reden. Dabei werden Tonhöhe, Tonfall und Lautstärke variiert, um Emotionen zu vermitteln, Punkte zu betonen und das Interesse aufrechtzuerhalten. </a:t>
+              <a:rPr lang="de-DE" sz="2000" b="1" u="sng" dirty="0"/>
+              <a:t>Dokumentstatus</a:t>
             </a:r>
           </a:p>
           <a:p>
             <a:pPr lvl="1" rtl="0"/>
             <a:r>
               <a:rPr lang="de-DE" dirty="0"/>
-              <a:t>Tonhöhenvariation</a:t>
+              <a:t>IA: in Arbeit</a:t>
+            </a:r>
+          </a:p>
+          <a:p>
+            <a:pPr lvl="1"/>
+            <a:r>
+              <a:rPr lang="de-DE" dirty="0"/>
+              <a:t>F: fertiggestellt</a:t>
             </a:r>
           </a:p>
           <a:p>
             <a:pPr lvl="1" rtl="0"/>
             <a:r>
               <a:rPr lang="de-DE" dirty="0"/>
-              <a:t>Tonfall</a:t>
-            </a:r>
-          </a:p>
-          <a:p>
-            <a:pPr lvl="1" rtl="0"/>
-            <a:r>
-              <a:rPr lang="de-DE" dirty="0"/>
-              <a:t>Lautstärkeregelung</a:t>
+              <a:t>QS: Qualitätssicherung</a:t>
             </a:r>
           </a:p>
         </p:txBody>
       </p:sp>
       <p:sp>
         <p:nvSpPr>
-          <p:cNvPr id="17" name="Inhaltsplatzhalter 6">
+          <p:cNvPr id="4" name="Inhaltsplatzhalter 6">
             <a:extLst>
               <a:ext uri="{FF2B5EF4-FFF2-40B4-BE49-F238E27FC236}">
-                <a16:creationId xmlns:a16="http://schemas.microsoft.com/office/drawing/2014/main" id="{33680A80-5C61-DD02-1119-0565C0AD5372}"/>
+                <a16:creationId xmlns:a16="http://schemas.microsoft.com/office/drawing/2014/main" id="{DDEC18B6-6202-D717-17E6-DD84F3C69C4D}"/>
               </a:ext>
             </a:extLst>
           </p:cNvPr>
-          <p:cNvSpPr>
-            <a:spLocks noGrp="1"/>
+          <p:cNvSpPr txBox="1">
+            <a:spLocks/>
           </p:cNvSpPr>
-          <p:nvPr>
-            <p:ph sz="quarter" idx="4"/>
-          </p:nvPr>
+          <p:nvPr/>
         </p:nvSpPr>
         <p:spPr>
           <a:xfrm>
-            <a:off x="4782159" y="2303028"/>
-            <a:ext cx="3643384" cy="3720337"/>
+            <a:off x="4980668" y="1843660"/>
+            <a:ext cx="3885979" cy="3170680"/>
           </a:xfrm>
+          <a:prstGeom prst="rect">
+            <a:avLst/>
+          </a:prstGeom>
         </p:spPr>
         <p:txBody>
-          <a:bodyPr rtlCol="0">
+          <a:bodyPr vert="horz" lIns="91440" tIns="0" rIns="91440" bIns="0" rtlCol="0">
             <a:normAutofit/>
           </a:bodyPr>
           <a:lstStyle>
             <a:defPPr>
               <a:defRPr lang="de-DE"/>
             </a:defPPr>
+            <a:lvl1pPr marL="0" indent="0" algn="l" defTabSz="914400" rtl="0" eaLnBrk="1" latinLnBrk="0" hangingPunct="1">
+              <a:lnSpc>
+                <a:spcPct val="100000"/>
+              </a:lnSpc>
+              <a:spcBef>
+                <a:spcPts val="1000"/>
+              </a:spcBef>
+              <a:buFont typeface="Arial" panose="020B0604020202020204" pitchFamily="34" charset="0"/>
+              <a:buNone/>
+              <a:defRPr lang="de-DE" sz="1800" kern="1200">
+                <a:solidFill>
+                  <a:schemeClr val="accent6"/>
+                </a:solidFill>
+                <a:latin typeface="+mn-lt"/>
+                <a:ea typeface="+mn-ea"/>
+                <a:cs typeface="+mn-cs"/>
+              </a:defRPr>
+            </a:lvl1pPr>
+            <a:lvl2pPr marL="283464" indent="-283464" algn="l" defTabSz="914400" rtl="0" eaLnBrk="1" latinLnBrk="0" hangingPunct="1">
+              <a:lnSpc>
+                <a:spcPct val="100000"/>
+              </a:lnSpc>
+              <a:spcBef>
+                <a:spcPts val="1000"/>
+              </a:spcBef>
+              <a:buFont typeface="Arial" panose="020B0604020202020204" pitchFamily="34" charset="0"/>
+              <a:buChar char="•"/>
+              <a:defRPr lang="de-DE" sz="1800" kern="1200">
+                <a:solidFill>
+                  <a:schemeClr val="accent6"/>
+                </a:solidFill>
+                <a:latin typeface="+mn-lt"/>
+                <a:ea typeface="+mn-ea"/>
+                <a:cs typeface="+mn-cs"/>
+              </a:defRPr>
+            </a:lvl2pPr>
+            <a:lvl3pPr marL="283464" indent="-283464" algn="l" defTabSz="914400" rtl="0" eaLnBrk="1" latinLnBrk="0" hangingPunct="1">
+              <a:lnSpc>
+                <a:spcPct val="100000"/>
+              </a:lnSpc>
+              <a:spcBef>
+                <a:spcPts val="1000"/>
+              </a:spcBef>
+              <a:buFont typeface="Arial" panose="020B0604020202020204" pitchFamily="34" charset="0"/>
+              <a:buChar char="•"/>
+              <a:defRPr lang="de-DE" sz="1800" kern="1200">
+                <a:solidFill>
+                  <a:schemeClr val="accent6"/>
+                </a:solidFill>
+                <a:latin typeface="+mn-lt"/>
+                <a:ea typeface="+mn-ea"/>
+                <a:cs typeface="+mn-cs"/>
+              </a:defRPr>
+            </a:lvl3pPr>
+            <a:lvl4pPr marL="283464" indent="-283464" algn="l" defTabSz="914400" rtl="0" eaLnBrk="1" latinLnBrk="0" hangingPunct="1">
+              <a:lnSpc>
+                <a:spcPct val="100000"/>
+              </a:lnSpc>
+              <a:spcBef>
+                <a:spcPts val="1000"/>
+              </a:spcBef>
+              <a:buFont typeface="Arial" panose="020B0604020202020204" pitchFamily="34" charset="0"/>
+              <a:buChar char="•"/>
+              <a:defRPr lang="de-DE" sz="1800" kern="1200">
+                <a:solidFill>
+                  <a:schemeClr val="accent6"/>
+                </a:solidFill>
+                <a:latin typeface="+mn-lt"/>
+                <a:ea typeface="+mn-ea"/>
+                <a:cs typeface="+mn-cs"/>
+              </a:defRPr>
+            </a:lvl4pPr>
+            <a:lvl5pPr marL="283464" indent="-283464" algn="l" defTabSz="914400" rtl="0" eaLnBrk="1" latinLnBrk="0" hangingPunct="1">
+              <a:lnSpc>
+                <a:spcPct val="100000"/>
+              </a:lnSpc>
+              <a:spcBef>
+                <a:spcPts val="1000"/>
+              </a:spcBef>
+              <a:buFont typeface="Arial" panose="020B0604020202020204" pitchFamily="34" charset="0"/>
+              <a:buChar char="•"/>
+              <a:defRPr lang="de-DE" sz="1800" kern="1200">
+                <a:solidFill>
+                  <a:schemeClr val="accent6"/>
+                </a:solidFill>
+                <a:latin typeface="+mn-lt"/>
+                <a:ea typeface="+mn-ea"/>
+                <a:cs typeface="+mn-cs"/>
+              </a:defRPr>
+            </a:lvl5pPr>
+            <a:lvl6pPr marL="2514600" indent="-228600" algn="l" defTabSz="914400" rtl="0" eaLnBrk="1" latinLnBrk="0" hangingPunct="1">
+              <a:lnSpc>
+                <a:spcPct val="90000"/>
+              </a:lnSpc>
+              <a:spcBef>
+                <a:spcPts val="500"/>
+              </a:spcBef>
+              <a:buFont typeface="Arial" panose="020B0604020202020204" pitchFamily="34" charset="0"/>
+              <a:buChar char="•"/>
+              <a:defRPr lang="de-DE" sz="1800" kern="1200">
+                <a:solidFill>
+                  <a:schemeClr val="tx1"/>
+                </a:solidFill>
+                <a:latin typeface="+mn-lt"/>
+                <a:ea typeface="+mn-ea"/>
+                <a:cs typeface="+mn-cs"/>
+              </a:defRPr>
+            </a:lvl6pPr>
+            <a:lvl7pPr marL="2971800" indent="-228600" algn="l" defTabSz="914400" rtl="0" eaLnBrk="1" latinLnBrk="0" hangingPunct="1">
+              <a:lnSpc>
+                <a:spcPct val="90000"/>
+              </a:lnSpc>
+              <a:spcBef>
+                <a:spcPts val="500"/>
+              </a:spcBef>
+              <a:buFont typeface="Arial" panose="020B0604020202020204" pitchFamily="34" charset="0"/>
+              <a:buChar char="•"/>
+              <a:defRPr lang="de-DE" sz="1800" kern="1200">
+                <a:solidFill>
+                  <a:schemeClr val="tx1"/>
+                </a:solidFill>
+                <a:latin typeface="+mn-lt"/>
+                <a:ea typeface="+mn-ea"/>
+                <a:cs typeface="+mn-cs"/>
+              </a:defRPr>
+            </a:lvl7pPr>
+            <a:lvl8pPr marL="3429000" indent="-228600" algn="l" defTabSz="914400" rtl="0" eaLnBrk="1" latinLnBrk="0" hangingPunct="1">
+              <a:lnSpc>
+                <a:spcPct val="90000"/>
+              </a:lnSpc>
+              <a:spcBef>
+                <a:spcPts val="500"/>
+              </a:spcBef>
+              <a:buFont typeface="Arial" panose="020B0604020202020204" pitchFamily="34" charset="0"/>
+              <a:buChar char="•"/>
+              <a:defRPr lang="de-DE" sz="1800" kern="1200">
+                <a:solidFill>
+                  <a:schemeClr val="tx1"/>
+                </a:solidFill>
+                <a:latin typeface="+mn-lt"/>
+                <a:ea typeface="+mn-ea"/>
+                <a:cs typeface="+mn-cs"/>
+              </a:defRPr>
+            </a:lvl8pPr>
+            <a:lvl9pPr marL="3886200" indent="-228600" algn="l" defTabSz="914400" rtl="0" eaLnBrk="1" latinLnBrk="0" hangingPunct="1">
+              <a:lnSpc>
+                <a:spcPct val="90000"/>
+              </a:lnSpc>
+              <a:spcBef>
+                <a:spcPts val="500"/>
+              </a:spcBef>
+              <a:buFont typeface="Arial" panose="020B0604020202020204" pitchFamily="34" charset="0"/>
+              <a:buChar char="•"/>
+              <a:defRPr lang="de-DE" sz="1800" kern="1200">
+                <a:solidFill>
+                  <a:schemeClr val="tx1"/>
+                </a:solidFill>
+                <a:latin typeface="+mn-lt"/>
+                <a:ea typeface="+mn-ea"/>
+                <a:cs typeface="+mn-cs"/>
+              </a:defRPr>
+            </a:lvl9pPr>
           </a:lstStyle>
           <a:p>
-            <a:pPr rtl="0"/>
+            <a:r>
+              <a:rPr lang="de-DE" sz="2000" b="1" u="sng" dirty="0"/>
+              <a:t>Benennungsschema</a:t>
+            </a:r>
+          </a:p>
+          <a:p>
+            <a:pPr marL="0" lvl="1" indent="0">
+              <a:buNone/>
+            </a:pPr>
             <a:r>
               <a:rPr lang="de-DE" dirty="0"/>
-              <a:t>Eine wirkungsvolle Körpersprache unterstreicht Ihre Botschaft und macht sie eindrucksvoller und einprägsamer.</a:t>
+              <a:t>&lt;Dateititel&gt;_&lt;Version&gt;.xxx</a:t>
             </a:r>
           </a:p>
           <a:p>
-            <a:pPr lvl="1" rtl="0"/>
+            <a:pPr marL="0" lvl="1" indent="0">
+              <a:buNone/>
+            </a:pPr>
+            <a:r>
+              <a:rPr lang="de-DE" b="1" dirty="0"/>
+              <a:t>Versionierung:</a:t>
+            </a:r>
+          </a:p>
+          <a:p>
+            <a:pPr lvl="1"/>
             <a:r>
               <a:rPr lang="de-DE" dirty="0"/>
-              <a:t>Aussagekräftiger Augenkontakt</a:t>
+              <a:t>0.x noch in Arbeit</a:t>
             </a:r>
           </a:p>
           <a:p>
-            <a:pPr lvl="1" rtl="0"/>
+            <a:pPr lvl="1"/>
             <a:r>
               <a:rPr lang="de-DE" dirty="0"/>
-              <a:t>Gezielte Gesten</a:t>
+              <a:t>1.x: fertiggestellt</a:t>
             </a:r>
           </a:p>
           <a:p>
-            <a:pPr lvl="1" rtl="0"/>
+            <a:pPr lvl="1"/>
             <a:r>
               <a:rPr lang="de-DE" dirty="0"/>
-              <a:t>Gute Körperhaltung beibehalten</a:t>
-            </a:r>
-          </a:p>
-          <a:p>
-            <a:pPr lvl="1" rtl="0"/>
-            <a:r>
-              <a:rPr lang="de-DE" dirty="0"/>
-              <a:t>Kontrollieren Ihrer Ausdrucksweise</a:t>
+              <a:t>&gt; 1.x: gravierende Änderungen</a:t>
             </a:r>
           </a:p>
         </p:txBody>
       </p:sp>
+      <p:pic>
+        <p:nvPicPr>
+          <p:cNvPr id="7" name="Grafik 6" descr="Blockchain mit einfarbiger Füllung">
+            <a:extLst>
+              <a:ext uri="{FF2B5EF4-FFF2-40B4-BE49-F238E27FC236}">
+                <a16:creationId xmlns:a16="http://schemas.microsoft.com/office/drawing/2014/main" id="{586D08BD-47A1-C1B8-1B9B-A22378A0AAA0}"/>
+              </a:ext>
+            </a:extLst>
+          </p:cNvPr>
+          <p:cNvPicPr>
+            <a:picLocks noChangeAspect="1"/>
+          </p:cNvPicPr>
+          <p:nvPr/>
+        </p:nvPicPr>
+        <p:blipFill>
+          <a:blip r:embed="rId3">
+            <a:extLst>
+              <a:ext uri="{96DAC541-7B7A-43D3-8B79-37D633B846F1}">
+                <asvg:svgBlip xmlns:asvg="http://schemas.microsoft.com/office/drawing/2016/SVG/main" r:embed="rId4"/>
+              </a:ext>
+            </a:extLst>
+          </a:blip>
+          <a:stretch>
+            <a:fillRect/>
+          </a:stretch>
+        </p:blipFill>
+        <p:spPr>
+          <a:xfrm>
+            <a:off x="5558385" y="4618931"/>
+            <a:ext cx="1773747" cy="1773747"/>
+          </a:xfrm>
+          <a:prstGeom prst="rect">
+            <a:avLst/>
+          </a:prstGeom>
+        </p:spPr>
+      </p:pic>
     </p:spTree>
     <p:extLst>
       <p:ext uri="{BB962C8B-B14F-4D97-AF65-F5344CB8AC3E}">
-        <p14:creationId xmlns:p14="http://schemas.microsoft.com/office/powerpoint/2010/main" val="2468595790"/>
+        <p14:creationId xmlns:p14="http://schemas.microsoft.com/office/powerpoint/2010/main" val="4173005505"/>
       </p:ext>
     </p:extLst>
   </p:cSld>
   <p:clrMapOvr>
     <a:masterClrMapping/>
   </p:clrMapOvr>
-</p:sld>
-</file>
-
-<file path=ppt/slides/slide8.xml><?xml version="1.0" encoding="utf-8"?>
-<p:sld xmlns:a="http://schemas.openxmlformats.org/drawingml/2006/main" xmlns:r="http://schemas.openxmlformats.org/officeDocument/2006/relationships" xmlns:p="http://schemas.openxmlformats.org/presentationml/2006/main">
-  <p:cSld>
-    <p:spTree>
-      <p:nvGrpSpPr>
-        <p:cNvPr id="1" name=""/>
-        <p:cNvGrpSpPr/>
-        <p:nvPr/>
-      </p:nvGrpSpPr>
-      <p:grpSpPr>
-        <a:xfrm>
-          <a:off x="0" y="0"/>
-          <a:ext cx="0" cy="0"/>
-          <a:chOff x="0" y="0"/>
-          <a:chExt cx="0" cy="0"/>
-        </a:xfrm>
-      </p:grpSpPr>
-      <p:sp>
-        <p:nvSpPr>
-          <p:cNvPr id="3" name="Titel 2">
-            <a:extLst>
-              <a:ext uri="{FF2B5EF4-FFF2-40B4-BE49-F238E27FC236}">
-                <a16:creationId xmlns:a16="http://schemas.microsoft.com/office/drawing/2014/main" id="{3D55F2D4-C20E-BEBC-1CCF-4449B0456A7E}"/>
-              </a:ext>
-            </a:extLst>
-          </p:cNvPr>
-          <p:cNvSpPr>
-            <a:spLocks noGrp="1"/>
-          </p:cNvSpPr>
-          <p:nvPr>
-            <p:ph type="title"/>
-          </p:nvPr>
-        </p:nvSpPr>
-        <p:spPr>
-          <a:xfrm>
-            <a:off x="914401" y="965393"/>
-            <a:ext cx="7725746" cy="1091627"/>
-          </a:xfrm>
-        </p:spPr>
-        <p:txBody>
-          <a:bodyPr rtlCol="0"/>
-          <a:lstStyle>
-            <a:defPPr>
-              <a:defRPr lang="de-DE"/>
-            </a:defPPr>
-          </a:lstStyle>
-          <a:p>
-            <a:pPr rtl="0"/>
-            <a:r>
-              <a:rPr lang="de-DE" dirty="0"/>
-              <a:t>NAVIGIEREN IN FRAGE-UND-ANTWORT-SITZUNGEN</a:t>
-            </a:r>
-          </a:p>
-        </p:txBody>
-      </p:sp>
-      <p:sp>
-        <p:nvSpPr>
-          <p:cNvPr id="14" name="Inhaltsplatzhalter 7">
-            <a:extLst>
-              <a:ext uri="{FF2B5EF4-FFF2-40B4-BE49-F238E27FC236}">
-                <a16:creationId xmlns:a16="http://schemas.microsoft.com/office/drawing/2014/main" id="{749C7CD1-A9AA-49E3-6734-AD9546F2DF5B}"/>
-              </a:ext>
-            </a:extLst>
-          </p:cNvPr>
-          <p:cNvSpPr>
-            <a:spLocks noGrp="1"/>
-          </p:cNvSpPr>
-          <p:nvPr>
-            <p:ph sz="half" idx="15"/>
-          </p:nvPr>
-        </p:nvSpPr>
-        <p:spPr>
-          <a:xfrm>
-            <a:off x="914399" y="2303463"/>
-            <a:ext cx="3666931" cy="4143375"/>
-          </a:xfrm>
-        </p:spPr>
-        <p:txBody>
-          <a:bodyPr rtlCol="0">
-            <a:normAutofit/>
-          </a:bodyPr>
-          <a:lstStyle>
-            <a:defPPr>
-              <a:defRPr lang="de-DE"/>
-            </a:defPPr>
-          </a:lstStyle>
-          <a:p>
-            <a:pPr rtl="0"/>
-            <a:r>
-              <a:rPr lang="de-DE" dirty="0"/>
-              <a:t>Um Selbstvertrauen und Autorität auszudrücken, ist es wichtig, während der Frage-und-Antwort-Runde Gelassenheit zu bewahren. Beachten Sie die folgenden Tipps, um gelassen zu bleiben:</a:t>
-            </a:r>
-          </a:p>
-          <a:p>
-            <a:pPr rtl="0"/>
-            <a:r>
-              <a:rPr lang="de-DE" dirty="0"/>
-              <a:t>Ruhig bleiben</a:t>
-            </a:r>
-          </a:p>
-          <a:p>
-            <a:pPr rtl="0"/>
-            <a:r>
-              <a:rPr lang="de-DE" dirty="0"/>
-              <a:t>Aktiv zuhören</a:t>
-            </a:r>
-          </a:p>
-          <a:p>
-            <a:pPr rtl="0"/>
-            <a:r>
-              <a:rPr lang="de-DE" dirty="0"/>
-              <a:t>Innehalten und nachdenken</a:t>
-            </a:r>
-          </a:p>
-          <a:p>
-            <a:pPr rtl="0"/>
-            <a:r>
-              <a:rPr lang="de-DE" dirty="0"/>
-              <a:t>Augenkontakt beibehalten</a:t>
-            </a:r>
-          </a:p>
-        </p:txBody>
-      </p:sp>
-      <p:sp>
-        <p:nvSpPr>
-          <p:cNvPr id="13" name="Inhaltsplatzhalter 5">
-            <a:extLst>
-              <a:ext uri="{FF2B5EF4-FFF2-40B4-BE49-F238E27FC236}">
-                <a16:creationId xmlns:a16="http://schemas.microsoft.com/office/drawing/2014/main" id="{58AC0C8B-8A7A-9FAE-2D0F-4D1C3A8C3FA5}"/>
-              </a:ext>
-            </a:extLst>
-          </p:cNvPr>
-          <p:cNvSpPr>
-            <a:spLocks noGrp="1"/>
-          </p:cNvSpPr>
-          <p:nvPr>
-            <p:ph sz="half" idx="1"/>
-          </p:nvPr>
-        </p:nvSpPr>
-        <p:spPr>
-          <a:xfrm>
-            <a:off x="4781550" y="2303463"/>
-            <a:ext cx="3763963" cy="4143375"/>
-          </a:xfrm>
-        </p:spPr>
-        <p:txBody>
-          <a:bodyPr rtlCol="0"/>
-          <a:lstStyle>
-            <a:defPPr>
-              <a:defRPr lang="de-DE"/>
-            </a:defPPr>
-          </a:lstStyle>
-          <a:p>
-            <a:pPr rtl="0"/>
-            <a:r>
-              <a:rPr lang="de-DE" dirty="0"/>
-              <a:t>Machen Sie sich im Voraus mit Ihrem Material vertraut. Antizipieren Sie häufige Fragen und üben Sie Ihre Antworten.</a:t>
-            </a:r>
-          </a:p>
-        </p:txBody>
-      </p:sp>
-      <p:pic>
-        <p:nvPicPr>
-          <p:cNvPr id="10" name="Bildplatzhalter 9" descr="Eine Person mit blauem Anzug und Kopfhörern, die auf einen Computer zeigt">
-            <a:extLst>
-              <a:ext uri="{FF2B5EF4-FFF2-40B4-BE49-F238E27FC236}">
-                <a16:creationId xmlns:a16="http://schemas.microsoft.com/office/drawing/2014/main" id="{DD0A0899-5B02-CEB5-E5DD-448B169C2377}"/>
-              </a:ext>
-            </a:extLst>
-          </p:cNvPr>
-          <p:cNvPicPr>
-            <a:picLocks noGrp="1" noChangeAspect="1"/>
-          </p:cNvPicPr>
-          <p:nvPr>
-            <p:ph type="pic" sz="quarter" idx="14"/>
-          </p:nvPr>
-        </p:nvPicPr>
-        <p:blipFill rotWithShape="1">
-          <a:blip r:embed="rId3">
-            <a:duotone>
-              <a:prstClr val="black"/>
-              <a:schemeClr val="accent1">
-                <a:tint val="45000"/>
-                <a:satMod val="400000"/>
-              </a:schemeClr>
-            </a:duotone>
-          </a:blip>
-          <a:srcRect l="31888" r="31888"/>
-          <a:stretch/>
-        </p:blipFill>
-        <p:spPr>
-          <a:xfrm>
-            <a:off x="8989454" y="965393"/>
-            <a:ext cx="3202545" cy="5892607"/>
-          </a:xfrm>
-        </p:spPr>
-      </p:pic>
-      <p:sp>
-        <p:nvSpPr>
-          <p:cNvPr id="4" name="Foliennummernplatzhalter 3">
-            <a:extLst>
-              <a:ext uri="{FF2B5EF4-FFF2-40B4-BE49-F238E27FC236}">
-                <a16:creationId xmlns:a16="http://schemas.microsoft.com/office/drawing/2014/main" id="{C82CE1B8-1C92-D6D2-444B-652DB90E86D1}"/>
-              </a:ext>
-            </a:extLst>
-          </p:cNvPr>
-          <p:cNvSpPr>
-            <a:spLocks noGrp="1"/>
-          </p:cNvSpPr>
-          <p:nvPr>
-            <p:ph type="sldNum" sz="quarter" idx="10"/>
-          </p:nvPr>
-        </p:nvSpPr>
-        <p:spPr>
-          <a:xfrm>
-            <a:off x="10358437" y="457199"/>
-            <a:ext cx="1067589" cy="471489"/>
-          </a:xfrm>
-        </p:spPr>
-        <p:txBody>
-          <a:bodyPr rtlCol="0"/>
-          <a:lstStyle>
-            <a:defPPr>
-              <a:defRPr lang="de-DE"/>
-            </a:defPPr>
-          </a:lstStyle>
-          <a:p>
-            <a:pPr rtl="0"/>
-            <a:fld id="{48F63A3B-78C7-47BE-AE5E-E10140E04643}" type="slidenum">
-              <a:rPr lang="de-DE" smtClean="0"/>
-              <a:pPr/>
-              <a:t>8</a:t>
-            </a:fld>
-            <a:endParaRPr lang="de-DE" dirty="0"/>
-          </a:p>
-        </p:txBody>
-      </p:sp>
-    </p:spTree>
-    <p:extLst>
-      <p:ext uri="{BB962C8B-B14F-4D97-AF65-F5344CB8AC3E}">
-        <p14:creationId xmlns:p14="http://schemas.microsoft.com/office/powerpoint/2010/main" val="1941619646"/>
-      </p:ext>
-    </p:extLst>
-  </p:cSld>
-  <p:clrMapOvr>
-    <a:masterClrMapping/>
-  </p:clrMapOvr>
-</p:sld>
-</file>
-
-<file path=ppt/slides/slide9.xml><?xml version="1.0" encoding="utf-8"?>
-<p:sld xmlns:a="http://schemas.openxmlformats.org/drawingml/2006/main" xmlns:r="http://schemas.openxmlformats.org/officeDocument/2006/relationships" xmlns:p="http://schemas.openxmlformats.org/presentationml/2006/main">
-  <p:cSld>
-    <p:spTree>
-      <p:nvGrpSpPr>
-        <p:cNvPr id="1" name=""/>
-        <p:cNvGrpSpPr/>
-        <p:nvPr/>
-      </p:nvGrpSpPr>
-      <p:grpSpPr>
-        <a:xfrm>
-          <a:off x="0" y="0"/>
-          <a:ext cx="0" cy="0"/>
-          <a:chOff x="0" y="0"/>
-          <a:chExt cx="0" cy="0"/>
-        </a:xfrm>
-      </p:grpSpPr>
-      <p:sp>
-        <p:nvSpPr>
-          <p:cNvPr id="3" name="Titel 2">
-            <a:extLst>
-              <a:ext uri="{FF2B5EF4-FFF2-40B4-BE49-F238E27FC236}">
-                <a16:creationId xmlns:a16="http://schemas.microsoft.com/office/drawing/2014/main" id="{9443EC8A-1733-CCF7-081F-EB4667CB3285}"/>
-              </a:ext>
-            </a:extLst>
-          </p:cNvPr>
-          <p:cNvSpPr>
-            <a:spLocks noGrp="1"/>
-          </p:cNvSpPr>
-          <p:nvPr>
-            <p:ph type="title"/>
-          </p:nvPr>
-        </p:nvSpPr>
-        <p:spPr>
-          <a:xfrm>
-            <a:off x="914400" y="1057274"/>
-            <a:ext cx="7843837" cy="1012782"/>
-          </a:xfrm>
-        </p:spPr>
-        <p:txBody>
-          <a:bodyPr rtlCol="0"/>
-          <a:lstStyle>
-            <a:defPPr>
-              <a:defRPr lang="de-DE"/>
-            </a:defPPr>
-          </a:lstStyle>
-          <a:p>
-            <a:pPr rtl="0"/>
-            <a:r>
-              <a:rPr lang="de-DE"/>
-              <a:t>Wirkung der Rede</a:t>
-            </a:r>
-          </a:p>
-        </p:txBody>
-      </p:sp>
-      <p:sp>
-        <p:nvSpPr>
-          <p:cNvPr id="4" name="Inhaltsplatzhalter 3">
-            <a:extLst>
-              <a:ext uri="{FF2B5EF4-FFF2-40B4-BE49-F238E27FC236}">
-                <a16:creationId xmlns:a16="http://schemas.microsoft.com/office/drawing/2014/main" id="{ACE55D3D-AA24-CF53-6679-29B3C83F7646}"/>
-              </a:ext>
-            </a:extLst>
-          </p:cNvPr>
-          <p:cNvSpPr>
-            <a:spLocks noGrp="1"/>
-          </p:cNvSpPr>
-          <p:nvPr>
-            <p:ph idx="13"/>
-          </p:nvPr>
-        </p:nvSpPr>
-        <p:spPr>
-          <a:xfrm>
-            <a:off x="914400" y="2331791"/>
-            <a:ext cx="6903076" cy="3721817"/>
-          </a:xfrm>
-        </p:spPr>
-        <p:txBody>
-          <a:bodyPr rtlCol="0"/>
-          <a:lstStyle>
-            <a:defPPr>
-              <a:defRPr lang="de-DE"/>
-            </a:defPPr>
-          </a:lstStyle>
-          <a:p>
-            <a:pPr rtl="0"/>
-            <a:r>
-              <a:rPr lang="de-DE" dirty="0"/>
-              <a:t>Ihre Fähigkeit, effektiv zu kommunizieren, wird einen bleibenden Eindruck bei Ihrem Publikum hinterlassen.</a:t>
-            </a:r>
-          </a:p>
-          <a:p>
-            <a:pPr rtl="0"/>
-            <a:endParaRPr lang="de-DE" dirty="0"/>
-          </a:p>
-          <a:p>
-            <a:pPr rtl="0"/>
-            <a:r>
-              <a:rPr lang="de-DE" dirty="0"/>
-              <a:t>Zu einer effektiven Kommunikation gehört nicht nur die Übermittlung einer Botschaft, sondern auch die Auseinandersetzung mit den Erfahrungen, Werten und Emotionen der Zuhörer. </a:t>
-            </a:r>
-          </a:p>
-        </p:txBody>
-      </p:sp>
-      <p:pic>
-        <p:nvPicPr>
-          <p:cNvPr id="7" name="Bildplatzhalter 6" descr="Eine Person, die eine Brille und ein blaues Hemd trägt">
-            <a:extLst>
-              <a:ext uri="{FF2B5EF4-FFF2-40B4-BE49-F238E27FC236}">
-                <a16:creationId xmlns:a16="http://schemas.microsoft.com/office/drawing/2014/main" id="{C570EB79-053B-0283-9D2D-6266701EEDDD}"/>
-              </a:ext>
-            </a:extLst>
-          </p:cNvPr>
-          <p:cNvPicPr>
-            <a:picLocks noGrp="1" noChangeAspect="1"/>
-          </p:cNvPicPr>
-          <p:nvPr>
-            <p:ph type="pic" sz="quarter" idx="14"/>
-          </p:nvPr>
-        </p:nvPicPr>
-        <p:blipFill rotWithShape="1">
-          <a:blip r:embed="rId3">
-            <a:duotone>
-              <a:prstClr val="black"/>
-              <a:schemeClr val="accent4">
-                <a:tint val="45000"/>
-                <a:satMod val="400000"/>
-              </a:schemeClr>
-            </a:duotone>
-          </a:blip>
-          <a:srcRect l="19088" r="19088"/>
-          <a:stretch/>
-        </p:blipFill>
-        <p:spPr>
-          <a:xfrm>
-            <a:off x="8989454" y="3405189"/>
-            <a:ext cx="3202546" cy="3452811"/>
-          </a:xfrm>
-        </p:spPr>
-      </p:pic>
-      <p:sp>
-        <p:nvSpPr>
-          <p:cNvPr id="2" name="Foliennummernplatzhalter 1">
-            <a:extLst>
-              <a:ext uri="{FF2B5EF4-FFF2-40B4-BE49-F238E27FC236}">
-                <a16:creationId xmlns:a16="http://schemas.microsoft.com/office/drawing/2014/main" id="{AB69D854-FB65-0E93-CFE2-041F7C41DD24}"/>
-              </a:ext>
-            </a:extLst>
-          </p:cNvPr>
-          <p:cNvSpPr>
-            <a:spLocks noGrp="1"/>
-          </p:cNvSpPr>
-          <p:nvPr>
-            <p:ph type="sldNum" sz="quarter" idx="10"/>
-          </p:nvPr>
-        </p:nvSpPr>
-        <p:spPr>
-          <a:xfrm>
-            <a:off x="10438475" y="457199"/>
-            <a:ext cx="987552" cy="471489"/>
-          </a:xfrm>
-        </p:spPr>
-        <p:txBody>
-          <a:bodyPr rtlCol="0"/>
-          <a:lstStyle>
-            <a:defPPr>
-              <a:defRPr lang="de-DE"/>
-            </a:defPPr>
-          </a:lstStyle>
-          <a:p>
-            <a:pPr rtl="0"/>
-            <a:fld id="{48F63A3B-78C7-47BE-AE5E-E10140E04643}" type="slidenum">
-              <a:rPr lang="de-DE" smtClean="0"/>
-              <a:pPr/>
-              <a:t>9</a:t>
-            </a:fld>
-            <a:endParaRPr lang="de-DE" dirty="0"/>
-          </a:p>
-        </p:txBody>
-      </p:sp>
-    </p:spTree>
-    <p:extLst>
-      <p:ext uri="{BB962C8B-B14F-4D97-AF65-F5344CB8AC3E}">
-        <p14:creationId xmlns:p14="http://schemas.microsoft.com/office/powerpoint/2010/main" val="4072101725"/>
-      </p:ext>
-    </p:extLst>
-  </p:cSld>
-  <p:clrMapOvr>
-    <a:masterClrMapping/>
-  </p:clrMapOvr>
+  <mc:AlternateContent xmlns:mc="http://schemas.openxmlformats.org/markup-compatibility/2006">
+    <mc:Choice xmlns:p159="http://schemas.microsoft.com/office/powerpoint/2015/09/main" Requires="p159">
+      <p:transition xmlns:p14="http://schemas.microsoft.com/office/powerpoint/2010/main" spd="slow" p14:dur="2000">
+        <p159:morph option="byObject"/>
+      </p:transition>
+    </mc:Choice>
+    <mc:Fallback>
+      <p:transition spd="slow">
+        <p:fade/>
+      </p:transition>
+    </mc:Fallback>
+  </mc:AlternateContent>
 </p:sld>
 </file>
 

--- a/Dokumentation/Präsentationen/Präsentation_Kickoff_0.1.pptx
+++ b/Dokumentation/Präsentationen/Präsentation_Kickoff_0.1.pptx
@@ -19045,13 +19045,13 @@
   <p:clrMapOvr>
     <a:masterClrMapping/>
   </p:clrMapOvr>
-  <mc:AlternateContent xmlns:mc="http://schemas.openxmlformats.org/markup-compatibility/2006">
-    <mc:Choice xmlns:p159="http://schemas.microsoft.com/office/powerpoint/2015/09/main" Requires="p159">
+  <mc:AlternateContent xmlns:mc="http://schemas.openxmlformats.org/markup-compatibility/2006" xmlns:p159="http://schemas.microsoft.com/office/powerpoint/2015/09/main">
+    <mc:Choice Requires="p159">
       <p:transition xmlns:p14="http://schemas.microsoft.com/office/powerpoint/2010/main" spd="slow" p14:dur="2000">
         <p159:morph option="byObject"/>
       </p:transition>
     </mc:Choice>
-    <mc:Fallback>
+    <mc:Fallback xmlns="">
       <p:transition spd="slow">
         <p:fade/>
       </p:transition>
@@ -19325,13 +19325,13 @@
   <p:clrMapOvr>
     <a:masterClrMapping/>
   </p:clrMapOvr>
-  <mc:AlternateContent xmlns:mc="http://schemas.openxmlformats.org/markup-compatibility/2006">
-    <mc:Choice xmlns:p159="http://schemas.microsoft.com/office/powerpoint/2015/09/main" Requires="p159">
+  <mc:AlternateContent xmlns:mc="http://schemas.openxmlformats.org/markup-compatibility/2006" xmlns:p159="http://schemas.microsoft.com/office/powerpoint/2015/09/main">
+    <mc:Choice Requires="p159">
       <p:transition xmlns:p14="http://schemas.microsoft.com/office/powerpoint/2010/main" spd="slow" p14:dur="2000">
         <p159:morph option="byObject"/>
       </p:transition>
     </mc:Choice>
-    <mc:Fallback>
+    <mc:Fallback xmlns="">
       <p:transition spd="slow">
         <p:fade/>
       </p:transition>
@@ -19405,13 +19405,13 @@
   <p:clrMapOvr>
     <a:masterClrMapping/>
   </p:clrMapOvr>
-  <mc:AlternateContent xmlns:mc="http://schemas.openxmlformats.org/markup-compatibility/2006">
-    <mc:Choice xmlns:p159="http://schemas.microsoft.com/office/powerpoint/2015/09/main" Requires="p159">
+  <mc:AlternateContent xmlns:mc="http://schemas.openxmlformats.org/markup-compatibility/2006" xmlns:p159="http://schemas.microsoft.com/office/powerpoint/2015/09/main">
+    <mc:Choice Requires="p159">
       <p:transition xmlns:p14="http://schemas.microsoft.com/office/powerpoint/2010/main" spd="slow" p14:dur="2000">
         <p159:morph option="byObject"/>
       </p:transition>
     </mc:Choice>
-    <mc:Fallback>
+    <mc:Fallback xmlns="">
       <p:transition spd="slow">
         <p:fade/>
       </p:transition>
@@ -20593,13 +20593,13 @@
   <p:clrMapOvr>
     <a:masterClrMapping/>
   </p:clrMapOvr>
-  <mc:AlternateContent xmlns:mc="http://schemas.openxmlformats.org/markup-compatibility/2006">
-    <mc:Choice xmlns:p159="http://schemas.microsoft.com/office/powerpoint/2015/09/main" Requires="p159">
+  <mc:AlternateContent xmlns:mc="http://schemas.openxmlformats.org/markup-compatibility/2006" xmlns:p159="http://schemas.microsoft.com/office/powerpoint/2015/09/main">
+    <mc:Choice Requires="p159">
       <p:transition xmlns:p14="http://schemas.microsoft.com/office/powerpoint/2010/main" spd="slow" p14:dur="2000">
         <p159:morph option="byObject"/>
       </p:transition>
     </mc:Choice>
-    <mc:Fallback>
+    <mc:Fallback xmlns="">
       <p:transition spd="slow">
         <p:fade/>
       </p:transition>
@@ -20844,13 +20844,13 @@
   <p:clrMapOvr>
     <a:masterClrMapping/>
   </p:clrMapOvr>
-  <mc:AlternateContent xmlns:mc="http://schemas.openxmlformats.org/markup-compatibility/2006">
-    <mc:Choice xmlns:p159="http://schemas.microsoft.com/office/powerpoint/2015/09/main" Requires="p159">
+  <mc:AlternateContent xmlns:mc="http://schemas.openxmlformats.org/markup-compatibility/2006" xmlns:p159="http://schemas.microsoft.com/office/powerpoint/2015/09/main">
+    <mc:Choice Requires="p159">
       <p:transition xmlns:p14="http://schemas.microsoft.com/office/powerpoint/2010/main" spd="slow" p14:dur="2000">
         <p159:morph option="byObject"/>
       </p:transition>
     </mc:Choice>
-    <mc:Fallback>
+    <mc:Fallback xmlns="">
       <p:transition spd="slow">
         <p:fade/>
       </p:transition>
@@ -21214,13 +21214,13 @@
   <p:clrMapOvr>
     <a:masterClrMapping/>
   </p:clrMapOvr>
-  <mc:AlternateContent xmlns:mc="http://schemas.openxmlformats.org/markup-compatibility/2006">
-    <mc:Choice xmlns:p159="http://schemas.microsoft.com/office/powerpoint/2015/09/main" Requires="p159">
+  <mc:AlternateContent xmlns:mc="http://schemas.openxmlformats.org/markup-compatibility/2006" xmlns:p159="http://schemas.microsoft.com/office/powerpoint/2015/09/main">
+    <mc:Choice Requires="p159">
       <p:transition xmlns:p14="http://schemas.microsoft.com/office/powerpoint/2010/main" spd="slow" p14:dur="2000">
         <p159:morph option="byObject"/>
       </p:transition>
     </mc:Choice>
-    <mc:Fallback>
+    <mc:Fallback xmlns="">
       <p:transition spd="slow">
         <p:fade/>
       </p:transition>
@@ -21583,13 +21583,13 @@
   <p:clrMapOvr>
     <a:masterClrMapping/>
   </p:clrMapOvr>
-  <mc:AlternateContent xmlns:mc="http://schemas.openxmlformats.org/markup-compatibility/2006">
-    <mc:Choice xmlns:p159="http://schemas.microsoft.com/office/powerpoint/2015/09/main" Requires="p159">
+  <mc:AlternateContent xmlns:mc="http://schemas.openxmlformats.org/markup-compatibility/2006" xmlns:p159="http://schemas.microsoft.com/office/powerpoint/2015/09/main">
+    <mc:Choice Requires="p159">
       <p:transition xmlns:p14="http://schemas.microsoft.com/office/powerpoint/2010/main" spd="slow" p14:dur="2000">
         <p159:morph option="byObject"/>
       </p:transition>
     </mc:Choice>
-    <mc:Fallback>
+    <mc:Fallback xmlns="">
       <p:transition spd="slow">
         <p:fade/>
       </p:transition>
@@ -22509,13 +22509,13 @@
   <p:clrMapOvr>
     <a:masterClrMapping/>
   </p:clrMapOvr>
-  <mc:AlternateContent xmlns:mc="http://schemas.openxmlformats.org/markup-compatibility/2006">
-    <mc:Choice xmlns:p159="http://schemas.microsoft.com/office/powerpoint/2015/09/main" Requires="p159">
+  <mc:AlternateContent xmlns:mc="http://schemas.openxmlformats.org/markup-compatibility/2006" xmlns:p159="http://schemas.microsoft.com/office/powerpoint/2015/09/main">
+    <mc:Choice Requires="p159">
       <p:transition xmlns:p14="http://schemas.microsoft.com/office/powerpoint/2010/main" spd="slow" p14:dur="2000">
         <p159:morph option="byObject"/>
       </p:transition>
     </mc:Choice>
-    <mc:Fallback>
+    <mc:Fallback xmlns="">
       <p:transition spd="slow">
         <p:fade/>
       </p:transition>
@@ -22995,13 +22995,13 @@
   <p:clrMapOvr>
     <a:masterClrMapping/>
   </p:clrMapOvr>
-  <mc:AlternateContent xmlns:mc="http://schemas.openxmlformats.org/markup-compatibility/2006">
-    <mc:Choice xmlns:p159="http://schemas.microsoft.com/office/powerpoint/2015/09/main" Requires="p159">
+  <mc:AlternateContent xmlns:mc="http://schemas.openxmlformats.org/markup-compatibility/2006" xmlns:p159="http://schemas.microsoft.com/office/powerpoint/2015/09/main">
+    <mc:Choice Requires="p159">
       <p:transition xmlns:p14="http://schemas.microsoft.com/office/powerpoint/2010/main" spd="slow" p14:dur="2000">
         <p159:morph option="byObject"/>
       </p:transition>
     </mc:Choice>
-    <mc:Fallback>
+    <mc:Fallback xmlns="">
       <p:transition spd="slow">
         <p:fade/>
       </p:transition>
@@ -23313,13 +23313,13 @@
   <p:clrMapOvr>
     <a:masterClrMapping/>
   </p:clrMapOvr>
-  <mc:AlternateContent xmlns:mc="http://schemas.openxmlformats.org/markup-compatibility/2006">
-    <mc:Choice xmlns:p159="http://schemas.microsoft.com/office/powerpoint/2015/09/main" Requires="p159">
+  <mc:AlternateContent xmlns:mc="http://schemas.openxmlformats.org/markup-compatibility/2006" xmlns:p159="http://schemas.microsoft.com/office/powerpoint/2015/09/main">
+    <mc:Choice Requires="p159">
       <p:transition xmlns:p14="http://schemas.microsoft.com/office/powerpoint/2010/main" spd="slow" p14:dur="2000">
         <p159:morph option="byObject"/>
       </p:transition>
     </mc:Choice>
-    <mc:Fallback>
+    <mc:Fallback xmlns="">
       <p:transition spd="slow">
         <p:fade/>
       </p:transition>
@@ -23529,12 +23529,12 @@
         <p:spPr>
           <a:xfrm>
             <a:off x="463903" y="2061720"/>
-            <a:ext cx="3885979" cy="1640114"/>
+            <a:ext cx="4197904" cy="1640114"/>
           </a:xfrm>
         </p:spPr>
         <p:txBody>
           <a:bodyPr rtlCol="0">
-            <a:normAutofit/>
+            <a:normAutofit fontScale="92500"/>
           </a:bodyPr>
           <a:lstStyle>
             <a:defPPr>
@@ -23559,14 +23559,14 @@
             <a:pPr lvl="1"/>
             <a:r>
               <a:rPr lang="de-DE" dirty="0"/>
-              <a:t>F: fertiggestellt</a:t>
+              <a:t>QS: zur Qualitätssicherung freigegeben</a:t>
             </a:r>
           </a:p>
           <a:p>
-            <a:pPr lvl="1" rtl="0"/>
+            <a:pPr lvl="1"/>
             <a:r>
               <a:rPr lang="de-DE" dirty="0"/>
-              <a:t>QS: Qualitätssicherung</a:t>
+              <a:t>F: fertiggestellt</a:t>
             </a:r>
           </a:p>
         </p:txBody>
@@ -23858,13 +23858,13 @@
   <p:clrMapOvr>
     <a:masterClrMapping/>
   </p:clrMapOvr>
-  <mc:AlternateContent xmlns:mc="http://schemas.openxmlformats.org/markup-compatibility/2006">
-    <mc:Choice xmlns:p159="http://schemas.microsoft.com/office/powerpoint/2015/09/main" Requires="p159">
+  <mc:AlternateContent xmlns:mc="http://schemas.openxmlformats.org/markup-compatibility/2006" xmlns:p159="http://schemas.microsoft.com/office/powerpoint/2015/09/main">
+    <mc:Choice Requires="p159">
       <p:transition xmlns:p14="http://schemas.microsoft.com/office/powerpoint/2010/main" spd="slow" p14:dur="2000">
         <p159:morph option="byObject"/>
       </p:transition>
     </mc:Choice>
-    <mc:Fallback>
+    <mc:Fallback xmlns="">
       <p:transition spd="slow">
         <p:fade/>
       </p:transition>
@@ -24665,15 +24665,6 @@
 </file>
 
 <file path=customXml/item1.xml><?xml version="1.0" encoding="utf-8"?>
-<?mso-contentType ?>
-<FormTemplates xmlns="http://schemas.microsoft.com/sharepoint/v3/contenttype/forms">
-  <Display>DocumentLibraryForm</Display>
-  <Edit>DocumentLibraryForm</Edit>
-  <New>DocumentLibraryForm</New>
-</FormTemplates>
-</file>
-
-<file path=customXml/item2.xml><?xml version="1.0" encoding="utf-8"?>
 <ct:contentTypeSchema xmlns:ct="http://schemas.microsoft.com/office/2006/metadata/contentType" xmlns:ma="http://schemas.microsoft.com/office/2006/metadata/properties/metaAttributes" ct:_="" ma:_="" ma:contentTypeName="Document" ma:contentTypeID="0x01010079F111ED35F8CC479449609E8A0923A6" ma:contentTypeVersion="28" ma:contentTypeDescription="Create a new document." ma:contentTypeScope="" ma:versionID="60f5a4f2d2b0abadcf532d48ebf9cb71">
   <xsd:schema xmlns:xsd="http://www.w3.org/2001/XMLSchema" xmlns:xs="http://www.w3.org/2001/XMLSchema" xmlns:p="http://schemas.microsoft.com/office/2006/metadata/properties" xmlns:ns1="http://schemas.microsoft.com/sharepoint/v3" xmlns:ns2="71af3243-3dd4-4a8d-8c0d-dd76da1f02a5" xmlns:ns3="16c05727-aa75-4e4a-9b5f-8a80a1165891" xmlns:ns4="230e9df3-be65-4c73-a93b-d1236ebd677e" targetNamespace="http://schemas.microsoft.com/office/2006/metadata/properties" ma:root="true" ma:fieldsID="7dd78129e6a1811f84807ad11c651531" ns1:_="" ns2:_="" ns3:_="" ns4:_="">
     <xsd:import namespace="http://schemas.microsoft.com/sharepoint/v3"/>
@@ -24985,6 +24976,15 @@
 </ct:contentTypeSchema>
 </file>
 
+<file path=customXml/item2.xml><?xml version="1.0" encoding="utf-8"?>
+<?mso-contentType ?>
+<FormTemplates xmlns="http://schemas.microsoft.com/sharepoint/v3/contenttype/forms">
+  <Display>DocumentLibraryForm</Display>
+  <Edit>DocumentLibraryForm</Edit>
+  <New>DocumentLibraryForm</New>
+</FormTemplates>
+</file>
+
 <file path=customXml/item3.xml><?xml version="1.0" encoding="utf-8"?>
 <p:properties xmlns:p="http://schemas.microsoft.com/office/2006/metadata/properties" xmlns:xsi="http://www.w3.org/2001/XMLSchema-instance" xmlns:pc="http://schemas.microsoft.com/office/infopath/2007/PartnerControls">
   <documentManagement>
@@ -25006,14 +25006,6 @@
 </file>
 
 <file path=customXml/itemProps1.xml><?xml version="1.0" encoding="utf-8"?>
-<ds:datastoreItem xmlns:ds="http://schemas.openxmlformats.org/officeDocument/2006/customXml" ds:itemID="{16DBB56F-4362-4386-A1A1-3DF898896616}">
-  <ds:schemaRefs>
-    <ds:schemaRef ds:uri="http://schemas.microsoft.com/sharepoint/v3/contenttype/forms"/>
-  </ds:schemaRefs>
-</ds:datastoreItem>
-</file>
-
-<file path=customXml/itemProps2.xml><?xml version="1.0" encoding="utf-8"?>
 <ds:datastoreItem xmlns:ds="http://schemas.openxmlformats.org/officeDocument/2006/customXml" ds:itemID="{04948363-B267-4BAC-8655-100FBEC280C1}">
   <ds:schemaRefs>
     <ds:schemaRef ds:uri="http://schemas.microsoft.com/office/2006/metadata/contentType"/>
@@ -25034,6 +25026,14 @@
 </ds:datastoreItem>
 </file>
 
+<file path=customXml/itemProps2.xml><?xml version="1.0" encoding="utf-8"?>
+<ds:datastoreItem xmlns:ds="http://schemas.openxmlformats.org/officeDocument/2006/customXml" ds:itemID="{16DBB56F-4362-4386-A1A1-3DF898896616}">
+  <ds:schemaRefs>
+    <ds:schemaRef ds:uri="http://schemas.microsoft.com/sharepoint/v3/contenttype/forms"/>
+  </ds:schemaRefs>
+</ds:datastoreItem>
+</file>
+
 <file path=customXml/itemProps3.xml><?xml version="1.0" encoding="utf-8"?>
 <ds:datastoreItem xmlns:ds="http://schemas.openxmlformats.org/officeDocument/2006/customXml" ds:itemID="{BA719FA4-954C-4FA8-82CB-206659C3B826}">
   <ds:schemaRefs>

--- a/Dokumentation/Präsentationen/Präsentation_Kickoff_0.1.pptx
+++ b/Dokumentation/Präsentationen/Präsentation_Kickoff_0.1.pptx
@@ -17,10 +17,10 @@
     <p:sldId id="323" r:id="rId8"/>
     <p:sldId id="324" r:id="rId9"/>
     <p:sldId id="325" r:id="rId10"/>
-    <p:sldId id="326" r:id="rId11"/>
-    <p:sldId id="327" r:id="rId12"/>
-    <p:sldId id="328" r:id="rId13"/>
-    <p:sldId id="314" r:id="rId14"/>
+    <p:sldId id="327" r:id="rId11"/>
+    <p:sldId id="328" r:id="rId12"/>
+    <p:sldId id="326" r:id="rId13"/>
+    <p:sldId id="329" r:id="rId14"/>
     <p:sldId id="282" r:id="rId15"/>
     <p:sldId id="297" r:id="rId16"/>
   </p:sldIdLst>
@@ -642,7 +642,13 @@
   <p:cSld>
     <p:spTree>
       <p:nvGrpSpPr>
-        <p:cNvPr id="1" name=""/>
+        <p:cNvPr id="1" name="">
+          <a:extLst>
+            <a:ext uri="{FF2B5EF4-FFF2-40B4-BE49-F238E27FC236}">
+              <a16:creationId xmlns:a16="http://schemas.microsoft.com/office/drawing/2014/main" id="{75BE02A6-B60D-A96B-12F1-B4D80C8F1185}"/>
+            </a:ext>
+          </a:extLst>
+        </p:cNvPr>
         <p:cNvGrpSpPr/>
         <p:nvPr/>
       </p:nvGrpSpPr>
@@ -656,7 +662,13 @@
       </p:grpSpPr>
       <p:sp>
         <p:nvSpPr>
-          <p:cNvPr id="2" name="Folienbildplatzhalter 1"/>
+          <p:cNvPr id="2" name="Folienbildplatzhalter 1">
+            <a:extLst>
+              <a:ext uri="{FF2B5EF4-FFF2-40B4-BE49-F238E27FC236}">
+                <a16:creationId xmlns:a16="http://schemas.microsoft.com/office/drawing/2014/main" id="{B1137953-FA38-0FF8-F058-5540E6ADDB0A}"/>
+              </a:ext>
+            </a:extLst>
+          </p:cNvPr>
           <p:cNvSpPr>
             <a:spLocks noGrp="1" noRot="1" noChangeAspect="1"/>
           </p:cNvSpPr>
@@ -682,7 +694,13 @@
       </p:sp>
       <p:sp>
         <p:nvSpPr>
-          <p:cNvPr id="3" name="Notizenplatzhalter 2"/>
+          <p:cNvPr id="3" name="Notizenplatzhalter 2">
+            <a:extLst>
+              <a:ext uri="{FF2B5EF4-FFF2-40B4-BE49-F238E27FC236}">
+                <a16:creationId xmlns:a16="http://schemas.microsoft.com/office/drawing/2014/main" id="{4A0AF189-2DE0-D994-1C2D-D525DB1A712A}"/>
+              </a:ext>
+            </a:extLst>
+          </p:cNvPr>
           <p:cNvSpPr>
             <a:spLocks noGrp="1"/>
           </p:cNvSpPr>
@@ -715,7 +733,7 @@
     </p:spTree>
     <p:extLst>
       <p:ext uri="{BB962C8B-B14F-4D97-AF65-F5344CB8AC3E}">
-        <p14:creationId xmlns:p14="http://schemas.microsoft.com/office/powerpoint/2010/main" val="87667087"/>
+        <p14:creationId xmlns:p14="http://schemas.microsoft.com/office/powerpoint/2010/main" val="4183609060"/>
       </p:ext>
     </p:extLst>
   </p:cSld>
@@ -1403,6 +1421,218 @@
         <p:cNvPr id="1" name="">
           <a:extLst>
             <a:ext uri="{FF2B5EF4-FFF2-40B4-BE49-F238E27FC236}">
+              <a16:creationId xmlns:a16="http://schemas.microsoft.com/office/drawing/2014/main" id="{FB7C6919-689B-53BE-F63A-E995C87DCD03}"/>
+            </a:ext>
+          </a:extLst>
+        </p:cNvPr>
+        <p:cNvGrpSpPr/>
+        <p:nvPr/>
+      </p:nvGrpSpPr>
+      <p:grpSpPr>
+        <a:xfrm>
+          <a:off x="0" y="0"/>
+          <a:ext cx="0" cy="0"/>
+          <a:chOff x="0" y="0"/>
+          <a:chExt cx="0" cy="0"/>
+        </a:xfrm>
+      </p:grpSpPr>
+      <p:sp>
+        <p:nvSpPr>
+          <p:cNvPr id="2" name="Folienbildplatzhalter 1">
+            <a:extLst>
+              <a:ext uri="{FF2B5EF4-FFF2-40B4-BE49-F238E27FC236}">
+                <a16:creationId xmlns:a16="http://schemas.microsoft.com/office/drawing/2014/main" id="{D6BA1889-69E6-C356-B00E-C14B803B381D}"/>
+              </a:ext>
+            </a:extLst>
+          </p:cNvPr>
+          <p:cNvSpPr>
+            <a:spLocks noGrp="1" noRot="1" noChangeAspect="1"/>
+          </p:cNvSpPr>
+          <p:nvPr>
+            <p:ph type="sldImg"/>
+          </p:nvPr>
+        </p:nvSpPr>
+        <p:spPr>
+          <a:xfrm>
+            <a:off x="-457200" y="3048000"/>
+            <a:ext cx="14630400" cy="8229600"/>
+          </a:xfrm>
+          <a:prstGeom prst="rect">
+            <a:avLst/>
+          </a:prstGeom>
+          <a:noFill/>
+          <a:ln w="12700">
+            <a:solidFill>
+              <a:prstClr val="black"/>
+            </a:solidFill>
+          </a:ln>
+        </p:spPr>
+      </p:sp>
+      <p:sp>
+        <p:nvSpPr>
+          <p:cNvPr id="3" name="Notizenplatzhalter 2">
+            <a:extLst>
+              <a:ext uri="{FF2B5EF4-FFF2-40B4-BE49-F238E27FC236}">
+                <a16:creationId xmlns:a16="http://schemas.microsoft.com/office/drawing/2014/main" id="{63F99931-5493-6D11-F7AE-018FB9E741CE}"/>
+              </a:ext>
+            </a:extLst>
+          </p:cNvPr>
+          <p:cNvSpPr>
+            <a:spLocks noGrp="1"/>
+          </p:cNvSpPr>
+          <p:nvPr>
+            <p:ph type="body" idx="1"/>
+          </p:nvPr>
+        </p:nvSpPr>
+        <p:spPr>
+          <a:xfrm>
+            <a:off x="1371600" y="11734800"/>
+            <a:ext cx="10972800" cy="9601200"/>
+          </a:xfrm>
+          <a:prstGeom prst="rect">
+            <a:avLst/>
+          </a:prstGeom>
+        </p:spPr>
+        <p:txBody>
+          <a:bodyPr rtlCol="0"/>
+          <a:lstStyle>
+            <a:defPPr>
+              <a:defRPr lang="de-DE"/>
+            </a:defPPr>
+          </a:lstStyle>
+          <a:p>
+            <a:pPr rtl="0"/>
+            <a:endParaRPr lang="de-DE" dirty="0"/>
+          </a:p>
+        </p:txBody>
+      </p:sp>
+    </p:spTree>
+    <p:extLst>
+      <p:ext uri="{BB962C8B-B14F-4D97-AF65-F5344CB8AC3E}">
+        <p14:creationId xmlns:p14="http://schemas.microsoft.com/office/powerpoint/2010/main" val="890984838"/>
+      </p:ext>
+    </p:extLst>
+  </p:cSld>
+  <p:clrMapOvr>
+    <a:masterClrMapping/>
+  </p:clrMapOvr>
+</p:notes>
+</file>
+
+<file path=ppt/notesSlides/notesSlide8.xml><?xml version="1.0" encoding="utf-8"?>
+<p:notes xmlns:a="http://schemas.openxmlformats.org/drawingml/2006/main" xmlns:r="http://schemas.openxmlformats.org/officeDocument/2006/relationships" xmlns:p="http://schemas.openxmlformats.org/presentationml/2006/main">
+  <p:cSld>
+    <p:spTree>
+      <p:nvGrpSpPr>
+        <p:cNvPr id="1" name="">
+          <a:extLst>
+            <a:ext uri="{FF2B5EF4-FFF2-40B4-BE49-F238E27FC236}">
+              <a16:creationId xmlns:a16="http://schemas.microsoft.com/office/drawing/2014/main" id="{43FEC0BD-4227-1395-83D9-8EFEAA5E87C6}"/>
+            </a:ext>
+          </a:extLst>
+        </p:cNvPr>
+        <p:cNvGrpSpPr/>
+        <p:nvPr/>
+      </p:nvGrpSpPr>
+      <p:grpSpPr>
+        <a:xfrm>
+          <a:off x="0" y="0"/>
+          <a:ext cx="0" cy="0"/>
+          <a:chOff x="0" y="0"/>
+          <a:chExt cx="0" cy="0"/>
+        </a:xfrm>
+      </p:grpSpPr>
+      <p:sp>
+        <p:nvSpPr>
+          <p:cNvPr id="2" name="Folienbildplatzhalter 1">
+            <a:extLst>
+              <a:ext uri="{FF2B5EF4-FFF2-40B4-BE49-F238E27FC236}">
+                <a16:creationId xmlns:a16="http://schemas.microsoft.com/office/drawing/2014/main" id="{F36AF8B4-0A2A-2913-01DF-FDB13124F9D4}"/>
+              </a:ext>
+            </a:extLst>
+          </p:cNvPr>
+          <p:cNvSpPr>
+            <a:spLocks noGrp="1" noRot="1" noChangeAspect="1"/>
+          </p:cNvSpPr>
+          <p:nvPr>
+            <p:ph type="sldImg"/>
+          </p:nvPr>
+        </p:nvSpPr>
+        <p:spPr>
+          <a:xfrm>
+            <a:off x="-457200" y="3048000"/>
+            <a:ext cx="14630400" cy="8229600"/>
+          </a:xfrm>
+          <a:prstGeom prst="rect">
+            <a:avLst/>
+          </a:prstGeom>
+          <a:noFill/>
+          <a:ln w="12700">
+            <a:solidFill>
+              <a:prstClr val="black"/>
+            </a:solidFill>
+          </a:ln>
+        </p:spPr>
+      </p:sp>
+      <p:sp>
+        <p:nvSpPr>
+          <p:cNvPr id="3" name="Notizenplatzhalter 2">
+            <a:extLst>
+              <a:ext uri="{FF2B5EF4-FFF2-40B4-BE49-F238E27FC236}">
+                <a16:creationId xmlns:a16="http://schemas.microsoft.com/office/drawing/2014/main" id="{6D70BBC4-8F7A-72DA-99B8-E4314563FEEE}"/>
+              </a:ext>
+            </a:extLst>
+          </p:cNvPr>
+          <p:cNvSpPr>
+            <a:spLocks noGrp="1"/>
+          </p:cNvSpPr>
+          <p:nvPr>
+            <p:ph type="body" idx="1"/>
+          </p:nvPr>
+        </p:nvSpPr>
+        <p:spPr>
+          <a:xfrm>
+            <a:off x="1371600" y="11734800"/>
+            <a:ext cx="10972800" cy="9601200"/>
+          </a:xfrm>
+          <a:prstGeom prst="rect">
+            <a:avLst/>
+          </a:prstGeom>
+        </p:spPr>
+        <p:txBody>
+          <a:bodyPr rtlCol="0"/>
+          <a:lstStyle>
+            <a:defPPr>
+              <a:defRPr lang="de-DE"/>
+            </a:defPPr>
+          </a:lstStyle>
+          <a:p>
+            <a:pPr rtl="0"/>
+            <a:endParaRPr lang="de-DE" dirty="0"/>
+          </a:p>
+        </p:txBody>
+      </p:sp>
+    </p:spTree>
+    <p:extLst>
+      <p:ext uri="{BB962C8B-B14F-4D97-AF65-F5344CB8AC3E}">
+        <p14:creationId xmlns:p14="http://schemas.microsoft.com/office/powerpoint/2010/main" val="432066566"/>
+      </p:ext>
+    </p:extLst>
+  </p:cSld>
+  <p:clrMapOvr>
+    <a:masterClrMapping/>
+  </p:clrMapOvr>
+</p:notes>
+</file>
+
+<file path=ppt/notesSlides/notesSlide9.xml><?xml version="1.0" encoding="utf-8"?>
+<p:notes xmlns:a="http://schemas.openxmlformats.org/drawingml/2006/main" xmlns:r="http://schemas.openxmlformats.org/officeDocument/2006/relationships" xmlns:p="http://schemas.openxmlformats.org/presentationml/2006/main">
+  <p:cSld>
+    <p:spTree>
+      <p:nvGrpSpPr>
+        <p:cNvPr id="1" name="">
+          <a:extLst>
+            <a:ext uri="{FF2B5EF4-FFF2-40B4-BE49-F238E27FC236}">
               <a16:creationId xmlns:a16="http://schemas.microsoft.com/office/drawing/2014/main" id="{949B017C-D628-D80A-10CF-7B58A61CE8D6}"/>
             </a:ext>
           </a:extLst>
@@ -1492,218 +1722,6 @@
     <p:extLst>
       <p:ext uri="{BB962C8B-B14F-4D97-AF65-F5344CB8AC3E}">
         <p14:creationId xmlns:p14="http://schemas.microsoft.com/office/powerpoint/2010/main" val="3374383724"/>
-      </p:ext>
-    </p:extLst>
-  </p:cSld>
-  <p:clrMapOvr>
-    <a:masterClrMapping/>
-  </p:clrMapOvr>
-</p:notes>
-</file>
-
-<file path=ppt/notesSlides/notesSlide8.xml><?xml version="1.0" encoding="utf-8"?>
-<p:notes xmlns:a="http://schemas.openxmlformats.org/drawingml/2006/main" xmlns:r="http://schemas.openxmlformats.org/officeDocument/2006/relationships" xmlns:p="http://schemas.openxmlformats.org/presentationml/2006/main">
-  <p:cSld>
-    <p:spTree>
-      <p:nvGrpSpPr>
-        <p:cNvPr id="1" name="">
-          <a:extLst>
-            <a:ext uri="{FF2B5EF4-FFF2-40B4-BE49-F238E27FC236}">
-              <a16:creationId xmlns:a16="http://schemas.microsoft.com/office/drawing/2014/main" id="{FB7C6919-689B-53BE-F63A-E995C87DCD03}"/>
-            </a:ext>
-          </a:extLst>
-        </p:cNvPr>
-        <p:cNvGrpSpPr/>
-        <p:nvPr/>
-      </p:nvGrpSpPr>
-      <p:grpSpPr>
-        <a:xfrm>
-          <a:off x="0" y="0"/>
-          <a:ext cx="0" cy="0"/>
-          <a:chOff x="0" y="0"/>
-          <a:chExt cx="0" cy="0"/>
-        </a:xfrm>
-      </p:grpSpPr>
-      <p:sp>
-        <p:nvSpPr>
-          <p:cNvPr id="2" name="Folienbildplatzhalter 1">
-            <a:extLst>
-              <a:ext uri="{FF2B5EF4-FFF2-40B4-BE49-F238E27FC236}">
-                <a16:creationId xmlns:a16="http://schemas.microsoft.com/office/drawing/2014/main" id="{D6BA1889-69E6-C356-B00E-C14B803B381D}"/>
-              </a:ext>
-            </a:extLst>
-          </p:cNvPr>
-          <p:cNvSpPr>
-            <a:spLocks noGrp="1" noRot="1" noChangeAspect="1"/>
-          </p:cNvSpPr>
-          <p:nvPr>
-            <p:ph type="sldImg"/>
-          </p:nvPr>
-        </p:nvSpPr>
-        <p:spPr>
-          <a:xfrm>
-            <a:off x="-457200" y="3048000"/>
-            <a:ext cx="14630400" cy="8229600"/>
-          </a:xfrm>
-          <a:prstGeom prst="rect">
-            <a:avLst/>
-          </a:prstGeom>
-          <a:noFill/>
-          <a:ln w="12700">
-            <a:solidFill>
-              <a:prstClr val="black"/>
-            </a:solidFill>
-          </a:ln>
-        </p:spPr>
-      </p:sp>
-      <p:sp>
-        <p:nvSpPr>
-          <p:cNvPr id="3" name="Notizenplatzhalter 2">
-            <a:extLst>
-              <a:ext uri="{FF2B5EF4-FFF2-40B4-BE49-F238E27FC236}">
-                <a16:creationId xmlns:a16="http://schemas.microsoft.com/office/drawing/2014/main" id="{63F99931-5493-6D11-F7AE-018FB9E741CE}"/>
-              </a:ext>
-            </a:extLst>
-          </p:cNvPr>
-          <p:cNvSpPr>
-            <a:spLocks noGrp="1"/>
-          </p:cNvSpPr>
-          <p:nvPr>
-            <p:ph type="body" idx="1"/>
-          </p:nvPr>
-        </p:nvSpPr>
-        <p:spPr>
-          <a:xfrm>
-            <a:off x="1371600" y="11734800"/>
-            <a:ext cx="10972800" cy="9601200"/>
-          </a:xfrm>
-          <a:prstGeom prst="rect">
-            <a:avLst/>
-          </a:prstGeom>
-        </p:spPr>
-        <p:txBody>
-          <a:bodyPr rtlCol="0"/>
-          <a:lstStyle>
-            <a:defPPr>
-              <a:defRPr lang="de-DE"/>
-            </a:defPPr>
-          </a:lstStyle>
-          <a:p>
-            <a:pPr rtl="0"/>
-            <a:endParaRPr lang="de-DE" dirty="0"/>
-          </a:p>
-        </p:txBody>
-      </p:sp>
-    </p:spTree>
-    <p:extLst>
-      <p:ext uri="{BB962C8B-B14F-4D97-AF65-F5344CB8AC3E}">
-        <p14:creationId xmlns:p14="http://schemas.microsoft.com/office/powerpoint/2010/main" val="890984838"/>
-      </p:ext>
-    </p:extLst>
-  </p:cSld>
-  <p:clrMapOvr>
-    <a:masterClrMapping/>
-  </p:clrMapOvr>
-</p:notes>
-</file>
-
-<file path=ppt/notesSlides/notesSlide9.xml><?xml version="1.0" encoding="utf-8"?>
-<p:notes xmlns:a="http://schemas.openxmlformats.org/drawingml/2006/main" xmlns:r="http://schemas.openxmlformats.org/officeDocument/2006/relationships" xmlns:p="http://schemas.openxmlformats.org/presentationml/2006/main">
-  <p:cSld>
-    <p:spTree>
-      <p:nvGrpSpPr>
-        <p:cNvPr id="1" name="">
-          <a:extLst>
-            <a:ext uri="{FF2B5EF4-FFF2-40B4-BE49-F238E27FC236}">
-              <a16:creationId xmlns:a16="http://schemas.microsoft.com/office/drawing/2014/main" id="{43FEC0BD-4227-1395-83D9-8EFEAA5E87C6}"/>
-            </a:ext>
-          </a:extLst>
-        </p:cNvPr>
-        <p:cNvGrpSpPr/>
-        <p:nvPr/>
-      </p:nvGrpSpPr>
-      <p:grpSpPr>
-        <a:xfrm>
-          <a:off x="0" y="0"/>
-          <a:ext cx="0" cy="0"/>
-          <a:chOff x="0" y="0"/>
-          <a:chExt cx="0" cy="0"/>
-        </a:xfrm>
-      </p:grpSpPr>
-      <p:sp>
-        <p:nvSpPr>
-          <p:cNvPr id="2" name="Folienbildplatzhalter 1">
-            <a:extLst>
-              <a:ext uri="{FF2B5EF4-FFF2-40B4-BE49-F238E27FC236}">
-                <a16:creationId xmlns:a16="http://schemas.microsoft.com/office/drawing/2014/main" id="{F36AF8B4-0A2A-2913-01DF-FDB13124F9D4}"/>
-              </a:ext>
-            </a:extLst>
-          </p:cNvPr>
-          <p:cNvSpPr>
-            <a:spLocks noGrp="1" noRot="1" noChangeAspect="1"/>
-          </p:cNvSpPr>
-          <p:nvPr>
-            <p:ph type="sldImg"/>
-          </p:nvPr>
-        </p:nvSpPr>
-        <p:spPr>
-          <a:xfrm>
-            <a:off x="-457200" y="3048000"/>
-            <a:ext cx="14630400" cy="8229600"/>
-          </a:xfrm>
-          <a:prstGeom prst="rect">
-            <a:avLst/>
-          </a:prstGeom>
-          <a:noFill/>
-          <a:ln w="12700">
-            <a:solidFill>
-              <a:prstClr val="black"/>
-            </a:solidFill>
-          </a:ln>
-        </p:spPr>
-      </p:sp>
-      <p:sp>
-        <p:nvSpPr>
-          <p:cNvPr id="3" name="Notizenplatzhalter 2">
-            <a:extLst>
-              <a:ext uri="{FF2B5EF4-FFF2-40B4-BE49-F238E27FC236}">
-                <a16:creationId xmlns:a16="http://schemas.microsoft.com/office/drawing/2014/main" id="{6D70BBC4-8F7A-72DA-99B8-E4314563FEEE}"/>
-              </a:ext>
-            </a:extLst>
-          </p:cNvPr>
-          <p:cNvSpPr>
-            <a:spLocks noGrp="1"/>
-          </p:cNvSpPr>
-          <p:nvPr>
-            <p:ph type="body" idx="1"/>
-          </p:nvPr>
-        </p:nvSpPr>
-        <p:spPr>
-          <a:xfrm>
-            <a:off x="1371600" y="11734800"/>
-            <a:ext cx="10972800" cy="9601200"/>
-          </a:xfrm>
-          <a:prstGeom prst="rect">
-            <a:avLst/>
-          </a:prstGeom>
-        </p:spPr>
-        <p:txBody>
-          <a:bodyPr rtlCol="0"/>
-          <a:lstStyle>
-            <a:defPPr>
-              <a:defRPr lang="de-DE"/>
-            </a:defPPr>
-          </a:lstStyle>
-          <a:p>
-            <a:pPr rtl="0"/>
-            <a:endParaRPr lang="de-DE" dirty="0"/>
-          </a:p>
-        </p:txBody>
-      </p:sp>
-    </p:spTree>
-    <p:extLst>
-      <p:ext uri="{BB962C8B-B14F-4D97-AF65-F5344CB8AC3E}">
-        <p14:creationId xmlns:p14="http://schemas.microsoft.com/office/powerpoint/2010/main" val="432066566"/>
       </p:ext>
     </p:extLst>
   </p:cSld>
@@ -18802,7 +18820,13 @@
   <p:cSld>
     <p:spTree>
       <p:nvGrpSpPr>
-        <p:cNvPr id="1" name=""/>
+        <p:cNvPr id="1" name="">
+          <a:extLst>
+            <a:ext uri="{FF2B5EF4-FFF2-40B4-BE49-F238E27FC236}">
+              <a16:creationId xmlns:a16="http://schemas.microsoft.com/office/drawing/2014/main" id="{C0A7CD78-5D3B-BFB4-D0F3-4A43A998E2AC}"/>
+            </a:ext>
+          </a:extLst>
+        </p:cNvPr>
         <p:cNvGrpSpPr/>
         <p:nvPr/>
       </p:nvGrpSpPr>
@@ -18816,10 +18840,50 @@
       </p:grpSpPr>
       <p:sp>
         <p:nvSpPr>
-          <p:cNvPr id="2" name="Titel 1">
+          <p:cNvPr id="2" name="Foliennummernplatzhalter 1">
             <a:extLst>
               <a:ext uri="{FF2B5EF4-FFF2-40B4-BE49-F238E27FC236}">
-                <a16:creationId xmlns:a16="http://schemas.microsoft.com/office/drawing/2014/main" id="{B6210199-C129-11F0-56F2-2D1AED21CB4C}"/>
+                <a16:creationId xmlns:a16="http://schemas.microsoft.com/office/drawing/2014/main" id="{34766815-D541-928A-8710-3BA77F469724}"/>
+              </a:ext>
+            </a:extLst>
+          </p:cNvPr>
+          <p:cNvSpPr>
+            <a:spLocks noGrp="1"/>
+          </p:cNvSpPr>
+          <p:nvPr>
+            <p:ph type="sldNum" sz="quarter" idx="10"/>
+          </p:nvPr>
+        </p:nvSpPr>
+        <p:spPr>
+          <a:xfrm>
+            <a:off x="10358437" y="457199"/>
+            <a:ext cx="1067589" cy="471489"/>
+          </a:xfrm>
+        </p:spPr>
+        <p:txBody>
+          <a:bodyPr rtlCol="0"/>
+          <a:lstStyle>
+            <a:defPPr>
+              <a:defRPr lang="de-DE"/>
+            </a:defPPr>
+          </a:lstStyle>
+          <a:p>
+            <a:pPr rtl="0"/>
+            <a:fld id="{48F63A3B-78C7-47BE-AE5E-E10140E04643}" type="slidenum">
+              <a:rPr lang="de-DE" smtClean="0"/>
+              <a:pPr rtl="0"/>
+              <a:t>10</a:t>
+            </a:fld>
+            <a:endParaRPr lang="de-DE" dirty="0"/>
+          </a:p>
+        </p:txBody>
+      </p:sp>
+      <p:sp>
+        <p:nvSpPr>
+          <p:cNvPr id="10" name="Titel 1">
+            <a:extLst>
+              <a:ext uri="{FF2B5EF4-FFF2-40B4-BE49-F238E27FC236}">
+                <a16:creationId xmlns:a16="http://schemas.microsoft.com/office/drawing/2014/main" id="{3763DB3E-7AE1-48DD-8469-8816568E1773}"/>
               </a:ext>
             </a:extLst>
           </p:cNvPr>
@@ -18832,7 +18896,7 @@
         </p:nvSpPr>
         <p:spPr>
           <a:xfrm>
-            <a:off x="4076701" y="1057275"/>
+            <a:off x="2060123" y="773112"/>
             <a:ext cx="5257800" cy="568326"/>
           </a:xfrm>
         </p:spPr>
@@ -18855,82 +18919,203 @@
       </p:sp>
       <p:sp>
         <p:nvSpPr>
-          <p:cNvPr id="3" name="Foliennummernplatzhalter 2">
+          <p:cNvPr id="11" name="Inhaltsplatzhalter 3">
             <a:extLst>
               <a:ext uri="{FF2B5EF4-FFF2-40B4-BE49-F238E27FC236}">
-                <a16:creationId xmlns:a16="http://schemas.microsoft.com/office/drawing/2014/main" id="{370AEC4F-E711-8552-9C34-82C1514A1E37}"/>
+                <a16:creationId xmlns:a16="http://schemas.microsoft.com/office/drawing/2014/main" id="{8EA2A2CE-06E0-C1BE-D0A6-E73C9BE634C1}"/>
               </a:ext>
             </a:extLst>
           </p:cNvPr>
-          <p:cNvSpPr>
-            <a:spLocks noGrp="1"/>
+          <p:cNvSpPr txBox="1">
+            <a:spLocks/>
           </p:cNvSpPr>
-          <p:nvPr>
-            <p:ph type="sldNum" sz="quarter" idx="10"/>
-          </p:nvPr>
+          <p:nvPr/>
         </p:nvSpPr>
         <p:spPr>
           <a:xfrm>
-            <a:off x="10438475" y="457199"/>
-            <a:ext cx="987552" cy="471489"/>
+            <a:off x="824594" y="2205936"/>
+            <a:ext cx="11367406" cy="3886732"/>
           </a:xfrm>
-        </p:spPr>
-        <p:txBody>
-          <a:bodyPr rtlCol="0"/>
-          <a:lstStyle>
-            <a:defPPr>
-              <a:defRPr lang="de-DE"/>
-            </a:defPPr>
-          </a:lstStyle>
-          <a:p>
-            <a:pPr rtl="0"/>
-            <a:fld id="{48F63A3B-78C7-47BE-AE5E-E10140E04643}" type="slidenum">
-              <a:rPr lang="de-DE" smtClean="0"/>
-              <a:pPr rtl="0"/>
-              <a:t>10</a:t>
-            </a:fld>
-            <a:endParaRPr lang="de-DE" dirty="0"/>
-          </a:p>
-        </p:txBody>
-      </p:sp>
-      <p:sp>
-        <p:nvSpPr>
-          <p:cNvPr id="4" name="Inhaltsplatzhalter 3">
-            <a:extLst>
-              <a:ext uri="{FF2B5EF4-FFF2-40B4-BE49-F238E27FC236}">
-                <a16:creationId xmlns:a16="http://schemas.microsoft.com/office/drawing/2014/main" id="{BDDD6BDC-E008-6AB7-55A1-46ED9BCF054F}"/>
-              </a:ext>
-            </a:extLst>
-          </p:cNvPr>
-          <p:cNvSpPr>
-            <a:spLocks noGrp="1"/>
-          </p:cNvSpPr>
-          <p:nvPr>
-            <p:ph idx="11"/>
-          </p:nvPr>
-        </p:nvSpPr>
-        <p:spPr>
-          <a:xfrm>
-            <a:off x="3556000" y="1973786"/>
-            <a:ext cx="8636000" cy="3886732"/>
-          </a:xfrm>
+          <a:prstGeom prst="rect">
+            <a:avLst/>
+          </a:prstGeom>
         </p:spPr>
         <p:txBody>
           <a:bodyPr rtlCol="0">
-            <a:normAutofit/>
+            <a:normAutofit fontScale="92500"/>
           </a:bodyPr>
           <a:lstStyle>
             <a:defPPr>
               <a:defRPr lang="de-DE"/>
             </a:defPPr>
+            <a:lvl1pPr marL="347472" indent="-347472" algn="l" defTabSz="914400" rtl="0" eaLnBrk="1" latinLnBrk="0" hangingPunct="1">
+              <a:lnSpc>
+                <a:spcPct val="100000"/>
+              </a:lnSpc>
+              <a:spcBef>
+                <a:spcPts val="360"/>
+              </a:spcBef>
+              <a:buFont typeface="Arial" panose="020B0604020202020204" pitchFamily="34" charset="0"/>
+              <a:buChar char="•"/>
+              <a:defRPr lang="de-DE" sz="2800" kern="1200">
+                <a:solidFill>
+                  <a:schemeClr val="accent6"/>
+                </a:solidFill>
+                <a:latin typeface="+mn-lt"/>
+                <a:ea typeface="+mn-ea"/>
+                <a:cs typeface="+mn-cs"/>
+              </a:defRPr>
+            </a:lvl1pPr>
+            <a:lvl2pPr marL="685800" indent="-347472" algn="l" defTabSz="914400" rtl="0" eaLnBrk="1" latinLnBrk="0" hangingPunct="1">
+              <a:lnSpc>
+                <a:spcPct val="100000"/>
+              </a:lnSpc>
+              <a:spcBef>
+                <a:spcPts val="360"/>
+              </a:spcBef>
+              <a:buFont typeface="Arial" panose="020B0604020202020204" pitchFamily="34" charset="0"/>
+              <a:buChar char="•"/>
+              <a:defRPr lang="de-DE" sz="2400" kern="1200">
+                <a:solidFill>
+                  <a:schemeClr val="accent6"/>
+                </a:solidFill>
+                <a:latin typeface="+mn-lt"/>
+                <a:ea typeface="+mn-ea"/>
+                <a:cs typeface="+mn-cs"/>
+              </a:defRPr>
+            </a:lvl2pPr>
+            <a:lvl3pPr marL="1143000" indent="-347472" algn="l" defTabSz="914400" rtl="0" eaLnBrk="1" latinLnBrk="0" hangingPunct="1">
+              <a:lnSpc>
+                <a:spcPct val="100000"/>
+              </a:lnSpc>
+              <a:spcBef>
+                <a:spcPts val="360"/>
+              </a:spcBef>
+              <a:buFont typeface="Arial" panose="020B0604020202020204" pitchFamily="34" charset="0"/>
+              <a:buChar char="•"/>
+              <a:defRPr lang="de-DE" sz="2000" kern="1200">
+                <a:solidFill>
+                  <a:schemeClr val="accent6"/>
+                </a:solidFill>
+                <a:latin typeface="+mn-lt"/>
+                <a:ea typeface="+mn-ea"/>
+                <a:cs typeface="+mn-cs"/>
+              </a:defRPr>
+            </a:lvl3pPr>
+            <a:lvl4pPr marL="1600200" indent="-347472" algn="l" defTabSz="914400" rtl="0" eaLnBrk="1" latinLnBrk="0" hangingPunct="1">
+              <a:lnSpc>
+                <a:spcPct val="100000"/>
+              </a:lnSpc>
+              <a:spcBef>
+                <a:spcPts val="360"/>
+              </a:spcBef>
+              <a:buFont typeface="Arial" panose="020B0604020202020204" pitchFamily="34" charset="0"/>
+              <a:buChar char="•"/>
+              <a:defRPr lang="de-DE" sz="1800" kern="1200">
+                <a:solidFill>
+                  <a:schemeClr val="accent6"/>
+                </a:solidFill>
+                <a:latin typeface="+mn-lt"/>
+                <a:ea typeface="+mn-ea"/>
+                <a:cs typeface="+mn-cs"/>
+              </a:defRPr>
+            </a:lvl4pPr>
+            <a:lvl5pPr marL="2057400" indent="-347472" algn="l" defTabSz="914400" rtl="0" eaLnBrk="1" latinLnBrk="0" hangingPunct="1">
+              <a:lnSpc>
+                <a:spcPct val="100000"/>
+              </a:lnSpc>
+              <a:spcBef>
+                <a:spcPts val="360"/>
+              </a:spcBef>
+              <a:buFont typeface="Arial" panose="020B0604020202020204" pitchFamily="34" charset="0"/>
+              <a:buChar char="•"/>
+              <a:defRPr lang="de-DE" sz="1800" kern="1200">
+                <a:solidFill>
+                  <a:schemeClr val="accent6"/>
+                </a:solidFill>
+                <a:latin typeface="+mn-lt"/>
+                <a:ea typeface="+mn-ea"/>
+                <a:cs typeface="+mn-cs"/>
+              </a:defRPr>
+            </a:lvl5pPr>
+            <a:lvl6pPr marL="2514600" indent="-228600" algn="l" defTabSz="914400" rtl="0" eaLnBrk="1" latinLnBrk="0" hangingPunct="1">
+              <a:lnSpc>
+                <a:spcPct val="90000"/>
+              </a:lnSpc>
+              <a:spcBef>
+                <a:spcPts val="500"/>
+              </a:spcBef>
+              <a:buFont typeface="Arial" panose="020B0604020202020204" pitchFamily="34" charset="0"/>
+              <a:buChar char="•"/>
+              <a:defRPr lang="de-DE" sz="1800" kern="1200">
+                <a:solidFill>
+                  <a:schemeClr val="tx1"/>
+                </a:solidFill>
+                <a:latin typeface="+mn-lt"/>
+                <a:ea typeface="+mn-ea"/>
+                <a:cs typeface="+mn-cs"/>
+              </a:defRPr>
+            </a:lvl6pPr>
+            <a:lvl7pPr marL="2971800" indent="-228600" algn="l" defTabSz="914400" rtl="0" eaLnBrk="1" latinLnBrk="0" hangingPunct="1">
+              <a:lnSpc>
+                <a:spcPct val="90000"/>
+              </a:lnSpc>
+              <a:spcBef>
+                <a:spcPts val="500"/>
+              </a:spcBef>
+              <a:buFont typeface="Arial" panose="020B0604020202020204" pitchFamily="34" charset="0"/>
+              <a:buChar char="•"/>
+              <a:defRPr lang="de-DE" sz="1800" kern="1200">
+                <a:solidFill>
+                  <a:schemeClr val="tx1"/>
+                </a:solidFill>
+                <a:latin typeface="+mn-lt"/>
+                <a:ea typeface="+mn-ea"/>
+                <a:cs typeface="+mn-cs"/>
+              </a:defRPr>
+            </a:lvl7pPr>
+            <a:lvl8pPr marL="3429000" indent="-228600" algn="l" defTabSz="914400" rtl="0" eaLnBrk="1" latinLnBrk="0" hangingPunct="1">
+              <a:lnSpc>
+                <a:spcPct val="90000"/>
+              </a:lnSpc>
+              <a:spcBef>
+                <a:spcPts val="500"/>
+              </a:spcBef>
+              <a:buFont typeface="Arial" panose="020B0604020202020204" pitchFamily="34" charset="0"/>
+              <a:buChar char="•"/>
+              <a:defRPr lang="de-DE" sz="1800" kern="1200">
+                <a:solidFill>
+                  <a:schemeClr val="tx1"/>
+                </a:solidFill>
+                <a:latin typeface="+mn-lt"/>
+                <a:ea typeface="+mn-ea"/>
+                <a:cs typeface="+mn-cs"/>
+              </a:defRPr>
+            </a:lvl8pPr>
+            <a:lvl9pPr marL="3886200" indent="-228600" algn="l" defTabSz="914400" rtl="0" eaLnBrk="1" latinLnBrk="0" hangingPunct="1">
+              <a:lnSpc>
+                <a:spcPct val="90000"/>
+              </a:lnSpc>
+              <a:spcBef>
+                <a:spcPts val="500"/>
+              </a:spcBef>
+              <a:buFont typeface="Arial" panose="020B0604020202020204" pitchFamily="34" charset="0"/>
+              <a:buChar char="•"/>
+              <a:defRPr lang="de-DE" sz="1800" kern="1200">
+                <a:solidFill>
+                  <a:schemeClr val="tx1"/>
+                </a:solidFill>
+                <a:latin typeface="+mn-lt"/>
+                <a:ea typeface="+mn-ea"/>
+                <a:cs typeface="+mn-cs"/>
+              </a:defRPr>
+            </a:lvl9pPr>
           </a:lstStyle>
           <a:p>
-            <a:pPr marL="342900" indent="-342900" rtl="0">
+            <a:pPr marL="342900" indent="-342900">
               <a:spcAft>
                 <a:spcPts val="1200"/>
               </a:spcAft>
-              <a:buFont typeface="Arial" panose="020B0604020202020204" pitchFamily="34" charset="0"/>
-              <a:buChar char="•"/>
             </a:pPr>
             <a:r>
               <a:rPr lang="de-DE" b="1" dirty="0"/>
@@ -18942,12 +19127,10 @@
             </a:r>
           </a:p>
           <a:p>
-            <a:pPr marL="342900" indent="-342900" rtl="0">
+            <a:pPr marL="342900" indent="-342900">
               <a:spcAft>
                 <a:spcPts val="1200"/>
               </a:spcAft>
-              <a:buFont typeface="Arial" panose="020B0604020202020204" pitchFamily="34" charset="0"/>
-              <a:buChar char="•"/>
             </a:pPr>
             <a:r>
               <a:rPr lang="de-DE" b="1" dirty="0"/>
@@ -18959,12 +19142,10 @@
             </a:r>
           </a:p>
           <a:p>
-            <a:pPr marL="342900" indent="-342900" rtl="0">
+            <a:pPr marL="342900" indent="-342900">
               <a:spcAft>
                 <a:spcPts val="1200"/>
               </a:spcAft>
-              <a:buFont typeface="Arial" panose="020B0604020202020204" pitchFamily="34" charset="0"/>
-              <a:buChar char="•"/>
             </a:pPr>
             <a:r>
               <a:rPr lang="de-DE" b="1" dirty="0"/>
@@ -18972,16 +19153,14 @@
             </a:r>
             <a:r>
               <a:rPr lang="de-DE" dirty="0"/>
-              <a:t>: Backend mit Datenbank, Kommunikation zu Frontend – 26.03.2026	</a:t>
+              <a:t>: Backend mit Datenbank, Kommunikation zu Frontend – 26.03.2026</a:t>
             </a:r>
           </a:p>
           <a:p>
-            <a:pPr marL="342900" indent="-342900" rtl="0">
+            <a:pPr marL="342900" indent="-342900">
               <a:spcAft>
                 <a:spcPts val="1200"/>
               </a:spcAft>
-              <a:buFont typeface="Arial" panose="020B0604020202020204" pitchFamily="34" charset="0"/>
-              <a:buChar char="•"/>
             </a:pPr>
             <a:r>
               <a:rPr lang="de-DE" b="1" dirty="0"/>
@@ -18989,16 +19168,14 @@
             </a:r>
             <a:r>
               <a:rPr lang="de-DE" dirty="0"/>
-              <a:t>: Automatische Protokollerstellung und Export– 20.04.2026</a:t>
+              <a:t>: Automatische Protokollerstellung und Export, Konto-Arten– 20.04.2026</a:t>
             </a:r>
           </a:p>
           <a:p>
-            <a:pPr marL="342900" indent="-342900" rtl="0">
+            <a:pPr marL="342900" indent="-342900">
               <a:spcAft>
                 <a:spcPts val="1200"/>
               </a:spcAft>
-              <a:buFont typeface="Arial" panose="020B0604020202020204" pitchFamily="34" charset="0"/>
-              <a:buChar char="•"/>
             </a:pPr>
             <a:r>
               <a:rPr lang="de-DE" b="1" dirty="0"/>
@@ -19010,12 +19187,10 @@
             </a:r>
           </a:p>
           <a:p>
-            <a:pPr marL="342900" indent="-342900" rtl="0">
+            <a:pPr marL="342900" indent="-342900">
               <a:spcAft>
                 <a:spcPts val="1200"/>
               </a:spcAft>
-              <a:buFont typeface="Arial" panose="020B0604020202020204" pitchFamily="34" charset="0"/>
-              <a:buChar char="•"/>
             </a:pPr>
             <a:r>
               <a:rPr lang="de-DE" b="1" dirty="0"/>
@@ -19027,10 +19202,7 @@
             </a:r>
           </a:p>
           <a:p>
-            <a:pPr marL="342900" indent="-342900" rtl="0">
-              <a:buFont typeface="Arial" panose="020B0604020202020204" pitchFamily="34" charset="0"/>
-              <a:buChar char="•"/>
-            </a:pPr>
+            <a:pPr marL="342900" indent="-342900"/>
             <a:endParaRPr lang="de-DE" dirty="0"/>
           </a:p>
         </p:txBody>
@@ -19038,7 +19210,7 @@
     </p:spTree>
     <p:extLst>
       <p:ext uri="{BB962C8B-B14F-4D97-AF65-F5344CB8AC3E}">
-        <p14:creationId xmlns:p14="http://schemas.microsoft.com/office/powerpoint/2010/main" val="1131718056"/>
+        <p14:creationId xmlns:p14="http://schemas.microsoft.com/office/powerpoint/2010/main" val="1727392000"/>
       </p:ext>
     </p:extLst>
   </p:cSld>
@@ -20139,7 +20311,7 @@
                   <a:schemeClr val="bg1"/>
                 </a:solidFill>
               </a:rPr>
-              <a:t>Lead-QS</a:t>
+              <a:t>QS-Lead</a:t>
             </a:r>
           </a:p>
           <a:p>
@@ -20173,7 +20345,7 @@
                   <a:schemeClr val="bg1"/>
                 </a:solidFill>
               </a:rPr>
-              <a:t>Implementierung</a:t>
+              <a:t>Programmierer</a:t>
             </a:r>
           </a:p>
           <a:p>
@@ -20190,7 +20362,7 @@
                   <a:schemeClr val="bg1"/>
                 </a:solidFill>
               </a:rPr>
-              <a:t>Testen</a:t>
+              <a:t>Tester</a:t>
             </a:r>
             <a:endParaRPr lang="de-AT" dirty="0">
               <a:solidFill>
@@ -20256,7 +20428,7 @@
                   <a:schemeClr val="bg1"/>
                 </a:solidFill>
               </a:rPr>
-              <a:t>Grafik und Design</a:t>
+              <a:t>Design-Lead</a:t>
             </a:r>
           </a:p>
           <a:p>
@@ -20273,7 +20445,7 @@
                   <a:schemeClr val="bg1"/>
                 </a:solidFill>
               </a:rPr>
-              <a:t>Implementierung</a:t>
+              <a:t>Programmierer</a:t>
             </a:r>
           </a:p>
           <a:p>
@@ -20290,7 +20462,7 @@
                   <a:schemeClr val="bg1"/>
                 </a:solidFill>
               </a:rPr>
-              <a:t>Testen </a:t>
+              <a:t>Tester </a:t>
             </a:r>
             <a:endParaRPr lang="de-AT" dirty="0">
               <a:solidFill>
@@ -20386,7 +20558,7 @@
                   <a:schemeClr val="bg1"/>
                 </a:solidFill>
               </a:rPr>
-              <a:t>Implementierung</a:t>
+              <a:t>Programmierer</a:t>
             </a:r>
           </a:p>
           <a:p>
@@ -20403,7 +20575,7 @@
                   <a:schemeClr val="bg1"/>
                 </a:solidFill>
               </a:rPr>
-              <a:t>Testen </a:t>
+              <a:t>Tester </a:t>
             </a:r>
             <a:endParaRPr lang="de-AT" dirty="0">
               <a:solidFill>
@@ -20482,7 +20654,7 @@
                   <a:schemeClr val="bg1"/>
                 </a:solidFill>
               </a:rPr>
-              <a:t>Protokollführer</a:t>
+              <a:t>Test-Lead</a:t>
             </a:r>
           </a:p>
           <a:p>
@@ -20499,7 +20671,7 @@
                   <a:schemeClr val="bg1"/>
                 </a:solidFill>
               </a:rPr>
-              <a:t>Implementierung</a:t>
+              <a:t>Protokollführer</a:t>
             </a:r>
           </a:p>
           <a:p>
@@ -20516,13 +20688,8 @@
                   <a:schemeClr val="bg1"/>
                 </a:solidFill>
               </a:rPr>
-              <a:t>Lead-Tester </a:t>
+              <a:t>Programmierer</a:t>
             </a:r>
-            <a:endParaRPr lang="de-AT" dirty="0">
-              <a:solidFill>
-                <a:schemeClr val="bg1"/>
-              </a:solidFill>
-            </a:endParaRPr>
           </a:p>
         </p:txBody>
       </p:sp>
@@ -22532,492 +22699,6 @@
         <p:cNvPr id="1" name="">
           <a:extLst>
             <a:ext uri="{FF2B5EF4-FFF2-40B4-BE49-F238E27FC236}">
-              <a16:creationId xmlns:a16="http://schemas.microsoft.com/office/drawing/2014/main" id="{782C6FF3-A729-D3AB-A031-74E1F962DA90}"/>
-            </a:ext>
-          </a:extLst>
-        </p:cNvPr>
-        <p:cNvGrpSpPr/>
-        <p:nvPr/>
-      </p:nvGrpSpPr>
-      <p:grpSpPr>
-        <a:xfrm>
-          <a:off x="0" y="0"/>
-          <a:ext cx="0" cy="0"/>
-          <a:chOff x="0" y="0"/>
-          <a:chExt cx="0" cy="0"/>
-        </a:xfrm>
-      </p:grpSpPr>
-      <p:sp>
-        <p:nvSpPr>
-          <p:cNvPr id="3" name="Titel 2">
-            <a:extLst>
-              <a:ext uri="{FF2B5EF4-FFF2-40B4-BE49-F238E27FC236}">
-                <a16:creationId xmlns:a16="http://schemas.microsoft.com/office/drawing/2014/main" id="{5EAA56E6-D056-7741-2E13-2FAAC4F28928}"/>
-              </a:ext>
-            </a:extLst>
-          </p:cNvPr>
-          <p:cNvSpPr>
-            <a:spLocks noGrp="1"/>
-          </p:cNvSpPr>
-          <p:nvPr>
-            <p:ph type="title"/>
-          </p:nvPr>
-        </p:nvSpPr>
-        <p:spPr>
-          <a:xfrm>
-            <a:off x="918677" y="473148"/>
-            <a:ext cx="7725746" cy="1091627"/>
-          </a:xfrm>
-        </p:spPr>
-        <p:txBody>
-          <a:bodyPr rtlCol="0"/>
-          <a:lstStyle>
-            <a:defPPr>
-              <a:defRPr lang="de-DE"/>
-            </a:defPPr>
-          </a:lstStyle>
-          <a:p>
-            <a:pPr rtl="0"/>
-            <a:r>
-              <a:rPr lang="de-DE" dirty="0"/>
-              <a:t>Technologien</a:t>
-            </a:r>
-          </a:p>
-        </p:txBody>
-      </p:sp>
-      <p:sp>
-        <p:nvSpPr>
-          <p:cNvPr id="4" name="Foliennummernplatzhalter 3">
-            <a:extLst>
-              <a:ext uri="{FF2B5EF4-FFF2-40B4-BE49-F238E27FC236}">
-                <a16:creationId xmlns:a16="http://schemas.microsoft.com/office/drawing/2014/main" id="{C8476ED0-D106-600A-1FE1-F501334657C0}"/>
-              </a:ext>
-            </a:extLst>
-          </p:cNvPr>
-          <p:cNvSpPr>
-            <a:spLocks noGrp="1"/>
-          </p:cNvSpPr>
-          <p:nvPr>
-            <p:ph type="sldNum" sz="quarter" idx="10"/>
-          </p:nvPr>
-        </p:nvSpPr>
-        <p:spPr>
-          <a:xfrm>
-            <a:off x="10358437" y="457199"/>
-            <a:ext cx="1067589" cy="471489"/>
-          </a:xfrm>
-        </p:spPr>
-        <p:txBody>
-          <a:bodyPr rtlCol="0"/>
-          <a:lstStyle>
-            <a:defPPr>
-              <a:defRPr lang="de-DE"/>
-            </a:defPPr>
-          </a:lstStyle>
-          <a:p>
-            <a:pPr rtl="0"/>
-            <a:fld id="{48F63A3B-78C7-47BE-AE5E-E10140E04643}" type="slidenum">
-              <a:rPr lang="de-DE" smtClean="0"/>
-              <a:pPr rtl="0"/>
-              <a:t>7</a:t>
-            </a:fld>
-            <a:endParaRPr lang="de-DE" dirty="0"/>
-          </a:p>
-        </p:txBody>
-      </p:sp>
-      <p:pic>
-        <p:nvPicPr>
-          <p:cNvPr id="56" name="Grafik 55">
-            <a:extLst>
-              <a:ext uri="{FF2B5EF4-FFF2-40B4-BE49-F238E27FC236}">
-                <a16:creationId xmlns:a16="http://schemas.microsoft.com/office/drawing/2014/main" id="{EB2CF6D6-C049-B264-BA7B-72D43C2994F4}"/>
-              </a:ext>
-            </a:extLst>
-          </p:cNvPr>
-          <p:cNvPicPr>
-            <a:picLocks noChangeAspect="1"/>
-          </p:cNvPicPr>
-          <p:nvPr/>
-        </p:nvPicPr>
-        <p:blipFill>
-          <a:blip r:embed="rId3">
-            <a:extLst>
-              <a:ext uri="{96DAC541-7B7A-43D3-8B79-37D633B846F1}">
-                <asvg:svgBlip xmlns:asvg="http://schemas.microsoft.com/office/drawing/2016/SVG/main" r:embed="rId4"/>
-              </a:ext>
-            </a:extLst>
-          </a:blip>
-          <a:stretch>
-            <a:fillRect/>
-          </a:stretch>
-        </p:blipFill>
-        <p:spPr>
-          <a:xfrm>
-            <a:off x="984492" y="2306998"/>
-            <a:ext cx="931165" cy="931165"/>
-          </a:xfrm>
-          <a:prstGeom prst="rect">
-            <a:avLst/>
-          </a:prstGeom>
-        </p:spPr>
-      </p:pic>
-      <p:pic>
-        <p:nvPicPr>
-          <p:cNvPr id="58" name="Grafik 57">
-            <a:extLst>
-              <a:ext uri="{FF2B5EF4-FFF2-40B4-BE49-F238E27FC236}">
-                <a16:creationId xmlns:a16="http://schemas.microsoft.com/office/drawing/2014/main" id="{E640C9FB-292B-C228-CB33-F7BF1899086E}"/>
-              </a:ext>
-            </a:extLst>
-          </p:cNvPr>
-          <p:cNvPicPr>
-            <a:picLocks noChangeAspect="1"/>
-          </p:cNvPicPr>
-          <p:nvPr/>
-        </p:nvPicPr>
-        <p:blipFill>
-          <a:blip r:embed="rId5">
-            <a:extLst>
-              <a:ext uri="{96DAC541-7B7A-43D3-8B79-37D633B846F1}">
-                <asvg:svgBlip xmlns:asvg="http://schemas.microsoft.com/office/drawing/2016/SVG/main" r:embed="rId6"/>
-              </a:ext>
-            </a:extLst>
-          </a:blip>
-          <a:stretch>
-            <a:fillRect/>
-          </a:stretch>
-        </p:blipFill>
-        <p:spPr>
-          <a:xfrm>
-            <a:off x="5158544" y="2724406"/>
-            <a:ext cx="1944095" cy="1091627"/>
-          </a:xfrm>
-          <a:prstGeom prst="rect">
-            <a:avLst/>
-          </a:prstGeom>
-        </p:spPr>
-      </p:pic>
-      <p:pic>
-        <p:nvPicPr>
-          <p:cNvPr id="70" name="Grafik 69">
-            <a:extLst>
-              <a:ext uri="{FF2B5EF4-FFF2-40B4-BE49-F238E27FC236}">
-                <a16:creationId xmlns:a16="http://schemas.microsoft.com/office/drawing/2014/main" id="{FA0A01EA-1FAC-9FE8-CE29-1B37DF5586D6}"/>
-              </a:ext>
-            </a:extLst>
-          </p:cNvPr>
-          <p:cNvPicPr>
-            <a:picLocks noChangeAspect="1"/>
-          </p:cNvPicPr>
-          <p:nvPr/>
-        </p:nvPicPr>
-        <p:blipFill>
-          <a:blip r:embed="rId7">
-            <a:extLst>
-              <a:ext uri="{96DAC541-7B7A-43D3-8B79-37D633B846F1}">
-                <asvg:svgBlip xmlns:asvg="http://schemas.microsoft.com/office/drawing/2016/SVG/main" r:embed="rId8"/>
-              </a:ext>
-            </a:extLst>
-          </a:blip>
-          <a:stretch>
-            <a:fillRect/>
-          </a:stretch>
-        </p:blipFill>
-        <p:spPr>
-          <a:xfrm>
-            <a:off x="4367655" y="4541652"/>
-            <a:ext cx="931165" cy="931165"/>
-          </a:xfrm>
-          <a:prstGeom prst="rect">
-            <a:avLst/>
-          </a:prstGeom>
-        </p:spPr>
-      </p:pic>
-      <p:pic>
-        <p:nvPicPr>
-          <p:cNvPr id="72" name="Grafik 71">
-            <a:extLst>
-              <a:ext uri="{FF2B5EF4-FFF2-40B4-BE49-F238E27FC236}">
-                <a16:creationId xmlns:a16="http://schemas.microsoft.com/office/drawing/2014/main" id="{E0CF297D-F550-8EB4-C6EB-9475AF16FC70}"/>
-              </a:ext>
-            </a:extLst>
-          </p:cNvPr>
-          <p:cNvPicPr>
-            <a:picLocks noChangeAspect="1"/>
-          </p:cNvPicPr>
-          <p:nvPr/>
-        </p:nvPicPr>
-        <p:blipFill>
-          <a:blip r:embed="rId9">
-            <a:extLst>
-              <a:ext uri="{96DAC541-7B7A-43D3-8B79-37D633B846F1}">
-                <asvg:svgBlip xmlns:asvg="http://schemas.microsoft.com/office/drawing/2016/SVG/main" r:embed="rId10"/>
-              </a:ext>
-            </a:extLst>
-          </a:blip>
-          <a:stretch>
-            <a:fillRect/>
-          </a:stretch>
-        </p:blipFill>
-        <p:spPr>
-          <a:xfrm>
-            <a:off x="7717696" y="2744493"/>
-            <a:ext cx="2181226" cy="1090613"/>
-          </a:xfrm>
-          <a:prstGeom prst="rect">
-            <a:avLst/>
-          </a:prstGeom>
-        </p:spPr>
-      </p:pic>
-      <p:pic>
-        <p:nvPicPr>
-          <p:cNvPr id="76" name="Grafik 75">
-            <a:extLst>
-              <a:ext uri="{FF2B5EF4-FFF2-40B4-BE49-F238E27FC236}">
-                <a16:creationId xmlns:a16="http://schemas.microsoft.com/office/drawing/2014/main" id="{EFA39FF8-456B-7E08-2F8D-55B707E206B0}"/>
-              </a:ext>
-            </a:extLst>
-          </p:cNvPr>
-          <p:cNvPicPr>
-            <a:picLocks noChangeAspect="1"/>
-          </p:cNvPicPr>
-          <p:nvPr/>
-        </p:nvPicPr>
-        <p:blipFill>
-          <a:blip r:embed="rId11">
-            <a:extLst>
-              <a:ext uri="{96DAC541-7B7A-43D3-8B79-37D633B846F1}">
-                <asvg:svgBlip xmlns:asvg="http://schemas.microsoft.com/office/drawing/2016/SVG/main" r:embed="rId12"/>
-              </a:ext>
-            </a:extLst>
-          </a:blip>
-          <a:stretch>
-            <a:fillRect/>
-          </a:stretch>
-        </p:blipFill>
-        <p:spPr>
-          <a:xfrm>
-            <a:off x="7389923" y="3987322"/>
-            <a:ext cx="2508999" cy="1254500"/>
-          </a:xfrm>
-          <a:prstGeom prst="rect">
-            <a:avLst/>
-          </a:prstGeom>
-        </p:spPr>
-      </p:pic>
-      <p:pic>
-        <p:nvPicPr>
-          <p:cNvPr id="78" name="Grafik 77">
-            <a:extLst>
-              <a:ext uri="{FF2B5EF4-FFF2-40B4-BE49-F238E27FC236}">
-                <a16:creationId xmlns:a16="http://schemas.microsoft.com/office/drawing/2014/main" id="{0AC1489E-B4B8-C5D0-5DF7-EF08935197F8}"/>
-              </a:ext>
-            </a:extLst>
-          </p:cNvPr>
-          <p:cNvPicPr>
-            <a:picLocks noChangeAspect="1"/>
-          </p:cNvPicPr>
-          <p:nvPr/>
-        </p:nvPicPr>
-        <p:blipFill>
-          <a:blip r:embed="rId13">
-            <a:extLst>
-              <a:ext uri="{96DAC541-7B7A-43D3-8B79-37D633B846F1}">
-                <asvg:svgBlip xmlns:asvg="http://schemas.microsoft.com/office/drawing/2016/SVG/main" r:embed="rId14"/>
-              </a:ext>
-            </a:extLst>
-          </a:blip>
-          <a:stretch>
-            <a:fillRect/>
-          </a:stretch>
-        </p:blipFill>
-        <p:spPr>
-          <a:xfrm>
-            <a:off x="984492" y="3683407"/>
-            <a:ext cx="931165" cy="931165"/>
-          </a:xfrm>
-          <a:prstGeom prst="rect">
-            <a:avLst/>
-          </a:prstGeom>
-        </p:spPr>
-      </p:pic>
-      <p:pic>
-        <p:nvPicPr>
-          <p:cNvPr id="84" name="Grafik 83">
-            <a:extLst>
-              <a:ext uri="{FF2B5EF4-FFF2-40B4-BE49-F238E27FC236}">
-                <a16:creationId xmlns:a16="http://schemas.microsoft.com/office/drawing/2014/main" id="{06FA0559-9AA4-935E-02C1-C805BAD80172}"/>
-              </a:ext>
-            </a:extLst>
-          </p:cNvPr>
-          <p:cNvPicPr>
-            <a:picLocks noChangeAspect="1"/>
-          </p:cNvPicPr>
-          <p:nvPr/>
-        </p:nvPicPr>
-        <p:blipFill>
-          <a:blip r:embed="rId15">
-            <a:extLst>
-              <a:ext uri="{96DAC541-7B7A-43D3-8B79-37D633B846F1}">
-                <asvg:svgBlip xmlns:asvg="http://schemas.microsoft.com/office/drawing/2016/SVG/main" r:embed="rId16"/>
-              </a:ext>
-            </a:extLst>
-          </a:blip>
-          <a:stretch>
-            <a:fillRect/>
-          </a:stretch>
-        </p:blipFill>
-        <p:spPr>
-          <a:xfrm>
-            <a:off x="3051313" y="4541651"/>
-            <a:ext cx="931165" cy="931165"/>
-          </a:xfrm>
-          <a:prstGeom prst="rect">
-            <a:avLst/>
-          </a:prstGeom>
-        </p:spPr>
-      </p:pic>
-      <p:pic>
-        <p:nvPicPr>
-          <p:cNvPr id="88" name="Grafik 87">
-            <a:extLst>
-              <a:ext uri="{FF2B5EF4-FFF2-40B4-BE49-F238E27FC236}">
-                <a16:creationId xmlns:a16="http://schemas.microsoft.com/office/drawing/2014/main" id="{803B41D0-ABCA-5F23-FCA4-0937BBCAC54B}"/>
-              </a:ext>
-            </a:extLst>
-          </p:cNvPr>
-          <p:cNvPicPr>
-            <a:picLocks noChangeAspect="1"/>
-          </p:cNvPicPr>
-          <p:nvPr/>
-        </p:nvPicPr>
-        <p:blipFill>
-          <a:blip r:embed="rId17">
-            <a:extLst>
-              <a:ext uri="{96DAC541-7B7A-43D3-8B79-37D633B846F1}">
-                <asvg:svgBlip xmlns:asvg="http://schemas.microsoft.com/office/drawing/2016/SVG/main" r:embed="rId18"/>
-              </a:ext>
-            </a:extLst>
-          </a:blip>
-          <a:stretch>
-            <a:fillRect/>
-          </a:stretch>
-        </p:blipFill>
-        <p:spPr>
-          <a:xfrm>
-            <a:off x="5532405" y="4541650"/>
-            <a:ext cx="1070840" cy="931165"/>
-          </a:xfrm>
-          <a:prstGeom prst="rect">
-            <a:avLst/>
-          </a:prstGeom>
-        </p:spPr>
-      </p:pic>
-      <p:pic>
-        <p:nvPicPr>
-          <p:cNvPr id="94" name="Grafik 93">
-            <a:extLst>
-              <a:ext uri="{FF2B5EF4-FFF2-40B4-BE49-F238E27FC236}">
-                <a16:creationId xmlns:a16="http://schemas.microsoft.com/office/drawing/2014/main" id="{F5907737-13CA-856A-18AB-797AC2376166}"/>
-              </a:ext>
-            </a:extLst>
-          </p:cNvPr>
-          <p:cNvPicPr>
-            <a:picLocks noChangeAspect="1"/>
-          </p:cNvPicPr>
-          <p:nvPr/>
-        </p:nvPicPr>
-        <p:blipFill>
-          <a:blip r:embed="rId19">
-            <a:extLst>
-              <a:ext uri="{96DAC541-7B7A-43D3-8B79-37D633B846F1}">
-                <asvg:svgBlip xmlns:asvg="http://schemas.microsoft.com/office/drawing/2016/SVG/main" r:embed="rId20"/>
-              </a:ext>
-            </a:extLst>
-          </a:blip>
-          <a:stretch>
-            <a:fillRect/>
-          </a:stretch>
-        </p:blipFill>
-        <p:spPr>
-          <a:xfrm>
-            <a:off x="2740688" y="2306456"/>
-            <a:ext cx="1966686" cy="1966686"/>
-          </a:xfrm>
-          <a:prstGeom prst="rect">
-            <a:avLst/>
-          </a:prstGeom>
-        </p:spPr>
-      </p:pic>
-      <p:pic>
-        <p:nvPicPr>
-          <p:cNvPr id="96" name="Grafik 95">
-            <a:extLst>
-              <a:ext uri="{FF2B5EF4-FFF2-40B4-BE49-F238E27FC236}">
-                <a16:creationId xmlns:a16="http://schemas.microsoft.com/office/drawing/2014/main" id="{021F3BE4-E5CB-F5D6-340B-AABFB2C5BF63}"/>
-              </a:ext>
-            </a:extLst>
-          </p:cNvPr>
-          <p:cNvPicPr>
-            <a:picLocks noChangeAspect="1"/>
-          </p:cNvPicPr>
-          <p:nvPr/>
-        </p:nvPicPr>
-        <p:blipFill>
-          <a:blip r:embed="rId21">
-            <a:extLst>
-              <a:ext uri="{96DAC541-7B7A-43D3-8B79-37D633B846F1}">
-                <asvg:svgBlip xmlns:asvg="http://schemas.microsoft.com/office/drawing/2016/SVG/main" r:embed="rId22"/>
-              </a:ext>
-            </a:extLst>
-          </a:blip>
-          <a:stretch>
-            <a:fillRect/>
-          </a:stretch>
-        </p:blipFill>
-        <p:spPr>
-          <a:xfrm>
-            <a:off x="892278" y="4915021"/>
-            <a:ext cx="1115592" cy="1121967"/>
-          </a:xfrm>
-          <a:prstGeom prst="rect">
-            <a:avLst/>
-          </a:prstGeom>
-        </p:spPr>
-      </p:pic>
-    </p:spTree>
-    <p:extLst>
-      <p:ext uri="{BB962C8B-B14F-4D97-AF65-F5344CB8AC3E}">
-        <p14:creationId xmlns:p14="http://schemas.microsoft.com/office/powerpoint/2010/main" val="1326088408"/>
-      </p:ext>
-    </p:extLst>
-  </p:cSld>
-  <p:clrMapOvr>
-    <a:masterClrMapping/>
-  </p:clrMapOvr>
-  <mc:AlternateContent xmlns:mc="http://schemas.openxmlformats.org/markup-compatibility/2006" xmlns:p159="http://schemas.microsoft.com/office/powerpoint/2015/09/main">
-    <mc:Choice Requires="p159">
-      <p:transition xmlns:p14="http://schemas.microsoft.com/office/powerpoint/2010/main" spd="slow" p14:dur="2000">
-        <p159:morph option="byObject"/>
-      </p:transition>
-    </mc:Choice>
-    <mc:Fallback xmlns="">
-      <p:transition spd="slow">
-        <p:fade/>
-      </p:transition>
-    </mc:Fallback>
-  </mc:AlternateContent>
-</p:sld>
-</file>
-
-<file path=ppt/slides/slide8.xml><?xml version="1.0" encoding="utf-8"?>
-<p:sld xmlns:a="http://schemas.openxmlformats.org/drawingml/2006/main" xmlns:r="http://schemas.openxmlformats.org/officeDocument/2006/relationships" xmlns:p="http://schemas.openxmlformats.org/presentationml/2006/main">
-  <p:cSld>
-    <p:spTree>
-      <p:nvGrpSpPr>
-        <p:cNvPr id="1" name="">
-          <a:extLst>
-            <a:ext uri="{FF2B5EF4-FFF2-40B4-BE49-F238E27FC236}">
               <a16:creationId xmlns:a16="http://schemas.microsoft.com/office/drawing/2014/main" id="{DE9DDD7D-11FC-346C-3C1C-7A84A0B8F2A7}"/>
             </a:ext>
           </a:extLst>
@@ -23225,7 +22906,7 @@
             <a:fld id="{48F63A3B-78C7-47BE-AE5E-E10140E04643}" type="slidenum">
               <a:rPr lang="de-DE" smtClean="0"/>
               <a:pPr rtl="0"/>
-              <a:t>8</a:t>
+              <a:t>7</a:t>
             </a:fld>
             <a:endParaRPr lang="de-DE" dirty="0"/>
           </a:p>
@@ -23328,7 +23009,7 @@
 </p:sld>
 </file>
 
-<file path=ppt/slides/slide9.xml><?xml version="1.0" encoding="utf-8"?>
+<file path=ppt/slides/slide8.xml><?xml version="1.0" encoding="utf-8"?>
 <p:sld xmlns:a="http://schemas.openxmlformats.org/drawingml/2006/main" xmlns:r="http://schemas.openxmlformats.org/officeDocument/2006/relationships" xmlns:p="http://schemas.openxmlformats.org/presentationml/2006/main">
   <p:cSld>
     <p:spTree>
@@ -23423,7 +23104,7 @@
             <a:fld id="{48F63A3B-78C7-47BE-AE5E-E10140E04643}" type="slidenum">
               <a:rPr lang="de-DE" smtClean="0"/>
               <a:pPr rtl="0"/>
-              <a:t>9</a:t>
+              <a:t>8</a:t>
             </a:fld>
             <a:endParaRPr lang="de-DE" dirty="0"/>
           </a:p>
@@ -23852,6 +23533,492 @@
     <p:extLst>
       <p:ext uri="{BB962C8B-B14F-4D97-AF65-F5344CB8AC3E}">
         <p14:creationId xmlns:p14="http://schemas.microsoft.com/office/powerpoint/2010/main" val="4173005505"/>
+      </p:ext>
+    </p:extLst>
+  </p:cSld>
+  <p:clrMapOvr>
+    <a:masterClrMapping/>
+  </p:clrMapOvr>
+  <mc:AlternateContent xmlns:mc="http://schemas.openxmlformats.org/markup-compatibility/2006" xmlns:p159="http://schemas.microsoft.com/office/powerpoint/2015/09/main">
+    <mc:Choice Requires="p159">
+      <p:transition xmlns:p14="http://schemas.microsoft.com/office/powerpoint/2010/main" spd="slow" p14:dur="2000">
+        <p159:morph option="byObject"/>
+      </p:transition>
+    </mc:Choice>
+    <mc:Fallback xmlns="">
+      <p:transition spd="slow">
+        <p:fade/>
+      </p:transition>
+    </mc:Fallback>
+  </mc:AlternateContent>
+</p:sld>
+</file>
+
+<file path=ppt/slides/slide9.xml><?xml version="1.0" encoding="utf-8"?>
+<p:sld xmlns:a="http://schemas.openxmlformats.org/drawingml/2006/main" xmlns:r="http://schemas.openxmlformats.org/officeDocument/2006/relationships" xmlns:p="http://schemas.openxmlformats.org/presentationml/2006/main">
+  <p:cSld>
+    <p:spTree>
+      <p:nvGrpSpPr>
+        <p:cNvPr id="1" name="">
+          <a:extLst>
+            <a:ext uri="{FF2B5EF4-FFF2-40B4-BE49-F238E27FC236}">
+              <a16:creationId xmlns:a16="http://schemas.microsoft.com/office/drawing/2014/main" id="{782C6FF3-A729-D3AB-A031-74E1F962DA90}"/>
+            </a:ext>
+          </a:extLst>
+        </p:cNvPr>
+        <p:cNvGrpSpPr/>
+        <p:nvPr/>
+      </p:nvGrpSpPr>
+      <p:grpSpPr>
+        <a:xfrm>
+          <a:off x="0" y="0"/>
+          <a:ext cx="0" cy="0"/>
+          <a:chOff x="0" y="0"/>
+          <a:chExt cx="0" cy="0"/>
+        </a:xfrm>
+      </p:grpSpPr>
+      <p:sp>
+        <p:nvSpPr>
+          <p:cNvPr id="3" name="Titel 2">
+            <a:extLst>
+              <a:ext uri="{FF2B5EF4-FFF2-40B4-BE49-F238E27FC236}">
+                <a16:creationId xmlns:a16="http://schemas.microsoft.com/office/drawing/2014/main" id="{5EAA56E6-D056-7741-2E13-2FAAC4F28928}"/>
+              </a:ext>
+            </a:extLst>
+          </p:cNvPr>
+          <p:cNvSpPr>
+            <a:spLocks noGrp="1"/>
+          </p:cNvSpPr>
+          <p:nvPr>
+            <p:ph type="title"/>
+          </p:nvPr>
+        </p:nvSpPr>
+        <p:spPr>
+          <a:xfrm>
+            <a:off x="918677" y="473148"/>
+            <a:ext cx="7725746" cy="1091627"/>
+          </a:xfrm>
+        </p:spPr>
+        <p:txBody>
+          <a:bodyPr rtlCol="0"/>
+          <a:lstStyle>
+            <a:defPPr>
+              <a:defRPr lang="de-DE"/>
+            </a:defPPr>
+          </a:lstStyle>
+          <a:p>
+            <a:pPr rtl="0"/>
+            <a:r>
+              <a:rPr lang="de-DE" dirty="0"/>
+              <a:t>Technologien</a:t>
+            </a:r>
+          </a:p>
+        </p:txBody>
+      </p:sp>
+      <p:sp>
+        <p:nvSpPr>
+          <p:cNvPr id="4" name="Foliennummernplatzhalter 3">
+            <a:extLst>
+              <a:ext uri="{FF2B5EF4-FFF2-40B4-BE49-F238E27FC236}">
+                <a16:creationId xmlns:a16="http://schemas.microsoft.com/office/drawing/2014/main" id="{C8476ED0-D106-600A-1FE1-F501334657C0}"/>
+              </a:ext>
+            </a:extLst>
+          </p:cNvPr>
+          <p:cNvSpPr>
+            <a:spLocks noGrp="1"/>
+          </p:cNvSpPr>
+          <p:nvPr>
+            <p:ph type="sldNum" sz="quarter" idx="10"/>
+          </p:nvPr>
+        </p:nvSpPr>
+        <p:spPr>
+          <a:xfrm>
+            <a:off x="10358437" y="457199"/>
+            <a:ext cx="1067589" cy="471489"/>
+          </a:xfrm>
+        </p:spPr>
+        <p:txBody>
+          <a:bodyPr rtlCol="0"/>
+          <a:lstStyle>
+            <a:defPPr>
+              <a:defRPr lang="de-DE"/>
+            </a:defPPr>
+          </a:lstStyle>
+          <a:p>
+            <a:pPr rtl="0"/>
+            <a:fld id="{48F63A3B-78C7-47BE-AE5E-E10140E04643}" type="slidenum">
+              <a:rPr lang="de-DE" smtClean="0"/>
+              <a:pPr rtl="0"/>
+              <a:t>9</a:t>
+            </a:fld>
+            <a:endParaRPr lang="de-DE" dirty="0"/>
+          </a:p>
+        </p:txBody>
+      </p:sp>
+      <p:pic>
+        <p:nvPicPr>
+          <p:cNvPr id="56" name="Grafik 55">
+            <a:extLst>
+              <a:ext uri="{FF2B5EF4-FFF2-40B4-BE49-F238E27FC236}">
+                <a16:creationId xmlns:a16="http://schemas.microsoft.com/office/drawing/2014/main" id="{EB2CF6D6-C049-B264-BA7B-72D43C2994F4}"/>
+              </a:ext>
+            </a:extLst>
+          </p:cNvPr>
+          <p:cNvPicPr>
+            <a:picLocks noChangeAspect="1"/>
+          </p:cNvPicPr>
+          <p:nvPr/>
+        </p:nvPicPr>
+        <p:blipFill>
+          <a:blip r:embed="rId3">
+            <a:extLst>
+              <a:ext uri="{96DAC541-7B7A-43D3-8B79-37D633B846F1}">
+                <asvg:svgBlip xmlns:asvg="http://schemas.microsoft.com/office/drawing/2016/SVG/main" r:embed="rId4"/>
+              </a:ext>
+            </a:extLst>
+          </a:blip>
+          <a:stretch>
+            <a:fillRect/>
+          </a:stretch>
+        </p:blipFill>
+        <p:spPr>
+          <a:xfrm>
+            <a:off x="984492" y="2306998"/>
+            <a:ext cx="931165" cy="931165"/>
+          </a:xfrm>
+          <a:prstGeom prst="rect">
+            <a:avLst/>
+          </a:prstGeom>
+        </p:spPr>
+      </p:pic>
+      <p:pic>
+        <p:nvPicPr>
+          <p:cNvPr id="58" name="Grafik 57">
+            <a:extLst>
+              <a:ext uri="{FF2B5EF4-FFF2-40B4-BE49-F238E27FC236}">
+                <a16:creationId xmlns:a16="http://schemas.microsoft.com/office/drawing/2014/main" id="{E640C9FB-292B-C228-CB33-F7BF1899086E}"/>
+              </a:ext>
+            </a:extLst>
+          </p:cNvPr>
+          <p:cNvPicPr>
+            <a:picLocks noChangeAspect="1"/>
+          </p:cNvPicPr>
+          <p:nvPr/>
+        </p:nvPicPr>
+        <p:blipFill>
+          <a:blip r:embed="rId5">
+            <a:extLst>
+              <a:ext uri="{96DAC541-7B7A-43D3-8B79-37D633B846F1}">
+                <asvg:svgBlip xmlns:asvg="http://schemas.microsoft.com/office/drawing/2016/SVG/main" r:embed="rId6"/>
+              </a:ext>
+            </a:extLst>
+          </a:blip>
+          <a:stretch>
+            <a:fillRect/>
+          </a:stretch>
+        </p:blipFill>
+        <p:spPr>
+          <a:xfrm>
+            <a:off x="5158544" y="2724406"/>
+            <a:ext cx="1944095" cy="1091627"/>
+          </a:xfrm>
+          <a:prstGeom prst="rect">
+            <a:avLst/>
+          </a:prstGeom>
+        </p:spPr>
+      </p:pic>
+      <p:pic>
+        <p:nvPicPr>
+          <p:cNvPr id="70" name="Grafik 69">
+            <a:extLst>
+              <a:ext uri="{FF2B5EF4-FFF2-40B4-BE49-F238E27FC236}">
+                <a16:creationId xmlns:a16="http://schemas.microsoft.com/office/drawing/2014/main" id="{FA0A01EA-1FAC-9FE8-CE29-1B37DF5586D6}"/>
+              </a:ext>
+            </a:extLst>
+          </p:cNvPr>
+          <p:cNvPicPr>
+            <a:picLocks noChangeAspect="1"/>
+          </p:cNvPicPr>
+          <p:nvPr/>
+        </p:nvPicPr>
+        <p:blipFill>
+          <a:blip r:embed="rId7">
+            <a:extLst>
+              <a:ext uri="{96DAC541-7B7A-43D3-8B79-37D633B846F1}">
+                <asvg:svgBlip xmlns:asvg="http://schemas.microsoft.com/office/drawing/2016/SVG/main" r:embed="rId8"/>
+              </a:ext>
+            </a:extLst>
+          </a:blip>
+          <a:stretch>
+            <a:fillRect/>
+          </a:stretch>
+        </p:blipFill>
+        <p:spPr>
+          <a:xfrm>
+            <a:off x="4367655" y="4541652"/>
+            <a:ext cx="931165" cy="931165"/>
+          </a:xfrm>
+          <a:prstGeom prst="rect">
+            <a:avLst/>
+          </a:prstGeom>
+        </p:spPr>
+      </p:pic>
+      <p:pic>
+        <p:nvPicPr>
+          <p:cNvPr id="72" name="Grafik 71">
+            <a:extLst>
+              <a:ext uri="{FF2B5EF4-FFF2-40B4-BE49-F238E27FC236}">
+                <a16:creationId xmlns:a16="http://schemas.microsoft.com/office/drawing/2014/main" id="{E0CF297D-F550-8EB4-C6EB-9475AF16FC70}"/>
+              </a:ext>
+            </a:extLst>
+          </p:cNvPr>
+          <p:cNvPicPr>
+            <a:picLocks noChangeAspect="1"/>
+          </p:cNvPicPr>
+          <p:nvPr/>
+        </p:nvPicPr>
+        <p:blipFill>
+          <a:blip r:embed="rId9">
+            <a:extLst>
+              <a:ext uri="{96DAC541-7B7A-43D3-8B79-37D633B846F1}">
+                <asvg:svgBlip xmlns:asvg="http://schemas.microsoft.com/office/drawing/2016/SVG/main" r:embed="rId10"/>
+              </a:ext>
+            </a:extLst>
+          </a:blip>
+          <a:stretch>
+            <a:fillRect/>
+          </a:stretch>
+        </p:blipFill>
+        <p:spPr>
+          <a:xfrm>
+            <a:off x="7717696" y="2744493"/>
+            <a:ext cx="2181226" cy="1090613"/>
+          </a:xfrm>
+          <a:prstGeom prst="rect">
+            <a:avLst/>
+          </a:prstGeom>
+        </p:spPr>
+      </p:pic>
+      <p:pic>
+        <p:nvPicPr>
+          <p:cNvPr id="76" name="Grafik 75">
+            <a:extLst>
+              <a:ext uri="{FF2B5EF4-FFF2-40B4-BE49-F238E27FC236}">
+                <a16:creationId xmlns:a16="http://schemas.microsoft.com/office/drawing/2014/main" id="{EFA39FF8-456B-7E08-2F8D-55B707E206B0}"/>
+              </a:ext>
+            </a:extLst>
+          </p:cNvPr>
+          <p:cNvPicPr>
+            <a:picLocks noChangeAspect="1"/>
+          </p:cNvPicPr>
+          <p:nvPr/>
+        </p:nvPicPr>
+        <p:blipFill>
+          <a:blip r:embed="rId11">
+            <a:extLst>
+              <a:ext uri="{96DAC541-7B7A-43D3-8B79-37D633B846F1}">
+                <asvg:svgBlip xmlns:asvg="http://schemas.microsoft.com/office/drawing/2016/SVG/main" r:embed="rId12"/>
+              </a:ext>
+            </a:extLst>
+          </a:blip>
+          <a:stretch>
+            <a:fillRect/>
+          </a:stretch>
+        </p:blipFill>
+        <p:spPr>
+          <a:xfrm>
+            <a:off x="7389923" y="3987322"/>
+            <a:ext cx="2508999" cy="1254500"/>
+          </a:xfrm>
+          <a:prstGeom prst="rect">
+            <a:avLst/>
+          </a:prstGeom>
+        </p:spPr>
+      </p:pic>
+      <p:pic>
+        <p:nvPicPr>
+          <p:cNvPr id="78" name="Grafik 77">
+            <a:extLst>
+              <a:ext uri="{FF2B5EF4-FFF2-40B4-BE49-F238E27FC236}">
+                <a16:creationId xmlns:a16="http://schemas.microsoft.com/office/drawing/2014/main" id="{0AC1489E-B4B8-C5D0-5DF7-EF08935197F8}"/>
+              </a:ext>
+            </a:extLst>
+          </p:cNvPr>
+          <p:cNvPicPr>
+            <a:picLocks noChangeAspect="1"/>
+          </p:cNvPicPr>
+          <p:nvPr/>
+        </p:nvPicPr>
+        <p:blipFill>
+          <a:blip r:embed="rId13">
+            <a:extLst>
+              <a:ext uri="{96DAC541-7B7A-43D3-8B79-37D633B846F1}">
+                <asvg:svgBlip xmlns:asvg="http://schemas.microsoft.com/office/drawing/2016/SVG/main" r:embed="rId14"/>
+              </a:ext>
+            </a:extLst>
+          </a:blip>
+          <a:stretch>
+            <a:fillRect/>
+          </a:stretch>
+        </p:blipFill>
+        <p:spPr>
+          <a:xfrm>
+            <a:off x="984492" y="3683407"/>
+            <a:ext cx="931165" cy="931165"/>
+          </a:xfrm>
+          <a:prstGeom prst="rect">
+            <a:avLst/>
+          </a:prstGeom>
+        </p:spPr>
+      </p:pic>
+      <p:pic>
+        <p:nvPicPr>
+          <p:cNvPr id="84" name="Grafik 83">
+            <a:extLst>
+              <a:ext uri="{FF2B5EF4-FFF2-40B4-BE49-F238E27FC236}">
+                <a16:creationId xmlns:a16="http://schemas.microsoft.com/office/drawing/2014/main" id="{06FA0559-9AA4-935E-02C1-C805BAD80172}"/>
+              </a:ext>
+            </a:extLst>
+          </p:cNvPr>
+          <p:cNvPicPr>
+            <a:picLocks noChangeAspect="1"/>
+          </p:cNvPicPr>
+          <p:nvPr/>
+        </p:nvPicPr>
+        <p:blipFill>
+          <a:blip r:embed="rId15">
+            <a:extLst>
+              <a:ext uri="{96DAC541-7B7A-43D3-8B79-37D633B846F1}">
+                <asvg:svgBlip xmlns:asvg="http://schemas.microsoft.com/office/drawing/2016/SVG/main" r:embed="rId16"/>
+              </a:ext>
+            </a:extLst>
+          </a:blip>
+          <a:stretch>
+            <a:fillRect/>
+          </a:stretch>
+        </p:blipFill>
+        <p:spPr>
+          <a:xfrm>
+            <a:off x="3051313" y="4541651"/>
+            <a:ext cx="931165" cy="931165"/>
+          </a:xfrm>
+          <a:prstGeom prst="rect">
+            <a:avLst/>
+          </a:prstGeom>
+        </p:spPr>
+      </p:pic>
+      <p:pic>
+        <p:nvPicPr>
+          <p:cNvPr id="88" name="Grafik 87">
+            <a:extLst>
+              <a:ext uri="{FF2B5EF4-FFF2-40B4-BE49-F238E27FC236}">
+                <a16:creationId xmlns:a16="http://schemas.microsoft.com/office/drawing/2014/main" id="{803B41D0-ABCA-5F23-FCA4-0937BBCAC54B}"/>
+              </a:ext>
+            </a:extLst>
+          </p:cNvPr>
+          <p:cNvPicPr>
+            <a:picLocks noChangeAspect="1"/>
+          </p:cNvPicPr>
+          <p:nvPr/>
+        </p:nvPicPr>
+        <p:blipFill>
+          <a:blip r:embed="rId17">
+            <a:extLst>
+              <a:ext uri="{96DAC541-7B7A-43D3-8B79-37D633B846F1}">
+                <asvg:svgBlip xmlns:asvg="http://schemas.microsoft.com/office/drawing/2016/SVG/main" r:embed="rId18"/>
+              </a:ext>
+            </a:extLst>
+          </a:blip>
+          <a:stretch>
+            <a:fillRect/>
+          </a:stretch>
+        </p:blipFill>
+        <p:spPr>
+          <a:xfrm>
+            <a:off x="5532405" y="4541650"/>
+            <a:ext cx="1070840" cy="931165"/>
+          </a:xfrm>
+          <a:prstGeom prst="rect">
+            <a:avLst/>
+          </a:prstGeom>
+        </p:spPr>
+      </p:pic>
+      <p:pic>
+        <p:nvPicPr>
+          <p:cNvPr id="94" name="Grafik 93">
+            <a:extLst>
+              <a:ext uri="{FF2B5EF4-FFF2-40B4-BE49-F238E27FC236}">
+                <a16:creationId xmlns:a16="http://schemas.microsoft.com/office/drawing/2014/main" id="{F5907737-13CA-856A-18AB-797AC2376166}"/>
+              </a:ext>
+            </a:extLst>
+          </p:cNvPr>
+          <p:cNvPicPr>
+            <a:picLocks noChangeAspect="1"/>
+          </p:cNvPicPr>
+          <p:nvPr/>
+        </p:nvPicPr>
+        <p:blipFill>
+          <a:blip r:embed="rId19">
+            <a:extLst>
+              <a:ext uri="{96DAC541-7B7A-43D3-8B79-37D633B846F1}">
+                <asvg:svgBlip xmlns:asvg="http://schemas.microsoft.com/office/drawing/2016/SVG/main" r:embed="rId20"/>
+              </a:ext>
+            </a:extLst>
+          </a:blip>
+          <a:stretch>
+            <a:fillRect/>
+          </a:stretch>
+        </p:blipFill>
+        <p:spPr>
+          <a:xfrm>
+            <a:off x="2740688" y="2306456"/>
+            <a:ext cx="1966686" cy="1966686"/>
+          </a:xfrm>
+          <a:prstGeom prst="rect">
+            <a:avLst/>
+          </a:prstGeom>
+        </p:spPr>
+      </p:pic>
+      <p:pic>
+        <p:nvPicPr>
+          <p:cNvPr id="96" name="Grafik 95">
+            <a:extLst>
+              <a:ext uri="{FF2B5EF4-FFF2-40B4-BE49-F238E27FC236}">
+                <a16:creationId xmlns:a16="http://schemas.microsoft.com/office/drawing/2014/main" id="{021F3BE4-E5CB-F5D6-340B-AABFB2C5BF63}"/>
+              </a:ext>
+            </a:extLst>
+          </p:cNvPr>
+          <p:cNvPicPr>
+            <a:picLocks noChangeAspect="1"/>
+          </p:cNvPicPr>
+          <p:nvPr/>
+        </p:nvPicPr>
+        <p:blipFill>
+          <a:blip r:embed="rId21">
+            <a:extLst>
+              <a:ext uri="{96DAC541-7B7A-43D3-8B79-37D633B846F1}">
+                <asvg:svgBlip xmlns:asvg="http://schemas.microsoft.com/office/drawing/2016/SVG/main" r:embed="rId22"/>
+              </a:ext>
+            </a:extLst>
+          </a:blip>
+          <a:stretch>
+            <a:fillRect/>
+          </a:stretch>
+        </p:blipFill>
+        <p:spPr>
+          <a:xfrm>
+            <a:off x="892278" y="4915021"/>
+            <a:ext cx="1115592" cy="1121967"/>
+          </a:xfrm>
+          <a:prstGeom prst="rect">
+            <a:avLst/>
+          </a:prstGeom>
+        </p:spPr>
+      </p:pic>
+    </p:spTree>
+    <p:extLst>
+      <p:ext uri="{BB962C8B-B14F-4D97-AF65-F5344CB8AC3E}">
+        <p14:creationId xmlns:p14="http://schemas.microsoft.com/office/powerpoint/2010/main" val="1326088408"/>
       </p:ext>
     </p:extLst>
   </p:cSld>
@@ -24665,6 +24832,15 @@
 </file>
 
 <file path=customXml/item1.xml><?xml version="1.0" encoding="utf-8"?>
+<?mso-contentType ?>
+<FormTemplates xmlns="http://schemas.microsoft.com/sharepoint/v3/contenttype/forms">
+  <Display>DocumentLibraryForm</Display>
+  <Edit>DocumentLibraryForm</Edit>
+  <New>DocumentLibraryForm</New>
+</FormTemplates>
+</file>
+
+<file path=customXml/item2.xml><?xml version="1.0" encoding="utf-8"?>
 <ct:contentTypeSchema xmlns:ct="http://schemas.microsoft.com/office/2006/metadata/contentType" xmlns:ma="http://schemas.microsoft.com/office/2006/metadata/properties/metaAttributes" ct:_="" ma:_="" ma:contentTypeName="Document" ma:contentTypeID="0x01010079F111ED35F8CC479449609E8A0923A6" ma:contentTypeVersion="28" ma:contentTypeDescription="Create a new document." ma:contentTypeScope="" ma:versionID="60f5a4f2d2b0abadcf532d48ebf9cb71">
   <xsd:schema xmlns:xsd="http://www.w3.org/2001/XMLSchema" xmlns:xs="http://www.w3.org/2001/XMLSchema" xmlns:p="http://schemas.microsoft.com/office/2006/metadata/properties" xmlns:ns1="http://schemas.microsoft.com/sharepoint/v3" xmlns:ns2="71af3243-3dd4-4a8d-8c0d-dd76da1f02a5" xmlns:ns3="16c05727-aa75-4e4a-9b5f-8a80a1165891" xmlns:ns4="230e9df3-be65-4c73-a93b-d1236ebd677e" targetNamespace="http://schemas.microsoft.com/office/2006/metadata/properties" ma:root="true" ma:fieldsID="7dd78129e6a1811f84807ad11c651531" ns1:_="" ns2:_="" ns3:_="" ns4:_="">
     <xsd:import namespace="http://schemas.microsoft.com/sharepoint/v3"/>
@@ -24976,15 +25152,6 @@
 </ct:contentTypeSchema>
 </file>
 
-<file path=customXml/item2.xml><?xml version="1.0" encoding="utf-8"?>
-<?mso-contentType ?>
-<FormTemplates xmlns="http://schemas.microsoft.com/sharepoint/v3/contenttype/forms">
-  <Display>DocumentLibraryForm</Display>
-  <Edit>DocumentLibraryForm</Edit>
-  <New>DocumentLibraryForm</New>
-</FormTemplates>
-</file>
-
 <file path=customXml/item3.xml><?xml version="1.0" encoding="utf-8"?>
 <p:properties xmlns:p="http://schemas.microsoft.com/office/2006/metadata/properties" xmlns:xsi="http://www.w3.org/2001/XMLSchema-instance" xmlns:pc="http://schemas.microsoft.com/office/infopath/2007/PartnerControls">
   <documentManagement>
@@ -25006,6 +25173,14 @@
 </file>
 
 <file path=customXml/itemProps1.xml><?xml version="1.0" encoding="utf-8"?>
+<ds:datastoreItem xmlns:ds="http://schemas.openxmlformats.org/officeDocument/2006/customXml" ds:itemID="{16DBB56F-4362-4386-A1A1-3DF898896616}">
+  <ds:schemaRefs>
+    <ds:schemaRef ds:uri="http://schemas.microsoft.com/sharepoint/v3/contenttype/forms"/>
+  </ds:schemaRefs>
+</ds:datastoreItem>
+</file>
+
+<file path=customXml/itemProps2.xml><?xml version="1.0" encoding="utf-8"?>
 <ds:datastoreItem xmlns:ds="http://schemas.openxmlformats.org/officeDocument/2006/customXml" ds:itemID="{04948363-B267-4BAC-8655-100FBEC280C1}">
   <ds:schemaRefs>
     <ds:schemaRef ds:uri="http://schemas.microsoft.com/office/2006/metadata/contentType"/>
@@ -25026,14 +25201,6 @@
 </ds:datastoreItem>
 </file>
 
-<file path=customXml/itemProps2.xml><?xml version="1.0" encoding="utf-8"?>
-<ds:datastoreItem xmlns:ds="http://schemas.openxmlformats.org/officeDocument/2006/customXml" ds:itemID="{16DBB56F-4362-4386-A1A1-3DF898896616}">
-  <ds:schemaRefs>
-    <ds:schemaRef ds:uri="http://schemas.microsoft.com/sharepoint/v3/contenttype/forms"/>
-  </ds:schemaRefs>
-</ds:datastoreItem>
-</file>
-
 <file path=customXml/itemProps3.xml><?xml version="1.0" encoding="utf-8"?>
 <ds:datastoreItem xmlns:ds="http://schemas.openxmlformats.org/officeDocument/2006/customXml" ds:itemID="{BA719FA4-954C-4FA8-82CB-206659C3B826}">
   <ds:schemaRefs>
